--- a/deliverables/题目三_工作过程.pptx
+++ b/deliverables/题目三_工作过程.pptx
@@ -2,31 +2,34 @@
 <file path=ppt/presentation.xml><?xml version="1.0" encoding="utf-8"?>
 <p:presentation xmlns:p="http://schemas.openxmlformats.org/presentationml/2006/main">
   <p:sldMasterIdLst>
-    <p:sldMasterId xmlns:r="http://schemas.openxmlformats.org/officeDocument/2006/relationships" id="2147483648" r:id="Raee7fcfe119b4029"/>
+    <p:sldMasterId xmlns:r="http://schemas.openxmlformats.org/officeDocument/2006/relationships" id="2147483648" r:id="R32695ca85ca14ff6"/>
   </p:sldMasterIdLst>
   <p:notesMasterIdLst>
-    <p:notesMasterId xmlns:r="http://schemas.openxmlformats.org/officeDocument/2006/relationships" r:id="Rf048d94dcda441d7"/>
+    <p:notesMasterId xmlns:r="http://schemas.openxmlformats.org/officeDocument/2006/relationships" r:id="R9c35084cb7a44461"/>
   </p:notesMasterIdLst>
   <p:sldIdLst>
-    <p:sldId xmlns:r="http://schemas.openxmlformats.org/officeDocument/2006/relationships" id="256" r:id="R9815815976694122"/>
-    <p:sldId xmlns:r="http://schemas.openxmlformats.org/officeDocument/2006/relationships" id="257" r:id="Ra7f60c339b4d4f59"/>
-    <p:sldId xmlns:r="http://schemas.openxmlformats.org/officeDocument/2006/relationships" id="258" r:id="Rb875d783419d417e"/>
-    <p:sldId xmlns:r="http://schemas.openxmlformats.org/officeDocument/2006/relationships" id="259" r:id="Ra53ef46f9c384f3e"/>
-    <p:sldId xmlns:r="http://schemas.openxmlformats.org/officeDocument/2006/relationships" id="260" r:id="Reded20b621e3422d"/>
-    <p:sldId xmlns:r="http://schemas.openxmlformats.org/officeDocument/2006/relationships" id="261" r:id="R3a0237f064c7427d"/>
-    <p:sldId xmlns:r="http://schemas.openxmlformats.org/officeDocument/2006/relationships" id="262" r:id="R8ccc27c6d17d43e7"/>
-    <p:sldId xmlns:r="http://schemas.openxmlformats.org/officeDocument/2006/relationships" id="263" r:id="R10bd4640929041e8"/>
-    <p:sldId xmlns:r="http://schemas.openxmlformats.org/officeDocument/2006/relationships" id="264" r:id="Rb1b0ac0990954d07"/>
-    <p:sldId xmlns:r="http://schemas.openxmlformats.org/officeDocument/2006/relationships" id="265" r:id="R74ed921dec284e4d"/>
-    <p:sldId xmlns:r="http://schemas.openxmlformats.org/officeDocument/2006/relationships" id="266" r:id="R3cd54c78ae9b4044"/>
-    <p:sldId xmlns:r="http://schemas.openxmlformats.org/officeDocument/2006/relationships" id="267" r:id="Rf2b8a28efcf442de"/>
-    <p:sldId xmlns:r="http://schemas.openxmlformats.org/officeDocument/2006/relationships" id="268" r:id="Rd4cdde6e58fd4f13"/>
-    <p:sldId xmlns:r="http://schemas.openxmlformats.org/officeDocument/2006/relationships" id="269" r:id="Rc23cfc6b648e4c5b"/>
-    <p:sldId xmlns:r="http://schemas.openxmlformats.org/officeDocument/2006/relationships" id="270" r:id="Ra4eeaf7d44184ec8"/>
-    <p:sldId xmlns:r="http://schemas.openxmlformats.org/officeDocument/2006/relationships" id="271" r:id="Ra88f25e44c614ee5"/>
-    <p:sldId xmlns:r="http://schemas.openxmlformats.org/officeDocument/2006/relationships" id="272" r:id="Ra12e1ebc800647b1"/>
-    <p:sldId xmlns:r="http://schemas.openxmlformats.org/officeDocument/2006/relationships" id="273" r:id="R33e0b6324cf24bba"/>
-    <p:sldId xmlns:r="http://schemas.openxmlformats.org/officeDocument/2006/relationships" id="274" r:id="Redb6ae7504944388"/>
+    <p:sldId xmlns:r="http://schemas.openxmlformats.org/officeDocument/2006/relationships" id="256" r:id="R9ea3d67597d241bc"/>
+    <p:sldId xmlns:r="http://schemas.openxmlformats.org/officeDocument/2006/relationships" id="257" r:id="R644564cd087641c5"/>
+    <p:sldId xmlns:r="http://schemas.openxmlformats.org/officeDocument/2006/relationships" id="258" r:id="R466f0d263d4447a0"/>
+    <p:sldId xmlns:r="http://schemas.openxmlformats.org/officeDocument/2006/relationships" id="259" r:id="Rc8096255cd8c4e86"/>
+    <p:sldId xmlns:r="http://schemas.openxmlformats.org/officeDocument/2006/relationships" id="260" r:id="R6247ef520d5e45dc"/>
+    <p:sldId xmlns:r="http://schemas.openxmlformats.org/officeDocument/2006/relationships" id="261" r:id="R6975797fb06440ff"/>
+    <p:sldId xmlns:r="http://schemas.openxmlformats.org/officeDocument/2006/relationships" id="262" r:id="Rbecc835d43164041"/>
+    <p:sldId xmlns:r="http://schemas.openxmlformats.org/officeDocument/2006/relationships" id="263" r:id="Ra3eed63a1f44476a"/>
+    <p:sldId xmlns:r="http://schemas.openxmlformats.org/officeDocument/2006/relationships" id="264" r:id="Rabc5d011def24f9b"/>
+    <p:sldId xmlns:r="http://schemas.openxmlformats.org/officeDocument/2006/relationships" id="265" r:id="R207b5c63ddb6435b"/>
+    <p:sldId xmlns:r="http://schemas.openxmlformats.org/officeDocument/2006/relationships" id="266" r:id="R1daad9fb874d4450"/>
+    <p:sldId xmlns:r="http://schemas.openxmlformats.org/officeDocument/2006/relationships" id="267" r:id="Rb865c3e0c0384f61"/>
+    <p:sldId xmlns:r="http://schemas.openxmlformats.org/officeDocument/2006/relationships" id="268" r:id="R6f18e6efc0da4c94"/>
+    <p:sldId xmlns:r="http://schemas.openxmlformats.org/officeDocument/2006/relationships" id="269" r:id="R9692f7df03894b4a"/>
+    <p:sldId xmlns:r="http://schemas.openxmlformats.org/officeDocument/2006/relationships" id="270" r:id="Rf17b154808014d8b"/>
+    <p:sldId xmlns:r="http://schemas.openxmlformats.org/officeDocument/2006/relationships" id="271" r:id="Rc8ba226e7fb44546"/>
+    <p:sldId xmlns:r="http://schemas.openxmlformats.org/officeDocument/2006/relationships" id="272" r:id="R63f687c5c5ba4f4e"/>
+    <p:sldId xmlns:r="http://schemas.openxmlformats.org/officeDocument/2006/relationships" id="273" r:id="Reb2a2567c7fc498e"/>
+    <p:sldId xmlns:r="http://schemas.openxmlformats.org/officeDocument/2006/relationships" id="274" r:id="Rf3be89a1e5e344f5"/>
+    <p:sldId xmlns:r="http://schemas.openxmlformats.org/officeDocument/2006/relationships" id="275" r:id="R9835f1d126ae4554"/>
+    <p:sldId xmlns:r="http://schemas.openxmlformats.org/officeDocument/2006/relationships" id="276" r:id="R09033096a4ee45b1"/>
+    <p:sldId xmlns:r="http://schemas.openxmlformats.org/officeDocument/2006/relationships" id="277" r:id="Rda4b88ecaa7b4cd0"/>
   </p:sldIdLst>
   <p:sldSz cx="12192000" cy="6858000"/>
   <p:notesSz cx="6858000" cy="9144000"/>
@@ -1310,6 +1313,231 @@
 </p:notes>
 </file>
 
+<file path=ppt/notesSlides/notesSlide20.xml><?xml version="1.0" encoding="utf-8"?>
+<p:notes xmlns:p="http://schemas.openxmlformats.org/presentationml/2006/main">
+  <p:cSld>
+    <p:spTree>
+      <p:nvGrpSpPr>
+        <p:cNvPr id="1" name=""/>
+        <p:cNvGrpSpPr/>
+        <p:nvPr/>
+      </p:nvGrpSpPr>
+      <p:grpSpPr>
+        <a:xfrm xmlns:a="http://schemas.openxmlformats.org/drawingml/2006/main"/>
+      </p:grpSpPr>
+      <p:sp>
+        <p:nvSpPr>
+          <p:cNvPr id="2" name="Slide Image Placeholder 1"/>
+          <p:cNvSpPr>
+            <a:spLocks xmlns:a="http://schemas.openxmlformats.org/drawingml/2006/main" noGrp="1"/>
+          </p:cNvSpPr>
+          <p:nvPr>
+            <p:ph type="sldImg" idx="0"/>
+          </p:nvPr>
+        </p:nvSpPr>
+        <p:spPr/>
+      </p:sp>
+      <p:sp>
+        <p:nvSpPr>
+          <p:cNvPr id="3" name="Notes Placeholder 2"/>
+          <p:cNvSpPr>
+            <a:spLocks xmlns:a="http://schemas.openxmlformats.org/drawingml/2006/main" noGrp="1"/>
+          </p:cNvSpPr>
+          <p:nvPr>
+            <p:ph type="body" idx="1"/>
+          </p:nvPr>
+        </p:nvSpPr>
+        <p:spPr/>
+        <p:txBody>
+          <a:bodyPr xmlns:a="http://schemas.openxmlformats.org/drawingml/2006/main"/>
+          <a:lstStyle xmlns:a="http://schemas.openxmlformats.org/drawingml/2006/main"/>
+          <a:p xmlns:a="http://schemas.openxmlformats.org/drawingml/2006/main">
+            <a:r>
+              <a:t>原基础检查只确认没有缺失、重复和非正容量。统计检测按电池计算相邻容量变化，阈值用各自前60%记录估计。1.5IQR标记待核查，3IQR标记极端。训练段内部为事后诊断，不是在线预警。来源src/01b_check_capacity_jumps.py和results/step01b。</a:t>
+            </a:r>
+          </a:p>
+          <a:p xmlns:a="http://schemas.openxmlformats.org/drawingml/2006/main">
+            <a:r>
+              <a:t>来源：src/03_features_and_models.py，results/step03/，tests/test_step03.py，本仓库Git日志。</a:t>
+            </a:r>
+          </a:p>
+        </p:txBody>
+      </p:sp>
+      <p:sp>
+        <p:nvSpPr>
+          <p:cNvPr id="4" name="Slide Number Placeholder 3"/>
+          <p:cNvSpPr>
+            <a:spLocks xmlns:a="http://schemas.openxmlformats.org/drawingml/2006/main" noGrp="1"/>
+          </p:cNvSpPr>
+          <p:nvPr>
+            <p:ph type="sldNum" idx="5"/>
+          </p:nvPr>
+        </p:nvSpPr>
+        <p:spPr/>
+        <p:txBody>
+          <a:bodyPr xmlns:a="http://schemas.openxmlformats.org/drawingml/2006/main"/>
+          <a:lstStyle xmlns:a="http://schemas.openxmlformats.org/drawingml/2006/main"/>
+          <a:p xmlns:a="http://schemas.openxmlformats.org/drawingml/2006/main"/>
+        </p:txBody>
+      </p:sp>
+    </p:spTree>
+  </p:cSld>
+  <p:clrMapOvr>
+    <a:masterClrMapping xmlns:a="http://schemas.openxmlformats.org/drawingml/2006/main"/>
+  </p:clrMapOvr>
+</p:notes>
+</file>
+
+<file path=ppt/notesSlides/notesSlide21.xml><?xml version="1.0" encoding="utf-8"?>
+<p:notes xmlns:p="http://schemas.openxmlformats.org/presentationml/2006/main">
+  <p:cSld>
+    <p:spTree>
+      <p:nvGrpSpPr>
+        <p:cNvPr id="1" name=""/>
+        <p:cNvGrpSpPr/>
+        <p:nvPr/>
+      </p:nvGrpSpPr>
+      <p:grpSpPr>
+        <a:xfrm xmlns:a="http://schemas.openxmlformats.org/drawingml/2006/main"/>
+      </p:grpSpPr>
+      <p:sp>
+        <p:nvSpPr>
+          <p:cNvPr id="2" name="Slide Image Placeholder 1"/>
+          <p:cNvSpPr>
+            <a:spLocks xmlns:a="http://schemas.openxmlformats.org/drawingml/2006/main" noGrp="1"/>
+          </p:cNvSpPr>
+          <p:nvPr>
+            <p:ph type="sldImg" idx="0"/>
+          </p:nvPr>
+        </p:nvSpPr>
+        <p:spPr/>
+      </p:sp>
+      <p:sp>
+        <p:nvSpPr>
+          <p:cNvPr id="3" name="Notes Placeholder 2"/>
+          <p:cNvSpPr>
+            <a:spLocks xmlns:a="http://schemas.openxmlformats.org/drawingml/2006/main" noGrp="1"/>
+          </p:cNvSpPr>
+          <p:nvPr>
+            <p:ph type="body" idx="1"/>
+          </p:nvPr>
+        </p:nvSpPr>
+        <p:spPr/>
+        <p:txBody>
+          <a:bodyPr xmlns:a="http://schemas.openxmlformats.org/drawingml/2006/main"/>
+          <a:lstStyle xmlns:a="http://schemas.openxmlformats.org/drawingml/2006/main"/>
+          <a:p xmlns:a="http://schemas.openxmlformats.org/drawingml/2006/main">
+            <a:r>
+              <a:t>对30个极端点生成独立限幅对照，其他606条不变。处理容量等于上一循环原始容量加限幅后的变化量。不会递归累计修正，不覆盖正式清洗数据。原始记录没有缺失，不制造缺失值。来源treated_points.csv，代码提交6aa6676。</a:t>
+            </a:r>
+          </a:p>
+          <a:p xmlns:a="http://schemas.openxmlformats.org/drawingml/2006/main">
+            <a:r>
+              <a:t>来源：src/03_features_and_models.py，results/step03/，tests/test_step03.py，本仓库Git日志。</a:t>
+            </a:r>
+          </a:p>
+        </p:txBody>
+      </p:sp>
+      <p:sp>
+        <p:nvSpPr>
+          <p:cNvPr id="4" name="Slide Number Placeholder 3"/>
+          <p:cNvSpPr>
+            <a:spLocks xmlns:a="http://schemas.openxmlformats.org/drawingml/2006/main" noGrp="1"/>
+          </p:cNvSpPr>
+          <p:nvPr>
+            <p:ph type="sldNum" idx="5"/>
+          </p:nvPr>
+        </p:nvSpPr>
+        <p:spPr/>
+        <p:txBody>
+          <a:bodyPr xmlns:a="http://schemas.openxmlformats.org/drawingml/2006/main"/>
+          <a:lstStyle xmlns:a="http://schemas.openxmlformats.org/drawingml/2006/main"/>
+          <a:p xmlns:a="http://schemas.openxmlformats.org/drawingml/2006/main"/>
+        </p:txBody>
+      </p:sp>
+    </p:spTree>
+  </p:cSld>
+  <p:clrMapOvr>
+    <a:masterClrMapping xmlns:a="http://schemas.openxmlformats.org/drawingml/2006/main"/>
+  </p:clrMapOvr>
+</p:notes>
+</file>
+
+<file path=ppt/notesSlides/notesSlide22.xml><?xml version="1.0" encoding="utf-8"?>
+<p:notes xmlns:p="http://schemas.openxmlformats.org/presentationml/2006/main">
+  <p:cSld>
+    <p:spTree>
+      <p:nvGrpSpPr>
+        <p:cNvPr id="1" name=""/>
+        <p:cNvGrpSpPr/>
+        <p:nvPr/>
+      </p:nvGrpSpPr>
+      <p:grpSpPr>
+        <a:xfrm xmlns:a="http://schemas.openxmlformats.org/drawingml/2006/main"/>
+      </p:grpSpPr>
+      <p:sp>
+        <p:nvSpPr>
+          <p:cNvPr id="2" name="Slide Image Placeholder 1"/>
+          <p:cNvSpPr>
+            <a:spLocks xmlns:a="http://schemas.openxmlformats.org/drawingml/2006/main" noGrp="1"/>
+          </p:cNvSpPr>
+          <p:nvPr>
+            <p:ph type="sldImg" idx="0"/>
+          </p:nvPr>
+        </p:nvSpPr>
+        <p:spPr/>
+      </p:sp>
+      <p:sp>
+        <p:nvSpPr>
+          <p:cNvPr id="3" name="Notes Placeholder 2"/>
+          <p:cNvSpPr>
+            <a:spLocks xmlns:a="http://schemas.openxmlformats.org/drawingml/2006/main" noGrp="1"/>
+          </p:cNvSpPr>
+          <p:nvPr>
+            <p:ph type="body" idx="1"/>
+          </p:nvPr>
+        </p:nvSpPr>
+        <p:spPr/>
+        <p:txBody>
+          <a:bodyPr xmlns:a="http://schemas.openxmlformats.org/drawingml/2006/main"/>
+          <a:lstStyle xmlns:a="http://schemas.openxmlformats.org/drawingml/2006/main"/>
+          <a:p xmlns:a="http://schemas.openxmlformats.org/drawingml/2006/main">
+            <a:r>
+              <a:t>限幅改变局部峰值，不能证明处理值比原值更准确。所有电池首末容量不变，全段线性斜率仍为负。现有模型继续使用保留原值的清洗版，未用处理后测试目标降低误差。未来若比较处理方案，应在每个训练折内拟合阈值并对原始测试目标评价。来源all_rows_with_flags.csv、trend_sensitivity.csv。</a:t>
+            </a:r>
+          </a:p>
+          <a:p xmlns:a="http://schemas.openxmlformats.org/drawingml/2006/main">
+            <a:r>
+              <a:t>来源：src/03_features_and_models.py，results/step03/，tests/test_step03.py，本仓库Git日志。</a:t>
+            </a:r>
+          </a:p>
+        </p:txBody>
+      </p:sp>
+      <p:sp>
+        <p:nvSpPr>
+          <p:cNvPr id="4" name="Slide Number Placeholder 3"/>
+          <p:cNvSpPr>
+            <a:spLocks xmlns:a="http://schemas.openxmlformats.org/drawingml/2006/main" noGrp="1"/>
+          </p:cNvSpPr>
+          <p:nvPr>
+            <p:ph type="sldNum" idx="5"/>
+          </p:nvPr>
+        </p:nvSpPr>
+        <p:spPr/>
+        <p:txBody>
+          <a:bodyPr xmlns:a="http://schemas.openxmlformats.org/drawingml/2006/main"/>
+          <a:lstStyle xmlns:a="http://schemas.openxmlformats.org/drawingml/2006/main"/>
+          <a:p xmlns:a="http://schemas.openxmlformats.org/drawingml/2006/main"/>
+        </p:txBody>
+      </p:sp>
+    </p:spTree>
+  </p:cSld>
+  <p:clrMapOvr>
+    <a:masterClrMapping xmlns:a="http://schemas.openxmlformats.org/drawingml/2006/main"/>
+  </p:clrMapOvr>
+</p:notes>
+</file>
+
 <file path=ppt/notesSlides/notesSlide3.xml><?xml version="1.0" encoding="utf-8"?>
 <p:notes xmlns:p="http://schemas.openxmlformats.org/presentationml/2006/main">
   <p:cSld>
@@ -4248,12 +4476,12 @@
   </p:cSld>
   <p:clrMap bg1="lt1" tx1="dk1" bg2="lt2" tx2="dk2" accent1="accent1" accent2="accent2" accent3="accent3" accent4="accent4" accent5="accent5" accent6="accent6" hlink="hlink" folHlink="folHlink"/>
   <p:sldLayoutIdLst>
-    <p:sldLayoutId xmlns:r="http://schemas.openxmlformats.org/officeDocument/2006/relationships" id="2147483649" r:id="R07fedf3c0bfc4e47"/>
-    <p:sldLayoutId xmlns:r="http://schemas.openxmlformats.org/officeDocument/2006/relationships" id="2147483650" r:id="R31fb43aa92254e03"/>
-    <p:sldLayoutId xmlns:r="http://schemas.openxmlformats.org/officeDocument/2006/relationships" id="2147483651" r:id="R05356e0a3ca44d89"/>
-    <p:sldLayoutId xmlns:r="http://schemas.openxmlformats.org/officeDocument/2006/relationships" id="2147483652" r:id="R381069b031784dae"/>
-    <p:sldLayoutId xmlns:r="http://schemas.openxmlformats.org/officeDocument/2006/relationships" id="2147483653" r:id="Rd0619294313c4164"/>
-    <p:sldLayoutId xmlns:r="http://schemas.openxmlformats.org/officeDocument/2006/relationships" id="2147483654" r:id="R53cba4e235464d63"/>
+    <p:sldLayoutId xmlns:r="http://schemas.openxmlformats.org/officeDocument/2006/relationships" id="2147483649" r:id="R0d0a0704eb8d4fe9"/>
+    <p:sldLayoutId xmlns:r="http://schemas.openxmlformats.org/officeDocument/2006/relationships" id="2147483650" r:id="R6bad09a40de046b9"/>
+    <p:sldLayoutId xmlns:r="http://schemas.openxmlformats.org/officeDocument/2006/relationships" id="2147483651" r:id="Ree5f6f2ea9c24115"/>
+    <p:sldLayoutId xmlns:r="http://schemas.openxmlformats.org/officeDocument/2006/relationships" id="2147483652" r:id="Rec3300e1281640f0"/>
+    <p:sldLayoutId xmlns:r="http://schemas.openxmlformats.org/officeDocument/2006/relationships" id="2147483653" r:id="R8d9b90f07c5e457b"/>
+    <p:sldLayoutId xmlns:r="http://schemas.openxmlformats.org/officeDocument/2006/relationships" id="2147483654" r:id="R53a818cd63c34b62"/>
   </p:sldLayoutIdLst>
   <p:txStyles>
     <p:titleStyle>
@@ -9080,6 +9308,788 @@
 </c:chartSpace>
 </file>
 
+<file path=ppt/slides/charts/chart11.xml><?xml version="1.0" encoding="utf-8"?>
+<c:chartSpace xmlns:c="http://schemas.openxmlformats.org/drawingml/2006/chart" xmlns:r="http://schemas.openxmlformats.org/officeDocument/2006/relationships">
+  <c:lang val="en-US"/>
+  <c:chart>
+    <c:plotArea>
+      <c:lineChart>
+        <c:grouping val="standard"/>
+        <c:varyColors val="0"/>
+        <c:ser>
+          <c:idx val="0"/>
+          <c:order val="0"/>
+          <c:tx>
+            <c:v>原始容量</c:v>
+          </c:tx>
+          <c:spPr>
+            <a:solidFill xmlns:a="http://schemas.openxmlformats.org/drawingml/2006/main">
+              <a:srgbClr val="176B87"/>
+            </a:solidFill>
+          </c:spPr>
+          <c:marker>
+            <c:symbol val="none"/>
+          </c:marker>
+          <c:cat>
+            <c:numRef>
+              <c:f>'Chart Data'!$A$2:$A$12</c:f>
+              <c:numCache>
+                <c:formatCode>General</c:formatCode>
+                <c:ptCount val="11"/>
+                <c:pt idx="0">
+                  <c:v>85</c:v>
+                </c:pt>
+                <c:pt idx="1">
+                  <c:v>86</c:v>
+                </c:pt>
+                <c:pt idx="2">
+                  <c:v>87</c:v>
+                </c:pt>
+                <c:pt idx="3">
+                  <c:v>88</c:v>
+                </c:pt>
+                <c:pt idx="4">
+                  <c:v>89</c:v>
+                </c:pt>
+                <c:pt idx="5">
+                  <c:v>90</c:v>
+                </c:pt>
+                <c:pt idx="6">
+                  <c:v>91</c:v>
+                </c:pt>
+                <c:pt idx="7">
+                  <c:v>92</c:v>
+                </c:pt>
+                <c:pt idx="8">
+                  <c:v>93</c:v>
+                </c:pt>
+                <c:pt idx="9">
+                  <c:v>94</c:v>
+                </c:pt>
+                <c:pt idx="10">
+                  <c:v>95</c:v>
+                </c:pt>
+              </c:numCache>
+            </c:numRef>
+          </c:cat>
+          <c:val>
+            <c:numRef>
+              <c:f>'Chart Data'!$B$2:$B$12</c:f>
+              <c:numCache>
+                <c:formatCode>General</c:formatCode>
+                <c:ptCount val="11"/>
+                <c:pt idx="0">
+                  <c:v>1.4516</c:v>
+                </c:pt>
+                <c:pt idx="1">
+                  <c:v>1.4519</c:v>
+                </c:pt>
+                <c:pt idx="2">
+                  <c:v>1.4471</c:v>
+                </c:pt>
+                <c:pt idx="3">
+                  <c:v>1.4469</c:v>
+                </c:pt>
+                <c:pt idx="4">
+                  <c:v>1.4417</c:v>
+                </c:pt>
+                <c:pt idx="5">
+                  <c:v>1.5936</c:v>
+                </c:pt>
+                <c:pt idx="6">
+                  <c:v>1.5464</c:v>
+                </c:pt>
+                <c:pt idx="7">
+                  <c:v>1.5147</c:v>
+                </c:pt>
+                <c:pt idx="8">
+                  <c:v>1.499</c:v>
+                </c:pt>
+                <c:pt idx="9">
+                  <c:v>1.4831</c:v>
+                </c:pt>
+                <c:pt idx="10">
+                  <c:v>1.473</c:v>
+                </c:pt>
+              </c:numCache>
+            </c:numRef>
+          </c:val>
+          <c:smooth val="0"/>
+        </c:ser>
+        <c:ser>
+          <c:idx val="1"/>
+          <c:order val="1"/>
+          <c:tx>
+            <c:v>限幅对照</c:v>
+          </c:tx>
+          <c:spPr>
+            <a:solidFill xmlns:a="http://schemas.openxmlformats.org/drawingml/2006/main">
+              <a:srgbClr val="D3662E"/>
+            </a:solidFill>
+          </c:spPr>
+          <c:marker>
+            <c:symbol val="none"/>
+          </c:marker>
+          <c:cat>
+            <c:numRef>
+              <c:f>'Chart Data'!$C$2:$C$12</c:f>
+              <c:numCache>
+                <c:formatCode>General</c:formatCode>
+                <c:ptCount val="11"/>
+                <c:pt idx="0">
+                  <c:v>85</c:v>
+                </c:pt>
+                <c:pt idx="1">
+                  <c:v>86</c:v>
+                </c:pt>
+                <c:pt idx="2">
+                  <c:v>87</c:v>
+                </c:pt>
+                <c:pt idx="3">
+                  <c:v>88</c:v>
+                </c:pt>
+                <c:pt idx="4">
+                  <c:v>89</c:v>
+                </c:pt>
+                <c:pt idx="5">
+                  <c:v>90</c:v>
+                </c:pt>
+                <c:pt idx="6">
+                  <c:v>91</c:v>
+                </c:pt>
+                <c:pt idx="7">
+                  <c:v>92</c:v>
+                </c:pt>
+                <c:pt idx="8">
+                  <c:v>93</c:v>
+                </c:pt>
+                <c:pt idx="9">
+                  <c:v>94</c:v>
+                </c:pt>
+                <c:pt idx="10">
+                  <c:v>95</c:v>
+                </c:pt>
+              </c:numCache>
+            </c:numRef>
+          </c:cat>
+          <c:val>
+            <c:numRef>
+              <c:f>'Chart Data'!$D$2:$D$12</c:f>
+              <c:numCache>
+                <c:formatCode>General</c:formatCode>
+                <c:ptCount val="11"/>
+                <c:pt idx="0">
+                  <c:v>1.4516</c:v>
+                </c:pt>
+                <c:pt idx="1">
+                  <c:v>1.4519</c:v>
+                </c:pt>
+                <c:pt idx="2">
+                  <c:v>1.4471</c:v>
+                </c:pt>
+                <c:pt idx="3">
+                  <c:v>1.4469</c:v>
+                </c:pt>
+                <c:pt idx="4">
+                  <c:v>1.4417</c:v>
+                </c:pt>
+                <c:pt idx="5">
+                  <c:v>1.46735</c:v>
+                </c:pt>
+                <c:pt idx="6">
+                  <c:v>1.54715</c:v>
+                </c:pt>
+                <c:pt idx="7">
+                  <c:v>1.5147</c:v>
+                </c:pt>
+                <c:pt idx="8">
+                  <c:v>1.499</c:v>
+                </c:pt>
+                <c:pt idx="9">
+                  <c:v>1.4831</c:v>
+                </c:pt>
+                <c:pt idx="10">
+                  <c:v>1.473</c:v>
+                </c:pt>
+              </c:numCache>
+            </c:numRef>
+          </c:val>
+          <c:smooth val="0"/>
+        </c:ser>
+        <c:dLbls>
+          <c:txPr>
+            <a:bodyPr xmlns:a="http://schemas.openxmlformats.org/drawingml/2006/main" anchorCtr="1"/>
+            <a:lstStyle xmlns:a="http://schemas.openxmlformats.org/drawingml/2006/main"/>
+            <a:p xmlns:a="http://schemas.openxmlformats.org/drawingml/2006/main">
+              <a:pPr>
+                <a:defRPr>
+                  <a:latin typeface="Arial Unicode MS"/>
+                  <a:ea typeface="Arial Unicode MS"/>
+                  <a:cs typeface="Arial Unicode MS"/>
+                </a:defRPr>
+              </a:pPr>
+            </a:p>
+          </c:txPr>
+          <c:showLegendKey val="0"/>
+          <c:showVal val="0"/>
+          <c:showCatName val="0"/>
+          <c:showSerName val="0"/>
+          <c:showPercent val="0"/>
+          <c:showBubbleSize val="0"/>
+          <c:showLeaderLines val="0"/>
+        </c:dLbls>
+        <c:smooth val="0"/>
+        <c:axId val="48650112"/>
+        <c:axId val="48672768"/>
+      </c:lineChart>
+      <c:catAx>
+        <c:axId val="48650112"/>
+        <c:scaling>
+          <c:orientation val="minMax"/>
+        </c:scaling>
+        <c:delete val="0"/>
+        <c:axPos val="b"/>
+        <c:title>
+          <c:tx>
+            <c:rich>
+              <a:bodyPr xmlns:a="http://schemas.openxmlformats.org/drawingml/2006/main"/>
+              <a:lstStyle xmlns:a="http://schemas.openxmlformats.org/drawingml/2006/main"/>
+              <a:p xmlns:a="http://schemas.openxmlformats.org/drawingml/2006/main">
+                <a:r>
+                  <a:rPr>
+                    <a:latin typeface="Arial Unicode MS"/>
+                    <a:ea typeface="Arial Unicode MS"/>
+                    <a:cs typeface="Arial Unicode MS"/>
+                  </a:rPr>
+                  <a:t>循环次数</a:t>
+                </a:r>
+              </a:p>
+            </c:rich>
+          </c:tx>
+          <c:overlay val="0"/>
+          <c:txPr>
+            <a:bodyPr xmlns:a="http://schemas.openxmlformats.org/drawingml/2006/main" anchorCtr="1"/>
+            <a:lstStyle xmlns:a="http://schemas.openxmlformats.org/drawingml/2006/main"/>
+            <a:p xmlns:a="http://schemas.openxmlformats.org/drawingml/2006/main">
+              <a:pPr>
+                <a:defRPr>
+                  <a:latin typeface="Arial Unicode MS"/>
+                  <a:ea typeface="Arial Unicode MS"/>
+                  <a:cs typeface="Arial Unicode MS"/>
+                </a:defRPr>
+              </a:pPr>
+            </a:p>
+          </c:txPr>
+        </c:title>
+        <c:numFmt formatCode="General"/>
+        <c:majorTickMark val="none"/>
+        <c:minorTickMark val="none"/>
+        <c:spPr>
+          <a:ln xmlns:a="http://schemas.openxmlformats.org/drawingml/2006/main" w="9525">
+            <a:solidFill>
+              <a:srgbClr val="D4D4D4"/>
+            </a:solidFill>
+            <a:prstDash val="solid"/>
+          </a:ln>
+        </c:spPr>
+        <c:txPr>
+          <a:bodyPr xmlns:a="http://schemas.openxmlformats.org/drawingml/2006/main" anchorCtr="1"/>
+          <a:lstStyle xmlns:a="http://schemas.openxmlformats.org/drawingml/2006/main"/>
+          <a:p xmlns:a="http://schemas.openxmlformats.org/drawingml/2006/main">
+            <a:pPr>
+              <a:defRPr>
+                <a:solidFill>
+                  <a:srgbClr val="666666"/>
+                </a:solidFill>
+                <a:latin typeface="Arial Unicode MS"/>
+                <a:ea typeface="Arial Unicode MS"/>
+                <a:cs typeface="Arial Unicode MS"/>
+              </a:defRPr>
+            </a:pPr>
+          </a:p>
+        </c:txPr>
+        <c:crossAx val="48672768"/>
+      </c:catAx>
+      <c:valAx>
+        <c:axId val="48672768"/>
+        <c:scaling>
+          <c:orientation val="minMax"/>
+        </c:scaling>
+        <c:delete val="0"/>
+        <c:axPos val="l"/>
+        <c:title>
+          <c:tx>
+            <c:rich>
+              <a:bodyPr xmlns:a="http://schemas.openxmlformats.org/drawingml/2006/main"/>
+              <a:lstStyle xmlns:a="http://schemas.openxmlformats.org/drawingml/2006/main"/>
+              <a:p xmlns:a="http://schemas.openxmlformats.org/drawingml/2006/main">
+                <a:r>
+                  <a:rPr>
+                    <a:latin typeface="Arial Unicode MS"/>
+                    <a:ea typeface="Arial Unicode MS"/>
+                    <a:cs typeface="Arial Unicode MS"/>
+                  </a:rPr>
+                  <a:t>容量（Ah）</a:t>
+                </a:r>
+              </a:p>
+            </c:rich>
+          </c:tx>
+          <c:overlay val="0"/>
+          <c:txPr>
+            <a:bodyPr xmlns:a="http://schemas.openxmlformats.org/drawingml/2006/main" anchorCtr="1"/>
+            <a:lstStyle xmlns:a="http://schemas.openxmlformats.org/drawingml/2006/main"/>
+            <a:p xmlns:a="http://schemas.openxmlformats.org/drawingml/2006/main">
+              <a:pPr>
+                <a:defRPr>
+                  <a:latin typeface="Arial Unicode MS"/>
+                  <a:ea typeface="Arial Unicode MS"/>
+                  <a:cs typeface="Arial Unicode MS"/>
+                </a:defRPr>
+              </a:pPr>
+            </a:p>
+          </c:txPr>
+        </c:title>
+        <c:numFmt formatCode="General"/>
+        <c:majorTickMark val="none"/>
+        <c:minorTickMark val="none"/>
+        <c:spPr>
+          <a:ln xmlns:a="http://schemas.openxmlformats.org/drawingml/2006/main" w="9525">
+            <a:solidFill>
+              <a:srgbClr val="D4D4D4"/>
+            </a:solidFill>
+            <a:prstDash val="solid"/>
+          </a:ln>
+        </c:spPr>
+        <c:txPr>
+          <a:bodyPr xmlns:a="http://schemas.openxmlformats.org/drawingml/2006/main" anchorCtr="1"/>
+          <a:lstStyle xmlns:a="http://schemas.openxmlformats.org/drawingml/2006/main"/>
+          <a:p xmlns:a="http://schemas.openxmlformats.org/drawingml/2006/main">
+            <a:pPr>
+              <a:defRPr>
+                <a:solidFill>
+                  <a:srgbClr val="666666"/>
+                </a:solidFill>
+                <a:latin typeface="Arial Unicode MS"/>
+                <a:ea typeface="Arial Unicode MS"/>
+                <a:cs typeface="Arial Unicode MS"/>
+              </a:defRPr>
+            </a:pPr>
+          </a:p>
+        </c:txPr>
+        <c:crossAx val="48650112"/>
+        <c:crossBetween val="between"/>
+      </c:valAx>
+    </c:plotArea>
+    <c:legend>
+      <c:legendPos val="b"/>
+      <c:overlay val="0"/>
+      <c:txPr>
+        <a:bodyPr xmlns:a="http://schemas.openxmlformats.org/drawingml/2006/main" anchorCtr="1"/>
+        <a:lstStyle xmlns:a="http://schemas.openxmlformats.org/drawingml/2006/main"/>
+        <a:p xmlns:a="http://schemas.openxmlformats.org/drawingml/2006/main">
+          <a:pPr>
+            <a:defRPr>
+              <a:latin typeface="Arial Unicode MS"/>
+              <a:ea typeface="Arial Unicode MS"/>
+              <a:cs typeface="Arial Unicode MS"/>
+            </a:defRPr>
+          </a:pPr>
+        </a:p>
+      </c:txPr>
+    </c:legend>
+    <c:plotVisOnly val="1"/>
+  </c:chart>
+  <c:externalData r:id="rIdChartSnapshot1">
+    <c:autoUpdate val="0"/>
+  </c:externalData>
+</c:chartSpace>
+</file>
+
+<file path=ppt/slides/charts/chart12.xml><?xml version="1.0" encoding="utf-8"?>
+<c:chartSpace xmlns:c="http://schemas.openxmlformats.org/drawingml/2006/chart" xmlns:r="http://schemas.openxmlformats.org/officeDocument/2006/relationships">
+  <c:lang val="en-US"/>
+  <c:chart>
+    <c:plotArea>
+      <c:lineChart>
+        <c:grouping val="standard"/>
+        <c:varyColors val="0"/>
+        <c:ser>
+          <c:idx val="0"/>
+          <c:order val="0"/>
+          <c:tx>
+            <c:v>原始容量</c:v>
+          </c:tx>
+          <c:spPr>
+            <a:solidFill xmlns:a="http://schemas.openxmlformats.org/drawingml/2006/main">
+              <a:srgbClr val="176B87"/>
+            </a:solidFill>
+          </c:spPr>
+          <c:marker>
+            <c:symbol val="none"/>
+          </c:marker>
+          <c:cat>
+            <c:numRef>
+              <c:f>'Chart Data'!$A$2:$A$11</c:f>
+              <c:numCache>
+                <c:formatCode>General</c:formatCode>
+                <c:ptCount val="10"/>
+                <c:pt idx="0">
+                  <c:v>42</c:v>
+                </c:pt>
+                <c:pt idx="1">
+                  <c:v>43</c:v>
+                </c:pt>
+                <c:pt idx="2">
+                  <c:v>44</c:v>
+                </c:pt>
+                <c:pt idx="3">
+                  <c:v>45</c:v>
+                </c:pt>
+                <c:pt idx="4">
+                  <c:v>46</c:v>
+                </c:pt>
+                <c:pt idx="5">
+                  <c:v>47</c:v>
+                </c:pt>
+                <c:pt idx="6">
+                  <c:v>48</c:v>
+                </c:pt>
+                <c:pt idx="7">
+                  <c:v>49</c:v>
+                </c:pt>
+                <c:pt idx="8">
+                  <c:v>50</c:v>
+                </c:pt>
+                <c:pt idx="9">
+                  <c:v>51</c:v>
+                </c:pt>
+              </c:numCache>
+            </c:numRef>
+          </c:cat>
+          <c:val>
+            <c:numRef>
+              <c:f>'Chart Data'!$B$2:$B$11</c:f>
+              <c:numCache>
+                <c:formatCode>General</c:formatCode>
+                <c:ptCount val="10"/>
+                <c:pt idx="0">
+                  <c:v>1.6324</c:v>
+                </c:pt>
+                <c:pt idx="1">
+                  <c:v>1.6164</c:v>
+                </c:pt>
+                <c:pt idx="2">
+                  <c:v>1.6109</c:v>
+                </c:pt>
+                <c:pt idx="3">
+                  <c:v>1.5955</c:v>
+                </c:pt>
+                <c:pt idx="4">
+                  <c:v>1.7267</c:v>
+                </c:pt>
+                <c:pt idx="5">
+                  <c:v>1.7166</c:v>
+                </c:pt>
+                <c:pt idx="6">
+                  <c:v>1.6958</c:v>
+                </c:pt>
+                <c:pt idx="7">
+                  <c:v>1.6778</c:v>
+                </c:pt>
+                <c:pt idx="8">
+                  <c:v>1.6607</c:v>
+                </c:pt>
+                <c:pt idx="9">
+                  <c:v>1.6664</c:v>
+                </c:pt>
+              </c:numCache>
+            </c:numRef>
+          </c:val>
+          <c:smooth val="0"/>
+        </c:ser>
+        <c:ser>
+          <c:idx val="1"/>
+          <c:order val="1"/>
+          <c:tx>
+            <c:v>限幅对照</c:v>
+          </c:tx>
+          <c:spPr>
+            <a:solidFill xmlns:a="http://schemas.openxmlformats.org/drawingml/2006/main">
+              <a:srgbClr val="D3662E"/>
+            </a:solidFill>
+          </c:spPr>
+          <c:marker>
+            <c:symbol val="none"/>
+          </c:marker>
+          <c:cat>
+            <c:numRef>
+              <c:f>'Chart Data'!$C$2:$C$11</c:f>
+              <c:numCache>
+                <c:formatCode>General</c:formatCode>
+                <c:ptCount val="10"/>
+                <c:pt idx="0">
+                  <c:v>42</c:v>
+                </c:pt>
+                <c:pt idx="1">
+                  <c:v>43</c:v>
+                </c:pt>
+                <c:pt idx="2">
+                  <c:v>44</c:v>
+                </c:pt>
+                <c:pt idx="3">
+                  <c:v>45</c:v>
+                </c:pt>
+                <c:pt idx="4">
+                  <c:v>46</c:v>
+                </c:pt>
+                <c:pt idx="5">
+                  <c:v>47</c:v>
+                </c:pt>
+                <c:pt idx="6">
+                  <c:v>48</c:v>
+                </c:pt>
+                <c:pt idx="7">
+                  <c:v>49</c:v>
+                </c:pt>
+                <c:pt idx="8">
+                  <c:v>50</c:v>
+                </c:pt>
+                <c:pt idx="9">
+                  <c:v>51</c:v>
+                </c:pt>
+              </c:numCache>
+            </c:numRef>
+          </c:cat>
+          <c:val>
+            <c:numRef>
+              <c:f>'Chart Data'!$D$2:$D$11</c:f>
+              <c:numCache>
+                <c:formatCode>General</c:formatCode>
+                <c:ptCount val="10"/>
+                <c:pt idx="0">
+                  <c:v>1.6324</c:v>
+                </c:pt>
+                <c:pt idx="1">
+                  <c:v>1.6164</c:v>
+                </c:pt>
+                <c:pt idx="2">
+                  <c:v>1.6109</c:v>
+                </c:pt>
+                <c:pt idx="3">
+                  <c:v>1.5955</c:v>
+                </c:pt>
+                <c:pt idx="4">
+                  <c:v>1.615675</c:v>
+                </c:pt>
+                <c:pt idx="5">
+                  <c:v>1.7166</c:v>
+                </c:pt>
+                <c:pt idx="6">
+                  <c:v>1.6958</c:v>
+                </c:pt>
+                <c:pt idx="7">
+                  <c:v>1.6778</c:v>
+                </c:pt>
+                <c:pt idx="8">
+                  <c:v>1.6607</c:v>
+                </c:pt>
+                <c:pt idx="9">
+                  <c:v>1.6664</c:v>
+                </c:pt>
+              </c:numCache>
+            </c:numRef>
+          </c:val>
+          <c:smooth val="0"/>
+        </c:ser>
+        <c:dLbls>
+          <c:txPr>
+            <a:bodyPr xmlns:a="http://schemas.openxmlformats.org/drawingml/2006/main" anchorCtr="1"/>
+            <a:lstStyle xmlns:a="http://schemas.openxmlformats.org/drawingml/2006/main"/>
+            <a:p xmlns:a="http://schemas.openxmlformats.org/drawingml/2006/main">
+              <a:pPr>
+                <a:defRPr>
+                  <a:latin typeface="Arial Unicode MS"/>
+                  <a:ea typeface="Arial Unicode MS"/>
+                  <a:cs typeface="Arial Unicode MS"/>
+                </a:defRPr>
+              </a:pPr>
+            </a:p>
+          </c:txPr>
+          <c:showLegendKey val="0"/>
+          <c:showVal val="0"/>
+          <c:showCatName val="0"/>
+          <c:showSerName val="0"/>
+          <c:showPercent val="0"/>
+          <c:showBubbleSize val="0"/>
+          <c:showLeaderLines val="0"/>
+        </c:dLbls>
+        <c:smooth val="0"/>
+        <c:axId val="48650112"/>
+        <c:axId val="48672768"/>
+      </c:lineChart>
+      <c:catAx>
+        <c:axId val="48650112"/>
+        <c:scaling>
+          <c:orientation val="minMax"/>
+        </c:scaling>
+        <c:delete val="0"/>
+        <c:axPos val="b"/>
+        <c:title>
+          <c:tx>
+            <c:rich>
+              <a:bodyPr xmlns:a="http://schemas.openxmlformats.org/drawingml/2006/main"/>
+              <a:lstStyle xmlns:a="http://schemas.openxmlformats.org/drawingml/2006/main"/>
+              <a:p xmlns:a="http://schemas.openxmlformats.org/drawingml/2006/main">
+                <a:r>
+                  <a:rPr>
+                    <a:latin typeface="Arial Unicode MS"/>
+                    <a:ea typeface="Arial Unicode MS"/>
+                    <a:cs typeface="Arial Unicode MS"/>
+                  </a:rPr>
+                  <a:t>循环次数</a:t>
+                </a:r>
+              </a:p>
+            </c:rich>
+          </c:tx>
+          <c:overlay val="0"/>
+          <c:txPr>
+            <a:bodyPr xmlns:a="http://schemas.openxmlformats.org/drawingml/2006/main" anchorCtr="1"/>
+            <a:lstStyle xmlns:a="http://schemas.openxmlformats.org/drawingml/2006/main"/>
+            <a:p xmlns:a="http://schemas.openxmlformats.org/drawingml/2006/main">
+              <a:pPr>
+                <a:defRPr>
+                  <a:latin typeface="Arial Unicode MS"/>
+                  <a:ea typeface="Arial Unicode MS"/>
+                  <a:cs typeface="Arial Unicode MS"/>
+                </a:defRPr>
+              </a:pPr>
+            </a:p>
+          </c:txPr>
+        </c:title>
+        <c:numFmt formatCode="General"/>
+        <c:majorTickMark val="none"/>
+        <c:minorTickMark val="none"/>
+        <c:spPr>
+          <a:ln xmlns:a="http://schemas.openxmlformats.org/drawingml/2006/main" w="9525">
+            <a:solidFill>
+              <a:srgbClr val="D4D4D4"/>
+            </a:solidFill>
+            <a:prstDash val="solid"/>
+          </a:ln>
+        </c:spPr>
+        <c:txPr>
+          <a:bodyPr xmlns:a="http://schemas.openxmlformats.org/drawingml/2006/main" anchorCtr="1"/>
+          <a:lstStyle xmlns:a="http://schemas.openxmlformats.org/drawingml/2006/main"/>
+          <a:p xmlns:a="http://schemas.openxmlformats.org/drawingml/2006/main">
+            <a:pPr>
+              <a:defRPr>
+                <a:solidFill>
+                  <a:srgbClr val="666666"/>
+                </a:solidFill>
+                <a:latin typeface="Arial Unicode MS"/>
+                <a:ea typeface="Arial Unicode MS"/>
+                <a:cs typeface="Arial Unicode MS"/>
+              </a:defRPr>
+            </a:pPr>
+          </a:p>
+        </c:txPr>
+        <c:crossAx val="48672768"/>
+      </c:catAx>
+      <c:valAx>
+        <c:axId val="48672768"/>
+        <c:scaling>
+          <c:orientation val="minMax"/>
+        </c:scaling>
+        <c:delete val="0"/>
+        <c:axPos val="l"/>
+        <c:title>
+          <c:tx>
+            <c:rich>
+              <a:bodyPr xmlns:a="http://schemas.openxmlformats.org/drawingml/2006/main"/>
+              <a:lstStyle xmlns:a="http://schemas.openxmlformats.org/drawingml/2006/main"/>
+              <a:p xmlns:a="http://schemas.openxmlformats.org/drawingml/2006/main">
+                <a:r>
+                  <a:rPr>
+                    <a:latin typeface="Arial Unicode MS"/>
+                    <a:ea typeface="Arial Unicode MS"/>
+                    <a:cs typeface="Arial Unicode MS"/>
+                  </a:rPr>
+                  <a:t>容量（Ah）</a:t>
+                </a:r>
+              </a:p>
+            </c:rich>
+          </c:tx>
+          <c:overlay val="0"/>
+          <c:txPr>
+            <a:bodyPr xmlns:a="http://schemas.openxmlformats.org/drawingml/2006/main" anchorCtr="1"/>
+            <a:lstStyle xmlns:a="http://schemas.openxmlformats.org/drawingml/2006/main"/>
+            <a:p xmlns:a="http://schemas.openxmlformats.org/drawingml/2006/main">
+              <a:pPr>
+                <a:defRPr>
+                  <a:latin typeface="Arial Unicode MS"/>
+                  <a:ea typeface="Arial Unicode MS"/>
+                  <a:cs typeface="Arial Unicode MS"/>
+                </a:defRPr>
+              </a:pPr>
+            </a:p>
+          </c:txPr>
+        </c:title>
+        <c:numFmt formatCode="General"/>
+        <c:majorTickMark val="none"/>
+        <c:minorTickMark val="none"/>
+        <c:spPr>
+          <a:ln xmlns:a="http://schemas.openxmlformats.org/drawingml/2006/main" w="9525">
+            <a:solidFill>
+              <a:srgbClr val="D4D4D4"/>
+            </a:solidFill>
+            <a:prstDash val="solid"/>
+          </a:ln>
+        </c:spPr>
+        <c:txPr>
+          <a:bodyPr xmlns:a="http://schemas.openxmlformats.org/drawingml/2006/main" anchorCtr="1"/>
+          <a:lstStyle xmlns:a="http://schemas.openxmlformats.org/drawingml/2006/main"/>
+          <a:p xmlns:a="http://schemas.openxmlformats.org/drawingml/2006/main">
+            <a:pPr>
+              <a:defRPr>
+                <a:solidFill>
+                  <a:srgbClr val="666666"/>
+                </a:solidFill>
+                <a:latin typeface="Arial Unicode MS"/>
+                <a:ea typeface="Arial Unicode MS"/>
+                <a:cs typeface="Arial Unicode MS"/>
+              </a:defRPr>
+            </a:pPr>
+          </a:p>
+        </c:txPr>
+        <c:crossAx val="48650112"/>
+        <c:crossBetween val="between"/>
+      </c:valAx>
+    </c:plotArea>
+    <c:legend>
+      <c:legendPos val="b"/>
+      <c:overlay val="0"/>
+      <c:txPr>
+        <a:bodyPr xmlns:a="http://schemas.openxmlformats.org/drawingml/2006/main" anchorCtr="1"/>
+        <a:lstStyle xmlns:a="http://schemas.openxmlformats.org/drawingml/2006/main"/>
+        <a:p xmlns:a="http://schemas.openxmlformats.org/drawingml/2006/main">
+          <a:pPr>
+            <a:defRPr>
+              <a:latin typeface="Arial Unicode MS"/>
+              <a:ea typeface="Arial Unicode MS"/>
+              <a:cs typeface="Arial Unicode MS"/>
+            </a:defRPr>
+          </a:pPr>
+        </a:p>
+      </c:txPr>
+    </c:legend>
+    <c:plotVisOnly val="1"/>
+  </c:chart>
+  <c:externalData r:id="rIdChartSnapshot1">
+    <c:autoUpdate val="0"/>
+  </c:externalData>
+</c:chartSpace>
+</file>
+
 <file path=ppt/slides/charts/chart2.xml><?xml version="1.0" encoding="utf-8"?>
 <c:chartSpace xmlns:c="http://schemas.openxmlformats.org/drawingml/2006/chart" xmlns:r="http://schemas.openxmlformats.org/officeDocument/2006/relationships">
   <c:lang val="en-US"/>
@@ -19577,6 +20587,7 @@
               </a:defRPr>
             </a:defPPr>
             <a:lvl1pPr>
+              <a:buNone/>
               <a:defRPr sz="2925">
                 <a:solidFill>
                   <a:srgbClr val="172B3A"/>
@@ -19587,6 +20598,7 @@
               </a:defRPr>
             </a:lvl1pPr>
             <a:lvl2pPr>
+              <a:buNone/>
               <a:defRPr sz="2925">
                 <a:solidFill>
                   <a:srgbClr val="172B3A"/>
@@ -19597,6 +20609,7 @@
               </a:defRPr>
             </a:lvl2pPr>
             <a:lvl3pPr>
+              <a:buNone/>
               <a:defRPr sz="2925">
                 <a:solidFill>
                   <a:srgbClr val="172B3A"/>
@@ -19607,6 +20620,7 @@
               </a:defRPr>
             </a:lvl3pPr>
             <a:lvl4pPr>
+              <a:buNone/>
               <a:defRPr sz="2925">
                 <a:solidFill>
                   <a:srgbClr val="172B3A"/>
@@ -19617,6 +20631,7 @@
               </a:defRPr>
             </a:lvl4pPr>
             <a:lvl5pPr>
+              <a:buNone/>
               <a:defRPr sz="2925">
                 <a:solidFill>
                   <a:srgbClr val="172B3A"/>
@@ -19627,6 +20642,7 @@
               </a:defRPr>
             </a:lvl5pPr>
             <a:lvl6pPr>
+              <a:buNone/>
               <a:defRPr sz="2925">
                 <a:solidFill>
                   <a:srgbClr val="172B3A"/>
@@ -19637,6 +20653,7 @@
               </a:defRPr>
             </a:lvl6pPr>
             <a:lvl7pPr>
+              <a:buNone/>
               <a:defRPr sz="2925">
                 <a:solidFill>
                   <a:srgbClr val="172B3A"/>
@@ -19647,6 +20664,7 @@
               </a:defRPr>
             </a:lvl7pPr>
             <a:lvl8pPr>
+              <a:buNone/>
               <a:defRPr sz="2925">
                 <a:solidFill>
                   <a:srgbClr val="172B3A"/>
@@ -19657,6 +20675,7 @@
               </a:defRPr>
             </a:lvl8pPr>
             <a:lvl9pPr>
+              <a:buNone/>
               <a:defRPr sz="2925">
                 <a:solidFill>
                   <a:srgbClr val="172B3A"/>
@@ -19669,6 +20688,7 @@
           </a:lstStyle>
           <a:p xmlns:a="http://schemas.openxmlformats.org/drawingml/2006/main">
             <a:pPr>
+              <a:buNone/>
               <a:defRPr sz="2925">
                 <a:solidFill>
                   <a:srgbClr val="172B3A"/>
@@ -19733,6 +20753,7 @@
               </a:defRPr>
             </a:defPPr>
             <a:lvl1pPr>
+              <a:buNone/>
               <a:defRPr sz="1200">
                 <a:solidFill>
                   <a:srgbClr val="687985"/>
@@ -19743,6 +20764,7 @@
               </a:defRPr>
             </a:lvl1pPr>
             <a:lvl2pPr>
+              <a:buNone/>
               <a:defRPr sz="1200">
                 <a:solidFill>
                   <a:srgbClr val="687985"/>
@@ -19753,6 +20775,7 @@
               </a:defRPr>
             </a:lvl2pPr>
             <a:lvl3pPr>
+              <a:buNone/>
               <a:defRPr sz="1200">
                 <a:solidFill>
                   <a:srgbClr val="687985"/>
@@ -19763,6 +20786,7 @@
               </a:defRPr>
             </a:lvl3pPr>
             <a:lvl4pPr>
+              <a:buNone/>
               <a:defRPr sz="1200">
                 <a:solidFill>
                   <a:srgbClr val="687985"/>
@@ -19773,6 +20797,7 @@
               </a:defRPr>
             </a:lvl4pPr>
             <a:lvl5pPr>
+              <a:buNone/>
               <a:defRPr sz="1200">
                 <a:solidFill>
                   <a:srgbClr val="687985"/>
@@ -19783,6 +20808,7 @@
               </a:defRPr>
             </a:lvl5pPr>
             <a:lvl6pPr>
+              <a:buNone/>
               <a:defRPr sz="1200">
                 <a:solidFill>
                   <a:srgbClr val="687985"/>
@@ -19793,6 +20819,7 @@
               </a:defRPr>
             </a:lvl6pPr>
             <a:lvl7pPr>
+              <a:buNone/>
               <a:defRPr sz="1200">
                 <a:solidFill>
                   <a:srgbClr val="687985"/>
@@ -19803,6 +20830,7 @@
               </a:defRPr>
             </a:lvl7pPr>
             <a:lvl8pPr>
+              <a:buNone/>
               <a:defRPr sz="1200">
                 <a:solidFill>
                   <a:srgbClr val="687985"/>
@@ -19813,6 +20841,7 @@
               </a:defRPr>
             </a:lvl8pPr>
             <a:lvl9pPr>
+              <a:buNone/>
               <a:defRPr sz="1200">
                 <a:solidFill>
                   <a:srgbClr val="687985"/>
@@ -19825,6 +20854,7 @@
           </a:lstStyle>
           <a:p xmlns:a="http://schemas.openxmlformats.org/drawingml/2006/main">
             <a:pPr>
+              <a:buNone/>
               <a:defRPr sz="1200">
                 <a:solidFill>
                   <a:srgbClr val="687985"/>
@@ -19889,6 +20919,7 @@
               </a:defRPr>
             </a:defPPr>
             <a:lvl1pPr>
+              <a:buNone/>
               <a:defRPr sz="1200">
                 <a:solidFill>
                   <a:srgbClr val="172B3A"/>
@@ -19899,6 +20930,7 @@
               </a:defRPr>
             </a:lvl1pPr>
             <a:lvl2pPr>
+              <a:buNone/>
               <a:defRPr sz="1200">
                 <a:solidFill>
                   <a:srgbClr val="172B3A"/>
@@ -19909,6 +20941,7 @@
               </a:defRPr>
             </a:lvl2pPr>
             <a:lvl3pPr>
+              <a:buNone/>
               <a:defRPr sz="1200">
                 <a:solidFill>
                   <a:srgbClr val="172B3A"/>
@@ -19919,6 +20952,7 @@
               </a:defRPr>
             </a:lvl3pPr>
             <a:lvl4pPr>
+              <a:buNone/>
               <a:defRPr sz="1200">
                 <a:solidFill>
                   <a:srgbClr val="172B3A"/>
@@ -19929,6 +20963,7 @@
               </a:defRPr>
             </a:lvl4pPr>
             <a:lvl5pPr>
+              <a:buNone/>
               <a:defRPr sz="1200">
                 <a:solidFill>
                   <a:srgbClr val="172B3A"/>
@@ -19939,6 +20974,7 @@
               </a:defRPr>
             </a:lvl5pPr>
             <a:lvl6pPr>
+              <a:buNone/>
               <a:defRPr sz="1200">
                 <a:solidFill>
                   <a:srgbClr val="172B3A"/>
@@ -19949,6 +20985,7 @@
               </a:defRPr>
             </a:lvl6pPr>
             <a:lvl7pPr>
+              <a:buNone/>
               <a:defRPr sz="1200">
                 <a:solidFill>
                   <a:srgbClr val="172B3A"/>
@@ -19959,6 +20996,7 @@
               </a:defRPr>
             </a:lvl7pPr>
             <a:lvl8pPr>
+              <a:buNone/>
               <a:defRPr sz="1200">
                 <a:solidFill>
                   <a:srgbClr val="172B3A"/>
@@ -19969,6 +21007,7 @@
               </a:defRPr>
             </a:lvl8pPr>
             <a:lvl9pPr>
+              <a:buNone/>
               <a:defRPr sz="1200">
                 <a:solidFill>
                   <a:srgbClr val="172B3A"/>
@@ -19981,6 +21020,7 @@
           </a:lstStyle>
           <a:p xmlns:a="http://schemas.openxmlformats.org/drawingml/2006/main">
             <a:pPr>
+              <a:buNone/>
               <a:defRPr sz="1200">
                 <a:solidFill>
                   <a:srgbClr val="172B3A"/>
@@ -20045,6 +21085,7 @@
               </a:defRPr>
             </a:defPPr>
             <a:lvl1pPr>
+              <a:buNone/>
               <a:defRPr sz="2400">
                 <a:solidFill>
                   <a:srgbClr val="176B87"/>
@@ -20055,6 +21096,7 @@
               </a:defRPr>
             </a:lvl1pPr>
             <a:lvl2pPr>
+              <a:buNone/>
               <a:defRPr sz="2400">
                 <a:solidFill>
                   <a:srgbClr val="176B87"/>
@@ -20065,6 +21107,7 @@
               </a:defRPr>
             </a:lvl2pPr>
             <a:lvl3pPr>
+              <a:buNone/>
               <a:defRPr sz="2400">
                 <a:solidFill>
                   <a:srgbClr val="176B87"/>
@@ -20075,6 +21118,7 @@
               </a:defRPr>
             </a:lvl3pPr>
             <a:lvl4pPr>
+              <a:buNone/>
               <a:defRPr sz="2400">
                 <a:solidFill>
                   <a:srgbClr val="176B87"/>
@@ -20085,6 +21129,7 @@
               </a:defRPr>
             </a:lvl4pPr>
             <a:lvl5pPr>
+              <a:buNone/>
               <a:defRPr sz="2400">
                 <a:solidFill>
                   <a:srgbClr val="176B87"/>
@@ -20095,6 +21140,7 @@
               </a:defRPr>
             </a:lvl5pPr>
             <a:lvl6pPr>
+              <a:buNone/>
               <a:defRPr sz="2400">
                 <a:solidFill>
                   <a:srgbClr val="176B87"/>
@@ -20105,6 +21151,7 @@
               </a:defRPr>
             </a:lvl6pPr>
             <a:lvl7pPr>
+              <a:buNone/>
               <a:defRPr sz="2400">
                 <a:solidFill>
                   <a:srgbClr val="176B87"/>
@@ -20115,6 +21162,7 @@
               </a:defRPr>
             </a:lvl7pPr>
             <a:lvl8pPr>
+              <a:buNone/>
               <a:defRPr sz="2400">
                 <a:solidFill>
                   <a:srgbClr val="176B87"/>
@@ -20125,6 +21173,7 @@
               </a:defRPr>
             </a:lvl8pPr>
             <a:lvl9pPr>
+              <a:buNone/>
               <a:defRPr sz="2400">
                 <a:solidFill>
                   <a:srgbClr val="176B87"/>
@@ -20137,6 +21186,7 @@
           </a:lstStyle>
           <a:p xmlns:a="http://schemas.openxmlformats.org/drawingml/2006/main">
             <a:pPr>
+              <a:buNone/>
               <a:defRPr sz="2400">
                 <a:solidFill>
                   <a:srgbClr val="176B87"/>
@@ -20165,7 +21215,7 @@
           <p:cNvPr id="5" name="">
             <a:extLst xmlns:a="http://schemas.openxmlformats.org/drawingml/2006/main">
               <a:ext uri="{FF2B5EF4-FFF2-40B4-BE49-F238E27FC236}">
-                <a16:creationId xmlns:a16="http://schemas.microsoft.com/office/drawing/2014/main" id="{53A9554D-3778-4F53-807F-F77EE8C2B4F8}"/>
+                <a16:creationId xmlns:a16="http://schemas.microsoft.com/office/drawing/2014/main" id="{96471CB0-44B6-4DEB-A902-7067E5AE79E0}"/>
               </a:ext>
             </a:extLst>
           </p:cNvPr>
@@ -20614,6 +21664,7 @@
               </a:defRPr>
             </a:defPPr>
             <a:lvl1pPr>
+              <a:buNone/>
               <a:defRPr sz="1950">
                 <a:solidFill>
                   <a:srgbClr val="172B3A"/>
@@ -20624,6 +21675,7 @@
               </a:defRPr>
             </a:lvl1pPr>
             <a:lvl2pPr>
+              <a:buNone/>
               <a:defRPr sz="1950">
                 <a:solidFill>
                   <a:srgbClr val="172B3A"/>
@@ -20634,6 +21686,7 @@
               </a:defRPr>
             </a:lvl2pPr>
             <a:lvl3pPr>
+              <a:buNone/>
               <a:defRPr sz="1950">
                 <a:solidFill>
                   <a:srgbClr val="172B3A"/>
@@ -20644,6 +21697,7 @@
               </a:defRPr>
             </a:lvl3pPr>
             <a:lvl4pPr>
+              <a:buNone/>
               <a:defRPr sz="1950">
                 <a:solidFill>
                   <a:srgbClr val="172B3A"/>
@@ -20654,6 +21708,7 @@
               </a:defRPr>
             </a:lvl4pPr>
             <a:lvl5pPr>
+              <a:buNone/>
               <a:defRPr sz="1950">
                 <a:solidFill>
                   <a:srgbClr val="172B3A"/>
@@ -20664,6 +21719,7 @@
               </a:defRPr>
             </a:lvl5pPr>
             <a:lvl6pPr>
+              <a:buNone/>
               <a:defRPr sz="1950">
                 <a:solidFill>
                   <a:srgbClr val="172B3A"/>
@@ -20674,6 +21730,7 @@
               </a:defRPr>
             </a:lvl6pPr>
             <a:lvl7pPr>
+              <a:buNone/>
               <a:defRPr sz="1950">
                 <a:solidFill>
                   <a:srgbClr val="172B3A"/>
@@ -20684,6 +21741,7 @@
               </a:defRPr>
             </a:lvl7pPr>
             <a:lvl8pPr>
+              <a:buNone/>
               <a:defRPr sz="1950">
                 <a:solidFill>
                   <a:srgbClr val="172B3A"/>
@@ -20694,6 +21752,7 @@
               </a:defRPr>
             </a:lvl8pPr>
             <a:lvl9pPr>
+              <a:buNone/>
               <a:defRPr sz="1950">
                 <a:solidFill>
                   <a:srgbClr val="172B3A"/>
@@ -20706,6 +21765,7 @@
           </a:lstStyle>
           <a:p xmlns:a="http://schemas.openxmlformats.org/drawingml/2006/main">
             <a:pPr>
+              <a:buNone/>
               <a:defRPr sz="1950">
                 <a:solidFill>
                   <a:srgbClr val="172B3A"/>
@@ -20729,6 +21789,7 @@
           </a:p>
           <a:p xmlns:a="http://schemas.openxmlformats.org/drawingml/2006/main">
             <a:pPr>
+              <a:buNone/>
               <a:defRPr sz="1950">
                 <a:solidFill>
                   <a:srgbClr val="172B3A"/>
@@ -20822,6 +21883,7 @@
               </a:defRPr>
             </a:defPPr>
             <a:lvl1pPr>
+              <a:buNone/>
               <a:defRPr sz="2925">
                 <a:solidFill>
                   <a:srgbClr val="172B3A"/>
@@ -20832,6 +21894,7 @@
               </a:defRPr>
             </a:lvl1pPr>
             <a:lvl2pPr>
+              <a:buNone/>
               <a:defRPr sz="2925">
                 <a:solidFill>
                   <a:srgbClr val="172B3A"/>
@@ -20842,6 +21905,7 @@
               </a:defRPr>
             </a:lvl2pPr>
             <a:lvl3pPr>
+              <a:buNone/>
               <a:defRPr sz="2925">
                 <a:solidFill>
                   <a:srgbClr val="172B3A"/>
@@ -20852,6 +21916,7 @@
               </a:defRPr>
             </a:lvl3pPr>
             <a:lvl4pPr>
+              <a:buNone/>
               <a:defRPr sz="2925">
                 <a:solidFill>
                   <a:srgbClr val="172B3A"/>
@@ -20862,6 +21927,7 @@
               </a:defRPr>
             </a:lvl4pPr>
             <a:lvl5pPr>
+              <a:buNone/>
               <a:defRPr sz="2925">
                 <a:solidFill>
                   <a:srgbClr val="172B3A"/>
@@ -20872,6 +21938,7 @@
               </a:defRPr>
             </a:lvl5pPr>
             <a:lvl6pPr>
+              <a:buNone/>
               <a:defRPr sz="2925">
                 <a:solidFill>
                   <a:srgbClr val="172B3A"/>
@@ -20882,6 +21949,7 @@
               </a:defRPr>
             </a:lvl6pPr>
             <a:lvl7pPr>
+              <a:buNone/>
               <a:defRPr sz="2925">
                 <a:solidFill>
                   <a:srgbClr val="172B3A"/>
@@ -20892,6 +21960,7 @@
               </a:defRPr>
             </a:lvl7pPr>
             <a:lvl8pPr>
+              <a:buNone/>
               <a:defRPr sz="2925">
                 <a:solidFill>
                   <a:srgbClr val="172B3A"/>
@@ -20902,6 +21971,7 @@
               </a:defRPr>
             </a:lvl8pPr>
             <a:lvl9pPr>
+              <a:buNone/>
               <a:defRPr sz="2925">
                 <a:solidFill>
                   <a:srgbClr val="172B3A"/>
@@ -20914,6 +21984,7 @@
           </a:lstStyle>
           <a:p xmlns:a="http://schemas.openxmlformats.org/drawingml/2006/main">
             <a:pPr>
+              <a:buNone/>
               <a:defRPr sz="2925">
                 <a:solidFill>
                   <a:srgbClr val="172B3A"/>
@@ -20978,6 +22049,7 @@
               </a:defRPr>
             </a:defPPr>
             <a:lvl1pPr>
+              <a:buNone/>
               <a:defRPr sz="1200">
                 <a:solidFill>
                   <a:srgbClr val="687985"/>
@@ -20988,6 +22060,7 @@
               </a:defRPr>
             </a:lvl1pPr>
             <a:lvl2pPr>
+              <a:buNone/>
               <a:defRPr sz="1200">
                 <a:solidFill>
                   <a:srgbClr val="687985"/>
@@ -20998,6 +22071,7 @@
               </a:defRPr>
             </a:lvl2pPr>
             <a:lvl3pPr>
+              <a:buNone/>
               <a:defRPr sz="1200">
                 <a:solidFill>
                   <a:srgbClr val="687985"/>
@@ -21008,6 +22082,7 @@
               </a:defRPr>
             </a:lvl3pPr>
             <a:lvl4pPr>
+              <a:buNone/>
               <a:defRPr sz="1200">
                 <a:solidFill>
                   <a:srgbClr val="687985"/>
@@ -21018,6 +22093,7 @@
               </a:defRPr>
             </a:lvl4pPr>
             <a:lvl5pPr>
+              <a:buNone/>
               <a:defRPr sz="1200">
                 <a:solidFill>
                   <a:srgbClr val="687985"/>
@@ -21028,6 +22104,7 @@
               </a:defRPr>
             </a:lvl5pPr>
             <a:lvl6pPr>
+              <a:buNone/>
               <a:defRPr sz="1200">
                 <a:solidFill>
                   <a:srgbClr val="687985"/>
@@ -21038,6 +22115,7 @@
               </a:defRPr>
             </a:lvl6pPr>
             <a:lvl7pPr>
+              <a:buNone/>
               <a:defRPr sz="1200">
                 <a:solidFill>
                   <a:srgbClr val="687985"/>
@@ -21048,6 +22126,7 @@
               </a:defRPr>
             </a:lvl7pPr>
             <a:lvl8pPr>
+              <a:buNone/>
               <a:defRPr sz="1200">
                 <a:solidFill>
                   <a:srgbClr val="687985"/>
@@ -21058,6 +22137,7 @@
               </a:defRPr>
             </a:lvl8pPr>
             <a:lvl9pPr>
+              <a:buNone/>
               <a:defRPr sz="1200">
                 <a:solidFill>
                   <a:srgbClr val="687985"/>
@@ -21070,6 +22150,7 @@
           </a:lstStyle>
           <a:p xmlns:a="http://schemas.openxmlformats.org/drawingml/2006/main">
             <a:pPr>
+              <a:buNone/>
               <a:defRPr sz="1200">
                 <a:solidFill>
                   <a:srgbClr val="687985"/>
@@ -21134,6 +22215,7 @@
               </a:defRPr>
             </a:defPPr>
             <a:lvl1pPr>
+              <a:buNone/>
               <a:defRPr sz="1200">
                 <a:solidFill>
                   <a:srgbClr val="172B3A"/>
@@ -21144,6 +22226,7 @@
               </a:defRPr>
             </a:lvl1pPr>
             <a:lvl2pPr>
+              <a:buNone/>
               <a:defRPr sz="1200">
                 <a:solidFill>
                   <a:srgbClr val="172B3A"/>
@@ -21154,6 +22237,7 @@
               </a:defRPr>
             </a:lvl2pPr>
             <a:lvl3pPr>
+              <a:buNone/>
               <a:defRPr sz="1200">
                 <a:solidFill>
                   <a:srgbClr val="172B3A"/>
@@ -21164,6 +22248,7 @@
               </a:defRPr>
             </a:lvl3pPr>
             <a:lvl4pPr>
+              <a:buNone/>
               <a:defRPr sz="1200">
                 <a:solidFill>
                   <a:srgbClr val="172B3A"/>
@@ -21174,6 +22259,7 @@
               </a:defRPr>
             </a:lvl4pPr>
             <a:lvl5pPr>
+              <a:buNone/>
               <a:defRPr sz="1200">
                 <a:solidFill>
                   <a:srgbClr val="172B3A"/>
@@ -21184,6 +22270,7 @@
               </a:defRPr>
             </a:lvl5pPr>
             <a:lvl6pPr>
+              <a:buNone/>
               <a:defRPr sz="1200">
                 <a:solidFill>
                   <a:srgbClr val="172B3A"/>
@@ -21194,6 +22281,7 @@
               </a:defRPr>
             </a:lvl6pPr>
             <a:lvl7pPr>
+              <a:buNone/>
               <a:defRPr sz="1200">
                 <a:solidFill>
                   <a:srgbClr val="172B3A"/>
@@ -21204,6 +22292,7 @@
               </a:defRPr>
             </a:lvl7pPr>
             <a:lvl8pPr>
+              <a:buNone/>
               <a:defRPr sz="1200">
                 <a:solidFill>
                   <a:srgbClr val="172B3A"/>
@@ -21214,6 +22303,7 @@
               </a:defRPr>
             </a:lvl8pPr>
             <a:lvl9pPr>
+              <a:buNone/>
               <a:defRPr sz="1200">
                 <a:solidFill>
                   <a:srgbClr val="172B3A"/>
@@ -21226,6 +22316,7 @@
           </a:lstStyle>
           <a:p xmlns:a="http://schemas.openxmlformats.org/drawingml/2006/main">
             <a:pPr>
+              <a:buNone/>
               <a:defRPr sz="1200">
                 <a:solidFill>
                   <a:srgbClr val="172B3A"/>
@@ -21254,7 +22345,7 @@
           <p:cNvPr id="4" name="">
             <a:extLst xmlns:a="http://schemas.openxmlformats.org/drawingml/2006/main">
               <a:ext uri="{FF2B5EF4-FFF2-40B4-BE49-F238E27FC236}">
-                <a16:creationId xmlns:a16="http://schemas.microsoft.com/office/drawing/2014/main" id="{3F9F4351-85D4-46D4-9F65-2A5E3117A153}"/>
+                <a16:creationId xmlns:a16="http://schemas.microsoft.com/office/drawing/2014/main" id="{B8718B0A-D896-440B-B29A-4390BF140CBB}"/>
               </a:ext>
             </a:extLst>
           </p:cNvPr>
@@ -21769,6 +22860,7 @@
               </a:defRPr>
             </a:defPPr>
             <a:lvl1pPr>
+              <a:buNone/>
               <a:defRPr sz="2100">
                 <a:solidFill>
                   <a:srgbClr val="172B3A"/>
@@ -21779,6 +22871,7 @@
               </a:defRPr>
             </a:lvl1pPr>
             <a:lvl2pPr>
+              <a:buNone/>
               <a:defRPr sz="2100">
                 <a:solidFill>
                   <a:srgbClr val="172B3A"/>
@@ -21789,6 +22882,7 @@
               </a:defRPr>
             </a:lvl2pPr>
             <a:lvl3pPr>
+              <a:buNone/>
               <a:defRPr sz="2100">
                 <a:solidFill>
                   <a:srgbClr val="172B3A"/>
@@ -21799,6 +22893,7 @@
               </a:defRPr>
             </a:lvl3pPr>
             <a:lvl4pPr>
+              <a:buNone/>
               <a:defRPr sz="2100">
                 <a:solidFill>
                   <a:srgbClr val="172B3A"/>
@@ -21809,6 +22904,7 @@
               </a:defRPr>
             </a:lvl4pPr>
             <a:lvl5pPr>
+              <a:buNone/>
               <a:defRPr sz="2100">
                 <a:solidFill>
                   <a:srgbClr val="172B3A"/>
@@ -21819,6 +22915,7 @@
               </a:defRPr>
             </a:lvl5pPr>
             <a:lvl6pPr>
+              <a:buNone/>
               <a:defRPr sz="2100">
                 <a:solidFill>
                   <a:srgbClr val="172B3A"/>
@@ -21829,6 +22926,7 @@
               </a:defRPr>
             </a:lvl6pPr>
             <a:lvl7pPr>
+              <a:buNone/>
               <a:defRPr sz="2100">
                 <a:solidFill>
                   <a:srgbClr val="172B3A"/>
@@ -21839,6 +22937,7 @@
               </a:defRPr>
             </a:lvl7pPr>
             <a:lvl8pPr>
+              <a:buNone/>
               <a:defRPr sz="2100">
                 <a:solidFill>
                   <a:srgbClr val="172B3A"/>
@@ -21849,6 +22948,7 @@
               </a:defRPr>
             </a:lvl8pPr>
             <a:lvl9pPr>
+              <a:buNone/>
               <a:defRPr sz="2100">
                 <a:solidFill>
                   <a:srgbClr val="172B3A"/>
@@ -21861,6 +22961,7 @@
           </a:lstStyle>
           <a:p xmlns:a="http://schemas.openxmlformats.org/drawingml/2006/main">
             <a:pPr>
+              <a:buNone/>
               <a:defRPr sz="2100">
                 <a:solidFill>
                   <a:srgbClr val="172B3A"/>
@@ -21889,6 +22990,7 @@
           </a:p>
           <a:p xmlns:a="http://schemas.openxmlformats.org/drawingml/2006/main">
             <a:pPr>
+              <a:buNone/>
               <a:defRPr sz="2100">
                 <a:solidFill>
                   <a:srgbClr val="172B3A"/>
@@ -21917,6 +23019,7 @@
           </a:p>
           <a:p xmlns:a="http://schemas.openxmlformats.org/drawingml/2006/main">
             <a:pPr>
+              <a:buNone/>
               <a:defRPr sz="2100">
                 <a:solidFill>
                   <a:srgbClr val="172B3A"/>
@@ -22010,6 +23113,7 @@
               </a:defRPr>
             </a:defPPr>
             <a:lvl1pPr>
+              <a:buNone/>
               <a:defRPr sz="2925">
                 <a:solidFill>
                   <a:srgbClr val="172B3A"/>
@@ -22020,6 +23124,7 @@
               </a:defRPr>
             </a:lvl1pPr>
             <a:lvl2pPr>
+              <a:buNone/>
               <a:defRPr sz="2925">
                 <a:solidFill>
                   <a:srgbClr val="172B3A"/>
@@ -22030,6 +23135,7 @@
               </a:defRPr>
             </a:lvl2pPr>
             <a:lvl3pPr>
+              <a:buNone/>
               <a:defRPr sz="2925">
                 <a:solidFill>
                   <a:srgbClr val="172B3A"/>
@@ -22040,6 +23146,7 @@
               </a:defRPr>
             </a:lvl3pPr>
             <a:lvl4pPr>
+              <a:buNone/>
               <a:defRPr sz="2925">
                 <a:solidFill>
                   <a:srgbClr val="172B3A"/>
@@ -22050,6 +23157,7 @@
               </a:defRPr>
             </a:lvl4pPr>
             <a:lvl5pPr>
+              <a:buNone/>
               <a:defRPr sz="2925">
                 <a:solidFill>
                   <a:srgbClr val="172B3A"/>
@@ -22060,6 +23168,7 @@
               </a:defRPr>
             </a:lvl5pPr>
             <a:lvl6pPr>
+              <a:buNone/>
               <a:defRPr sz="2925">
                 <a:solidFill>
                   <a:srgbClr val="172B3A"/>
@@ -22070,6 +23179,7 @@
               </a:defRPr>
             </a:lvl6pPr>
             <a:lvl7pPr>
+              <a:buNone/>
               <a:defRPr sz="2925">
                 <a:solidFill>
                   <a:srgbClr val="172B3A"/>
@@ -22080,6 +23190,7 @@
               </a:defRPr>
             </a:lvl7pPr>
             <a:lvl8pPr>
+              <a:buNone/>
               <a:defRPr sz="2925">
                 <a:solidFill>
                   <a:srgbClr val="172B3A"/>
@@ -22090,6 +23201,7 @@
               </a:defRPr>
             </a:lvl8pPr>
             <a:lvl9pPr>
+              <a:buNone/>
               <a:defRPr sz="2925">
                 <a:solidFill>
                   <a:srgbClr val="172B3A"/>
@@ -22102,6 +23214,7 @@
           </a:lstStyle>
           <a:p xmlns:a="http://schemas.openxmlformats.org/drawingml/2006/main">
             <a:pPr>
+              <a:buNone/>
               <a:defRPr sz="2925">
                 <a:solidFill>
                   <a:srgbClr val="172B3A"/>
@@ -22166,6 +23279,7 @@
               </a:defRPr>
             </a:defPPr>
             <a:lvl1pPr>
+              <a:buNone/>
               <a:defRPr sz="1200">
                 <a:solidFill>
                   <a:srgbClr val="687985"/>
@@ -22176,6 +23290,7 @@
               </a:defRPr>
             </a:lvl1pPr>
             <a:lvl2pPr>
+              <a:buNone/>
               <a:defRPr sz="1200">
                 <a:solidFill>
                   <a:srgbClr val="687985"/>
@@ -22186,6 +23301,7 @@
               </a:defRPr>
             </a:lvl2pPr>
             <a:lvl3pPr>
+              <a:buNone/>
               <a:defRPr sz="1200">
                 <a:solidFill>
                   <a:srgbClr val="687985"/>
@@ -22196,6 +23312,7 @@
               </a:defRPr>
             </a:lvl3pPr>
             <a:lvl4pPr>
+              <a:buNone/>
               <a:defRPr sz="1200">
                 <a:solidFill>
                   <a:srgbClr val="687985"/>
@@ -22206,6 +23323,7 @@
               </a:defRPr>
             </a:lvl4pPr>
             <a:lvl5pPr>
+              <a:buNone/>
               <a:defRPr sz="1200">
                 <a:solidFill>
                   <a:srgbClr val="687985"/>
@@ -22216,6 +23334,7 @@
               </a:defRPr>
             </a:lvl5pPr>
             <a:lvl6pPr>
+              <a:buNone/>
               <a:defRPr sz="1200">
                 <a:solidFill>
                   <a:srgbClr val="687985"/>
@@ -22226,6 +23345,7 @@
               </a:defRPr>
             </a:lvl6pPr>
             <a:lvl7pPr>
+              <a:buNone/>
               <a:defRPr sz="1200">
                 <a:solidFill>
                   <a:srgbClr val="687985"/>
@@ -22236,6 +23356,7 @@
               </a:defRPr>
             </a:lvl7pPr>
             <a:lvl8pPr>
+              <a:buNone/>
               <a:defRPr sz="1200">
                 <a:solidFill>
                   <a:srgbClr val="687985"/>
@@ -22246,6 +23367,7 @@
               </a:defRPr>
             </a:lvl8pPr>
             <a:lvl9pPr>
+              <a:buNone/>
               <a:defRPr sz="1200">
                 <a:solidFill>
                   <a:srgbClr val="687985"/>
@@ -22258,6 +23380,7 @@
           </a:lstStyle>
           <a:p xmlns:a="http://schemas.openxmlformats.org/drawingml/2006/main">
             <a:pPr>
+              <a:buNone/>
               <a:defRPr sz="1200">
                 <a:solidFill>
                   <a:srgbClr val="687985"/>
@@ -22322,6 +23445,7 @@
               </a:defRPr>
             </a:defPPr>
             <a:lvl1pPr>
+              <a:buNone/>
               <a:defRPr sz="1200">
                 <a:solidFill>
                   <a:srgbClr val="172B3A"/>
@@ -22332,6 +23456,7 @@
               </a:defRPr>
             </a:lvl1pPr>
             <a:lvl2pPr>
+              <a:buNone/>
               <a:defRPr sz="1200">
                 <a:solidFill>
                   <a:srgbClr val="172B3A"/>
@@ -22342,6 +23467,7 @@
               </a:defRPr>
             </a:lvl2pPr>
             <a:lvl3pPr>
+              <a:buNone/>
               <a:defRPr sz="1200">
                 <a:solidFill>
                   <a:srgbClr val="172B3A"/>
@@ -22352,6 +23478,7 @@
               </a:defRPr>
             </a:lvl3pPr>
             <a:lvl4pPr>
+              <a:buNone/>
               <a:defRPr sz="1200">
                 <a:solidFill>
                   <a:srgbClr val="172B3A"/>
@@ -22362,6 +23489,7 @@
               </a:defRPr>
             </a:lvl4pPr>
             <a:lvl5pPr>
+              <a:buNone/>
               <a:defRPr sz="1200">
                 <a:solidFill>
                   <a:srgbClr val="172B3A"/>
@@ -22372,6 +23500,7 @@
               </a:defRPr>
             </a:lvl5pPr>
             <a:lvl6pPr>
+              <a:buNone/>
               <a:defRPr sz="1200">
                 <a:solidFill>
                   <a:srgbClr val="172B3A"/>
@@ -22382,6 +23511,7 @@
               </a:defRPr>
             </a:lvl6pPr>
             <a:lvl7pPr>
+              <a:buNone/>
               <a:defRPr sz="1200">
                 <a:solidFill>
                   <a:srgbClr val="172B3A"/>
@@ -22392,6 +23522,7 @@
               </a:defRPr>
             </a:lvl7pPr>
             <a:lvl8pPr>
+              <a:buNone/>
               <a:defRPr sz="1200">
                 <a:solidFill>
                   <a:srgbClr val="172B3A"/>
@@ -22402,6 +23533,7 @@
               </a:defRPr>
             </a:lvl8pPr>
             <a:lvl9pPr>
+              <a:buNone/>
               <a:defRPr sz="1200">
                 <a:solidFill>
                   <a:srgbClr val="172B3A"/>
@@ -22414,6 +23546,7 @@
           </a:lstStyle>
           <a:p xmlns:a="http://schemas.openxmlformats.org/drawingml/2006/main">
             <a:pPr>
+              <a:buNone/>
               <a:defRPr sz="1200">
                 <a:solidFill>
                   <a:srgbClr val="172B3A"/>
@@ -22478,6 +23611,7 @@
               </a:defRPr>
             </a:defPPr>
             <a:lvl1pPr>
+              <a:buNone/>
               <a:defRPr sz="2325">
                 <a:solidFill>
                   <a:srgbClr val="176B87"/>
@@ -22488,6 +23622,7 @@
               </a:defRPr>
             </a:lvl1pPr>
             <a:lvl2pPr>
+              <a:buNone/>
               <a:defRPr sz="2325">
                 <a:solidFill>
                   <a:srgbClr val="176B87"/>
@@ -22498,6 +23633,7 @@
               </a:defRPr>
             </a:lvl2pPr>
             <a:lvl3pPr>
+              <a:buNone/>
               <a:defRPr sz="2325">
                 <a:solidFill>
                   <a:srgbClr val="176B87"/>
@@ -22508,6 +23644,7 @@
               </a:defRPr>
             </a:lvl3pPr>
             <a:lvl4pPr>
+              <a:buNone/>
               <a:defRPr sz="2325">
                 <a:solidFill>
                   <a:srgbClr val="176B87"/>
@@ -22518,6 +23655,7 @@
               </a:defRPr>
             </a:lvl4pPr>
             <a:lvl5pPr>
+              <a:buNone/>
               <a:defRPr sz="2325">
                 <a:solidFill>
                   <a:srgbClr val="176B87"/>
@@ -22528,6 +23666,7 @@
               </a:defRPr>
             </a:lvl5pPr>
             <a:lvl6pPr>
+              <a:buNone/>
               <a:defRPr sz="2325">
                 <a:solidFill>
                   <a:srgbClr val="176B87"/>
@@ -22538,6 +23677,7 @@
               </a:defRPr>
             </a:lvl6pPr>
             <a:lvl7pPr>
+              <a:buNone/>
               <a:defRPr sz="2325">
                 <a:solidFill>
                   <a:srgbClr val="176B87"/>
@@ -22548,6 +23688,7 @@
               </a:defRPr>
             </a:lvl7pPr>
             <a:lvl8pPr>
+              <a:buNone/>
               <a:defRPr sz="2325">
                 <a:solidFill>
                   <a:srgbClr val="176B87"/>
@@ -22558,6 +23699,7 @@
               </a:defRPr>
             </a:lvl8pPr>
             <a:lvl9pPr>
+              <a:buNone/>
               <a:defRPr sz="2325">
                 <a:solidFill>
                   <a:srgbClr val="176B87"/>
@@ -22570,6 +23712,7 @@
           </a:lstStyle>
           <a:p xmlns:a="http://schemas.openxmlformats.org/drawingml/2006/main">
             <a:pPr>
+              <a:buNone/>
               <a:defRPr sz="2325">
                 <a:solidFill>
                   <a:srgbClr val="176B87"/>
@@ -22634,6 +23777,7 @@
               </a:defRPr>
             </a:defPPr>
             <a:lvl1pPr>
+              <a:buNone/>
               <a:defRPr sz="2100">
                 <a:solidFill>
                   <a:srgbClr val="172B3A"/>
@@ -22644,6 +23788,7 @@
               </a:defRPr>
             </a:lvl1pPr>
             <a:lvl2pPr>
+              <a:buNone/>
               <a:defRPr sz="2100">
                 <a:solidFill>
                   <a:srgbClr val="172B3A"/>
@@ -22654,6 +23799,7 @@
               </a:defRPr>
             </a:lvl2pPr>
             <a:lvl3pPr>
+              <a:buNone/>
               <a:defRPr sz="2100">
                 <a:solidFill>
                   <a:srgbClr val="172B3A"/>
@@ -22664,6 +23810,7 @@
               </a:defRPr>
             </a:lvl3pPr>
             <a:lvl4pPr>
+              <a:buNone/>
               <a:defRPr sz="2100">
                 <a:solidFill>
                   <a:srgbClr val="172B3A"/>
@@ -22674,6 +23821,7 @@
               </a:defRPr>
             </a:lvl4pPr>
             <a:lvl5pPr>
+              <a:buNone/>
               <a:defRPr sz="2100">
                 <a:solidFill>
                   <a:srgbClr val="172B3A"/>
@@ -22684,6 +23832,7 @@
               </a:defRPr>
             </a:lvl5pPr>
             <a:lvl6pPr>
+              <a:buNone/>
               <a:defRPr sz="2100">
                 <a:solidFill>
                   <a:srgbClr val="172B3A"/>
@@ -22694,6 +23843,7 @@
               </a:defRPr>
             </a:lvl6pPr>
             <a:lvl7pPr>
+              <a:buNone/>
               <a:defRPr sz="2100">
                 <a:solidFill>
                   <a:srgbClr val="172B3A"/>
@@ -22704,6 +23854,7 @@
               </a:defRPr>
             </a:lvl7pPr>
             <a:lvl8pPr>
+              <a:buNone/>
               <a:defRPr sz="2100">
                 <a:solidFill>
                   <a:srgbClr val="172B3A"/>
@@ -22714,6 +23865,7 @@
               </a:defRPr>
             </a:lvl8pPr>
             <a:lvl9pPr>
+              <a:buNone/>
               <a:defRPr sz="2100">
                 <a:solidFill>
                   <a:srgbClr val="172B3A"/>
@@ -22726,6 +23878,7 @@
           </a:lstStyle>
           <a:p xmlns:a="http://schemas.openxmlformats.org/drawingml/2006/main">
             <a:pPr>
+              <a:buNone/>
               <a:defRPr sz="2100">
                 <a:solidFill>
                   <a:srgbClr val="172B3A"/>
@@ -22790,6 +23943,7 @@
               </a:defRPr>
             </a:defPPr>
             <a:lvl1pPr>
+              <a:buNone/>
               <a:defRPr sz="2325">
                 <a:solidFill>
                   <a:srgbClr val="176B87"/>
@@ -22800,6 +23954,7 @@
               </a:defRPr>
             </a:lvl1pPr>
             <a:lvl2pPr>
+              <a:buNone/>
               <a:defRPr sz="2325">
                 <a:solidFill>
                   <a:srgbClr val="176B87"/>
@@ -22810,6 +23965,7 @@
               </a:defRPr>
             </a:lvl2pPr>
             <a:lvl3pPr>
+              <a:buNone/>
               <a:defRPr sz="2325">
                 <a:solidFill>
                   <a:srgbClr val="176B87"/>
@@ -22820,6 +23976,7 @@
               </a:defRPr>
             </a:lvl3pPr>
             <a:lvl4pPr>
+              <a:buNone/>
               <a:defRPr sz="2325">
                 <a:solidFill>
                   <a:srgbClr val="176B87"/>
@@ -22830,6 +23987,7 @@
               </a:defRPr>
             </a:lvl4pPr>
             <a:lvl5pPr>
+              <a:buNone/>
               <a:defRPr sz="2325">
                 <a:solidFill>
                   <a:srgbClr val="176B87"/>
@@ -22840,6 +23998,7 @@
               </a:defRPr>
             </a:lvl5pPr>
             <a:lvl6pPr>
+              <a:buNone/>
               <a:defRPr sz="2325">
                 <a:solidFill>
                   <a:srgbClr val="176B87"/>
@@ -22850,6 +24009,7 @@
               </a:defRPr>
             </a:lvl6pPr>
             <a:lvl7pPr>
+              <a:buNone/>
               <a:defRPr sz="2325">
                 <a:solidFill>
                   <a:srgbClr val="176B87"/>
@@ -22860,6 +24020,7 @@
               </a:defRPr>
             </a:lvl7pPr>
             <a:lvl8pPr>
+              <a:buNone/>
               <a:defRPr sz="2325">
                 <a:solidFill>
                   <a:srgbClr val="176B87"/>
@@ -22870,6 +24031,7 @@
               </a:defRPr>
             </a:lvl8pPr>
             <a:lvl9pPr>
+              <a:buNone/>
               <a:defRPr sz="2325">
                 <a:solidFill>
                   <a:srgbClr val="176B87"/>
@@ -22882,6 +24044,7 @@
           </a:lstStyle>
           <a:p xmlns:a="http://schemas.openxmlformats.org/drawingml/2006/main">
             <a:pPr>
+              <a:buNone/>
               <a:defRPr sz="2325">
                 <a:solidFill>
                   <a:srgbClr val="176B87"/>
@@ -22946,6 +24109,7 @@
               </a:defRPr>
             </a:defPPr>
             <a:lvl1pPr>
+              <a:buNone/>
               <a:defRPr sz="2100">
                 <a:solidFill>
                   <a:srgbClr val="172B3A"/>
@@ -22956,6 +24120,7 @@
               </a:defRPr>
             </a:lvl1pPr>
             <a:lvl2pPr>
+              <a:buNone/>
               <a:defRPr sz="2100">
                 <a:solidFill>
                   <a:srgbClr val="172B3A"/>
@@ -22966,6 +24131,7 @@
               </a:defRPr>
             </a:lvl2pPr>
             <a:lvl3pPr>
+              <a:buNone/>
               <a:defRPr sz="2100">
                 <a:solidFill>
                   <a:srgbClr val="172B3A"/>
@@ -22976,6 +24142,7 @@
               </a:defRPr>
             </a:lvl3pPr>
             <a:lvl4pPr>
+              <a:buNone/>
               <a:defRPr sz="2100">
                 <a:solidFill>
                   <a:srgbClr val="172B3A"/>
@@ -22986,6 +24153,7 @@
               </a:defRPr>
             </a:lvl4pPr>
             <a:lvl5pPr>
+              <a:buNone/>
               <a:defRPr sz="2100">
                 <a:solidFill>
                   <a:srgbClr val="172B3A"/>
@@ -22996,6 +24164,7 @@
               </a:defRPr>
             </a:lvl5pPr>
             <a:lvl6pPr>
+              <a:buNone/>
               <a:defRPr sz="2100">
                 <a:solidFill>
                   <a:srgbClr val="172B3A"/>
@@ -23006,6 +24175,7 @@
               </a:defRPr>
             </a:lvl6pPr>
             <a:lvl7pPr>
+              <a:buNone/>
               <a:defRPr sz="2100">
                 <a:solidFill>
                   <a:srgbClr val="172B3A"/>
@@ -23016,6 +24186,7 @@
               </a:defRPr>
             </a:lvl7pPr>
             <a:lvl8pPr>
+              <a:buNone/>
               <a:defRPr sz="2100">
                 <a:solidFill>
                   <a:srgbClr val="172B3A"/>
@@ -23026,6 +24197,7 @@
               </a:defRPr>
             </a:lvl8pPr>
             <a:lvl9pPr>
+              <a:buNone/>
               <a:defRPr sz="2100">
                 <a:solidFill>
                   <a:srgbClr val="172B3A"/>
@@ -23038,6 +24210,7 @@
           </a:lstStyle>
           <a:p xmlns:a="http://schemas.openxmlformats.org/drawingml/2006/main">
             <a:pPr>
+              <a:buNone/>
               <a:defRPr sz="2100">
                 <a:solidFill>
                   <a:srgbClr val="172B3A"/>
@@ -23102,6 +24275,7 @@
               </a:defRPr>
             </a:defPPr>
             <a:lvl1pPr>
+              <a:buNone/>
               <a:defRPr sz="2325">
                 <a:solidFill>
                   <a:srgbClr val="176B87"/>
@@ -23112,6 +24286,7 @@
               </a:defRPr>
             </a:lvl1pPr>
             <a:lvl2pPr>
+              <a:buNone/>
               <a:defRPr sz="2325">
                 <a:solidFill>
                   <a:srgbClr val="176B87"/>
@@ -23122,6 +24297,7 @@
               </a:defRPr>
             </a:lvl2pPr>
             <a:lvl3pPr>
+              <a:buNone/>
               <a:defRPr sz="2325">
                 <a:solidFill>
                   <a:srgbClr val="176B87"/>
@@ -23132,6 +24308,7 @@
               </a:defRPr>
             </a:lvl3pPr>
             <a:lvl4pPr>
+              <a:buNone/>
               <a:defRPr sz="2325">
                 <a:solidFill>
                   <a:srgbClr val="176B87"/>
@@ -23142,6 +24319,7 @@
               </a:defRPr>
             </a:lvl4pPr>
             <a:lvl5pPr>
+              <a:buNone/>
               <a:defRPr sz="2325">
                 <a:solidFill>
                   <a:srgbClr val="176B87"/>
@@ -23152,6 +24330,7 @@
               </a:defRPr>
             </a:lvl5pPr>
             <a:lvl6pPr>
+              <a:buNone/>
               <a:defRPr sz="2325">
                 <a:solidFill>
                   <a:srgbClr val="176B87"/>
@@ -23162,6 +24341,7 @@
               </a:defRPr>
             </a:lvl6pPr>
             <a:lvl7pPr>
+              <a:buNone/>
               <a:defRPr sz="2325">
                 <a:solidFill>
                   <a:srgbClr val="176B87"/>
@@ -23172,6 +24352,7 @@
               </a:defRPr>
             </a:lvl7pPr>
             <a:lvl8pPr>
+              <a:buNone/>
               <a:defRPr sz="2325">
                 <a:solidFill>
                   <a:srgbClr val="176B87"/>
@@ -23182,6 +24363,7 @@
               </a:defRPr>
             </a:lvl8pPr>
             <a:lvl9pPr>
+              <a:buNone/>
               <a:defRPr sz="2325">
                 <a:solidFill>
                   <a:srgbClr val="176B87"/>
@@ -23194,6 +24376,7 @@
           </a:lstStyle>
           <a:p xmlns:a="http://schemas.openxmlformats.org/drawingml/2006/main">
             <a:pPr>
+              <a:buNone/>
               <a:defRPr sz="2325">
                 <a:solidFill>
                   <a:srgbClr val="176B87"/>
@@ -23258,6 +24441,7 @@
               </a:defRPr>
             </a:defPPr>
             <a:lvl1pPr>
+              <a:buNone/>
               <a:defRPr sz="2100">
                 <a:solidFill>
                   <a:srgbClr val="172B3A"/>
@@ -23268,6 +24452,7 @@
               </a:defRPr>
             </a:lvl1pPr>
             <a:lvl2pPr>
+              <a:buNone/>
               <a:defRPr sz="2100">
                 <a:solidFill>
                   <a:srgbClr val="172B3A"/>
@@ -23278,6 +24463,7 @@
               </a:defRPr>
             </a:lvl2pPr>
             <a:lvl3pPr>
+              <a:buNone/>
               <a:defRPr sz="2100">
                 <a:solidFill>
                   <a:srgbClr val="172B3A"/>
@@ -23288,6 +24474,7 @@
               </a:defRPr>
             </a:lvl3pPr>
             <a:lvl4pPr>
+              <a:buNone/>
               <a:defRPr sz="2100">
                 <a:solidFill>
                   <a:srgbClr val="172B3A"/>
@@ -23298,6 +24485,7 @@
               </a:defRPr>
             </a:lvl4pPr>
             <a:lvl5pPr>
+              <a:buNone/>
               <a:defRPr sz="2100">
                 <a:solidFill>
                   <a:srgbClr val="172B3A"/>
@@ -23308,6 +24496,7 @@
               </a:defRPr>
             </a:lvl5pPr>
             <a:lvl6pPr>
+              <a:buNone/>
               <a:defRPr sz="2100">
                 <a:solidFill>
                   <a:srgbClr val="172B3A"/>
@@ -23318,6 +24507,7 @@
               </a:defRPr>
             </a:lvl6pPr>
             <a:lvl7pPr>
+              <a:buNone/>
               <a:defRPr sz="2100">
                 <a:solidFill>
                   <a:srgbClr val="172B3A"/>
@@ -23328,6 +24518,7 @@
               </a:defRPr>
             </a:lvl7pPr>
             <a:lvl8pPr>
+              <a:buNone/>
               <a:defRPr sz="2100">
                 <a:solidFill>
                   <a:srgbClr val="172B3A"/>
@@ -23338,6 +24529,7 @@
               </a:defRPr>
             </a:lvl8pPr>
             <a:lvl9pPr>
+              <a:buNone/>
               <a:defRPr sz="2100">
                 <a:solidFill>
                   <a:srgbClr val="172B3A"/>
@@ -23350,6 +24542,7 @@
           </a:lstStyle>
           <a:p xmlns:a="http://schemas.openxmlformats.org/drawingml/2006/main">
             <a:pPr>
+              <a:buNone/>
               <a:defRPr sz="2100">
                 <a:solidFill>
                   <a:srgbClr val="172B3A"/>
@@ -23373,6 +24566,7 @@
           </a:p>
           <a:p xmlns:a="http://schemas.openxmlformats.org/drawingml/2006/main">
             <a:pPr>
+              <a:buNone/>
               <a:defRPr sz="2100">
                 <a:solidFill>
                   <a:srgbClr val="172B3A"/>
@@ -23466,6 +24660,7 @@
               </a:defRPr>
             </a:defPPr>
             <a:lvl1pPr>
+              <a:buNone/>
               <a:defRPr sz="2925">
                 <a:solidFill>
                   <a:srgbClr val="172B3A"/>
@@ -23476,6 +24671,7 @@
               </a:defRPr>
             </a:lvl1pPr>
             <a:lvl2pPr>
+              <a:buNone/>
               <a:defRPr sz="2925">
                 <a:solidFill>
                   <a:srgbClr val="172B3A"/>
@@ -23486,6 +24682,7 @@
               </a:defRPr>
             </a:lvl2pPr>
             <a:lvl3pPr>
+              <a:buNone/>
               <a:defRPr sz="2925">
                 <a:solidFill>
                   <a:srgbClr val="172B3A"/>
@@ -23496,6 +24693,7 @@
               </a:defRPr>
             </a:lvl3pPr>
             <a:lvl4pPr>
+              <a:buNone/>
               <a:defRPr sz="2925">
                 <a:solidFill>
                   <a:srgbClr val="172B3A"/>
@@ -23506,6 +24704,7 @@
               </a:defRPr>
             </a:lvl4pPr>
             <a:lvl5pPr>
+              <a:buNone/>
               <a:defRPr sz="2925">
                 <a:solidFill>
                   <a:srgbClr val="172B3A"/>
@@ -23516,6 +24715,7 @@
               </a:defRPr>
             </a:lvl5pPr>
             <a:lvl6pPr>
+              <a:buNone/>
               <a:defRPr sz="2925">
                 <a:solidFill>
                   <a:srgbClr val="172B3A"/>
@@ -23526,6 +24726,7 @@
               </a:defRPr>
             </a:lvl6pPr>
             <a:lvl7pPr>
+              <a:buNone/>
               <a:defRPr sz="2925">
                 <a:solidFill>
                   <a:srgbClr val="172B3A"/>
@@ -23536,6 +24737,7 @@
               </a:defRPr>
             </a:lvl7pPr>
             <a:lvl8pPr>
+              <a:buNone/>
               <a:defRPr sz="2925">
                 <a:solidFill>
                   <a:srgbClr val="172B3A"/>
@@ -23546,6 +24748,7 @@
               </a:defRPr>
             </a:lvl8pPr>
             <a:lvl9pPr>
+              <a:buNone/>
               <a:defRPr sz="2925">
                 <a:solidFill>
                   <a:srgbClr val="172B3A"/>
@@ -23558,6 +24761,7 @@
           </a:lstStyle>
           <a:p xmlns:a="http://schemas.openxmlformats.org/drawingml/2006/main">
             <a:pPr>
+              <a:buNone/>
               <a:defRPr sz="2925">
                 <a:solidFill>
                   <a:srgbClr val="172B3A"/>
@@ -23622,6 +24826,7 @@
               </a:defRPr>
             </a:defPPr>
             <a:lvl1pPr>
+              <a:buNone/>
               <a:defRPr sz="1200">
                 <a:solidFill>
                   <a:srgbClr val="687985"/>
@@ -23632,6 +24837,7 @@
               </a:defRPr>
             </a:lvl1pPr>
             <a:lvl2pPr>
+              <a:buNone/>
               <a:defRPr sz="1200">
                 <a:solidFill>
                   <a:srgbClr val="687985"/>
@@ -23642,6 +24848,7 @@
               </a:defRPr>
             </a:lvl2pPr>
             <a:lvl3pPr>
+              <a:buNone/>
               <a:defRPr sz="1200">
                 <a:solidFill>
                   <a:srgbClr val="687985"/>
@@ -23652,6 +24859,7 @@
               </a:defRPr>
             </a:lvl3pPr>
             <a:lvl4pPr>
+              <a:buNone/>
               <a:defRPr sz="1200">
                 <a:solidFill>
                   <a:srgbClr val="687985"/>
@@ -23662,6 +24870,7 @@
               </a:defRPr>
             </a:lvl4pPr>
             <a:lvl5pPr>
+              <a:buNone/>
               <a:defRPr sz="1200">
                 <a:solidFill>
                   <a:srgbClr val="687985"/>
@@ -23672,6 +24881,7 @@
               </a:defRPr>
             </a:lvl5pPr>
             <a:lvl6pPr>
+              <a:buNone/>
               <a:defRPr sz="1200">
                 <a:solidFill>
                   <a:srgbClr val="687985"/>
@@ -23682,6 +24892,7 @@
               </a:defRPr>
             </a:lvl6pPr>
             <a:lvl7pPr>
+              <a:buNone/>
               <a:defRPr sz="1200">
                 <a:solidFill>
                   <a:srgbClr val="687985"/>
@@ -23692,6 +24903,7 @@
               </a:defRPr>
             </a:lvl7pPr>
             <a:lvl8pPr>
+              <a:buNone/>
               <a:defRPr sz="1200">
                 <a:solidFill>
                   <a:srgbClr val="687985"/>
@@ -23702,6 +24914,7 @@
               </a:defRPr>
             </a:lvl8pPr>
             <a:lvl9pPr>
+              <a:buNone/>
               <a:defRPr sz="1200">
                 <a:solidFill>
                   <a:srgbClr val="687985"/>
@@ -23714,6 +24927,7 @@
           </a:lstStyle>
           <a:p xmlns:a="http://schemas.openxmlformats.org/drawingml/2006/main">
             <a:pPr>
+              <a:buNone/>
               <a:defRPr sz="1200">
                 <a:solidFill>
                   <a:srgbClr val="687985"/>
@@ -23778,6 +24992,7 @@
               </a:defRPr>
             </a:defPPr>
             <a:lvl1pPr>
+              <a:buNone/>
               <a:defRPr sz="1200">
                 <a:solidFill>
                   <a:srgbClr val="172B3A"/>
@@ -23788,6 +25003,7 @@
               </a:defRPr>
             </a:lvl1pPr>
             <a:lvl2pPr>
+              <a:buNone/>
               <a:defRPr sz="1200">
                 <a:solidFill>
                   <a:srgbClr val="172B3A"/>
@@ -23798,6 +25014,7 @@
               </a:defRPr>
             </a:lvl2pPr>
             <a:lvl3pPr>
+              <a:buNone/>
               <a:defRPr sz="1200">
                 <a:solidFill>
                   <a:srgbClr val="172B3A"/>
@@ -23808,6 +25025,7 @@
               </a:defRPr>
             </a:lvl3pPr>
             <a:lvl4pPr>
+              <a:buNone/>
               <a:defRPr sz="1200">
                 <a:solidFill>
                   <a:srgbClr val="172B3A"/>
@@ -23818,6 +25036,7 @@
               </a:defRPr>
             </a:lvl4pPr>
             <a:lvl5pPr>
+              <a:buNone/>
               <a:defRPr sz="1200">
                 <a:solidFill>
                   <a:srgbClr val="172B3A"/>
@@ -23828,6 +25047,7 @@
               </a:defRPr>
             </a:lvl5pPr>
             <a:lvl6pPr>
+              <a:buNone/>
               <a:defRPr sz="1200">
                 <a:solidFill>
                   <a:srgbClr val="172B3A"/>
@@ -23838,6 +25058,7 @@
               </a:defRPr>
             </a:lvl6pPr>
             <a:lvl7pPr>
+              <a:buNone/>
               <a:defRPr sz="1200">
                 <a:solidFill>
                   <a:srgbClr val="172B3A"/>
@@ -23848,6 +25069,7 @@
               </a:defRPr>
             </a:lvl7pPr>
             <a:lvl8pPr>
+              <a:buNone/>
               <a:defRPr sz="1200">
                 <a:solidFill>
                   <a:srgbClr val="172B3A"/>
@@ -23858,6 +25080,7 @@
               </a:defRPr>
             </a:lvl8pPr>
             <a:lvl9pPr>
+              <a:buNone/>
               <a:defRPr sz="1200">
                 <a:solidFill>
                   <a:srgbClr val="172B3A"/>
@@ -23870,6 +25093,7 @@
           </a:lstStyle>
           <a:p xmlns:a="http://schemas.openxmlformats.org/drawingml/2006/main">
             <a:pPr>
+              <a:buNone/>
               <a:defRPr sz="1200">
                 <a:solidFill>
                   <a:srgbClr val="172B3A"/>
@@ -23898,7 +25122,7 @@
           <p:cNvPr id="4" name="Chart">
             <a:extLst xmlns:a="http://schemas.openxmlformats.org/drawingml/2006/main">
               <a:ext uri="{FF2B5EF4-FFF2-40B4-BE49-F238E27FC236}">
-                <a16:creationId xmlns:a16="http://schemas.microsoft.com/office/drawing/2014/main" id="{9E82023A-6BB0-4672-98FC-9BA19F064029}"/>
+                <a16:creationId xmlns:a16="http://schemas.microsoft.com/office/drawing/2014/main" id="{9FAB19E9-88AB-4534-9F27-FB94E0A7CE8E}"/>
               </a:ext>
             </a:extLst>
           </p:cNvPr>
@@ -23911,7 +25135,7 @@
         </p:xfrm>
         <a:graphic xmlns:a="http://schemas.openxmlformats.org/drawingml/2006/main">
           <a:graphicData uri="http://schemas.openxmlformats.org/drawingml/2006/chart">
-            <c:chart xmlns:r="http://schemas.openxmlformats.org/officeDocument/2006/relationships" xmlns:c="http://schemas.openxmlformats.org/drawingml/2006/chart" r:id="R7aa827b5d8fc4bba"/>
+            <c:chart xmlns:r="http://schemas.openxmlformats.org/officeDocument/2006/relationships" xmlns:c="http://schemas.openxmlformats.org/drawingml/2006/chart" r:id="Rc1a0f997664248f9"/>
           </a:graphicData>
         </a:graphic>
       </p:graphicFrame>
@@ -23956,6 +25180,7 @@
               </a:defRPr>
             </a:defPPr>
             <a:lvl1pPr>
+              <a:buNone/>
               <a:defRPr sz="2250">
                 <a:solidFill>
                   <a:srgbClr val="176B87"/>
@@ -23966,6 +25191,7 @@
               </a:defRPr>
             </a:lvl1pPr>
             <a:lvl2pPr>
+              <a:buNone/>
               <a:defRPr sz="2250">
                 <a:solidFill>
                   <a:srgbClr val="176B87"/>
@@ -23976,6 +25202,7 @@
               </a:defRPr>
             </a:lvl2pPr>
             <a:lvl3pPr>
+              <a:buNone/>
               <a:defRPr sz="2250">
                 <a:solidFill>
                   <a:srgbClr val="176B87"/>
@@ -23986,6 +25213,7 @@
               </a:defRPr>
             </a:lvl3pPr>
             <a:lvl4pPr>
+              <a:buNone/>
               <a:defRPr sz="2250">
                 <a:solidFill>
                   <a:srgbClr val="176B87"/>
@@ -23996,6 +25224,7 @@
               </a:defRPr>
             </a:lvl4pPr>
             <a:lvl5pPr>
+              <a:buNone/>
               <a:defRPr sz="2250">
                 <a:solidFill>
                   <a:srgbClr val="176B87"/>
@@ -24006,6 +25235,7 @@
               </a:defRPr>
             </a:lvl5pPr>
             <a:lvl6pPr>
+              <a:buNone/>
               <a:defRPr sz="2250">
                 <a:solidFill>
                   <a:srgbClr val="176B87"/>
@@ -24016,6 +25246,7 @@
               </a:defRPr>
             </a:lvl6pPr>
             <a:lvl7pPr>
+              <a:buNone/>
               <a:defRPr sz="2250">
                 <a:solidFill>
                   <a:srgbClr val="176B87"/>
@@ -24026,6 +25257,7 @@
               </a:defRPr>
             </a:lvl7pPr>
             <a:lvl8pPr>
+              <a:buNone/>
               <a:defRPr sz="2250">
                 <a:solidFill>
                   <a:srgbClr val="176B87"/>
@@ -24036,6 +25268,7 @@
               </a:defRPr>
             </a:lvl8pPr>
             <a:lvl9pPr>
+              <a:buNone/>
               <a:defRPr sz="2250">
                 <a:solidFill>
                   <a:srgbClr val="176B87"/>
@@ -24048,6 +25281,7 @@
           </a:lstStyle>
           <a:p xmlns:a="http://schemas.openxmlformats.org/drawingml/2006/main">
             <a:pPr>
+              <a:buNone/>
               <a:defRPr sz="2250">
                 <a:solidFill>
                   <a:srgbClr val="176B87"/>
@@ -24112,6 +25346,7 @@
               </a:defRPr>
             </a:defPPr>
             <a:lvl1pPr>
+              <a:buNone/>
               <a:defRPr sz="2100">
                 <a:solidFill>
                   <a:srgbClr val="172B3A"/>
@@ -24122,6 +25357,7 @@
               </a:defRPr>
             </a:lvl1pPr>
             <a:lvl2pPr>
+              <a:buNone/>
               <a:defRPr sz="2100">
                 <a:solidFill>
                   <a:srgbClr val="172B3A"/>
@@ -24132,6 +25368,7 @@
               </a:defRPr>
             </a:lvl2pPr>
             <a:lvl3pPr>
+              <a:buNone/>
               <a:defRPr sz="2100">
                 <a:solidFill>
                   <a:srgbClr val="172B3A"/>
@@ -24142,6 +25379,7 @@
               </a:defRPr>
             </a:lvl3pPr>
             <a:lvl4pPr>
+              <a:buNone/>
               <a:defRPr sz="2100">
                 <a:solidFill>
                   <a:srgbClr val="172B3A"/>
@@ -24152,6 +25390,7 @@
               </a:defRPr>
             </a:lvl4pPr>
             <a:lvl5pPr>
+              <a:buNone/>
               <a:defRPr sz="2100">
                 <a:solidFill>
                   <a:srgbClr val="172B3A"/>
@@ -24162,6 +25401,7 @@
               </a:defRPr>
             </a:lvl5pPr>
             <a:lvl6pPr>
+              <a:buNone/>
               <a:defRPr sz="2100">
                 <a:solidFill>
                   <a:srgbClr val="172B3A"/>
@@ -24172,6 +25412,7 @@
               </a:defRPr>
             </a:lvl6pPr>
             <a:lvl7pPr>
+              <a:buNone/>
               <a:defRPr sz="2100">
                 <a:solidFill>
                   <a:srgbClr val="172B3A"/>
@@ -24182,6 +25423,7 @@
               </a:defRPr>
             </a:lvl7pPr>
             <a:lvl8pPr>
+              <a:buNone/>
               <a:defRPr sz="2100">
                 <a:solidFill>
                   <a:srgbClr val="172B3A"/>
@@ -24192,6 +25434,7 @@
               </a:defRPr>
             </a:lvl8pPr>
             <a:lvl9pPr>
+              <a:buNone/>
               <a:defRPr sz="2100">
                 <a:solidFill>
                   <a:srgbClr val="172B3A"/>
@@ -24204,6 +25447,7 @@
           </a:lstStyle>
           <a:p xmlns:a="http://schemas.openxmlformats.org/drawingml/2006/main">
             <a:pPr>
+              <a:buNone/>
               <a:defRPr sz="2100">
                 <a:solidFill>
                   <a:srgbClr val="172B3A"/>
@@ -24232,6 +25476,7 @@
           </a:p>
           <a:p xmlns:a="http://schemas.openxmlformats.org/drawingml/2006/main">
             <a:pPr>
+              <a:buNone/>
               <a:defRPr sz="2100">
                 <a:solidFill>
                   <a:srgbClr val="172B3A"/>
@@ -24260,6 +25505,7 @@
           </a:p>
           <a:p xmlns:a="http://schemas.openxmlformats.org/drawingml/2006/main">
             <a:pPr>
+              <a:buNone/>
               <a:defRPr sz="2100">
                 <a:solidFill>
                   <a:srgbClr val="172B3A"/>
@@ -24288,6 +25534,7 @@
           </a:p>
           <a:p xmlns:a="http://schemas.openxmlformats.org/drawingml/2006/main">
             <a:pPr>
+              <a:buNone/>
               <a:defRPr sz="2100">
                 <a:solidFill>
                   <a:srgbClr val="172B3A"/>
@@ -24352,6 +25599,7 @@
               </a:defRPr>
             </a:defPPr>
             <a:lvl1pPr>
+              <a:buNone/>
               <a:defRPr sz="1875">
                 <a:solidFill>
                   <a:srgbClr val="172B3A"/>
@@ -24362,6 +25610,7 @@
               </a:defRPr>
             </a:lvl1pPr>
             <a:lvl2pPr>
+              <a:buNone/>
               <a:defRPr sz="1875">
                 <a:solidFill>
                   <a:srgbClr val="172B3A"/>
@@ -24372,6 +25621,7 @@
               </a:defRPr>
             </a:lvl2pPr>
             <a:lvl3pPr>
+              <a:buNone/>
               <a:defRPr sz="1875">
                 <a:solidFill>
                   <a:srgbClr val="172B3A"/>
@@ -24382,6 +25632,7 @@
               </a:defRPr>
             </a:lvl3pPr>
             <a:lvl4pPr>
+              <a:buNone/>
               <a:defRPr sz="1875">
                 <a:solidFill>
                   <a:srgbClr val="172B3A"/>
@@ -24392,6 +25643,7 @@
               </a:defRPr>
             </a:lvl4pPr>
             <a:lvl5pPr>
+              <a:buNone/>
               <a:defRPr sz="1875">
                 <a:solidFill>
                   <a:srgbClr val="172B3A"/>
@@ -24402,6 +25654,7 @@
               </a:defRPr>
             </a:lvl5pPr>
             <a:lvl6pPr>
+              <a:buNone/>
               <a:defRPr sz="1875">
                 <a:solidFill>
                   <a:srgbClr val="172B3A"/>
@@ -24412,6 +25665,7 @@
               </a:defRPr>
             </a:lvl6pPr>
             <a:lvl7pPr>
+              <a:buNone/>
               <a:defRPr sz="1875">
                 <a:solidFill>
                   <a:srgbClr val="172B3A"/>
@@ -24422,6 +25676,7 @@
               </a:defRPr>
             </a:lvl7pPr>
             <a:lvl8pPr>
+              <a:buNone/>
               <a:defRPr sz="1875">
                 <a:solidFill>
                   <a:srgbClr val="172B3A"/>
@@ -24432,6 +25687,7 @@
               </a:defRPr>
             </a:lvl8pPr>
             <a:lvl9pPr>
+              <a:buNone/>
               <a:defRPr sz="1875">
                 <a:solidFill>
                   <a:srgbClr val="172B3A"/>
@@ -24444,6 +25700,7 @@
           </a:lstStyle>
           <a:p xmlns:a="http://schemas.openxmlformats.org/drawingml/2006/main">
             <a:pPr>
+              <a:buNone/>
               <a:defRPr sz="1875">
                 <a:solidFill>
                   <a:srgbClr val="172B3A"/>
@@ -24537,6 +25794,7 @@
               </a:defRPr>
             </a:defPPr>
             <a:lvl1pPr>
+              <a:buNone/>
               <a:defRPr sz="2925">
                 <a:solidFill>
                   <a:srgbClr val="172B3A"/>
@@ -24547,6 +25805,7 @@
               </a:defRPr>
             </a:lvl1pPr>
             <a:lvl2pPr>
+              <a:buNone/>
               <a:defRPr sz="2925">
                 <a:solidFill>
                   <a:srgbClr val="172B3A"/>
@@ -24557,6 +25816,7 @@
               </a:defRPr>
             </a:lvl2pPr>
             <a:lvl3pPr>
+              <a:buNone/>
               <a:defRPr sz="2925">
                 <a:solidFill>
                   <a:srgbClr val="172B3A"/>
@@ -24567,6 +25827,7 @@
               </a:defRPr>
             </a:lvl3pPr>
             <a:lvl4pPr>
+              <a:buNone/>
               <a:defRPr sz="2925">
                 <a:solidFill>
                   <a:srgbClr val="172B3A"/>
@@ -24577,6 +25838,7 @@
               </a:defRPr>
             </a:lvl4pPr>
             <a:lvl5pPr>
+              <a:buNone/>
               <a:defRPr sz="2925">
                 <a:solidFill>
                   <a:srgbClr val="172B3A"/>
@@ -24587,6 +25849,7 @@
               </a:defRPr>
             </a:lvl5pPr>
             <a:lvl6pPr>
+              <a:buNone/>
               <a:defRPr sz="2925">
                 <a:solidFill>
                   <a:srgbClr val="172B3A"/>
@@ -24597,6 +25860,7 @@
               </a:defRPr>
             </a:lvl6pPr>
             <a:lvl7pPr>
+              <a:buNone/>
               <a:defRPr sz="2925">
                 <a:solidFill>
                   <a:srgbClr val="172B3A"/>
@@ -24607,6 +25871,7 @@
               </a:defRPr>
             </a:lvl7pPr>
             <a:lvl8pPr>
+              <a:buNone/>
               <a:defRPr sz="2925">
                 <a:solidFill>
                   <a:srgbClr val="172B3A"/>
@@ -24617,6 +25882,7 @@
               </a:defRPr>
             </a:lvl8pPr>
             <a:lvl9pPr>
+              <a:buNone/>
               <a:defRPr sz="2925">
                 <a:solidFill>
                   <a:srgbClr val="172B3A"/>
@@ -24629,6 +25895,7 @@
           </a:lstStyle>
           <a:p xmlns:a="http://schemas.openxmlformats.org/drawingml/2006/main">
             <a:pPr>
+              <a:buNone/>
               <a:defRPr sz="2925">
                 <a:solidFill>
                   <a:srgbClr val="172B3A"/>
@@ -24693,6 +25960,7 @@
               </a:defRPr>
             </a:defPPr>
             <a:lvl1pPr>
+              <a:buNone/>
               <a:defRPr sz="1200">
                 <a:solidFill>
                   <a:srgbClr val="687985"/>
@@ -24703,6 +25971,7 @@
               </a:defRPr>
             </a:lvl1pPr>
             <a:lvl2pPr>
+              <a:buNone/>
               <a:defRPr sz="1200">
                 <a:solidFill>
                   <a:srgbClr val="687985"/>
@@ -24713,6 +25982,7 @@
               </a:defRPr>
             </a:lvl2pPr>
             <a:lvl3pPr>
+              <a:buNone/>
               <a:defRPr sz="1200">
                 <a:solidFill>
                   <a:srgbClr val="687985"/>
@@ -24723,6 +25993,7 @@
               </a:defRPr>
             </a:lvl3pPr>
             <a:lvl4pPr>
+              <a:buNone/>
               <a:defRPr sz="1200">
                 <a:solidFill>
                   <a:srgbClr val="687985"/>
@@ -24733,6 +26004,7 @@
               </a:defRPr>
             </a:lvl4pPr>
             <a:lvl5pPr>
+              <a:buNone/>
               <a:defRPr sz="1200">
                 <a:solidFill>
                   <a:srgbClr val="687985"/>
@@ -24743,6 +26015,7 @@
               </a:defRPr>
             </a:lvl5pPr>
             <a:lvl6pPr>
+              <a:buNone/>
               <a:defRPr sz="1200">
                 <a:solidFill>
                   <a:srgbClr val="687985"/>
@@ -24753,6 +26026,7 @@
               </a:defRPr>
             </a:lvl6pPr>
             <a:lvl7pPr>
+              <a:buNone/>
               <a:defRPr sz="1200">
                 <a:solidFill>
                   <a:srgbClr val="687985"/>
@@ -24763,6 +26037,7 @@
               </a:defRPr>
             </a:lvl7pPr>
             <a:lvl8pPr>
+              <a:buNone/>
               <a:defRPr sz="1200">
                 <a:solidFill>
                   <a:srgbClr val="687985"/>
@@ -24773,6 +26048,7 @@
               </a:defRPr>
             </a:lvl8pPr>
             <a:lvl9pPr>
+              <a:buNone/>
               <a:defRPr sz="1200">
                 <a:solidFill>
                   <a:srgbClr val="687985"/>
@@ -24785,6 +26061,7 @@
           </a:lstStyle>
           <a:p xmlns:a="http://schemas.openxmlformats.org/drawingml/2006/main">
             <a:pPr>
+              <a:buNone/>
               <a:defRPr sz="1200">
                 <a:solidFill>
                   <a:srgbClr val="687985"/>
@@ -24849,6 +26126,7 @@
               </a:defRPr>
             </a:defPPr>
             <a:lvl1pPr>
+              <a:buNone/>
               <a:defRPr sz="1200">
                 <a:solidFill>
                   <a:srgbClr val="172B3A"/>
@@ -24859,6 +26137,7 @@
               </a:defRPr>
             </a:lvl1pPr>
             <a:lvl2pPr>
+              <a:buNone/>
               <a:defRPr sz="1200">
                 <a:solidFill>
                   <a:srgbClr val="172B3A"/>
@@ -24869,6 +26148,7 @@
               </a:defRPr>
             </a:lvl2pPr>
             <a:lvl3pPr>
+              <a:buNone/>
               <a:defRPr sz="1200">
                 <a:solidFill>
                   <a:srgbClr val="172B3A"/>
@@ -24879,6 +26159,7 @@
               </a:defRPr>
             </a:lvl3pPr>
             <a:lvl4pPr>
+              <a:buNone/>
               <a:defRPr sz="1200">
                 <a:solidFill>
                   <a:srgbClr val="172B3A"/>
@@ -24889,6 +26170,7 @@
               </a:defRPr>
             </a:lvl4pPr>
             <a:lvl5pPr>
+              <a:buNone/>
               <a:defRPr sz="1200">
                 <a:solidFill>
                   <a:srgbClr val="172B3A"/>
@@ -24899,6 +26181,7 @@
               </a:defRPr>
             </a:lvl5pPr>
             <a:lvl6pPr>
+              <a:buNone/>
               <a:defRPr sz="1200">
                 <a:solidFill>
                   <a:srgbClr val="172B3A"/>
@@ -24909,6 +26192,7 @@
               </a:defRPr>
             </a:lvl6pPr>
             <a:lvl7pPr>
+              <a:buNone/>
               <a:defRPr sz="1200">
                 <a:solidFill>
                   <a:srgbClr val="172B3A"/>
@@ -24919,6 +26203,7 @@
               </a:defRPr>
             </a:lvl7pPr>
             <a:lvl8pPr>
+              <a:buNone/>
               <a:defRPr sz="1200">
                 <a:solidFill>
                   <a:srgbClr val="172B3A"/>
@@ -24929,6 +26214,7 @@
               </a:defRPr>
             </a:lvl8pPr>
             <a:lvl9pPr>
+              <a:buNone/>
               <a:defRPr sz="1200">
                 <a:solidFill>
                   <a:srgbClr val="172B3A"/>
@@ -24941,6 +26227,7 @@
           </a:lstStyle>
           <a:p xmlns:a="http://schemas.openxmlformats.org/drawingml/2006/main">
             <a:pPr>
+              <a:buNone/>
               <a:defRPr sz="1200">
                 <a:solidFill>
                   <a:srgbClr val="172B3A"/>
@@ -24969,7 +26256,7 @@
           <p:cNvPr id="4" name="Chart">
             <a:extLst xmlns:a="http://schemas.openxmlformats.org/drawingml/2006/main">
               <a:ext uri="{FF2B5EF4-FFF2-40B4-BE49-F238E27FC236}">
-                <a16:creationId xmlns:a16="http://schemas.microsoft.com/office/drawing/2014/main" id="{7847AD4C-988B-4C1B-B973-EAB2B3482BC7}"/>
+                <a16:creationId xmlns:a16="http://schemas.microsoft.com/office/drawing/2014/main" id="{E553D21A-2F5D-4DC8-8BB8-B57074C39007}"/>
               </a:ext>
             </a:extLst>
           </p:cNvPr>
@@ -24982,7 +26269,7 @@
         </p:xfrm>
         <a:graphic xmlns:a="http://schemas.openxmlformats.org/drawingml/2006/main">
           <a:graphicData uri="http://schemas.openxmlformats.org/drawingml/2006/chart">
-            <c:chart xmlns:r="http://schemas.openxmlformats.org/officeDocument/2006/relationships" xmlns:c="http://schemas.openxmlformats.org/drawingml/2006/chart" r:id="R1cf0a6df318f467e"/>
+            <c:chart xmlns:r="http://schemas.openxmlformats.org/officeDocument/2006/relationships" xmlns:c="http://schemas.openxmlformats.org/drawingml/2006/chart" r:id="R050fb125ea6e47fb"/>
           </a:graphicData>
         </a:graphic>
       </p:graphicFrame>
@@ -25027,6 +26314,7 @@
               </a:defRPr>
             </a:defPPr>
             <a:lvl1pPr>
+              <a:buNone/>
               <a:defRPr sz="1950">
                 <a:solidFill>
                   <a:srgbClr val="172B3A"/>
@@ -25037,6 +26325,7 @@
               </a:defRPr>
             </a:lvl1pPr>
             <a:lvl2pPr>
+              <a:buNone/>
               <a:defRPr sz="1950">
                 <a:solidFill>
                   <a:srgbClr val="172B3A"/>
@@ -25047,6 +26336,7 @@
               </a:defRPr>
             </a:lvl2pPr>
             <a:lvl3pPr>
+              <a:buNone/>
               <a:defRPr sz="1950">
                 <a:solidFill>
                   <a:srgbClr val="172B3A"/>
@@ -25057,6 +26347,7 @@
               </a:defRPr>
             </a:lvl3pPr>
             <a:lvl4pPr>
+              <a:buNone/>
               <a:defRPr sz="1950">
                 <a:solidFill>
                   <a:srgbClr val="172B3A"/>
@@ -25067,6 +26358,7 @@
               </a:defRPr>
             </a:lvl4pPr>
             <a:lvl5pPr>
+              <a:buNone/>
               <a:defRPr sz="1950">
                 <a:solidFill>
                   <a:srgbClr val="172B3A"/>
@@ -25077,6 +26369,7 @@
               </a:defRPr>
             </a:lvl5pPr>
             <a:lvl6pPr>
+              <a:buNone/>
               <a:defRPr sz="1950">
                 <a:solidFill>
                   <a:srgbClr val="172B3A"/>
@@ -25087,6 +26380,7 @@
               </a:defRPr>
             </a:lvl6pPr>
             <a:lvl7pPr>
+              <a:buNone/>
               <a:defRPr sz="1950">
                 <a:solidFill>
                   <a:srgbClr val="172B3A"/>
@@ -25097,6 +26391,7 @@
               </a:defRPr>
             </a:lvl7pPr>
             <a:lvl8pPr>
+              <a:buNone/>
               <a:defRPr sz="1950">
                 <a:solidFill>
                   <a:srgbClr val="172B3A"/>
@@ -25107,6 +26402,7 @@
               </a:defRPr>
             </a:lvl8pPr>
             <a:lvl9pPr>
+              <a:buNone/>
               <a:defRPr sz="1950">
                 <a:solidFill>
                   <a:srgbClr val="172B3A"/>
@@ -25119,6 +26415,7 @@
           </a:lstStyle>
           <a:p xmlns:a="http://schemas.openxmlformats.org/drawingml/2006/main">
             <a:pPr>
+              <a:buNone/>
               <a:defRPr sz="1950">
                 <a:solidFill>
                   <a:srgbClr val="172B3A"/>
@@ -25212,6 +26509,7 @@
               </a:defRPr>
             </a:defPPr>
             <a:lvl1pPr>
+              <a:buNone/>
               <a:defRPr sz="2925">
                 <a:solidFill>
                   <a:srgbClr val="172B3A"/>
@@ -25222,6 +26520,7 @@
               </a:defRPr>
             </a:lvl1pPr>
             <a:lvl2pPr>
+              <a:buNone/>
               <a:defRPr sz="2925">
                 <a:solidFill>
                   <a:srgbClr val="172B3A"/>
@@ -25232,6 +26531,7 @@
               </a:defRPr>
             </a:lvl2pPr>
             <a:lvl3pPr>
+              <a:buNone/>
               <a:defRPr sz="2925">
                 <a:solidFill>
                   <a:srgbClr val="172B3A"/>
@@ -25242,6 +26542,7 @@
               </a:defRPr>
             </a:lvl3pPr>
             <a:lvl4pPr>
+              <a:buNone/>
               <a:defRPr sz="2925">
                 <a:solidFill>
                   <a:srgbClr val="172B3A"/>
@@ -25252,6 +26553,7 @@
               </a:defRPr>
             </a:lvl4pPr>
             <a:lvl5pPr>
+              <a:buNone/>
               <a:defRPr sz="2925">
                 <a:solidFill>
                   <a:srgbClr val="172B3A"/>
@@ -25262,6 +26564,7 @@
               </a:defRPr>
             </a:lvl5pPr>
             <a:lvl6pPr>
+              <a:buNone/>
               <a:defRPr sz="2925">
                 <a:solidFill>
                   <a:srgbClr val="172B3A"/>
@@ -25272,6 +26575,7 @@
               </a:defRPr>
             </a:lvl6pPr>
             <a:lvl7pPr>
+              <a:buNone/>
               <a:defRPr sz="2925">
                 <a:solidFill>
                   <a:srgbClr val="172B3A"/>
@@ -25282,6 +26586,7 @@
               </a:defRPr>
             </a:lvl7pPr>
             <a:lvl8pPr>
+              <a:buNone/>
               <a:defRPr sz="2925">
                 <a:solidFill>
                   <a:srgbClr val="172B3A"/>
@@ -25292,6 +26597,7 @@
               </a:defRPr>
             </a:lvl8pPr>
             <a:lvl9pPr>
+              <a:buNone/>
               <a:defRPr sz="2925">
                 <a:solidFill>
                   <a:srgbClr val="172B3A"/>
@@ -25304,6 +26610,7 @@
           </a:lstStyle>
           <a:p xmlns:a="http://schemas.openxmlformats.org/drawingml/2006/main">
             <a:pPr>
+              <a:buNone/>
               <a:defRPr sz="2925">
                 <a:solidFill>
                   <a:srgbClr val="172B3A"/>
@@ -25368,6 +26675,7 @@
               </a:defRPr>
             </a:defPPr>
             <a:lvl1pPr>
+              <a:buNone/>
               <a:defRPr sz="1200">
                 <a:solidFill>
                   <a:srgbClr val="687985"/>
@@ -25378,6 +26686,7 @@
               </a:defRPr>
             </a:lvl1pPr>
             <a:lvl2pPr>
+              <a:buNone/>
               <a:defRPr sz="1200">
                 <a:solidFill>
                   <a:srgbClr val="687985"/>
@@ -25388,6 +26697,7 @@
               </a:defRPr>
             </a:lvl2pPr>
             <a:lvl3pPr>
+              <a:buNone/>
               <a:defRPr sz="1200">
                 <a:solidFill>
                   <a:srgbClr val="687985"/>
@@ -25398,6 +26708,7 @@
               </a:defRPr>
             </a:lvl3pPr>
             <a:lvl4pPr>
+              <a:buNone/>
               <a:defRPr sz="1200">
                 <a:solidFill>
                   <a:srgbClr val="687985"/>
@@ -25408,6 +26719,7 @@
               </a:defRPr>
             </a:lvl4pPr>
             <a:lvl5pPr>
+              <a:buNone/>
               <a:defRPr sz="1200">
                 <a:solidFill>
                   <a:srgbClr val="687985"/>
@@ -25418,6 +26730,7 @@
               </a:defRPr>
             </a:lvl5pPr>
             <a:lvl6pPr>
+              <a:buNone/>
               <a:defRPr sz="1200">
                 <a:solidFill>
                   <a:srgbClr val="687985"/>
@@ -25428,6 +26741,7 @@
               </a:defRPr>
             </a:lvl6pPr>
             <a:lvl7pPr>
+              <a:buNone/>
               <a:defRPr sz="1200">
                 <a:solidFill>
                   <a:srgbClr val="687985"/>
@@ -25438,6 +26752,7 @@
               </a:defRPr>
             </a:lvl7pPr>
             <a:lvl8pPr>
+              <a:buNone/>
               <a:defRPr sz="1200">
                 <a:solidFill>
                   <a:srgbClr val="687985"/>
@@ -25448,6 +26763,7 @@
               </a:defRPr>
             </a:lvl8pPr>
             <a:lvl9pPr>
+              <a:buNone/>
               <a:defRPr sz="1200">
                 <a:solidFill>
                   <a:srgbClr val="687985"/>
@@ -25460,6 +26776,7 @@
           </a:lstStyle>
           <a:p xmlns:a="http://schemas.openxmlformats.org/drawingml/2006/main">
             <a:pPr>
+              <a:buNone/>
               <a:defRPr sz="1200">
                 <a:solidFill>
                   <a:srgbClr val="687985"/>
@@ -25524,6 +26841,7 @@
               </a:defRPr>
             </a:defPPr>
             <a:lvl1pPr>
+              <a:buNone/>
               <a:defRPr sz="1200">
                 <a:solidFill>
                   <a:srgbClr val="172B3A"/>
@@ -25534,6 +26852,7 @@
               </a:defRPr>
             </a:lvl1pPr>
             <a:lvl2pPr>
+              <a:buNone/>
               <a:defRPr sz="1200">
                 <a:solidFill>
                   <a:srgbClr val="172B3A"/>
@@ -25544,6 +26863,7 @@
               </a:defRPr>
             </a:lvl2pPr>
             <a:lvl3pPr>
+              <a:buNone/>
               <a:defRPr sz="1200">
                 <a:solidFill>
                   <a:srgbClr val="172B3A"/>
@@ -25554,6 +26874,7 @@
               </a:defRPr>
             </a:lvl3pPr>
             <a:lvl4pPr>
+              <a:buNone/>
               <a:defRPr sz="1200">
                 <a:solidFill>
                   <a:srgbClr val="172B3A"/>
@@ -25564,6 +26885,7 @@
               </a:defRPr>
             </a:lvl4pPr>
             <a:lvl5pPr>
+              <a:buNone/>
               <a:defRPr sz="1200">
                 <a:solidFill>
                   <a:srgbClr val="172B3A"/>
@@ -25574,6 +26896,7 @@
               </a:defRPr>
             </a:lvl5pPr>
             <a:lvl6pPr>
+              <a:buNone/>
               <a:defRPr sz="1200">
                 <a:solidFill>
                   <a:srgbClr val="172B3A"/>
@@ -25584,6 +26907,7 @@
               </a:defRPr>
             </a:lvl6pPr>
             <a:lvl7pPr>
+              <a:buNone/>
               <a:defRPr sz="1200">
                 <a:solidFill>
                   <a:srgbClr val="172B3A"/>
@@ -25594,6 +26918,7 @@
               </a:defRPr>
             </a:lvl7pPr>
             <a:lvl8pPr>
+              <a:buNone/>
               <a:defRPr sz="1200">
                 <a:solidFill>
                   <a:srgbClr val="172B3A"/>
@@ -25604,6 +26929,7 @@
               </a:defRPr>
             </a:lvl8pPr>
             <a:lvl9pPr>
+              <a:buNone/>
               <a:defRPr sz="1200">
                 <a:solidFill>
                   <a:srgbClr val="172B3A"/>
@@ -25616,6 +26942,7 @@
           </a:lstStyle>
           <a:p xmlns:a="http://schemas.openxmlformats.org/drawingml/2006/main">
             <a:pPr>
+              <a:buNone/>
               <a:defRPr sz="1200">
                 <a:solidFill>
                   <a:srgbClr val="172B3A"/>
@@ -25680,6 +27007,7 @@
               </a:defRPr>
             </a:defPPr>
             <a:lvl1pPr>
+              <a:buNone/>
               <a:defRPr sz="2100">
                 <a:solidFill>
                   <a:srgbClr val="176B87"/>
@@ -25690,6 +27018,7 @@
               </a:defRPr>
             </a:lvl1pPr>
             <a:lvl2pPr>
+              <a:buNone/>
               <a:defRPr sz="2100">
                 <a:solidFill>
                   <a:srgbClr val="176B87"/>
@@ -25700,6 +27029,7 @@
               </a:defRPr>
             </a:lvl2pPr>
             <a:lvl3pPr>
+              <a:buNone/>
               <a:defRPr sz="2100">
                 <a:solidFill>
                   <a:srgbClr val="176B87"/>
@@ -25710,6 +27040,7 @@
               </a:defRPr>
             </a:lvl3pPr>
             <a:lvl4pPr>
+              <a:buNone/>
               <a:defRPr sz="2100">
                 <a:solidFill>
                   <a:srgbClr val="176B87"/>
@@ -25720,6 +27051,7 @@
               </a:defRPr>
             </a:lvl4pPr>
             <a:lvl5pPr>
+              <a:buNone/>
               <a:defRPr sz="2100">
                 <a:solidFill>
                   <a:srgbClr val="176B87"/>
@@ -25730,6 +27062,7 @@
               </a:defRPr>
             </a:lvl5pPr>
             <a:lvl6pPr>
+              <a:buNone/>
               <a:defRPr sz="2100">
                 <a:solidFill>
                   <a:srgbClr val="176B87"/>
@@ -25740,6 +27073,7 @@
               </a:defRPr>
             </a:lvl6pPr>
             <a:lvl7pPr>
+              <a:buNone/>
               <a:defRPr sz="2100">
                 <a:solidFill>
                   <a:srgbClr val="176B87"/>
@@ -25750,6 +27084,7 @@
               </a:defRPr>
             </a:lvl7pPr>
             <a:lvl8pPr>
+              <a:buNone/>
               <a:defRPr sz="2100">
                 <a:solidFill>
                   <a:srgbClr val="176B87"/>
@@ -25760,6 +27095,7 @@
               </a:defRPr>
             </a:lvl8pPr>
             <a:lvl9pPr>
+              <a:buNone/>
               <a:defRPr sz="2100">
                 <a:solidFill>
                   <a:srgbClr val="176B87"/>
@@ -25772,6 +27108,7 @@
           </a:lstStyle>
           <a:p xmlns:a="http://schemas.openxmlformats.org/drawingml/2006/main">
             <a:pPr>
+              <a:buNone/>
               <a:defRPr sz="2100">
                 <a:solidFill>
                   <a:srgbClr val="176B87"/>
@@ -25800,7 +27137,7 @@
           <p:cNvPr id="5" name="Chart">
             <a:extLst xmlns:a="http://schemas.openxmlformats.org/drawingml/2006/main">
               <a:ext uri="{FF2B5EF4-FFF2-40B4-BE49-F238E27FC236}">
-                <a16:creationId xmlns:a16="http://schemas.microsoft.com/office/drawing/2014/main" id="{FA967E8A-B5AD-42A3-B378-2F3E1BC1E8C1}"/>
+                <a16:creationId xmlns:a16="http://schemas.microsoft.com/office/drawing/2014/main" id="{6656CABF-FDE2-4925-87B8-6FA30C7B515D}"/>
               </a:ext>
             </a:extLst>
           </p:cNvPr>
@@ -25813,7 +27150,7 @@
         </p:xfrm>
         <a:graphic xmlns:a="http://schemas.openxmlformats.org/drawingml/2006/main">
           <a:graphicData uri="http://schemas.openxmlformats.org/drawingml/2006/chart">
-            <c:chart xmlns:r="http://schemas.openxmlformats.org/officeDocument/2006/relationships" xmlns:c="http://schemas.openxmlformats.org/drawingml/2006/chart" r:id="R1007342de8b04ced"/>
+            <c:chart xmlns:r="http://schemas.openxmlformats.org/officeDocument/2006/relationships" xmlns:c="http://schemas.openxmlformats.org/drawingml/2006/chart" r:id="R1a0b99262edc4a76"/>
           </a:graphicData>
         </a:graphic>
       </p:graphicFrame>
@@ -25858,6 +27195,7 @@
               </a:defRPr>
             </a:defPPr>
             <a:lvl1pPr>
+              <a:buNone/>
               <a:defRPr sz="2100">
                 <a:solidFill>
                   <a:srgbClr val="176B87"/>
@@ -25868,6 +27206,7 @@
               </a:defRPr>
             </a:lvl1pPr>
             <a:lvl2pPr>
+              <a:buNone/>
               <a:defRPr sz="2100">
                 <a:solidFill>
                   <a:srgbClr val="176B87"/>
@@ -25878,6 +27217,7 @@
               </a:defRPr>
             </a:lvl2pPr>
             <a:lvl3pPr>
+              <a:buNone/>
               <a:defRPr sz="2100">
                 <a:solidFill>
                   <a:srgbClr val="176B87"/>
@@ -25888,6 +27228,7 @@
               </a:defRPr>
             </a:lvl3pPr>
             <a:lvl4pPr>
+              <a:buNone/>
               <a:defRPr sz="2100">
                 <a:solidFill>
                   <a:srgbClr val="176B87"/>
@@ -25898,6 +27239,7 @@
               </a:defRPr>
             </a:lvl4pPr>
             <a:lvl5pPr>
+              <a:buNone/>
               <a:defRPr sz="2100">
                 <a:solidFill>
                   <a:srgbClr val="176B87"/>
@@ -25908,6 +27250,7 @@
               </a:defRPr>
             </a:lvl5pPr>
             <a:lvl6pPr>
+              <a:buNone/>
               <a:defRPr sz="2100">
                 <a:solidFill>
                   <a:srgbClr val="176B87"/>
@@ -25918,6 +27261,7 @@
               </a:defRPr>
             </a:lvl6pPr>
             <a:lvl7pPr>
+              <a:buNone/>
               <a:defRPr sz="2100">
                 <a:solidFill>
                   <a:srgbClr val="176B87"/>
@@ -25928,6 +27272,7 @@
               </a:defRPr>
             </a:lvl7pPr>
             <a:lvl8pPr>
+              <a:buNone/>
               <a:defRPr sz="2100">
                 <a:solidFill>
                   <a:srgbClr val="176B87"/>
@@ -25938,6 +27283,7 @@
               </a:defRPr>
             </a:lvl8pPr>
             <a:lvl9pPr>
+              <a:buNone/>
               <a:defRPr sz="2100">
                 <a:solidFill>
                   <a:srgbClr val="176B87"/>
@@ -25950,6 +27296,7 @@
           </a:lstStyle>
           <a:p xmlns:a="http://schemas.openxmlformats.org/drawingml/2006/main">
             <a:pPr>
+              <a:buNone/>
               <a:defRPr sz="2100">
                 <a:solidFill>
                   <a:srgbClr val="176B87"/>
@@ -25978,7 +27325,7 @@
           <p:cNvPr id="7" name="Chart">
             <a:extLst xmlns:a="http://schemas.openxmlformats.org/drawingml/2006/main">
               <a:ext uri="{FF2B5EF4-FFF2-40B4-BE49-F238E27FC236}">
-                <a16:creationId xmlns:a16="http://schemas.microsoft.com/office/drawing/2014/main" id="{1163032C-A913-4FFB-A04E-6466D159154F}"/>
+                <a16:creationId xmlns:a16="http://schemas.microsoft.com/office/drawing/2014/main" id="{94EAF61D-9440-42DA-8D26-7BDD8BE26D4B}"/>
               </a:ext>
             </a:extLst>
           </p:cNvPr>
@@ -25991,7 +27338,7 @@
         </p:xfrm>
         <a:graphic xmlns:a="http://schemas.openxmlformats.org/drawingml/2006/main">
           <a:graphicData uri="http://schemas.openxmlformats.org/drawingml/2006/chart">
-            <c:chart xmlns:r="http://schemas.openxmlformats.org/officeDocument/2006/relationships" xmlns:c="http://schemas.openxmlformats.org/drawingml/2006/chart" r:id="R85dafbed9b0a4a7a"/>
+            <c:chart xmlns:r="http://schemas.openxmlformats.org/officeDocument/2006/relationships" xmlns:c="http://schemas.openxmlformats.org/drawingml/2006/chart" r:id="R8fc5723ad81d4304"/>
           </a:graphicData>
         </a:graphic>
       </p:graphicFrame>
@@ -26036,6 +27383,7 @@
               </a:defRPr>
             </a:defPPr>
             <a:lvl1pPr>
+              <a:buNone/>
               <a:defRPr sz="1875">
                 <a:solidFill>
                   <a:srgbClr val="172B3A"/>
@@ -26046,6 +27394,7 @@
               </a:defRPr>
             </a:lvl1pPr>
             <a:lvl2pPr>
+              <a:buNone/>
               <a:defRPr sz="1875">
                 <a:solidFill>
                   <a:srgbClr val="172B3A"/>
@@ -26056,6 +27405,7 @@
               </a:defRPr>
             </a:lvl2pPr>
             <a:lvl3pPr>
+              <a:buNone/>
               <a:defRPr sz="1875">
                 <a:solidFill>
                   <a:srgbClr val="172B3A"/>
@@ -26066,6 +27416,7 @@
               </a:defRPr>
             </a:lvl3pPr>
             <a:lvl4pPr>
+              <a:buNone/>
               <a:defRPr sz="1875">
                 <a:solidFill>
                   <a:srgbClr val="172B3A"/>
@@ -26076,6 +27427,7 @@
               </a:defRPr>
             </a:lvl4pPr>
             <a:lvl5pPr>
+              <a:buNone/>
               <a:defRPr sz="1875">
                 <a:solidFill>
                   <a:srgbClr val="172B3A"/>
@@ -26086,6 +27438,7 @@
               </a:defRPr>
             </a:lvl5pPr>
             <a:lvl6pPr>
+              <a:buNone/>
               <a:defRPr sz="1875">
                 <a:solidFill>
                   <a:srgbClr val="172B3A"/>
@@ -26096,6 +27449,7 @@
               </a:defRPr>
             </a:lvl6pPr>
             <a:lvl7pPr>
+              <a:buNone/>
               <a:defRPr sz="1875">
                 <a:solidFill>
                   <a:srgbClr val="172B3A"/>
@@ -26106,6 +27460,7 @@
               </a:defRPr>
             </a:lvl7pPr>
             <a:lvl8pPr>
+              <a:buNone/>
               <a:defRPr sz="1875">
                 <a:solidFill>
                   <a:srgbClr val="172B3A"/>
@@ -26116,6 +27471,7 @@
               </a:defRPr>
             </a:lvl8pPr>
             <a:lvl9pPr>
+              <a:buNone/>
               <a:defRPr sz="1875">
                 <a:solidFill>
                   <a:srgbClr val="172B3A"/>
@@ -26128,6 +27484,7 @@
           </a:lstStyle>
           <a:p xmlns:a="http://schemas.openxmlformats.org/drawingml/2006/main">
             <a:pPr>
+              <a:buNone/>
               <a:defRPr sz="1875">
                 <a:solidFill>
                   <a:srgbClr val="172B3A"/>
@@ -26221,6 +27578,7 @@
               </a:defRPr>
             </a:defPPr>
             <a:lvl1pPr>
+              <a:buNone/>
               <a:defRPr sz="2925">
                 <a:solidFill>
                   <a:srgbClr val="172B3A"/>
@@ -26231,6 +27589,7 @@
               </a:defRPr>
             </a:lvl1pPr>
             <a:lvl2pPr>
+              <a:buNone/>
               <a:defRPr sz="2925">
                 <a:solidFill>
                   <a:srgbClr val="172B3A"/>
@@ -26241,6 +27600,7 @@
               </a:defRPr>
             </a:lvl2pPr>
             <a:lvl3pPr>
+              <a:buNone/>
               <a:defRPr sz="2925">
                 <a:solidFill>
                   <a:srgbClr val="172B3A"/>
@@ -26251,6 +27611,7 @@
               </a:defRPr>
             </a:lvl3pPr>
             <a:lvl4pPr>
+              <a:buNone/>
               <a:defRPr sz="2925">
                 <a:solidFill>
                   <a:srgbClr val="172B3A"/>
@@ -26261,6 +27622,7 @@
               </a:defRPr>
             </a:lvl4pPr>
             <a:lvl5pPr>
+              <a:buNone/>
               <a:defRPr sz="2925">
                 <a:solidFill>
                   <a:srgbClr val="172B3A"/>
@@ -26271,6 +27633,7 @@
               </a:defRPr>
             </a:lvl5pPr>
             <a:lvl6pPr>
+              <a:buNone/>
               <a:defRPr sz="2925">
                 <a:solidFill>
                   <a:srgbClr val="172B3A"/>
@@ -26281,6 +27644,7 @@
               </a:defRPr>
             </a:lvl6pPr>
             <a:lvl7pPr>
+              <a:buNone/>
               <a:defRPr sz="2925">
                 <a:solidFill>
                   <a:srgbClr val="172B3A"/>
@@ -26291,6 +27655,7 @@
               </a:defRPr>
             </a:lvl7pPr>
             <a:lvl8pPr>
+              <a:buNone/>
               <a:defRPr sz="2925">
                 <a:solidFill>
                   <a:srgbClr val="172B3A"/>
@@ -26301,6 +27666,7 @@
               </a:defRPr>
             </a:lvl8pPr>
             <a:lvl9pPr>
+              <a:buNone/>
               <a:defRPr sz="2925">
                 <a:solidFill>
                   <a:srgbClr val="172B3A"/>
@@ -26313,6 +27679,7 @@
           </a:lstStyle>
           <a:p xmlns:a="http://schemas.openxmlformats.org/drawingml/2006/main">
             <a:pPr>
+              <a:buNone/>
               <a:defRPr sz="2925">
                 <a:solidFill>
                   <a:srgbClr val="172B3A"/>
@@ -26377,6 +27744,7 @@
               </a:defRPr>
             </a:defPPr>
             <a:lvl1pPr>
+              <a:buNone/>
               <a:defRPr sz="1200">
                 <a:solidFill>
                   <a:srgbClr val="687985"/>
@@ -26387,6 +27755,7 @@
               </a:defRPr>
             </a:lvl1pPr>
             <a:lvl2pPr>
+              <a:buNone/>
               <a:defRPr sz="1200">
                 <a:solidFill>
                   <a:srgbClr val="687985"/>
@@ -26397,6 +27766,7 @@
               </a:defRPr>
             </a:lvl2pPr>
             <a:lvl3pPr>
+              <a:buNone/>
               <a:defRPr sz="1200">
                 <a:solidFill>
                   <a:srgbClr val="687985"/>
@@ -26407,6 +27777,7 @@
               </a:defRPr>
             </a:lvl3pPr>
             <a:lvl4pPr>
+              <a:buNone/>
               <a:defRPr sz="1200">
                 <a:solidFill>
                   <a:srgbClr val="687985"/>
@@ -26417,6 +27788,7 @@
               </a:defRPr>
             </a:lvl4pPr>
             <a:lvl5pPr>
+              <a:buNone/>
               <a:defRPr sz="1200">
                 <a:solidFill>
                   <a:srgbClr val="687985"/>
@@ -26427,6 +27799,7 @@
               </a:defRPr>
             </a:lvl5pPr>
             <a:lvl6pPr>
+              <a:buNone/>
               <a:defRPr sz="1200">
                 <a:solidFill>
                   <a:srgbClr val="687985"/>
@@ -26437,6 +27810,7 @@
               </a:defRPr>
             </a:lvl6pPr>
             <a:lvl7pPr>
+              <a:buNone/>
               <a:defRPr sz="1200">
                 <a:solidFill>
                   <a:srgbClr val="687985"/>
@@ -26447,6 +27821,7 @@
               </a:defRPr>
             </a:lvl7pPr>
             <a:lvl8pPr>
+              <a:buNone/>
               <a:defRPr sz="1200">
                 <a:solidFill>
                   <a:srgbClr val="687985"/>
@@ -26457,6 +27832,7 @@
               </a:defRPr>
             </a:lvl8pPr>
             <a:lvl9pPr>
+              <a:buNone/>
               <a:defRPr sz="1200">
                 <a:solidFill>
                   <a:srgbClr val="687985"/>
@@ -26469,6 +27845,7 @@
           </a:lstStyle>
           <a:p xmlns:a="http://schemas.openxmlformats.org/drawingml/2006/main">
             <a:pPr>
+              <a:buNone/>
               <a:defRPr sz="1200">
                 <a:solidFill>
                   <a:srgbClr val="687985"/>
@@ -26533,6 +27910,7 @@
               </a:defRPr>
             </a:defPPr>
             <a:lvl1pPr>
+              <a:buNone/>
               <a:defRPr sz="1200">
                 <a:solidFill>
                   <a:srgbClr val="172B3A"/>
@@ -26543,6 +27921,7 @@
               </a:defRPr>
             </a:lvl1pPr>
             <a:lvl2pPr>
+              <a:buNone/>
               <a:defRPr sz="1200">
                 <a:solidFill>
                   <a:srgbClr val="172B3A"/>
@@ -26553,6 +27932,7 @@
               </a:defRPr>
             </a:lvl2pPr>
             <a:lvl3pPr>
+              <a:buNone/>
               <a:defRPr sz="1200">
                 <a:solidFill>
                   <a:srgbClr val="172B3A"/>
@@ -26563,6 +27943,7 @@
               </a:defRPr>
             </a:lvl3pPr>
             <a:lvl4pPr>
+              <a:buNone/>
               <a:defRPr sz="1200">
                 <a:solidFill>
                   <a:srgbClr val="172B3A"/>
@@ -26573,6 +27954,7 @@
               </a:defRPr>
             </a:lvl4pPr>
             <a:lvl5pPr>
+              <a:buNone/>
               <a:defRPr sz="1200">
                 <a:solidFill>
                   <a:srgbClr val="172B3A"/>
@@ -26583,6 +27965,7 @@
               </a:defRPr>
             </a:lvl5pPr>
             <a:lvl6pPr>
+              <a:buNone/>
               <a:defRPr sz="1200">
                 <a:solidFill>
                   <a:srgbClr val="172B3A"/>
@@ -26593,6 +27976,7 @@
               </a:defRPr>
             </a:lvl6pPr>
             <a:lvl7pPr>
+              <a:buNone/>
               <a:defRPr sz="1200">
                 <a:solidFill>
                   <a:srgbClr val="172B3A"/>
@@ -26603,6 +27987,7 @@
               </a:defRPr>
             </a:lvl7pPr>
             <a:lvl8pPr>
+              <a:buNone/>
               <a:defRPr sz="1200">
                 <a:solidFill>
                   <a:srgbClr val="172B3A"/>
@@ -26613,6 +27998,7 @@
               </a:defRPr>
             </a:lvl8pPr>
             <a:lvl9pPr>
+              <a:buNone/>
               <a:defRPr sz="1200">
                 <a:solidFill>
                   <a:srgbClr val="172B3A"/>
@@ -26625,6 +28011,7 @@
           </a:lstStyle>
           <a:p xmlns:a="http://schemas.openxmlformats.org/drawingml/2006/main">
             <a:pPr>
+              <a:buNone/>
               <a:defRPr sz="1200">
                 <a:solidFill>
                   <a:srgbClr val="172B3A"/>
@@ -26689,6 +28076,7 @@
               </a:defRPr>
             </a:defPPr>
             <a:lvl1pPr>
+              <a:buNone/>
               <a:defRPr sz="2100">
                 <a:solidFill>
                   <a:srgbClr val="176B87"/>
@@ -26699,6 +28087,7 @@
               </a:defRPr>
             </a:lvl1pPr>
             <a:lvl2pPr>
+              <a:buNone/>
               <a:defRPr sz="2100">
                 <a:solidFill>
                   <a:srgbClr val="176B87"/>
@@ -26709,6 +28098,7 @@
               </a:defRPr>
             </a:lvl2pPr>
             <a:lvl3pPr>
+              <a:buNone/>
               <a:defRPr sz="2100">
                 <a:solidFill>
                   <a:srgbClr val="176B87"/>
@@ -26719,6 +28109,7 @@
               </a:defRPr>
             </a:lvl3pPr>
             <a:lvl4pPr>
+              <a:buNone/>
               <a:defRPr sz="2100">
                 <a:solidFill>
                   <a:srgbClr val="176B87"/>
@@ -26729,6 +28120,7 @@
               </a:defRPr>
             </a:lvl4pPr>
             <a:lvl5pPr>
+              <a:buNone/>
               <a:defRPr sz="2100">
                 <a:solidFill>
                   <a:srgbClr val="176B87"/>
@@ -26739,6 +28131,7 @@
               </a:defRPr>
             </a:lvl5pPr>
             <a:lvl6pPr>
+              <a:buNone/>
               <a:defRPr sz="2100">
                 <a:solidFill>
                   <a:srgbClr val="176B87"/>
@@ -26749,6 +28142,7 @@
               </a:defRPr>
             </a:lvl6pPr>
             <a:lvl7pPr>
+              <a:buNone/>
               <a:defRPr sz="2100">
                 <a:solidFill>
                   <a:srgbClr val="176B87"/>
@@ -26759,6 +28153,7 @@
               </a:defRPr>
             </a:lvl7pPr>
             <a:lvl8pPr>
+              <a:buNone/>
               <a:defRPr sz="2100">
                 <a:solidFill>
                   <a:srgbClr val="176B87"/>
@@ -26769,6 +28164,7 @@
               </a:defRPr>
             </a:lvl8pPr>
             <a:lvl9pPr>
+              <a:buNone/>
               <a:defRPr sz="2100">
                 <a:solidFill>
                   <a:srgbClr val="176B87"/>
@@ -26781,6 +28177,7 @@
           </a:lstStyle>
           <a:p xmlns:a="http://schemas.openxmlformats.org/drawingml/2006/main">
             <a:pPr>
+              <a:buNone/>
               <a:defRPr sz="2100">
                 <a:solidFill>
                   <a:srgbClr val="176B87"/>
@@ -26809,7 +28206,7 @@
           <p:cNvPr id="5" name="Chart">
             <a:extLst xmlns:a="http://schemas.openxmlformats.org/drawingml/2006/main">
               <a:ext uri="{FF2B5EF4-FFF2-40B4-BE49-F238E27FC236}">
-                <a16:creationId xmlns:a16="http://schemas.microsoft.com/office/drawing/2014/main" id="{56D0F242-EC27-45E5-9060-449B4B770094}"/>
+                <a16:creationId xmlns:a16="http://schemas.microsoft.com/office/drawing/2014/main" id="{891A0705-FFC5-47E5-9935-A969C455850E}"/>
               </a:ext>
             </a:extLst>
           </p:cNvPr>
@@ -26822,7 +28219,7 @@
         </p:xfrm>
         <a:graphic xmlns:a="http://schemas.openxmlformats.org/drawingml/2006/main">
           <a:graphicData uri="http://schemas.openxmlformats.org/drawingml/2006/chart">
-            <c:chart xmlns:r="http://schemas.openxmlformats.org/officeDocument/2006/relationships" xmlns:c="http://schemas.openxmlformats.org/drawingml/2006/chart" r:id="R63780c2c15514965"/>
+            <c:chart xmlns:r="http://schemas.openxmlformats.org/officeDocument/2006/relationships" xmlns:c="http://schemas.openxmlformats.org/drawingml/2006/chart" r:id="R3274f3a3cf65404d"/>
           </a:graphicData>
         </a:graphic>
       </p:graphicFrame>
@@ -26867,6 +28264,7 @@
               </a:defRPr>
             </a:defPPr>
             <a:lvl1pPr>
+              <a:buNone/>
               <a:defRPr sz="2100">
                 <a:solidFill>
                   <a:srgbClr val="176B87"/>
@@ -26877,6 +28275,7 @@
               </a:defRPr>
             </a:lvl1pPr>
             <a:lvl2pPr>
+              <a:buNone/>
               <a:defRPr sz="2100">
                 <a:solidFill>
                   <a:srgbClr val="176B87"/>
@@ -26887,6 +28286,7 @@
               </a:defRPr>
             </a:lvl2pPr>
             <a:lvl3pPr>
+              <a:buNone/>
               <a:defRPr sz="2100">
                 <a:solidFill>
                   <a:srgbClr val="176B87"/>
@@ -26897,6 +28297,7 @@
               </a:defRPr>
             </a:lvl3pPr>
             <a:lvl4pPr>
+              <a:buNone/>
               <a:defRPr sz="2100">
                 <a:solidFill>
                   <a:srgbClr val="176B87"/>
@@ -26907,6 +28308,7 @@
               </a:defRPr>
             </a:lvl4pPr>
             <a:lvl5pPr>
+              <a:buNone/>
               <a:defRPr sz="2100">
                 <a:solidFill>
                   <a:srgbClr val="176B87"/>
@@ -26917,6 +28319,7 @@
               </a:defRPr>
             </a:lvl5pPr>
             <a:lvl6pPr>
+              <a:buNone/>
               <a:defRPr sz="2100">
                 <a:solidFill>
                   <a:srgbClr val="176B87"/>
@@ -26927,6 +28330,7 @@
               </a:defRPr>
             </a:lvl6pPr>
             <a:lvl7pPr>
+              <a:buNone/>
               <a:defRPr sz="2100">
                 <a:solidFill>
                   <a:srgbClr val="176B87"/>
@@ -26937,6 +28341,7 @@
               </a:defRPr>
             </a:lvl7pPr>
             <a:lvl8pPr>
+              <a:buNone/>
               <a:defRPr sz="2100">
                 <a:solidFill>
                   <a:srgbClr val="176B87"/>
@@ -26947,6 +28352,7 @@
               </a:defRPr>
             </a:lvl8pPr>
             <a:lvl9pPr>
+              <a:buNone/>
               <a:defRPr sz="2100">
                 <a:solidFill>
                   <a:srgbClr val="176B87"/>
@@ -26959,6 +28365,7 @@
           </a:lstStyle>
           <a:p xmlns:a="http://schemas.openxmlformats.org/drawingml/2006/main">
             <a:pPr>
+              <a:buNone/>
               <a:defRPr sz="2100">
                 <a:solidFill>
                   <a:srgbClr val="176B87"/>
@@ -26987,7 +28394,7 @@
           <p:cNvPr id="7" name="Chart">
             <a:extLst xmlns:a="http://schemas.openxmlformats.org/drawingml/2006/main">
               <a:ext uri="{FF2B5EF4-FFF2-40B4-BE49-F238E27FC236}">
-                <a16:creationId xmlns:a16="http://schemas.microsoft.com/office/drawing/2014/main" id="{A0A81A78-B435-4ECD-9EE2-3BA4C63E6C0E}"/>
+                <a16:creationId xmlns:a16="http://schemas.microsoft.com/office/drawing/2014/main" id="{9E189B30-52AD-4AC6-B2CA-CE12B1E0D471}"/>
               </a:ext>
             </a:extLst>
           </p:cNvPr>
@@ -27000,7 +28407,7 @@
         </p:xfrm>
         <a:graphic xmlns:a="http://schemas.openxmlformats.org/drawingml/2006/main">
           <a:graphicData uri="http://schemas.openxmlformats.org/drawingml/2006/chart">
-            <c:chart xmlns:r="http://schemas.openxmlformats.org/officeDocument/2006/relationships" xmlns:c="http://schemas.openxmlformats.org/drawingml/2006/chart" r:id="R7720d03455cd4816"/>
+            <c:chart xmlns:r="http://schemas.openxmlformats.org/officeDocument/2006/relationships" xmlns:c="http://schemas.openxmlformats.org/drawingml/2006/chart" r:id="R852eed8bf5ea4148"/>
           </a:graphicData>
         </a:graphic>
       </p:graphicFrame>
@@ -27045,6 +28452,7 @@
               </a:defRPr>
             </a:defPPr>
             <a:lvl1pPr>
+              <a:buNone/>
               <a:defRPr sz="1875">
                 <a:solidFill>
                   <a:srgbClr val="172B3A"/>
@@ -27055,6 +28463,7 @@
               </a:defRPr>
             </a:lvl1pPr>
             <a:lvl2pPr>
+              <a:buNone/>
               <a:defRPr sz="1875">
                 <a:solidFill>
                   <a:srgbClr val="172B3A"/>
@@ -27065,6 +28474,7 @@
               </a:defRPr>
             </a:lvl2pPr>
             <a:lvl3pPr>
+              <a:buNone/>
               <a:defRPr sz="1875">
                 <a:solidFill>
                   <a:srgbClr val="172B3A"/>
@@ -27075,6 +28485,7 @@
               </a:defRPr>
             </a:lvl3pPr>
             <a:lvl4pPr>
+              <a:buNone/>
               <a:defRPr sz="1875">
                 <a:solidFill>
                   <a:srgbClr val="172B3A"/>
@@ -27085,6 +28496,7 @@
               </a:defRPr>
             </a:lvl4pPr>
             <a:lvl5pPr>
+              <a:buNone/>
               <a:defRPr sz="1875">
                 <a:solidFill>
                   <a:srgbClr val="172B3A"/>
@@ -27095,6 +28507,7 @@
               </a:defRPr>
             </a:lvl5pPr>
             <a:lvl6pPr>
+              <a:buNone/>
               <a:defRPr sz="1875">
                 <a:solidFill>
                   <a:srgbClr val="172B3A"/>
@@ -27105,6 +28518,7 @@
               </a:defRPr>
             </a:lvl6pPr>
             <a:lvl7pPr>
+              <a:buNone/>
               <a:defRPr sz="1875">
                 <a:solidFill>
                   <a:srgbClr val="172B3A"/>
@@ -27115,6 +28529,7 @@
               </a:defRPr>
             </a:lvl7pPr>
             <a:lvl8pPr>
+              <a:buNone/>
               <a:defRPr sz="1875">
                 <a:solidFill>
                   <a:srgbClr val="172B3A"/>
@@ -27125,6 +28540,7 @@
               </a:defRPr>
             </a:lvl8pPr>
             <a:lvl9pPr>
+              <a:buNone/>
               <a:defRPr sz="1875">
                 <a:solidFill>
                   <a:srgbClr val="172B3A"/>
@@ -27137,6 +28553,7 @@
           </a:lstStyle>
           <a:p xmlns:a="http://schemas.openxmlformats.org/drawingml/2006/main">
             <a:pPr>
+              <a:buNone/>
               <a:defRPr sz="1875">
                 <a:solidFill>
                   <a:srgbClr val="172B3A"/>
@@ -27230,6 +28647,7 @@
               </a:defRPr>
             </a:defPPr>
             <a:lvl1pPr>
+              <a:buNone/>
               <a:defRPr sz="2925">
                 <a:solidFill>
                   <a:srgbClr val="172B3A"/>
@@ -27240,6 +28658,7 @@
               </a:defRPr>
             </a:lvl1pPr>
             <a:lvl2pPr>
+              <a:buNone/>
               <a:defRPr sz="2925">
                 <a:solidFill>
                   <a:srgbClr val="172B3A"/>
@@ -27250,6 +28669,7 @@
               </a:defRPr>
             </a:lvl2pPr>
             <a:lvl3pPr>
+              <a:buNone/>
               <a:defRPr sz="2925">
                 <a:solidFill>
                   <a:srgbClr val="172B3A"/>
@@ -27260,6 +28680,7 @@
               </a:defRPr>
             </a:lvl3pPr>
             <a:lvl4pPr>
+              <a:buNone/>
               <a:defRPr sz="2925">
                 <a:solidFill>
                   <a:srgbClr val="172B3A"/>
@@ -27270,6 +28691,7 @@
               </a:defRPr>
             </a:lvl4pPr>
             <a:lvl5pPr>
+              <a:buNone/>
               <a:defRPr sz="2925">
                 <a:solidFill>
                   <a:srgbClr val="172B3A"/>
@@ -27280,6 +28702,7 @@
               </a:defRPr>
             </a:lvl5pPr>
             <a:lvl6pPr>
+              <a:buNone/>
               <a:defRPr sz="2925">
                 <a:solidFill>
                   <a:srgbClr val="172B3A"/>
@@ -27290,6 +28713,7 @@
               </a:defRPr>
             </a:lvl6pPr>
             <a:lvl7pPr>
+              <a:buNone/>
               <a:defRPr sz="2925">
                 <a:solidFill>
                   <a:srgbClr val="172B3A"/>
@@ -27300,6 +28724,7 @@
               </a:defRPr>
             </a:lvl7pPr>
             <a:lvl8pPr>
+              <a:buNone/>
               <a:defRPr sz="2925">
                 <a:solidFill>
                   <a:srgbClr val="172B3A"/>
@@ -27310,6 +28735,7 @@
               </a:defRPr>
             </a:lvl8pPr>
             <a:lvl9pPr>
+              <a:buNone/>
               <a:defRPr sz="2925">
                 <a:solidFill>
                   <a:srgbClr val="172B3A"/>
@@ -27322,6 +28748,7 @@
           </a:lstStyle>
           <a:p xmlns:a="http://schemas.openxmlformats.org/drawingml/2006/main">
             <a:pPr>
+              <a:buNone/>
               <a:defRPr sz="2925">
                 <a:solidFill>
                   <a:srgbClr val="172B3A"/>
@@ -27386,6 +28813,7 @@
               </a:defRPr>
             </a:defPPr>
             <a:lvl1pPr>
+              <a:buNone/>
               <a:defRPr sz="1200">
                 <a:solidFill>
                   <a:srgbClr val="687985"/>
@@ -27396,6 +28824,7 @@
               </a:defRPr>
             </a:lvl1pPr>
             <a:lvl2pPr>
+              <a:buNone/>
               <a:defRPr sz="1200">
                 <a:solidFill>
                   <a:srgbClr val="687985"/>
@@ -27406,6 +28835,7 @@
               </a:defRPr>
             </a:lvl2pPr>
             <a:lvl3pPr>
+              <a:buNone/>
               <a:defRPr sz="1200">
                 <a:solidFill>
                   <a:srgbClr val="687985"/>
@@ -27416,6 +28846,7 @@
               </a:defRPr>
             </a:lvl3pPr>
             <a:lvl4pPr>
+              <a:buNone/>
               <a:defRPr sz="1200">
                 <a:solidFill>
                   <a:srgbClr val="687985"/>
@@ -27426,6 +28857,7 @@
               </a:defRPr>
             </a:lvl4pPr>
             <a:lvl5pPr>
+              <a:buNone/>
               <a:defRPr sz="1200">
                 <a:solidFill>
                   <a:srgbClr val="687985"/>
@@ -27436,6 +28868,7 @@
               </a:defRPr>
             </a:lvl5pPr>
             <a:lvl6pPr>
+              <a:buNone/>
               <a:defRPr sz="1200">
                 <a:solidFill>
                   <a:srgbClr val="687985"/>
@@ -27446,6 +28879,7 @@
               </a:defRPr>
             </a:lvl6pPr>
             <a:lvl7pPr>
+              <a:buNone/>
               <a:defRPr sz="1200">
                 <a:solidFill>
                   <a:srgbClr val="687985"/>
@@ -27456,6 +28890,7 @@
               </a:defRPr>
             </a:lvl7pPr>
             <a:lvl8pPr>
+              <a:buNone/>
               <a:defRPr sz="1200">
                 <a:solidFill>
                   <a:srgbClr val="687985"/>
@@ -27466,6 +28901,7 @@
               </a:defRPr>
             </a:lvl8pPr>
             <a:lvl9pPr>
+              <a:buNone/>
               <a:defRPr sz="1200">
                 <a:solidFill>
                   <a:srgbClr val="687985"/>
@@ -27478,6 +28914,7 @@
           </a:lstStyle>
           <a:p xmlns:a="http://schemas.openxmlformats.org/drawingml/2006/main">
             <a:pPr>
+              <a:buNone/>
               <a:defRPr sz="1200">
                 <a:solidFill>
                   <a:srgbClr val="687985"/>
@@ -27542,6 +28979,7 @@
               </a:defRPr>
             </a:defPPr>
             <a:lvl1pPr>
+              <a:buNone/>
               <a:defRPr sz="1200">
                 <a:solidFill>
                   <a:srgbClr val="172B3A"/>
@@ -27552,6 +28990,7 @@
               </a:defRPr>
             </a:lvl1pPr>
             <a:lvl2pPr>
+              <a:buNone/>
               <a:defRPr sz="1200">
                 <a:solidFill>
                   <a:srgbClr val="172B3A"/>
@@ -27562,6 +29001,7 @@
               </a:defRPr>
             </a:lvl2pPr>
             <a:lvl3pPr>
+              <a:buNone/>
               <a:defRPr sz="1200">
                 <a:solidFill>
                   <a:srgbClr val="172B3A"/>
@@ -27572,6 +29012,7 @@
               </a:defRPr>
             </a:lvl3pPr>
             <a:lvl4pPr>
+              <a:buNone/>
               <a:defRPr sz="1200">
                 <a:solidFill>
                   <a:srgbClr val="172B3A"/>
@@ -27582,6 +29023,7 @@
               </a:defRPr>
             </a:lvl4pPr>
             <a:lvl5pPr>
+              <a:buNone/>
               <a:defRPr sz="1200">
                 <a:solidFill>
                   <a:srgbClr val="172B3A"/>
@@ -27592,6 +29034,7 @@
               </a:defRPr>
             </a:lvl5pPr>
             <a:lvl6pPr>
+              <a:buNone/>
               <a:defRPr sz="1200">
                 <a:solidFill>
                   <a:srgbClr val="172B3A"/>
@@ -27602,6 +29045,7 @@
               </a:defRPr>
             </a:lvl6pPr>
             <a:lvl7pPr>
+              <a:buNone/>
               <a:defRPr sz="1200">
                 <a:solidFill>
                   <a:srgbClr val="172B3A"/>
@@ -27612,6 +29056,7 @@
               </a:defRPr>
             </a:lvl7pPr>
             <a:lvl8pPr>
+              <a:buNone/>
               <a:defRPr sz="1200">
                 <a:solidFill>
                   <a:srgbClr val="172B3A"/>
@@ -27622,6 +29067,7 @@
               </a:defRPr>
             </a:lvl8pPr>
             <a:lvl9pPr>
+              <a:buNone/>
               <a:defRPr sz="1200">
                 <a:solidFill>
                   <a:srgbClr val="172B3A"/>
@@ -27634,6 +29080,7 @@
           </a:lstStyle>
           <a:p xmlns:a="http://schemas.openxmlformats.org/drawingml/2006/main">
             <a:pPr>
+              <a:buNone/>
               <a:defRPr sz="1200">
                 <a:solidFill>
                   <a:srgbClr val="172B3A"/>
@@ -27662,7 +29109,7 @@
           <p:cNvPr id="4" name="">
             <a:extLst xmlns:a="http://schemas.openxmlformats.org/drawingml/2006/main">
               <a:ext uri="{FF2B5EF4-FFF2-40B4-BE49-F238E27FC236}">
-                <a16:creationId xmlns:a16="http://schemas.microsoft.com/office/drawing/2014/main" id="{6F0D720B-F803-4358-B4C5-54887B4FA22A}"/>
+                <a16:creationId xmlns:a16="http://schemas.microsoft.com/office/drawing/2014/main" id="{E9E422A4-AB36-44FA-955D-FFC1F9886053}"/>
               </a:ext>
             </a:extLst>
           </p:cNvPr>
@@ -28111,6 +29558,7 @@
               </a:defRPr>
             </a:defPPr>
             <a:lvl1pPr>
+              <a:buNone/>
               <a:defRPr sz="2025">
                 <a:solidFill>
                   <a:srgbClr val="172B3A"/>
@@ -28121,6 +29569,7 @@
               </a:defRPr>
             </a:lvl1pPr>
             <a:lvl2pPr>
+              <a:buNone/>
               <a:defRPr sz="2025">
                 <a:solidFill>
                   <a:srgbClr val="172B3A"/>
@@ -28131,6 +29580,7 @@
               </a:defRPr>
             </a:lvl2pPr>
             <a:lvl3pPr>
+              <a:buNone/>
               <a:defRPr sz="2025">
                 <a:solidFill>
                   <a:srgbClr val="172B3A"/>
@@ -28141,6 +29591,7 @@
               </a:defRPr>
             </a:lvl3pPr>
             <a:lvl4pPr>
+              <a:buNone/>
               <a:defRPr sz="2025">
                 <a:solidFill>
                   <a:srgbClr val="172B3A"/>
@@ -28151,6 +29602,7 @@
               </a:defRPr>
             </a:lvl4pPr>
             <a:lvl5pPr>
+              <a:buNone/>
               <a:defRPr sz="2025">
                 <a:solidFill>
                   <a:srgbClr val="172B3A"/>
@@ -28161,6 +29613,7 @@
               </a:defRPr>
             </a:lvl5pPr>
             <a:lvl6pPr>
+              <a:buNone/>
               <a:defRPr sz="2025">
                 <a:solidFill>
                   <a:srgbClr val="172B3A"/>
@@ -28171,6 +29624,7 @@
               </a:defRPr>
             </a:lvl6pPr>
             <a:lvl7pPr>
+              <a:buNone/>
               <a:defRPr sz="2025">
                 <a:solidFill>
                   <a:srgbClr val="172B3A"/>
@@ -28181,6 +29635,7 @@
               </a:defRPr>
             </a:lvl7pPr>
             <a:lvl8pPr>
+              <a:buNone/>
               <a:defRPr sz="2025">
                 <a:solidFill>
                   <a:srgbClr val="172B3A"/>
@@ -28191,6 +29646,7 @@
               </a:defRPr>
             </a:lvl8pPr>
             <a:lvl9pPr>
+              <a:buNone/>
               <a:defRPr sz="2025">
                 <a:solidFill>
                   <a:srgbClr val="172B3A"/>
@@ -28203,6 +29659,7 @@
           </a:lstStyle>
           <a:p xmlns:a="http://schemas.openxmlformats.org/drawingml/2006/main">
             <a:pPr>
+              <a:buNone/>
               <a:defRPr sz="2025">
                 <a:solidFill>
                   <a:srgbClr val="172B3A"/>
@@ -28231,6 +29688,7 @@
           </a:p>
           <a:p xmlns:a="http://schemas.openxmlformats.org/drawingml/2006/main">
             <a:pPr>
+              <a:buNone/>
               <a:defRPr sz="2025">
                 <a:solidFill>
                   <a:srgbClr val="172B3A"/>
@@ -28324,6 +29782,7 @@
               </a:defRPr>
             </a:defPPr>
             <a:lvl1pPr>
+              <a:buNone/>
               <a:defRPr sz="2925">
                 <a:solidFill>
                   <a:srgbClr val="172B3A"/>
@@ -28334,6 +29793,7 @@
               </a:defRPr>
             </a:lvl1pPr>
             <a:lvl2pPr>
+              <a:buNone/>
               <a:defRPr sz="2925">
                 <a:solidFill>
                   <a:srgbClr val="172B3A"/>
@@ -28344,6 +29804,7 @@
               </a:defRPr>
             </a:lvl2pPr>
             <a:lvl3pPr>
+              <a:buNone/>
               <a:defRPr sz="2925">
                 <a:solidFill>
                   <a:srgbClr val="172B3A"/>
@@ -28354,6 +29815,7 @@
               </a:defRPr>
             </a:lvl3pPr>
             <a:lvl4pPr>
+              <a:buNone/>
               <a:defRPr sz="2925">
                 <a:solidFill>
                   <a:srgbClr val="172B3A"/>
@@ -28364,6 +29826,7 @@
               </a:defRPr>
             </a:lvl4pPr>
             <a:lvl5pPr>
+              <a:buNone/>
               <a:defRPr sz="2925">
                 <a:solidFill>
                   <a:srgbClr val="172B3A"/>
@@ -28374,6 +29837,7 @@
               </a:defRPr>
             </a:lvl5pPr>
             <a:lvl6pPr>
+              <a:buNone/>
               <a:defRPr sz="2925">
                 <a:solidFill>
                   <a:srgbClr val="172B3A"/>
@@ -28384,6 +29848,7 @@
               </a:defRPr>
             </a:lvl6pPr>
             <a:lvl7pPr>
+              <a:buNone/>
               <a:defRPr sz="2925">
                 <a:solidFill>
                   <a:srgbClr val="172B3A"/>
@@ -28394,6 +29859,7 @@
               </a:defRPr>
             </a:lvl7pPr>
             <a:lvl8pPr>
+              <a:buNone/>
               <a:defRPr sz="2925">
                 <a:solidFill>
                   <a:srgbClr val="172B3A"/>
@@ -28404,6 +29870,7 @@
               </a:defRPr>
             </a:lvl8pPr>
             <a:lvl9pPr>
+              <a:buNone/>
               <a:defRPr sz="2925">
                 <a:solidFill>
                   <a:srgbClr val="172B3A"/>
@@ -28416,6 +29883,7 @@
           </a:lstStyle>
           <a:p xmlns:a="http://schemas.openxmlformats.org/drawingml/2006/main">
             <a:pPr>
+              <a:buNone/>
               <a:defRPr sz="2925">
                 <a:solidFill>
                   <a:srgbClr val="172B3A"/>
@@ -28480,6 +29948,7 @@
               </a:defRPr>
             </a:defPPr>
             <a:lvl1pPr>
+              <a:buNone/>
               <a:defRPr sz="1200">
                 <a:solidFill>
                   <a:srgbClr val="687985"/>
@@ -28490,6 +29959,7 @@
               </a:defRPr>
             </a:lvl1pPr>
             <a:lvl2pPr>
+              <a:buNone/>
               <a:defRPr sz="1200">
                 <a:solidFill>
                   <a:srgbClr val="687985"/>
@@ -28500,6 +29970,7 @@
               </a:defRPr>
             </a:lvl2pPr>
             <a:lvl3pPr>
+              <a:buNone/>
               <a:defRPr sz="1200">
                 <a:solidFill>
                   <a:srgbClr val="687985"/>
@@ -28510,6 +29981,7 @@
               </a:defRPr>
             </a:lvl3pPr>
             <a:lvl4pPr>
+              <a:buNone/>
               <a:defRPr sz="1200">
                 <a:solidFill>
                   <a:srgbClr val="687985"/>
@@ -28520,6 +29992,7 @@
               </a:defRPr>
             </a:lvl4pPr>
             <a:lvl5pPr>
+              <a:buNone/>
               <a:defRPr sz="1200">
                 <a:solidFill>
                   <a:srgbClr val="687985"/>
@@ -28530,6 +30003,7 @@
               </a:defRPr>
             </a:lvl5pPr>
             <a:lvl6pPr>
+              <a:buNone/>
               <a:defRPr sz="1200">
                 <a:solidFill>
                   <a:srgbClr val="687985"/>
@@ -28540,6 +30014,7 @@
               </a:defRPr>
             </a:lvl6pPr>
             <a:lvl7pPr>
+              <a:buNone/>
               <a:defRPr sz="1200">
                 <a:solidFill>
                   <a:srgbClr val="687985"/>
@@ -28550,6 +30025,7 @@
               </a:defRPr>
             </a:lvl7pPr>
             <a:lvl8pPr>
+              <a:buNone/>
               <a:defRPr sz="1200">
                 <a:solidFill>
                   <a:srgbClr val="687985"/>
@@ -28560,6 +30036,7 @@
               </a:defRPr>
             </a:lvl8pPr>
             <a:lvl9pPr>
+              <a:buNone/>
               <a:defRPr sz="1200">
                 <a:solidFill>
                   <a:srgbClr val="687985"/>
@@ -28572,6 +30049,7 @@
           </a:lstStyle>
           <a:p xmlns:a="http://schemas.openxmlformats.org/drawingml/2006/main">
             <a:pPr>
+              <a:buNone/>
               <a:defRPr sz="1200">
                 <a:solidFill>
                   <a:srgbClr val="687985"/>
@@ -28636,6 +30114,7 @@
               </a:defRPr>
             </a:defPPr>
             <a:lvl1pPr>
+              <a:buNone/>
               <a:defRPr sz="1200">
                 <a:solidFill>
                   <a:srgbClr val="172B3A"/>
@@ -28646,6 +30125,7 @@
               </a:defRPr>
             </a:lvl1pPr>
             <a:lvl2pPr>
+              <a:buNone/>
               <a:defRPr sz="1200">
                 <a:solidFill>
                   <a:srgbClr val="172B3A"/>
@@ -28656,6 +30136,7 @@
               </a:defRPr>
             </a:lvl2pPr>
             <a:lvl3pPr>
+              <a:buNone/>
               <a:defRPr sz="1200">
                 <a:solidFill>
                   <a:srgbClr val="172B3A"/>
@@ -28666,6 +30147,7 @@
               </a:defRPr>
             </a:lvl3pPr>
             <a:lvl4pPr>
+              <a:buNone/>
               <a:defRPr sz="1200">
                 <a:solidFill>
                   <a:srgbClr val="172B3A"/>
@@ -28676,6 +30158,7 @@
               </a:defRPr>
             </a:lvl4pPr>
             <a:lvl5pPr>
+              <a:buNone/>
               <a:defRPr sz="1200">
                 <a:solidFill>
                   <a:srgbClr val="172B3A"/>
@@ -28686,6 +30169,7 @@
               </a:defRPr>
             </a:lvl5pPr>
             <a:lvl6pPr>
+              <a:buNone/>
               <a:defRPr sz="1200">
                 <a:solidFill>
                   <a:srgbClr val="172B3A"/>
@@ -28696,6 +30180,7 @@
               </a:defRPr>
             </a:lvl6pPr>
             <a:lvl7pPr>
+              <a:buNone/>
               <a:defRPr sz="1200">
                 <a:solidFill>
                   <a:srgbClr val="172B3A"/>
@@ -28706,6 +30191,7 @@
               </a:defRPr>
             </a:lvl7pPr>
             <a:lvl8pPr>
+              <a:buNone/>
               <a:defRPr sz="1200">
                 <a:solidFill>
                   <a:srgbClr val="172B3A"/>
@@ -28716,6 +30202,7 @@
               </a:defRPr>
             </a:lvl8pPr>
             <a:lvl9pPr>
+              <a:buNone/>
               <a:defRPr sz="1200">
                 <a:solidFill>
                   <a:srgbClr val="172B3A"/>
@@ -28728,6 +30215,7 @@
           </a:lstStyle>
           <a:p xmlns:a="http://schemas.openxmlformats.org/drawingml/2006/main">
             <a:pPr>
+              <a:buNone/>
               <a:defRPr sz="1200">
                 <a:solidFill>
                   <a:srgbClr val="172B3A"/>
@@ -28792,6 +30280,7 @@
               </a:defRPr>
             </a:defPPr>
             <a:lvl1pPr>
+              <a:buNone/>
               <a:defRPr sz="2175">
                 <a:solidFill>
                   <a:srgbClr val="172B3A"/>
@@ -28802,6 +30291,7 @@
               </a:defRPr>
             </a:lvl1pPr>
             <a:lvl2pPr>
+              <a:buNone/>
               <a:defRPr sz="2175">
                 <a:solidFill>
                   <a:srgbClr val="172B3A"/>
@@ -28812,6 +30302,7 @@
               </a:defRPr>
             </a:lvl2pPr>
             <a:lvl3pPr>
+              <a:buNone/>
               <a:defRPr sz="2175">
                 <a:solidFill>
                   <a:srgbClr val="172B3A"/>
@@ -28822,6 +30313,7 @@
               </a:defRPr>
             </a:lvl3pPr>
             <a:lvl4pPr>
+              <a:buNone/>
               <a:defRPr sz="2175">
                 <a:solidFill>
                   <a:srgbClr val="172B3A"/>
@@ -28832,6 +30324,7 @@
               </a:defRPr>
             </a:lvl4pPr>
             <a:lvl5pPr>
+              <a:buNone/>
               <a:defRPr sz="2175">
                 <a:solidFill>
                   <a:srgbClr val="172B3A"/>
@@ -28842,6 +30335,7 @@
               </a:defRPr>
             </a:lvl5pPr>
             <a:lvl6pPr>
+              <a:buNone/>
               <a:defRPr sz="2175">
                 <a:solidFill>
                   <a:srgbClr val="172B3A"/>
@@ -28852,6 +30346,7 @@
               </a:defRPr>
             </a:lvl6pPr>
             <a:lvl7pPr>
+              <a:buNone/>
               <a:defRPr sz="2175">
                 <a:solidFill>
                   <a:srgbClr val="172B3A"/>
@@ -28862,6 +30357,7 @@
               </a:defRPr>
             </a:lvl7pPr>
             <a:lvl8pPr>
+              <a:buNone/>
               <a:defRPr sz="2175">
                 <a:solidFill>
                   <a:srgbClr val="172B3A"/>
@@ -28872,6 +30368,7 @@
               </a:defRPr>
             </a:lvl8pPr>
             <a:lvl9pPr>
+              <a:buNone/>
               <a:defRPr sz="2175">
                 <a:solidFill>
                   <a:srgbClr val="172B3A"/>
@@ -28884,6 +30381,7 @@
           </a:lstStyle>
           <a:p xmlns:a="http://schemas.openxmlformats.org/drawingml/2006/main">
             <a:pPr>
+              <a:buNone/>
               <a:defRPr sz="2175">
                 <a:solidFill>
                   <a:srgbClr val="172B3A"/>
@@ -28912,6 +30410,7 @@
           </a:p>
           <a:p xmlns:a="http://schemas.openxmlformats.org/drawingml/2006/main">
             <a:pPr>
+              <a:buNone/>
               <a:defRPr sz="2175">
                 <a:solidFill>
                   <a:srgbClr val="172B3A"/>
@@ -28940,6 +30439,7 @@
           </a:p>
           <a:p xmlns:a="http://schemas.openxmlformats.org/drawingml/2006/main">
             <a:pPr>
+              <a:buNone/>
               <a:defRPr sz="2175">
                 <a:solidFill>
                   <a:srgbClr val="172B3A"/>
@@ -28968,6 +30468,7 @@
           </a:p>
           <a:p xmlns:a="http://schemas.openxmlformats.org/drawingml/2006/main">
             <a:pPr>
+              <a:buNone/>
               <a:defRPr sz="2175">
                 <a:solidFill>
                   <a:srgbClr val="172B3A"/>
@@ -29032,6 +30533,7 @@
               </a:defRPr>
             </a:defPPr>
             <a:lvl1pPr>
+              <a:buNone/>
               <a:defRPr sz="1800">
                 <a:solidFill>
                   <a:srgbClr val="176B87"/>
@@ -29042,6 +30544,7 @@
               </a:defRPr>
             </a:lvl1pPr>
             <a:lvl2pPr>
+              <a:buNone/>
               <a:defRPr sz="1800">
                 <a:solidFill>
                   <a:srgbClr val="176B87"/>
@@ -29052,6 +30555,7 @@
               </a:defRPr>
             </a:lvl2pPr>
             <a:lvl3pPr>
+              <a:buNone/>
               <a:defRPr sz="1800">
                 <a:solidFill>
                   <a:srgbClr val="176B87"/>
@@ -29062,6 +30566,7 @@
               </a:defRPr>
             </a:lvl3pPr>
             <a:lvl4pPr>
+              <a:buNone/>
               <a:defRPr sz="1800">
                 <a:solidFill>
                   <a:srgbClr val="176B87"/>
@@ -29072,6 +30577,7 @@
               </a:defRPr>
             </a:lvl4pPr>
             <a:lvl5pPr>
+              <a:buNone/>
               <a:defRPr sz="1800">
                 <a:solidFill>
                   <a:srgbClr val="176B87"/>
@@ -29082,6 +30588,7 @@
               </a:defRPr>
             </a:lvl5pPr>
             <a:lvl6pPr>
+              <a:buNone/>
               <a:defRPr sz="1800">
                 <a:solidFill>
                   <a:srgbClr val="176B87"/>
@@ -29092,6 +30599,7 @@
               </a:defRPr>
             </a:lvl6pPr>
             <a:lvl7pPr>
+              <a:buNone/>
               <a:defRPr sz="1800">
                 <a:solidFill>
                   <a:srgbClr val="176B87"/>
@@ -29102,6 +30610,7 @@
               </a:defRPr>
             </a:lvl7pPr>
             <a:lvl8pPr>
+              <a:buNone/>
               <a:defRPr sz="1800">
                 <a:solidFill>
                   <a:srgbClr val="176B87"/>
@@ -29112,6 +30621,7 @@
               </a:defRPr>
             </a:lvl8pPr>
             <a:lvl9pPr>
+              <a:buNone/>
               <a:defRPr sz="1800">
                 <a:solidFill>
                   <a:srgbClr val="176B87"/>
@@ -29124,6 +30634,7 @@
           </a:lstStyle>
           <a:p xmlns:a="http://schemas.openxmlformats.org/drawingml/2006/main">
             <a:pPr>
+              <a:buNone/>
               <a:defRPr sz="1800">
                 <a:solidFill>
                   <a:srgbClr val="176B87"/>
@@ -29147,6 +30658,7 @@
           </a:p>
           <a:p xmlns:a="http://schemas.openxmlformats.org/drawingml/2006/main">
             <a:pPr>
+              <a:buNone/>
               <a:defRPr sz="1800">
                 <a:solidFill>
                   <a:srgbClr val="176B87"/>
@@ -29941,6 +31453,4056 @@
 </p:sld>
 </file>
 
+<file path=ppt/slides/slide20.xml><?xml version="1.0" encoding="utf-8"?>
+<p:sld xmlns:p="http://schemas.openxmlformats.org/presentationml/2006/main">
+  <p:cSld>
+    <p:bg>
+      <p:bgPr>
+        <a:solidFill xmlns:a="http://schemas.openxmlformats.org/drawingml/2006/main">
+          <a:srgbClr val="FFFFFF"/>
+        </a:solidFill>
+      </p:bgPr>
+    </p:bg>
+    <p:spTree>
+      <p:nvGrpSpPr>
+        <p:cNvPr id="1" name=""/>
+        <p:cNvGrpSpPr/>
+        <p:nvPr/>
+      </p:nvGrpSpPr>
+      <p:grpSpPr>
+        <a:xfrm xmlns:a="http://schemas.openxmlformats.org/drawingml/2006/main"/>
+      </p:grpSpPr>
+      <p:sp>
+        <p:nvSpPr>
+          <p:cNvPr id="7" name="">
+            <a:extLst xmlns:a="http://schemas.openxmlformats.org/drawingml/2006/main">
+              <a:ext uri="{FF2B5EF4-FFF2-40B4-BE49-F238E27FC236}">
+                <a16:creationId xmlns:a16="http://schemas.microsoft.com/office/drawing/2014/main" id="{F0103861-DD26-41E7-A7E1-E71E1B20B23A}"/>
+              </a:ext>
+            </a:extLst>
+          </p:cNvPr>
+          <p:cNvSpPr>
+            <a:spLocks xmlns:a="http://schemas.openxmlformats.org/drawingml/2006/main" noGrp="1"/>
+          </p:cNvSpPr>
+          <p:nvPr/>
+        </p:nvSpPr>
+        <p:spPr>
+          <a:xfrm xmlns:a="http://schemas.openxmlformats.org/drawingml/2006/main">
+            <a:off x="571500" y="381000"/>
+            <a:ext cx="11049000" cy="857250"/>
+          </a:xfrm>
+          <a:prstGeom xmlns:a="http://schemas.openxmlformats.org/drawingml/2006/main" prst="rect">
+            <a:avLst/>
+          </a:prstGeom>
+          <a:noFill xmlns:a="http://schemas.openxmlformats.org/drawingml/2006/main"/>
+          <a:ln xmlns:a="http://schemas.openxmlformats.org/drawingml/2006/main" w="0">
+            <a:noFill/>
+          </a:ln>
+        </p:spPr>
+        <p:txBody>
+          <a:bodyPr xmlns:a="http://schemas.openxmlformats.org/drawingml/2006/main"/>
+          <a:lstStyle xmlns:a="http://schemas.openxmlformats.org/drawingml/2006/main">
+            <a:defPPr>
+              <a:defRPr sz="2925">
+                <a:solidFill>
+                  <a:srgbClr val="172B3A"/>
+                </a:solidFill>
+                <a:latin typeface="Arial Unicode MS"/>
+                <a:ea typeface="Arial Unicode MS"/>
+                <a:cs typeface="Arial Unicode MS"/>
+              </a:defRPr>
+            </a:defPPr>
+            <a:lvl1pPr>
+              <a:defRPr sz="2925">
+                <a:solidFill>
+                  <a:srgbClr val="172B3A"/>
+                </a:solidFill>
+                <a:latin typeface="Arial Unicode MS"/>
+                <a:ea typeface="Arial Unicode MS"/>
+                <a:cs typeface="Arial Unicode MS"/>
+              </a:defRPr>
+            </a:lvl1pPr>
+            <a:lvl2pPr>
+              <a:defRPr sz="2925">
+                <a:solidFill>
+                  <a:srgbClr val="172B3A"/>
+                </a:solidFill>
+                <a:latin typeface="Arial Unicode MS"/>
+                <a:ea typeface="Arial Unicode MS"/>
+                <a:cs typeface="Arial Unicode MS"/>
+              </a:defRPr>
+            </a:lvl2pPr>
+            <a:lvl3pPr>
+              <a:defRPr sz="2925">
+                <a:solidFill>
+                  <a:srgbClr val="172B3A"/>
+                </a:solidFill>
+                <a:latin typeface="Arial Unicode MS"/>
+                <a:ea typeface="Arial Unicode MS"/>
+                <a:cs typeface="Arial Unicode MS"/>
+              </a:defRPr>
+            </a:lvl3pPr>
+            <a:lvl4pPr>
+              <a:defRPr sz="2925">
+                <a:solidFill>
+                  <a:srgbClr val="172B3A"/>
+                </a:solidFill>
+                <a:latin typeface="Arial Unicode MS"/>
+                <a:ea typeface="Arial Unicode MS"/>
+                <a:cs typeface="Arial Unicode MS"/>
+              </a:defRPr>
+            </a:lvl4pPr>
+            <a:lvl5pPr>
+              <a:defRPr sz="2925">
+                <a:solidFill>
+                  <a:srgbClr val="172B3A"/>
+                </a:solidFill>
+                <a:latin typeface="Arial Unicode MS"/>
+                <a:ea typeface="Arial Unicode MS"/>
+                <a:cs typeface="Arial Unicode MS"/>
+              </a:defRPr>
+            </a:lvl5pPr>
+            <a:lvl6pPr>
+              <a:defRPr sz="2925">
+                <a:solidFill>
+                  <a:srgbClr val="172B3A"/>
+                </a:solidFill>
+                <a:latin typeface="Arial Unicode MS"/>
+                <a:ea typeface="Arial Unicode MS"/>
+                <a:cs typeface="Arial Unicode MS"/>
+              </a:defRPr>
+            </a:lvl6pPr>
+            <a:lvl7pPr>
+              <a:defRPr sz="2925">
+                <a:solidFill>
+                  <a:srgbClr val="172B3A"/>
+                </a:solidFill>
+                <a:latin typeface="Arial Unicode MS"/>
+                <a:ea typeface="Arial Unicode MS"/>
+                <a:cs typeface="Arial Unicode MS"/>
+              </a:defRPr>
+            </a:lvl7pPr>
+            <a:lvl8pPr>
+              <a:defRPr sz="2925">
+                <a:solidFill>
+                  <a:srgbClr val="172B3A"/>
+                </a:solidFill>
+                <a:latin typeface="Arial Unicode MS"/>
+                <a:ea typeface="Arial Unicode MS"/>
+                <a:cs typeface="Arial Unicode MS"/>
+              </a:defRPr>
+            </a:lvl8pPr>
+            <a:lvl9pPr>
+              <a:defRPr sz="2925">
+                <a:solidFill>
+                  <a:srgbClr val="172B3A"/>
+                </a:solidFill>
+                <a:latin typeface="Arial Unicode MS"/>
+                <a:ea typeface="Arial Unicode MS"/>
+                <a:cs typeface="Arial Unicode MS"/>
+              </a:defRPr>
+            </a:lvl9pPr>
+          </a:lstStyle>
+          <a:p xmlns:a="http://schemas.openxmlformats.org/drawingml/2006/main">
+            <a:pPr>
+              <a:defRPr sz="2925">
+                <a:solidFill>
+                  <a:srgbClr val="172B3A"/>
+                </a:solidFill>
+                <a:latin typeface="Arial Unicode MS"/>
+                <a:ea typeface="Arial Unicode MS"/>
+                <a:cs typeface="Arial Unicode MS"/>
+              </a:defRPr>
+            </a:pPr>
+            <a:r>
+              <a:rPr sz="2925">
+                <a:solidFill>
+                  <a:srgbClr val="172B3A"/>
+                </a:solidFill>
+                <a:latin typeface="Arial Unicode MS"/>
+                <a:ea typeface="Arial Unicode MS"/>
+                <a:cs typeface="Arial Unicode MS"/>
+              </a:rPr>
+              <a:t>补充清洗：无缺失值仍可能存在统计跳变</a:t>
+            </a:r>
+          </a:p>
+        </p:txBody>
+      </p:sp>
+      <p:sp>
+        <p:nvSpPr>
+          <p:cNvPr id="2" name="">
+            <a:extLst xmlns:a="http://schemas.openxmlformats.org/drawingml/2006/main">
+              <a:ext uri="{FF2B5EF4-FFF2-40B4-BE49-F238E27FC236}">
+                <a16:creationId xmlns:a16="http://schemas.microsoft.com/office/drawing/2014/main" id="{D2011CE9-A6FC-4267-BAAB-305FF0627A62}"/>
+              </a:ext>
+            </a:extLst>
+          </p:cNvPr>
+          <p:cNvSpPr>
+            <a:spLocks xmlns:a="http://schemas.openxmlformats.org/drawingml/2006/main" noGrp="1"/>
+          </p:cNvSpPr>
+          <p:nvPr/>
+        </p:nvSpPr>
+        <p:spPr>
+          <a:xfrm xmlns:a="http://schemas.openxmlformats.org/drawingml/2006/main">
+            <a:off x="571500" y="6334125"/>
+            <a:ext cx="10477500" cy="285750"/>
+          </a:xfrm>
+          <a:prstGeom xmlns:a="http://schemas.openxmlformats.org/drawingml/2006/main" prst="rect">
+            <a:avLst/>
+          </a:prstGeom>
+          <a:noFill xmlns:a="http://schemas.openxmlformats.org/drawingml/2006/main"/>
+          <a:ln xmlns:a="http://schemas.openxmlformats.org/drawingml/2006/main" w="0">
+            <a:noFill/>
+          </a:ln>
+        </p:spPr>
+        <p:txBody>
+          <a:bodyPr xmlns:a="http://schemas.openxmlformats.org/drawingml/2006/main"/>
+          <a:lstStyle xmlns:a="http://schemas.openxmlformats.org/drawingml/2006/main">
+            <a:defPPr>
+              <a:defRPr sz="1200">
+                <a:solidFill>
+                  <a:srgbClr val="687985"/>
+                </a:solidFill>
+                <a:latin typeface="Arial Unicode MS"/>
+                <a:ea typeface="Arial Unicode MS"/>
+                <a:cs typeface="Arial Unicode MS"/>
+              </a:defRPr>
+            </a:defPPr>
+            <a:lvl1pPr>
+              <a:defRPr sz="1200">
+                <a:solidFill>
+                  <a:srgbClr val="687985"/>
+                </a:solidFill>
+                <a:latin typeface="Arial Unicode MS"/>
+                <a:ea typeface="Arial Unicode MS"/>
+                <a:cs typeface="Arial Unicode MS"/>
+              </a:defRPr>
+            </a:lvl1pPr>
+            <a:lvl2pPr>
+              <a:defRPr sz="1200">
+                <a:solidFill>
+                  <a:srgbClr val="687985"/>
+                </a:solidFill>
+                <a:latin typeface="Arial Unicode MS"/>
+                <a:ea typeface="Arial Unicode MS"/>
+                <a:cs typeface="Arial Unicode MS"/>
+              </a:defRPr>
+            </a:lvl2pPr>
+            <a:lvl3pPr>
+              <a:defRPr sz="1200">
+                <a:solidFill>
+                  <a:srgbClr val="687985"/>
+                </a:solidFill>
+                <a:latin typeface="Arial Unicode MS"/>
+                <a:ea typeface="Arial Unicode MS"/>
+                <a:cs typeface="Arial Unicode MS"/>
+              </a:defRPr>
+            </a:lvl3pPr>
+            <a:lvl4pPr>
+              <a:defRPr sz="1200">
+                <a:solidFill>
+                  <a:srgbClr val="687985"/>
+                </a:solidFill>
+                <a:latin typeface="Arial Unicode MS"/>
+                <a:ea typeface="Arial Unicode MS"/>
+                <a:cs typeface="Arial Unicode MS"/>
+              </a:defRPr>
+            </a:lvl4pPr>
+            <a:lvl5pPr>
+              <a:defRPr sz="1200">
+                <a:solidFill>
+                  <a:srgbClr val="687985"/>
+                </a:solidFill>
+                <a:latin typeface="Arial Unicode MS"/>
+                <a:ea typeface="Arial Unicode MS"/>
+                <a:cs typeface="Arial Unicode MS"/>
+              </a:defRPr>
+            </a:lvl5pPr>
+            <a:lvl6pPr>
+              <a:defRPr sz="1200">
+                <a:solidFill>
+                  <a:srgbClr val="687985"/>
+                </a:solidFill>
+                <a:latin typeface="Arial Unicode MS"/>
+                <a:ea typeface="Arial Unicode MS"/>
+                <a:cs typeface="Arial Unicode MS"/>
+              </a:defRPr>
+            </a:lvl6pPr>
+            <a:lvl7pPr>
+              <a:defRPr sz="1200">
+                <a:solidFill>
+                  <a:srgbClr val="687985"/>
+                </a:solidFill>
+                <a:latin typeface="Arial Unicode MS"/>
+                <a:ea typeface="Arial Unicode MS"/>
+                <a:cs typeface="Arial Unicode MS"/>
+              </a:defRPr>
+            </a:lvl7pPr>
+            <a:lvl8pPr>
+              <a:defRPr sz="1200">
+                <a:solidFill>
+                  <a:srgbClr val="687985"/>
+                </a:solidFill>
+                <a:latin typeface="Arial Unicode MS"/>
+                <a:ea typeface="Arial Unicode MS"/>
+                <a:cs typeface="Arial Unicode MS"/>
+              </a:defRPr>
+            </a:lvl8pPr>
+            <a:lvl9pPr>
+              <a:defRPr sz="1200">
+                <a:solidFill>
+                  <a:srgbClr val="687985"/>
+                </a:solidFill>
+                <a:latin typeface="Arial Unicode MS"/>
+                <a:ea typeface="Arial Unicode MS"/>
+                <a:cs typeface="Arial Unicode MS"/>
+              </a:defRPr>
+            </a:lvl9pPr>
+          </a:lstStyle>
+          <a:p xmlns:a="http://schemas.openxmlformats.org/drawingml/2006/main">
+            <a:pPr>
+              <a:defRPr sz="1200">
+                <a:solidFill>
+                  <a:srgbClr val="687985"/>
+                </a:solidFill>
+                <a:latin typeface="Arial Unicode MS"/>
+                <a:ea typeface="Arial Unicode MS"/>
+                <a:cs typeface="Arial Unicode MS"/>
+              </a:defRPr>
+            </a:pPr>
+            <a:r>
+              <a:rPr sz="1200">
+                <a:solidFill>
+                  <a:srgbClr val="687985"/>
+                </a:solidFill>
+                <a:latin typeface="Arial Unicode MS"/>
+                <a:ea typeface="Arial Unicode MS"/>
+                <a:cs typeface="Arial Unicode MS"/>
+              </a:rPr>
+              <a:t>工作过程记录  |  杨晓真 25121619  |  2026.10.26</a:t>
+            </a:r>
+          </a:p>
+        </p:txBody>
+      </p:sp>
+      <p:sp>
+        <p:nvSpPr>
+          <p:cNvPr id="3" name="">
+            <a:extLst xmlns:a="http://schemas.openxmlformats.org/drawingml/2006/main">
+              <a:ext uri="{FF2B5EF4-FFF2-40B4-BE49-F238E27FC236}">
+                <a16:creationId xmlns:a16="http://schemas.microsoft.com/office/drawing/2014/main" id="{81532ADB-8B26-4A5E-82BA-6B36B2D6FDA7}"/>
+              </a:ext>
+            </a:extLst>
+          </p:cNvPr>
+          <p:cNvSpPr>
+            <a:spLocks xmlns:a="http://schemas.openxmlformats.org/drawingml/2006/main" noGrp="1"/>
+          </p:cNvSpPr>
+          <p:nvPr/>
+        </p:nvSpPr>
+        <p:spPr>
+          <a:xfrm xmlns:a="http://schemas.openxmlformats.org/drawingml/2006/main">
+            <a:off x="11144250" y="6334125"/>
+            <a:ext cx="714375" cy="285750"/>
+          </a:xfrm>
+          <a:prstGeom xmlns:a="http://schemas.openxmlformats.org/drawingml/2006/main" prst="rect">
+            <a:avLst/>
+          </a:prstGeom>
+          <a:noFill xmlns:a="http://schemas.openxmlformats.org/drawingml/2006/main"/>
+          <a:ln xmlns:a="http://schemas.openxmlformats.org/drawingml/2006/main" w="0">
+            <a:noFill/>
+          </a:ln>
+        </p:spPr>
+        <p:txBody>
+          <a:bodyPr xmlns:a="http://schemas.openxmlformats.org/drawingml/2006/main"/>
+          <a:lstStyle xmlns:a="http://schemas.openxmlformats.org/drawingml/2006/main">
+            <a:defPPr>
+              <a:defRPr sz="1200">
+                <a:solidFill>
+                  <a:srgbClr val="172B3A"/>
+                </a:solidFill>
+                <a:latin typeface="Arial Unicode MS"/>
+                <a:ea typeface="Arial Unicode MS"/>
+                <a:cs typeface="Arial Unicode MS"/>
+              </a:defRPr>
+            </a:defPPr>
+            <a:lvl1pPr>
+              <a:defRPr sz="1200">
+                <a:solidFill>
+                  <a:srgbClr val="172B3A"/>
+                </a:solidFill>
+                <a:latin typeface="Arial Unicode MS"/>
+                <a:ea typeface="Arial Unicode MS"/>
+                <a:cs typeface="Arial Unicode MS"/>
+              </a:defRPr>
+            </a:lvl1pPr>
+            <a:lvl2pPr>
+              <a:defRPr sz="1200">
+                <a:solidFill>
+                  <a:srgbClr val="172B3A"/>
+                </a:solidFill>
+                <a:latin typeface="Arial Unicode MS"/>
+                <a:ea typeface="Arial Unicode MS"/>
+                <a:cs typeface="Arial Unicode MS"/>
+              </a:defRPr>
+            </a:lvl2pPr>
+            <a:lvl3pPr>
+              <a:defRPr sz="1200">
+                <a:solidFill>
+                  <a:srgbClr val="172B3A"/>
+                </a:solidFill>
+                <a:latin typeface="Arial Unicode MS"/>
+                <a:ea typeface="Arial Unicode MS"/>
+                <a:cs typeface="Arial Unicode MS"/>
+              </a:defRPr>
+            </a:lvl3pPr>
+            <a:lvl4pPr>
+              <a:defRPr sz="1200">
+                <a:solidFill>
+                  <a:srgbClr val="172B3A"/>
+                </a:solidFill>
+                <a:latin typeface="Arial Unicode MS"/>
+                <a:ea typeface="Arial Unicode MS"/>
+                <a:cs typeface="Arial Unicode MS"/>
+              </a:defRPr>
+            </a:lvl4pPr>
+            <a:lvl5pPr>
+              <a:defRPr sz="1200">
+                <a:solidFill>
+                  <a:srgbClr val="172B3A"/>
+                </a:solidFill>
+                <a:latin typeface="Arial Unicode MS"/>
+                <a:ea typeface="Arial Unicode MS"/>
+                <a:cs typeface="Arial Unicode MS"/>
+              </a:defRPr>
+            </a:lvl5pPr>
+            <a:lvl6pPr>
+              <a:defRPr sz="1200">
+                <a:solidFill>
+                  <a:srgbClr val="172B3A"/>
+                </a:solidFill>
+                <a:latin typeface="Arial Unicode MS"/>
+                <a:ea typeface="Arial Unicode MS"/>
+                <a:cs typeface="Arial Unicode MS"/>
+              </a:defRPr>
+            </a:lvl6pPr>
+            <a:lvl7pPr>
+              <a:defRPr sz="1200">
+                <a:solidFill>
+                  <a:srgbClr val="172B3A"/>
+                </a:solidFill>
+                <a:latin typeface="Arial Unicode MS"/>
+                <a:ea typeface="Arial Unicode MS"/>
+                <a:cs typeface="Arial Unicode MS"/>
+              </a:defRPr>
+            </a:lvl7pPr>
+            <a:lvl8pPr>
+              <a:defRPr sz="1200">
+                <a:solidFill>
+                  <a:srgbClr val="172B3A"/>
+                </a:solidFill>
+                <a:latin typeface="Arial Unicode MS"/>
+                <a:ea typeface="Arial Unicode MS"/>
+                <a:cs typeface="Arial Unicode MS"/>
+              </a:defRPr>
+            </a:lvl8pPr>
+            <a:lvl9pPr>
+              <a:defRPr sz="1200">
+                <a:solidFill>
+                  <a:srgbClr val="172B3A"/>
+                </a:solidFill>
+                <a:latin typeface="Arial Unicode MS"/>
+                <a:ea typeface="Arial Unicode MS"/>
+                <a:cs typeface="Arial Unicode MS"/>
+              </a:defRPr>
+            </a:lvl9pPr>
+          </a:lstStyle>
+          <a:p xmlns:a="http://schemas.openxmlformats.org/drawingml/2006/main">
+            <a:pPr>
+              <a:defRPr sz="1200">
+                <a:solidFill>
+                  <a:srgbClr val="172B3A"/>
+                </a:solidFill>
+                <a:latin typeface="Arial Unicode MS"/>
+                <a:ea typeface="Arial Unicode MS"/>
+                <a:cs typeface="Arial Unicode MS"/>
+              </a:defRPr>
+            </a:pPr>
+            <a:r>
+              <a:rPr sz="1200">
+                <a:solidFill>
+                  <a:srgbClr val="172B3A"/>
+                </a:solidFill>
+                <a:latin typeface="Arial Unicode MS"/>
+                <a:ea typeface="Arial Unicode MS"/>
+                <a:cs typeface="Arial Unicode MS"/>
+              </a:rPr>
+              <a:t>20</a:t>
+            </a:r>
+          </a:p>
+        </p:txBody>
+      </p:sp>
+      <p:sp>
+        <p:nvSpPr>
+          <p:cNvPr id="4" name="">
+            <a:extLst xmlns:a="http://schemas.openxmlformats.org/drawingml/2006/main">
+              <a:ext uri="{FF2B5EF4-FFF2-40B4-BE49-F238E27FC236}">
+                <a16:creationId xmlns:a16="http://schemas.microsoft.com/office/drawing/2014/main" id="{8C75F477-BF7C-4D06-8893-06660655B9C6}"/>
+              </a:ext>
+            </a:extLst>
+          </p:cNvPr>
+          <p:cNvSpPr>
+            <a:spLocks xmlns:a="http://schemas.openxmlformats.org/drawingml/2006/main" noGrp="1"/>
+          </p:cNvSpPr>
+          <p:nvPr/>
+        </p:nvSpPr>
+        <p:spPr>
+          <a:xfrm xmlns:a="http://schemas.openxmlformats.org/drawingml/2006/main">
+            <a:off x="619125" y="1476375"/>
+            <a:ext cx="10763250" cy="523875"/>
+          </a:xfrm>
+          <a:prstGeom xmlns:a="http://schemas.openxmlformats.org/drawingml/2006/main" prst="rect">
+            <a:avLst/>
+          </a:prstGeom>
+          <a:noFill xmlns:a="http://schemas.openxmlformats.org/drawingml/2006/main"/>
+          <a:ln xmlns:a="http://schemas.openxmlformats.org/drawingml/2006/main" w="0">
+            <a:noFill/>
+          </a:ln>
+        </p:spPr>
+        <p:txBody>
+          <a:bodyPr xmlns:a="http://schemas.openxmlformats.org/drawingml/2006/main"/>
+          <a:lstStyle xmlns:a="http://schemas.openxmlformats.org/drawingml/2006/main">
+            <a:defPPr>
+              <a:defRPr sz="2175">
+                <a:solidFill>
+                  <a:srgbClr val="176B87"/>
+                </a:solidFill>
+                <a:latin typeface="Arial Unicode MS"/>
+                <a:ea typeface="Arial Unicode MS"/>
+                <a:cs typeface="Arial Unicode MS"/>
+              </a:defRPr>
+            </a:defPPr>
+            <a:lvl1pPr>
+              <a:defRPr sz="2175">
+                <a:solidFill>
+                  <a:srgbClr val="176B87"/>
+                </a:solidFill>
+                <a:latin typeface="Arial Unicode MS"/>
+                <a:ea typeface="Arial Unicode MS"/>
+                <a:cs typeface="Arial Unicode MS"/>
+              </a:defRPr>
+            </a:lvl1pPr>
+            <a:lvl2pPr>
+              <a:defRPr sz="2175">
+                <a:solidFill>
+                  <a:srgbClr val="176B87"/>
+                </a:solidFill>
+                <a:latin typeface="Arial Unicode MS"/>
+                <a:ea typeface="Arial Unicode MS"/>
+                <a:cs typeface="Arial Unicode MS"/>
+              </a:defRPr>
+            </a:lvl2pPr>
+            <a:lvl3pPr>
+              <a:defRPr sz="2175">
+                <a:solidFill>
+                  <a:srgbClr val="176B87"/>
+                </a:solidFill>
+                <a:latin typeface="Arial Unicode MS"/>
+                <a:ea typeface="Arial Unicode MS"/>
+                <a:cs typeface="Arial Unicode MS"/>
+              </a:defRPr>
+            </a:lvl3pPr>
+            <a:lvl4pPr>
+              <a:defRPr sz="2175">
+                <a:solidFill>
+                  <a:srgbClr val="176B87"/>
+                </a:solidFill>
+                <a:latin typeface="Arial Unicode MS"/>
+                <a:ea typeface="Arial Unicode MS"/>
+                <a:cs typeface="Arial Unicode MS"/>
+              </a:defRPr>
+            </a:lvl4pPr>
+            <a:lvl5pPr>
+              <a:defRPr sz="2175">
+                <a:solidFill>
+                  <a:srgbClr val="176B87"/>
+                </a:solidFill>
+                <a:latin typeface="Arial Unicode MS"/>
+                <a:ea typeface="Arial Unicode MS"/>
+                <a:cs typeface="Arial Unicode MS"/>
+              </a:defRPr>
+            </a:lvl5pPr>
+            <a:lvl6pPr>
+              <a:defRPr sz="2175">
+                <a:solidFill>
+                  <a:srgbClr val="176B87"/>
+                </a:solidFill>
+                <a:latin typeface="Arial Unicode MS"/>
+                <a:ea typeface="Arial Unicode MS"/>
+                <a:cs typeface="Arial Unicode MS"/>
+              </a:defRPr>
+            </a:lvl6pPr>
+            <a:lvl7pPr>
+              <a:defRPr sz="2175">
+                <a:solidFill>
+                  <a:srgbClr val="176B87"/>
+                </a:solidFill>
+                <a:latin typeface="Arial Unicode MS"/>
+                <a:ea typeface="Arial Unicode MS"/>
+                <a:cs typeface="Arial Unicode MS"/>
+              </a:defRPr>
+            </a:lvl7pPr>
+            <a:lvl8pPr>
+              <a:defRPr sz="2175">
+                <a:solidFill>
+                  <a:srgbClr val="176B87"/>
+                </a:solidFill>
+                <a:latin typeface="Arial Unicode MS"/>
+                <a:ea typeface="Arial Unicode MS"/>
+                <a:cs typeface="Arial Unicode MS"/>
+              </a:defRPr>
+            </a:lvl8pPr>
+            <a:lvl9pPr>
+              <a:defRPr sz="2175">
+                <a:solidFill>
+                  <a:srgbClr val="176B87"/>
+                </a:solidFill>
+                <a:latin typeface="Arial Unicode MS"/>
+                <a:ea typeface="Arial Unicode MS"/>
+                <a:cs typeface="Arial Unicode MS"/>
+              </a:defRPr>
+            </a:lvl9pPr>
+          </a:lstStyle>
+          <a:p xmlns:a="http://schemas.openxmlformats.org/drawingml/2006/main">
+            <a:pPr>
+              <a:defRPr sz="2175">
+                <a:solidFill>
+                  <a:srgbClr val="176B87"/>
+                </a:solidFill>
+                <a:latin typeface="Arial Unicode MS"/>
+                <a:ea typeface="Arial Unicode MS"/>
+                <a:cs typeface="Arial Unicode MS"/>
+              </a:defRPr>
+            </a:pPr>
+            <a:r>
+              <a:rPr sz="2175">
+                <a:solidFill>
+                  <a:srgbClr val="176B87"/>
+                </a:solidFill>
+                <a:latin typeface="Arial Unicode MS"/>
+                <a:ea typeface="Arial Unicode MS"/>
+                <a:cs typeface="Arial Unicode MS"/>
+              </a:rPr>
+              <a:t>检查相邻容量变化：ΔQ = 当前容量 − 上一循环容量</a:t>
+            </a:r>
+          </a:p>
+        </p:txBody>
+      </p:sp>
+      <p:graphicFrame>
+        <p:nvGraphicFramePr>
+          <p:cNvPr id="5" name="">
+            <a:extLst xmlns:a="http://schemas.openxmlformats.org/drawingml/2006/main">
+              <a:ext uri="{FF2B5EF4-FFF2-40B4-BE49-F238E27FC236}">
+                <a16:creationId xmlns:a16="http://schemas.microsoft.com/office/drawing/2014/main" id="{4FA4D58B-8BCA-4D88-81A1-F686FDD1EFD6}"/>
+              </a:ext>
+            </a:extLst>
+          </p:cNvPr>
+          <p:cNvGraphicFramePr/>
+          <p:nvPr/>
+        </p:nvGraphicFramePr>
+        <p:xfrm>
+          <a:off xmlns:a="http://schemas.openxmlformats.org/drawingml/2006/main" x="619125" y="2286000"/>
+          <a:ext xmlns:a="http://schemas.openxmlformats.org/drawingml/2006/main" cx="10763250" cy="2667000"/>
+        </p:xfrm>
+        <a:graphic xmlns:a="http://schemas.openxmlformats.org/drawingml/2006/main">
+          <a:graphicData uri="http://schemas.openxmlformats.org/drawingml/2006/table">
+            <a:tbl>
+              <a:tblPr/>
+              <a:tblGrid>
+                <a:gridCol w="3333750"/>
+                <a:gridCol w="3714750"/>
+                <a:gridCol w="3714750"/>
+              </a:tblGrid>
+              <a:tr h="533400">
+                <a:tc>
+                  <a:txBody>
+                    <a:bodyPr/>
+                    <a:lstStyle/>
+                    <a:p>
+                      <a:r>
+                        <a:rPr sz="1875">
+                          <a:solidFill>
+                            <a:srgbClr val="FFFFFF"/>
+                          </a:solidFill>
+                          <a:latin typeface="Arial Unicode MS"/>
+                          <a:ea typeface="Arial Unicode MS"/>
+                          <a:cs typeface="Arial Unicode MS"/>
+                        </a:rPr>
+                        <a:t>电池</a:t>
+                      </a:r>
+                    </a:p>
+                  </a:txBody>
+                  <a:tcPr marL="91440" marR="91440" marT="45720" marB="45720">
+                    <a:lnL w="9525">
+                      <a:solidFill>
+                        <a:srgbClr val="D6E0E5"/>
+                      </a:solidFill>
+                    </a:lnL>
+                    <a:lnR w="9525">
+                      <a:solidFill>
+                        <a:srgbClr val="D6E0E5"/>
+                      </a:solidFill>
+                    </a:lnR>
+                    <a:lnT w="9525">
+                      <a:solidFill>
+                        <a:srgbClr val="D6E0E5"/>
+                      </a:solidFill>
+                    </a:lnT>
+                    <a:lnB w="9525">
+                      <a:solidFill>
+                        <a:srgbClr val="D6E0E5"/>
+                      </a:solidFill>
+                    </a:lnB>
+                    <a:solidFill>
+                      <a:srgbClr val="176B87"/>
+                    </a:solidFill>
+                  </a:tcPr>
+                </a:tc>
+                <a:tc>
+                  <a:txBody>
+                    <a:bodyPr/>
+                    <a:lstStyle/>
+                    <a:p>
+                      <a:r>
+                        <a:rPr sz="1875">
+                          <a:solidFill>
+                            <a:srgbClr val="FFFFFF"/>
+                          </a:solidFill>
+                          <a:latin typeface="Arial Unicode MS"/>
+                          <a:ea typeface="Arial Unicode MS"/>
+                          <a:cs typeface="Arial Unicode MS"/>
+                        </a:rPr>
+                        <a:t>待核查（1.5IQR）</a:t>
+                      </a:r>
+                    </a:p>
+                  </a:txBody>
+                  <a:tcPr marL="91440" marR="91440" marT="45720" marB="45720">
+                    <a:lnR w="9525">
+                      <a:solidFill>
+                        <a:srgbClr val="D6E0E5"/>
+                      </a:solidFill>
+                    </a:lnR>
+                    <a:lnT w="9525">
+                      <a:solidFill>
+                        <a:srgbClr val="D6E0E5"/>
+                      </a:solidFill>
+                    </a:lnT>
+                    <a:lnB w="9525">
+                      <a:solidFill>
+                        <a:srgbClr val="D6E0E5"/>
+                      </a:solidFill>
+                    </a:lnB>
+                    <a:solidFill>
+                      <a:srgbClr val="176B87"/>
+                    </a:solidFill>
+                  </a:tcPr>
+                </a:tc>
+                <a:tc>
+                  <a:txBody>
+                    <a:bodyPr/>
+                    <a:lstStyle/>
+                    <a:p>
+                      <a:r>
+                        <a:rPr sz="1875">
+                          <a:solidFill>
+                            <a:srgbClr val="FFFFFF"/>
+                          </a:solidFill>
+                          <a:latin typeface="Arial Unicode MS"/>
+                          <a:ea typeface="Arial Unicode MS"/>
+                          <a:cs typeface="Arial Unicode MS"/>
+                        </a:rPr>
+                        <a:t>其中极端（3IQR）</a:t>
+                      </a:r>
+                    </a:p>
+                  </a:txBody>
+                  <a:tcPr marL="91440" marR="91440" marT="45720" marB="45720">
+                    <a:lnR w="9525">
+                      <a:solidFill>
+                        <a:srgbClr val="D6E0E5"/>
+                      </a:solidFill>
+                    </a:lnR>
+                    <a:lnT w="9525">
+                      <a:solidFill>
+                        <a:srgbClr val="D6E0E5"/>
+                      </a:solidFill>
+                    </a:lnT>
+                    <a:lnB w="9525">
+                      <a:solidFill>
+                        <a:srgbClr val="D6E0E5"/>
+                      </a:solidFill>
+                    </a:lnB>
+                    <a:solidFill>
+                      <a:srgbClr val="176B87"/>
+                    </a:solidFill>
+                  </a:tcPr>
+                </a:tc>
+              </a:tr>
+              <a:tr h="533400">
+                <a:tc>
+                  <a:txBody>
+                    <a:bodyPr/>
+                    <a:lstStyle/>
+                    <a:p>
+                      <a:r>
+                        <a:rPr sz="1875">
+                          <a:solidFill>
+                            <a:srgbClr val="172B3A"/>
+                          </a:solidFill>
+                          <a:latin typeface="Arial Unicode MS"/>
+                          <a:ea typeface="Arial Unicode MS"/>
+                          <a:cs typeface="Arial Unicode MS"/>
+                        </a:rPr>
+                        <a:t>B0005</a:t>
+                      </a:r>
+                    </a:p>
+                  </a:txBody>
+                  <a:tcPr marL="91440" marR="91440" marT="45720" marB="45720">
+                    <a:lnL w="9525">
+                      <a:solidFill>
+                        <a:srgbClr val="D6E0E5"/>
+                      </a:solidFill>
+                    </a:lnL>
+                    <a:lnR w="9525">
+                      <a:solidFill>
+                        <a:srgbClr val="D6E0E5"/>
+                      </a:solidFill>
+                    </a:lnR>
+                    <a:lnB w="9525">
+                      <a:solidFill>
+                        <a:srgbClr val="D6E0E5"/>
+                      </a:solidFill>
+                    </a:lnB>
+                    <a:solidFill>
+                      <a:srgbClr val="F0F5F7"/>
+                    </a:solidFill>
+                  </a:tcPr>
+                </a:tc>
+                <a:tc>
+                  <a:txBody>
+                    <a:bodyPr/>
+                    <a:lstStyle/>
+                    <a:p>
+                      <a:r>
+                        <a:rPr sz="1875">
+                          <a:solidFill>
+                            <a:srgbClr val="172B3A"/>
+                          </a:solidFill>
+                          <a:latin typeface="Arial Unicode MS"/>
+                          <a:ea typeface="Arial Unicode MS"/>
+                          <a:cs typeface="Arial Unicode MS"/>
+                        </a:rPr>
+                        <a:t>9</a:t>
+                      </a:r>
+                    </a:p>
+                  </a:txBody>
+                  <a:tcPr marL="91440" marR="91440" marT="45720" marB="45720">
+                    <a:lnR w="9525">
+                      <a:solidFill>
+                        <a:srgbClr val="D6E0E5"/>
+                      </a:solidFill>
+                    </a:lnR>
+                    <a:lnB w="9525">
+                      <a:solidFill>
+                        <a:srgbClr val="D6E0E5"/>
+                      </a:solidFill>
+                    </a:lnB>
+                    <a:solidFill>
+                      <a:srgbClr val="F0F5F7"/>
+                    </a:solidFill>
+                  </a:tcPr>
+                </a:tc>
+                <a:tc>
+                  <a:txBody>
+                    <a:bodyPr/>
+                    <a:lstStyle/>
+                    <a:p>
+                      <a:r>
+                        <a:rPr sz="1875">
+                          <a:solidFill>
+                            <a:srgbClr val="172B3A"/>
+                          </a:solidFill>
+                          <a:latin typeface="Arial Unicode MS"/>
+                          <a:ea typeface="Arial Unicode MS"/>
+                          <a:cs typeface="Arial Unicode MS"/>
+                        </a:rPr>
+                        <a:t>6</a:t>
+                      </a:r>
+                    </a:p>
+                  </a:txBody>
+                  <a:tcPr marL="91440" marR="91440" marT="45720" marB="45720">
+                    <a:lnR w="9525">
+                      <a:solidFill>
+                        <a:srgbClr val="D6E0E5"/>
+                      </a:solidFill>
+                    </a:lnR>
+                    <a:lnB w="9525">
+                      <a:solidFill>
+                        <a:srgbClr val="D6E0E5"/>
+                      </a:solidFill>
+                    </a:lnB>
+                    <a:solidFill>
+                      <a:srgbClr val="F0F5F7"/>
+                    </a:solidFill>
+                  </a:tcPr>
+                </a:tc>
+              </a:tr>
+              <a:tr h="533400">
+                <a:tc>
+                  <a:txBody>
+                    <a:bodyPr/>
+                    <a:lstStyle/>
+                    <a:p>
+                      <a:r>
+                        <a:rPr sz="1875">
+                          <a:solidFill>
+                            <a:srgbClr val="172B3A"/>
+                          </a:solidFill>
+                          <a:latin typeface="Arial Unicode MS"/>
+                          <a:ea typeface="Arial Unicode MS"/>
+                          <a:cs typeface="Arial Unicode MS"/>
+                        </a:rPr>
+                        <a:t>B0006</a:t>
+                      </a:r>
+                    </a:p>
+                  </a:txBody>
+                  <a:tcPr marL="91440" marR="91440" marT="45720" marB="45720">
+                    <a:lnL w="9525">
+                      <a:solidFill>
+                        <a:srgbClr val="D6E0E5"/>
+                      </a:solidFill>
+                    </a:lnL>
+                    <a:lnR w="9525">
+                      <a:solidFill>
+                        <a:srgbClr val="D6E0E5"/>
+                      </a:solidFill>
+                    </a:lnR>
+                    <a:lnB w="9525">
+                      <a:solidFill>
+                        <a:srgbClr val="D6E0E5"/>
+                      </a:solidFill>
+                    </a:lnB>
+                    <a:solidFill>
+                      <a:srgbClr val="FFFFFF"/>
+                    </a:solidFill>
+                  </a:tcPr>
+                </a:tc>
+                <a:tc>
+                  <a:txBody>
+                    <a:bodyPr/>
+                    <a:lstStyle/>
+                    <a:p>
+                      <a:r>
+                        <a:rPr sz="1875">
+                          <a:solidFill>
+                            <a:srgbClr val="172B3A"/>
+                          </a:solidFill>
+                          <a:latin typeface="Arial Unicode MS"/>
+                          <a:ea typeface="Arial Unicode MS"/>
+                          <a:cs typeface="Arial Unicode MS"/>
+                        </a:rPr>
+                        <a:t>26</a:t>
+                      </a:r>
+                    </a:p>
+                  </a:txBody>
+                  <a:tcPr marL="91440" marR="91440" marT="45720" marB="45720">
+                    <a:lnR w="9525">
+                      <a:solidFill>
+                        <a:srgbClr val="D6E0E5"/>
+                      </a:solidFill>
+                    </a:lnR>
+                    <a:lnB w="9525">
+                      <a:solidFill>
+                        <a:srgbClr val="D6E0E5"/>
+                      </a:solidFill>
+                    </a:lnB>
+                    <a:solidFill>
+                      <a:srgbClr val="FFFFFF"/>
+                    </a:solidFill>
+                  </a:tcPr>
+                </a:tc>
+                <a:tc>
+                  <a:txBody>
+                    <a:bodyPr/>
+                    <a:lstStyle/>
+                    <a:p>
+                      <a:r>
+                        <a:rPr sz="1875">
+                          <a:solidFill>
+                            <a:srgbClr val="172B3A"/>
+                          </a:solidFill>
+                          <a:latin typeface="Arial Unicode MS"/>
+                          <a:ea typeface="Arial Unicode MS"/>
+                          <a:cs typeface="Arial Unicode MS"/>
+                        </a:rPr>
+                        <a:t>10</a:t>
+                      </a:r>
+                    </a:p>
+                  </a:txBody>
+                  <a:tcPr marL="91440" marR="91440" marT="45720" marB="45720">
+                    <a:lnR w="9525">
+                      <a:solidFill>
+                        <a:srgbClr val="D6E0E5"/>
+                      </a:solidFill>
+                    </a:lnR>
+                    <a:lnB w="9525">
+                      <a:solidFill>
+                        <a:srgbClr val="D6E0E5"/>
+                      </a:solidFill>
+                    </a:lnB>
+                    <a:solidFill>
+                      <a:srgbClr val="FFFFFF"/>
+                    </a:solidFill>
+                  </a:tcPr>
+                </a:tc>
+              </a:tr>
+              <a:tr h="533400">
+                <a:tc>
+                  <a:txBody>
+                    <a:bodyPr/>
+                    <a:lstStyle/>
+                    <a:p>
+                      <a:r>
+                        <a:rPr sz="1875">
+                          <a:solidFill>
+                            <a:srgbClr val="172B3A"/>
+                          </a:solidFill>
+                          <a:latin typeface="Arial Unicode MS"/>
+                          <a:ea typeface="Arial Unicode MS"/>
+                          <a:cs typeface="Arial Unicode MS"/>
+                        </a:rPr>
+                        <a:t>B0007</a:t>
+                      </a:r>
+                    </a:p>
+                  </a:txBody>
+                  <a:tcPr marL="91440" marR="91440" marT="45720" marB="45720">
+                    <a:lnL w="9525">
+                      <a:solidFill>
+                        <a:srgbClr val="D6E0E5"/>
+                      </a:solidFill>
+                    </a:lnL>
+                    <a:lnR w="9525">
+                      <a:solidFill>
+                        <a:srgbClr val="D6E0E5"/>
+                      </a:solidFill>
+                    </a:lnR>
+                    <a:lnB w="9525">
+                      <a:solidFill>
+                        <a:srgbClr val="D6E0E5"/>
+                      </a:solidFill>
+                    </a:lnB>
+                    <a:solidFill>
+                      <a:srgbClr val="F0F5F7"/>
+                    </a:solidFill>
+                  </a:tcPr>
+                </a:tc>
+                <a:tc>
+                  <a:txBody>
+                    <a:bodyPr/>
+                    <a:lstStyle/>
+                    <a:p>
+                      <a:r>
+                        <a:rPr sz="1875">
+                          <a:solidFill>
+                            <a:srgbClr val="172B3A"/>
+                          </a:solidFill>
+                          <a:latin typeface="Arial Unicode MS"/>
+                          <a:ea typeface="Arial Unicode MS"/>
+                          <a:cs typeface="Arial Unicode MS"/>
+                        </a:rPr>
+                        <a:t>9</a:t>
+                      </a:r>
+                    </a:p>
+                  </a:txBody>
+                  <a:tcPr marL="91440" marR="91440" marT="45720" marB="45720">
+                    <a:lnR w="9525">
+                      <a:solidFill>
+                        <a:srgbClr val="D6E0E5"/>
+                      </a:solidFill>
+                    </a:lnR>
+                    <a:lnB w="9525">
+                      <a:solidFill>
+                        <a:srgbClr val="D6E0E5"/>
+                      </a:solidFill>
+                    </a:lnB>
+                    <a:solidFill>
+                      <a:srgbClr val="F0F5F7"/>
+                    </a:solidFill>
+                  </a:tcPr>
+                </a:tc>
+                <a:tc>
+                  <a:txBody>
+                    <a:bodyPr/>
+                    <a:lstStyle/>
+                    <a:p>
+                      <a:r>
+                        <a:rPr sz="1875">
+                          <a:solidFill>
+                            <a:srgbClr val="172B3A"/>
+                          </a:solidFill>
+                          <a:latin typeface="Arial Unicode MS"/>
+                          <a:ea typeface="Arial Unicode MS"/>
+                          <a:cs typeface="Arial Unicode MS"/>
+                        </a:rPr>
+                        <a:t>5</a:t>
+                      </a:r>
+                    </a:p>
+                  </a:txBody>
+                  <a:tcPr marL="91440" marR="91440" marT="45720" marB="45720">
+                    <a:lnR w="9525">
+                      <a:solidFill>
+                        <a:srgbClr val="D6E0E5"/>
+                      </a:solidFill>
+                    </a:lnR>
+                    <a:lnB w="9525">
+                      <a:solidFill>
+                        <a:srgbClr val="D6E0E5"/>
+                      </a:solidFill>
+                    </a:lnB>
+                    <a:solidFill>
+                      <a:srgbClr val="F0F5F7"/>
+                    </a:solidFill>
+                  </a:tcPr>
+                </a:tc>
+              </a:tr>
+              <a:tr h="533400">
+                <a:tc>
+                  <a:txBody>
+                    <a:bodyPr/>
+                    <a:lstStyle/>
+                    <a:p>
+                      <a:r>
+                        <a:rPr sz="1875">
+                          <a:solidFill>
+                            <a:srgbClr val="172B3A"/>
+                          </a:solidFill>
+                          <a:latin typeface="Arial Unicode MS"/>
+                          <a:ea typeface="Arial Unicode MS"/>
+                          <a:cs typeface="Arial Unicode MS"/>
+                        </a:rPr>
+                        <a:t>B0018</a:t>
+                      </a:r>
+                    </a:p>
+                  </a:txBody>
+                  <a:tcPr marL="91440" marR="91440" marT="45720" marB="45720">
+                    <a:lnL w="9525">
+                      <a:solidFill>
+                        <a:srgbClr val="D6E0E5"/>
+                      </a:solidFill>
+                    </a:lnL>
+                    <a:lnR w="9525">
+                      <a:solidFill>
+                        <a:srgbClr val="D6E0E5"/>
+                      </a:solidFill>
+                    </a:lnR>
+                    <a:lnB w="9525">
+                      <a:solidFill>
+                        <a:srgbClr val="D6E0E5"/>
+                      </a:solidFill>
+                    </a:lnB>
+                    <a:solidFill>
+                      <a:srgbClr val="FFFFFF"/>
+                    </a:solidFill>
+                  </a:tcPr>
+                </a:tc>
+                <a:tc>
+                  <a:txBody>
+                    <a:bodyPr/>
+                    <a:lstStyle/>
+                    <a:p>
+                      <a:r>
+                        <a:rPr sz="1875">
+                          <a:solidFill>
+                            <a:srgbClr val="172B3A"/>
+                          </a:solidFill>
+                          <a:latin typeface="Arial Unicode MS"/>
+                          <a:ea typeface="Arial Unicode MS"/>
+                          <a:cs typeface="Arial Unicode MS"/>
+                        </a:rPr>
+                        <a:t>14</a:t>
+                      </a:r>
+                    </a:p>
+                  </a:txBody>
+                  <a:tcPr marL="91440" marR="91440" marT="45720" marB="45720">
+                    <a:lnR w="9525">
+                      <a:solidFill>
+                        <a:srgbClr val="D6E0E5"/>
+                      </a:solidFill>
+                    </a:lnR>
+                    <a:lnB w="9525">
+                      <a:solidFill>
+                        <a:srgbClr val="D6E0E5"/>
+                      </a:solidFill>
+                    </a:lnB>
+                    <a:solidFill>
+                      <a:srgbClr val="FFFFFF"/>
+                    </a:solidFill>
+                  </a:tcPr>
+                </a:tc>
+                <a:tc>
+                  <a:txBody>
+                    <a:bodyPr/>
+                    <a:lstStyle/>
+                    <a:p>
+                      <a:r>
+                        <a:rPr sz="1875">
+                          <a:solidFill>
+                            <a:srgbClr val="172B3A"/>
+                          </a:solidFill>
+                          <a:latin typeface="Arial Unicode MS"/>
+                          <a:ea typeface="Arial Unicode MS"/>
+                          <a:cs typeface="Arial Unicode MS"/>
+                        </a:rPr>
+                        <a:t>9</a:t>
+                      </a:r>
+                    </a:p>
+                  </a:txBody>
+                  <a:tcPr marL="91440" marR="91440" marT="45720" marB="45720">
+                    <a:lnR w="9525">
+                      <a:solidFill>
+                        <a:srgbClr val="D6E0E5"/>
+                      </a:solidFill>
+                    </a:lnR>
+                    <a:lnB w="9525">
+                      <a:solidFill>
+                        <a:srgbClr val="D6E0E5"/>
+                      </a:solidFill>
+                    </a:lnB>
+                    <a:solidFill>
+                      <a:srgbClr val="FFFFFF"/>
+                    </a:solidFill>
+                  </a:tcPr>
+                </a:tc>
+              </a:tr>
+            </a:tbl>
+          </a:graphicData>
+        </a:graphic>
+      </p:graphicFrame>
+      <p:sp>
+        <p:nvSpPr>
+          <p:cNvPr id="6" name="">
+            <a:extLst xmlns:a="http://schemas.openxmlformats.org/drawingml/2006/main">
+              <a:ext uri="{FF2B5EF4-FFF2-40B4-BE49-F238E27FC236}">
+                <a16:creationId xmlns:a16="http://schemas.microsoft.com/office/drawing/2014/main" id="{187554EB-6D5B-4CEB-A2D6-3C792E2C5D4D}"/>
+              </a:ext>
+            </a:extLst>
+          </p:cNvPr>
+          <p:cNvSpPr>
+            <a:spLocks xmlns:a="http://schemas.openxmlformats.org/drawingml/2006/main" noGrp="1"/>
+          </p:cNvSpPr>
+          <p:nvPr/>
+        </p:nvSpPr>
+        <p:spPr>
+          <a:xfrm xmlns:a="http://schemas.openxmlformats.org/drawingml/2006/main">
+            <a:off x="619125" y="5286375"/>
+            <a:ext cx="10763250" cy="809625"/>
+          </a:xfrm>
+          <a:prstGeom xmlns:a="http://schemas.openxmlformats.org/drawingml/2006/main" prst="rect">
+            <a:avLst/>
+          </a:prstGeom>
+          <a:noFill xmlns:a="http://schemas.openxmlformats.org/drawingml/2006/main"/>
+          <a:ln xmlns:a="http://schemas.openxmlformats.org/drawingml/2006/main" w="0">
+            <a:noFill/>
+          </a:ln>
+        </p:spPr>
+        <p:txBody>
+          <a:bodyPr xmlns:a="http://schemas.openxmlformats.org/drawingml/2006/main"/>
+          <a:lstStyle xmlns:a="http://schemas.openxmlformats.org/drawingml/2006/main">
+            <a:defPPr>
+              <a:defRPr sz="1875">
+                <a:solidFill>
+                  <a:srgbClr val="172B3A"/>
+                </a:solidFill>
+                <a:latin typeface="Arial Unicode MS"/>
+                <a:ea typeface="Arial Unicode MS"/>
+                <a:cs typeface="Arial Unicode MS"/>
+              </a:defRPr>
+            </a:defPPr>
+            <a:lvl1pPr>
+              <a:defRPr sz="1875">
+                <a:solidFill>
+                  <a:srgbClr val="172B3A"/>
+                </a:solidFill>
+                <a:latin typeface="Arial Unicode MS"/>
+                <a:ea typeface="Arial Unicode MS"/>
+                <a:cs typeface="Arial Unicode MS"/>
+              </a:defRPr>
+            </a:lvl1pPr>
+            <a:lvl2pPr>
+              <a:defRPr sz="1875">
+                <a:solidFill>
+                  <a:srgbClr val="172B3A"/>
+                </a:solidFill>
+                <a:latin typeface="Arial Unicode MS"/>
+                <a:ea typeface="Arial Unicode MS"/>
+                <a:cs typeface="Arial Unicode MS"/>
+              </a:defRPr>
+            </a:lvl2pPr>
+            <a:lvl3pPr>
+              <a:defRPr sz="1875">
+                <a:solidFill>
+                  <a:srgbClr val="172B3A"/>
+                </a:solidFill>
+                <a:latin typeface="Arial Unicode MS"/>
+                <a:ea typeface="Arial Unicode MS"/>
+                <a:cs typeface="Arial Unicode MS"/>
+              </a:defRPr>
+            </a:lvl3pPr>
+            <a:lvl4pPr>
+              <a:defRPr sz="1875">
+                <a:solidFill>
+                  <a:srgbClr val="172B3A"/>
+                </a:solidFill>
+                <a:latin typeface="Arial Unicode MS"/>
+                <a:ea typeface="Arial Unicode MS"/>
+                <a:cs typeface="Arial Unicode MS"/>
+              </a:defRPr>
+            </a:lvl4pPr>
+            <a:lvl5pPr>
+              <a:defRPr sz="1875">
+                <a:solidFill>
+                  <a:srgbClr val="172B3A"/>
+                </a:solidFill>
+                <a:latin typeface="Arial Unicode MS"/>
+                <a:ea typeface="Arial Unicode MS"/>
+                <a:cs typeface="Arial Unicode MS"/>
+              </a:defRPr>
+            </a:lvl5pPr>
+            <a:lvl6pPr>
+              <a:defRPr sz="1875">
+                <a:solidFill>
+                  <a:srgbClr val="172B3A"/>
+                </a:solidFill>
+                <a:latin typeface="Arial Unicode MS"/>
+                <a:ea typeface="Arial Unicode MS"/>
+                <a:cs typeface="Arial Unicode MS"/>
+              </a:defRPr>
+            </a:lvl6pPr>
+            <a:lvl7pPr>
+              <a:defRPr sz="1875">
+                <a:solidFill>
+                  <a:srgbClr val="172B3A"/>
+                </a:solidFill>
+                <a:latin typeface="Arial Unicode MS"/>
+                <a:ea typeface="Arial Unicode MS"/>
+                <a:cs typeface="Arial Unicode MS"/>
+              </a:defRPr>
+            </a:lvl7pPr>
+            <a:lvl8pPr>
+              <a:defRPr sz="1875">
+                <a:solidFill>
+                  <a:srgbClr val="172B3A"/>
+                </a:solidFill>
+                <a:latin typeface="Arial Unicode MS"/>
+                <a:ea typeface="Arial Unicode MS"/>
+                <a:cs typeface="Arial Unicode MS"/>
+              </a:defRPr>
+            </a:lvl8pPr>
+            <a:lvl9pPr>
+              <a:defRPr sz="1875">
+                <a:solidFill>
+                  <a:srgbClr val="172B3A"/>
+                </a:solidFill>
+                <a:latin typeface="Arial Unicode MS"/>
+                <a:ea typeface="Arial Unicode MS"/>
+                <a:cs typeface="Arial Unicode MS"/>
+              </a:defRPr>
+            </a:lvl9pPr>
+          </a:lstStyle>
+          <a:p xmlns:a="http://schemas.openxmlformats.org/drawingml/2006/main">
+            <a:pPr>
+              <a:defRPr sz="1875">
+                <a:solidFill>
+                  <a:srgbClr val="172B3A"/>
+                </a:solidFill>
+                <a:latin typeface="Arial Unicode MS"/>
+                <a:ea typeface="Arial Unicode MS"/>
+                <a:cs typeface="Arial Unicode MS"/>
+              </a:defRPr>
+            </a:pPr>
+            <a:r>
+              <a:rPr sz="1875">
+                <a:solidFill>
+                  <a:srgbClr val="172B3A"/>
+                </a:solidFill>
+                <a:latin typeface="Arial Unicode MS"/>
+                <a:ea typeface="Arial Unicode MS"/>
+                <a:cs typeface="Arial Unicode MS"/>
+              </a:rPr>
+              <a:t>合计58条待核查，其中30条极端。它们尚未证实为测量错误。</a:t>
+            </a:r>
+          </a:p>
+          <a:p xmlns:a="http://schemas.openxmlformats.org/drawingml/2006/main">
+            <a:pPr>
+              <a:defRPr sz="1875">
+                <a:solidFill>
+                  <a:srgbClr val="172B3A"/>
+                </a:solidFill>
+                <a:latin typeface="Arial Unicode MS"/>
+                <a:ea typeface="Arial Unicode MS"/>
+                <a:cs typeface="Arial Unicode MS"/>
+              </a:defRPr>
+            </a:pPr>
+            <a:r>
+              <a:rPr sz="1875">
+                <a:solidFill>
+                  <a:srgbClr val="172B3A"/>
+                </a:solidFill>
+                <a:latin typeface="Arial Unicode MS"/>
+                <a:ea typeface="Arial Unicode MS"/>
+                <a:cs typeface="Arial Unicode MS"/>
+              </a:rPr>
+              <a:t>上下界为Q1−k×IQR、Q3+k×IQR，阈值仅用前60%记录估计。</a:t>
+            </a:r>
+          </a:p>
+        </p:txBody>
+      </p:sp>
+    </p:spTree>
+    <p:extLst>
+      <p:ext uri="{BB962C8B-B14F-4D97-AF65-F5344CB8AC3E}">
+        <p14:creationId xmlns:p14="http://schemas.microsoft.com/office/powerpoint/2010/main" val="1156873437"/>
+      </p:ext>
+    </p:extLst>
+  </p:cSld>
+</p:sld>
+</file>
+
+<file path=ppt/slides/slide21.xml><?xml version="1.0" encoding="utf-8"?>
+<p:sld xmlns:p="http://schemas.openxmlformats.org/presentationml/2006/main">
+  <p:cSld>
+    <p:bg>
+      <p:bgPr>
+        <a:solidFill xmlns:a="http://schemas.openxmlformats.org/drawingml/2006/main">
+          <a:srgbClr val="FFFFFF"/>
+        </a:solidFill>
+      </p:bgPr>
+    </p:bg>
+    <p:spTree>
+      <p:nvGrpSpPr>
+        <p:cNvPr id="1" name=""/>
+        <p:cNvGrpSpPr/>
+        <p:nvPr/>
+      </p:nvGrpSpPr>
+      <p:grpSpPr>
+        <a:xfrm xmlns:a="http://schemas.openxmlformats.org/drawingml/2006/main"/>
+      </p:grpSpPr>
+      <p:sp>
+        <p:nvSpPr>
+          <p:cNvPr id="7" name="">
+            <a:extLst xmlns:a="http://schemas.openxmlformats.org/drawingml/2006/main">
+              <a:ext uri="{FF2B5EF4-FFF2-40B4-BE49-F238E27FC236}">
+                <a16:creationId xmlns:a16="http://schemas.microsoft.com/office/drawing/2014/main" id="{6EB9A734-E0C2-4523-886C-647DE781F6A3}"/>
+              </a:ext>
+            </a:extLst>
+          </p:cNvPr>
+          <p:cNvSpPr>
+            <a:spLocks xmlns:a="http://schemas.openxmlformats.org/drawingml/2006/main" noGrp="1"/>
+          </p:cNvSpPr>
+          <p:nvPr/>
+        </p:nvSpPr>
+        <p:spPr>
+          <a:xfrm xmlns:a="http://schemas.openxmlformats.org/drawingml/2006/main">
+            <a:off x="571500" y="381000"/>
+            <a:ext cx="11049000" cy="857250"/>
+          </a:xfrm>
+          <a:prstGeom xmlns:a="http://schemas.openxmlformats.org/drawingml/2006/main" prst="rect">
+            <a:avLst/>
+          </a:prstGeom>
+          <a:noFill xmlns:a="http://schemas.openxmlformats.org/drawingml/2006/main"/>
+          <a:ln xmlns:a="http://schemas.openxmlformats.org/drawingml/2006/main" w="0">
+            <a:noFill/>
+          </a:ln>
+        </p:spPr>
+        <p:txBody>
+          <a:bodyPr xmlns:a="http://schemas.openxmlformats.org/drawingml/2006/main"/>
+          <a:lstStyle xmlns:a="http://schemas.openxmlformats.org/drawingml/2006/main">
+            <a:defPPr>
+              <a:defRPr sz="2925">
+                <a:solidFill>
+                  <a:srgbClr val="172B3A"/>
+                </a:solidFill>
+                <a:latin typeface="Arial Unicode MS"/>
+                <a:ea typeface="Arial Unicode MS"/>
+                <a:cs typeface="Arial Unicode MS"/>
+              </a:defRPr>
+            </a:defPPr>
+            <a:lvl1pPr>
+              <a:defRPr sz="2925">
+                <a:solidFill>
+                  <a:srgbClr val="172B3A"/>
+                </a:solidFill>
+                <a:latin typeface="Arial Unicode MS"/>
+                <a:ea typeface="Arial Unicode MS"/>
+                <a:cs typeface="Arial Unicode MS"/>
+              </a:defRPr>
+            </a:lvl1pPr>
+            <a:lvl2pPr>
+              <a:defRPr sz="2925">
+                <a:solidFill>
+                  <a:srgbClr val="172B3A"/>
+                </a:solidFill>
+                <a:latin typeface="Arial Unicode MS"/>
+                <a:ea typeface="Arial Unicode MS"/>
+                <a:cs typeface="Arial Unicode MS"/>
+              </a:defRPr>
+            </a:lvl2pPr>
+            <a:lvl3pPr>
+              <a:defRPr sz="2925">
+                <a:solidFill>
+                  <a:srgbClr val="172B3A"/>
+                </a:solidFill>
+                <a:latin typeface="Arial Unicode MS"/>
+                <a:ea typeface="Arial Unicode MS"/>
+                <a:cs typeface="Arial Unicode MS"/>
+              </a:defRPr>
+            </a:lvl3pPr>
+            <a:lvl4pPr>
+              <a:defRPr sz="2925">
+                <a:solidFill>
+                  <a:srgbClr val="172B3A"/>
+                </a:solidFill>
+                <a:latin typeface="Arial Unicode MS"/>
+                <a:ea typeface="Arial Unicode MS"/>
+                <a:cs typeface="Arial Unicode MS"/>
+              </a:defRPr>
+            </a:lvl4pPr>
+            <a:lvl5pPr>
+              <a:defRPr sz="2925">
+                <a:solidFill>
+                  <a:srgbClr val="172B3A"/>
+                </a:solidFill>
+                <a:latin typeface="Arial Unicode MS"/>
+                <a:ea typeface="Arial Unicode MS"/>
+                <a:cs typeface="Arial Unicode MS"/>
+              </a:defRPr>
+            </a:lvl5pPr>
+            <a:lvl6pPr>
+              <a:defRPr sz="2925">
+                <a:solidFill>
+                  <a:srgbClr val="172B3A"/>
+                </a:solidFill>
+                <a:latin typeface="Arial Unicode MS"/>
+                <a:ea typeface="Arial Unicode MS"/>
+                <a:cs typeface="Arial Unicode MS"/>
+              </a:defRPr>
+            </a:lvl6pPr>
+            <a:lvl7pPr>
+              <a:defRPr sz="2925">
+                <a:solidFill>
+                  <a:srgbClr val="172B3A"/>
+                </a:solidFill>
+                <a:latin typeface="Arial Unicode MS"/>
+                <a:ea typeface="Arial Unicode MS"/>
+                <a:cs typeface="Arial Unicode MS"/>
+              </a:defRPr>
+            </a:lvl7pPr>
+            <a:lvl8pPr>
+              <a:defRPr sz="2925">
+                <a:solidFill>
+                  <a:srgbClr val="172B3A"/>
+                </a:solidFill>
+                <a:latin typeface="Arial Unicode MS"/>
+                <a:ea typeface="Arial Unicode MS"/>
+                <a:cs typeface="Arial Unicode MS"/>
+              </a:defRPr>
+            </a:lvl8pPr>
+            <a:lvl9pPr>
+              <a:defRPr sz="2925">
+                <a:solidFill>
+                  <a:srgbClr val="172B3A"/>
+                </a:solidFill>
+                <a:latin typeface="Arial Unicode MS"/>
+                <a:ea typeface="Arial Unicode MS"/>
+                <a:cs typeface="Arial Unicode MS"/>
+              </a:defRPr>
+            </a:lvl9pPr>
+          </a:lstStyle>
+          <a:p xmlns:a="http://schemas.openxmlformats.org/drawingml/2006/main">
+            <a:pPr>
+              <a:defRPr sz="2925">
+                <a:solidFill>
+                  <a:srgbClr val="172B3A"/>
+                </a:solidFill>
+                <a:latin typeface="Arial Unicode MS"/>
+                <a:ea typeface="Arial Unicode MS"/>
+                <a:cs typeface="Arial Unicode MS"/>
+              </a:defRPr>
+            </a:pPr>
+            <a:r>
+              <a:rPr sz="2925">
+                <a:solidFill>
+                  <a:srgbClr val="172B3A"/>
+                </a:solidFill>
+                <a:latin typeface="Arial Unicode MS"/>
+                <a:ea typeface="Arial Unicode MS"/>
+                <a:cs typeface="Arial Unicode MS"/>
+              </a:rPr>
+              <a:t>补充清洗：保留原值，另做极端跳变限幅</a:t>
+            </a:r>
+          </a:p>
+        </p:txBody>
+      </p:sp>
+      <p:sp>
+        <p:nvSpPr>
+          <p:cNvPr id="2" name="">
+            <a:extLst xmlns:a="http://schemas.openxmlformats.org/drawingml/2006/main">
+              <a:ext uri="{FF2B5EF4-FFF2-40B4-BE49-F238E27FC236}">
+                <a16:creationId xmlns:a16="http://schemas.microsoft.com/office/drawing/2014/main" id="{6E57B8B5-8D35-4E07-9B6E-35E42CC765BF}"/>
+              </a:ext>
+            </a:extLst>
+          </p:cNvPr>
+          <p:cNvSpPr>
+            <a:spLocks xmlns:a="http://schemas.openxmlformats.org/drawingml/2006/main" noGrp="1"/>
+          </p:cNvSpPr>
+          <p:nvPr/>
+        </p:nvSpPr>
+        <p:spPr>
+          <a:xfrm xmlns:a="http://schemas.openxmlformats.org/drawingml/2006/main">
+            <a:off x="571500" y="6334125"/>
+            <a:ext cx="10477500" cy="285750"/>
+          </a:xfrm>
+          <a:prstGeom xmlns:a="http://schemas.openxmlformats.org/drawingml/2006/main" prst="rect">
+            <a:avLst/>
+          </a:prstGeom>
+          <a:noFill xmlns:a="http://schemas.openxmlformats.org/drawingml/2006/main"/>
+          <a:ln xmlns:a="http://schemas.openxmlformats.org/drawingml/2006/main" w="0">
+            <a:noFill/>
+          </a:ln>
+        </p:spPr>
+        <p:txBody>
+          <a:bodyPr xmlns:a="http://schemas.openxmlformats.org/drawingml/2006/main"/>
+          <a:lstStyle xmlns:a="http://schemas.openxmlformats.org/drawingml/2006/main">
+            <a:defPPr>
+              <a:defRPr sz="1200">
+                <a:solidFill>
+                  <a:srgbClr val="687985"/>
+                </a:solidFill>
+                <a:latin typeface="Arial Unicode MS"/>
+                <a:ea typeface="Arial Unicode MS"/>
+                <a:cs typeface="Arial Unicode MS"/>
+              </a:defRPr>
+            </a:defPPr>
+            <a:lvl1pPr>
+              <a:defRPr sz="1200">
+                <a:solidFill>
+                  <a:srgbClr val="687985"/>
+                </a:solidFill>
+                <a:latin typeface="Arial Unicode MS"/>
+                <a:ea typeface="Arial Unicode MS"/>
+                <a:cs typeface="Arial Unicode MS"/>
+              </a:defRPr>
+            </a:lvl1pPr>
+            <a:lvl2pPr>
+              <a:defRPr sz="1200">
+                <a:solidFill>
+                  <a:srgbClr val="687985"/>
+                </a:solidFill>
+                <a:latin typeface="Arial Unicode MS"/>
+                <a:ea typeface="Arial Unicode MS"/>
+                <a:cs typeface="Arial Unicode MS"/>
+              </a:defRPr>
+            </a:lvl2pPr>
+            <a:lvl3pPr>
+              <a:defRPr sz="1200">
+                <a:solidFill>
+                  <a:srgbClr val="687985"/>
+                </a:solidFill>
+                <a:latin typeface="Arial Unicode MS"/>
+                <a:ea typeface="Arial Unicode MS"/>
+                <a:cs typeface="Arial Unicode MS"/>
+              </a:defRPr>
+            </a:lvl3pPr>
+            <a:lvl4pPr>
+              <a:defRPr sz="1200">
+                <a:solidFill>
+                  <a:srgbClr val="687985"/>
+                </a:solidFill>
+                <a:latin typeface="Arial Unicode MS"/>
+                <a:ea typeface="Arial Unicode MS"/>
+                <a:cs typeface="Arial Unicode MS"/>
+              </a:defRPr>
+            </a:lvl4pPr>
+            <a:lvl5pPr>
+              <a:defRPr sz="1200">
+                <a:solidFill>
+                  <a:srgbClr val="687985"/>
+                </a:solidFill>
+                <a:latin typeface="Arial Unicode MS"/>
+                <a:ea typeface="Arial Unicode MS"/>
+                <a:cs typeface="Arial Unicode MS"/>
+              </a:defRPr>
+            </a:lvl5pPr>
+            <a:lvl6pPr>
+              <a:defRPr sz="1200">
+                <a:solidFill>
+                  <a:srgbClr val="687985"/>
+                </a:solidFill>
+                <a:latin typeface="Arial Unicode MS"/>
+                <a:ea typeface="Arial Unicode MS"/>
+                <a:cs typeface="Arial Unicode MS"/>
+              </a:defRPr>
+            </a:lvl6pPr>
+            <a:lvl7pPr>
+              <a:defRPr sz="1200">
+                <a:solidFill>
+                  <a:srgbClr val="687985"/>
+                </a:solidFill>
+                <a:latin typeface="Arial Unicode MS"/>
+                <a:ea typeface="Arial Unicode MS"/>
+                <a:cs typeface="Arial Unicode MS"/>
+              </a:defRPr>
+            </a:lvl7pPr>
+            <a:lvl8pPr>
+              <a:defRPr sz="1200">
+                <a:solidFill>
+                  <a:srgbClr val="687985"/>
+                </a:solidFill>
+                <a:latin typeface="Arial Unicode MS"/>
+                <a:ea typeface="Arial Unicode MS"/>
+                <a:cs typeface="Arial Unicode MS"/>
+              </a:defRPr>
+            </a:lvl8pPr>
+            <a:lvl9pPr>
+              <a:defRPr sz="1200">
+                <a:solidFill>
+                  <a:srgbClr val="687985"/>
+                </a:solidFill>
+                <a:latin typeface="Arial Unicode MS"/>
+                <a:ea typeface="Arial Unicode MS"/>
+                <a:cs typeface="Arial Unicode MS"/>
+              </a:defRPr>
+            </a:lvl9pPr>
+          </a:lstStyle>
+          <a:p xmlns:a="http://schemas.openxmlformats.org/drawingml/2006/main">
+            <a:pPr>
+              <a:defRPr sz="1200">
+                <a:solidFill>
+                  <a:srgbClr val="687985"/>
+                </a:solidFill>
+                <a:latin typeface="Arial Unicode MS"/>
+                <a:ea typeface="Arial Unicode MS"/>
+                <a:cs typeface="Arial Unicode MS"/>
+              </a:defRPr>
+            </a:pPr>
+            <a:r>
+              <a:rPr sz="1200">
+                <a:solidFill>
+                  <a:srgbClr val="687985"/>
+                </a:solidFill>
+                <a:latin typeface="Arial Unicode MS"/>
+                <a:ea typeface="Arial Unicode MS"/>
+                <a:cs typeface="Arial Unicode MS"/>
+              </a:rPr>
+              <a:t>工作过程记录  |  杨晓真 25121619  |  2026.10.26</a:t>
+            </a:r>
+          </a:p>
+        </p:txBody>
+      </p:sp>
+      <p:sp>
+        <p:nvSpPr>
+          <p:cNvPr id="3" name="">
+            <a:extLst xmlns:a="http://schemas.openxmlformats.org/drawingml/2006/main">
+              <a:ext uri="{FF2B5EF4-FFF2-40B4-BE49-F238E27FC236}">
+                <a16:creationId xmlns:a16="http://schemas.microsoft.com/office/drawing/2014/main" id="{7A644404-D525-4DBB-A8E9-2E8D4BD70672}"/>
+              </a:ext>
+            </a:extLst>
+          </p:cNvPr>
+          <p:cNvSpPr>
+            <a:spLocks xmlns:a="http://schemas.openxmlformats.org/drawingml/2006/main" noGrp="1"/>
+          </p:cNvSpPr>
+          <p:nvPr/>
+        </p:nvSpPr>
+        <p:spPr>
+          <a:xfrm xmlns:a="http://schemas.openxmlformats.org/drawingml/2006/main">
+            <a:off x="11144250" y="6334125"/>
+            <a:ext cx="714375" cy="285750"/>
+          </a:xfrm>
+          <a:prstGeom xmlns:a="http://schemas.openxmlformats.org/drawingml/2006/main" prst="rect">
+            <a:avLst/>
+          </a:prstGeom>
+          <a:noFill xmlns:a="http://schemas.openxmlformats.org/drawingml/2006/main"/>
+          <a:ln xmlns:a="http://schemas.openxmlformats.org/drawingml/2006/main" w="0">
+            <a:noFill/>
+          </a:ln>
+        </p:spPr>
+        <p:txBody>
+          <a:bodyPr xmlns:a="http://schemas.openxmlformats.org/drawingml/2006/main"/>
+          <a:lstStyle xmlns:a="http://schemas.openxmlformats.org/drawingml/2006/main">
+            <a:defPPr>
+              <a:defRPr sz="1200">
+                <a:solidFill>
+                  <a:srgbClr val="172B3A"/>
+                </a:solidFill>
+                <a:latin typeface="Arial Unicode MS"/>
+                <a:ea typeface="Arial Unicode MS"/>
+                <a:cs typeface="Arial Unicode MS"/>
+              </a:defRPr>
+            </a:defPPr>
+            <a:lvl1pPr>
+              <a:defRPr sz="1200">
+                <a:solidFill>
+                  <a:srgbClr val="172B3A"/>
+                </a:solidFill>
+                <a:latin typeface="Arial Unicode MS"/>
+                <a:ea typeface="Arial Unicode MS"/>
+                <a:cs typeface="Arial Unicode MS"/>
+              </a:defRPr>
+            </a:lvl1pPr>
+            <a:lvl2pPr>
+              <a:defRPr sz="1200">
+                <a:solidFill>
+                  <a:srgbClr val="172B3A"/>
+                </a:solidFill>
+                <a:latin typeface="Arial Unicode MS"/>
+                <a:ea typeface="Arial Unicode MS"/>
+                <a:cs typeface="Arial Unicode MS"/>
+              </a:defRPr>
+            </a:lvl2pPr>
+            <a:lvl3pPr>
+              <a:defRPr sz="1200">
+                <a:solidFill>
+                  <a:srgbClr val="172B3A"/>
+                </a:solidFill>
+                <a:latin typeface="Arial Unicode MS"/>
+                <a:ea typeface="Arial Unicode MS"/>
+                <a:cs typeface="Arial Unicode MS"/>
+              </a:defRPr>
+            </a:lvl3pPr>
+            <a:lvl4pPr>
+              <a:defRPr sz="1200">
+                <a:solidFill>
+                  <a:srgbClr val="172B3A"/>
+                </a:solidFill>
+                <a:latin typeface="Arial Unicode MS"/>
+                <a:ea typeface="Arial Unicode MS"/>
+                <a:cs typeface="Arial Unicode MS"/>
+              </a:defRPr>
+            </a:lvl4pPr>
+            <a:lvl5pPr>
+              <a:defRPr sz="1200">
+                <a:solidFill>
+                  <a:srgbClr val="172B3A"/>
+                </a:solidFill>
+                <a:latin typeface="Arial Unicode MS"/>
+                <a:ea typeface="Arial Unicode MS"/>
+                <a:cs typeface="Arial Unicode MS"/>
+              </a:defRPr>
+            </a:lvl5pPr>
+            <a:lvl6pPr>
+              <a:defRPr sz="1200">
+                <a:solidFill>
+                  <a:srgbClr val="172B3A"/>
+                </a:solidFill>
+                <a:latin typeface="Arial Unicode MS"/>
+                <a:ea typeface="Arial Unicode MS"/>
+                <a:cs typeface="Arial Unicode MS"/>
+              </a:defRPr>
+            </a:lvl6pPr>
+            <a:lvl7pPr>
+              <a:defRPr sz="1200">
+                <a:solidFill>
+                  <a:srgbClr val="172B3A"/>
+                </a:solidFill>
+                <a:latin typeface="Arial Unicode MS"/>
+                <a:ea typeface="Arial Unicode MS"/>
+                <a:cs typeface="Arial Unicode MS"/>
+              </a:defRPr>
+            </a:lvl7pPr>
+            <a:lvl8pPr>
+              <a:defRPr sz="1200">
+                <a:solidFill>
+                  <a:srgbClr val="172B3A"/>
+                </a:solidFill>
+                <a:latin typeface="Arial Unicode MS"/>
+                <a:ea typeface="Arial Unicode MS"/>
+                <a:cs typeface="Arial Unicode MS"/>
+              </a:defRPr>
+            </a:lvl8pPr>
+            <a:lvl9pPr>
+              <a:defRPr sz="1200">
+                <a:solidFill>
+                  <a:srgbClr val="172B3A"/>
+                </a:solidFill>
+                <a:latin typeface="Arial Unicode MS"/>
+                <a:ea typeface="Arial Unicode MS"/>
+                <a:cs typeface="Arial Unicode MS"/>
+              </a:defRPr>
+            </a:lvl9pPr>
+          </a:lstStyle>
+          <a:p xmlns:a="http://schemas.openxmlformats.org/drawingml/2006/main">
+            <a:pPr>
+              <a:defRPr sz="1200">
+                <a:solidFill>
+                  <a:srgbClr val="172B3A"/>
+                </a:solidFill>
+                <a:latin typeface="Arial Unicode MS"/>
+                <a:ea typeface="Arial Unicode MS"/>
+                <a:cs typeface="Arial Unicode MS"/>
+              </a:defRPr>
+            </a:pPr>
+            <a:r>
+              <a:rPr sz="1200">
+                <a:solidFill>
+                  <a:srgbClr val="172B3A"/>
+                </a:solidFill>
+                <a:latin typeface="Arial Unicode MS"/>
+                <a:ea typeface="Arial Unicode MS"/>
+                <a:cs typeface="Arial Unicode MS"/>
+              </a:rPr>
+              <a:t>21</a:t>
+            </a:r>
+          </a:p>
+        </p:txBody>
+      </p:sp>
+      <p:sp>
+        <p:nvSpPr>
+          <p:cNvPr id="4" name="">
+            <a:extLst xmlns:a="http://schemas.openxmlformats.org/drawingml/2006/main">
+              <a:ext uri="{FF2B5EF4-FFF2-40B4-BE49-F238E27FC236}">
+                <a16:creationId xmlns:a16="http://schemas.microsoft.com/office/drawing/2014/main" id="{F90EE97E-F10C-49B9-903F-6C511FA3AC88}"/>
+              </a:ext>
+            </a:extLst>
+          </p:cNvPr>
+          <p:cNvSpPr>
+            <a:spLocks xmlns:a="http://schemas.openxmlformats.org/drawingml/2006/main" noGrp="1"/>
+          </p:cNvSpPr>
+          <p:nvPr/>
+        </p:nvSpPr>
+        <p:spPr>
+          <a:xfrm xmlns:a="http://schemas.openxmlformats.org/drawingml/2006/main">
+            <a:off x="619125" y="1428750"/>
+            <a:ext cx="10763250" cy="904875"/>
+          </a:xfrm>
+          <a:prstGeom xmlns:a="http://schemas.openxmlformats.org/drawingml/2006/main" prst="rect">
+            <a:avLst/>
+          </a:prstGeom>
+          <a:noFill xmlns:a="http://schemas.openxmlformats.org/drawingml/2006/main"/>
+          <a:ln xmlns:a="http://schemas.openxmlformats.org/drawingml/2006/main" w="0">
+            <a:noFill/>
+          </a:ln>
+        </p:spPr>
+        <p:txBody>
+          <a:bodyPr xmlns:a="http://schemas.openxmlformats.org/drawingml/2006/main"/>
+          <a:lstStyle xmlns:a="http://schemas.openxmlformats.org/drawingml/2006/main">
+            <a:defPPr>
+              <a:defRPr sz="2100">
+                <a:solidFill>
+                  <a:srgbClr val="176B87"/>
+                </a:solidFill>
+                <a:latin typeface="Arial Unicode MS"/>
+                <a:ea typeface="Arial Unicode MS"/>
+                <a:cs typeface="Arial Unicode MS"/>
+              </a:defRPr>
+            </a:defPPr>
+            <a:lvl1pPr>
+              <a:defRPr sz="2100">
+                <a:solidFill>
+                  <a:srgbClr val="176B87"/>
+                </a:solidFill>
+                <a:latin typeface="Arial Unicode MS"/>
+                <a:ea typeface="Arial Unicode MS"/>
+                <a:cs typeface="Arial Unicode MS"/>
+              </a:defRPr>
+            </a:lvl1pPr>
+            <a:lvl2pPr>
+              <a:defRPr sz="2100">
+                <a:solidFill>
+                  <a:srgbClr val="176B87"/>
+                </a:solidFill>
+                <a:latin typeface="Arial Unicode MS"/>
+                <a:ea typeface="Arial Unicode MS"/>
+                <a:cs typeface="Arial Unicode MS"/>
+              </a:defRPr>
+            </a:lvl2pPr>
+            <a:lvl3pPr>
+              <a:defRPr sz="2100">
+                <a:solidFill>
+                  <a:srgbClr val="176B87"/>
+                </a:solidFill>
+                <a:latin typeface="Arial Unicode MS"/>
+                <a:ea typeface="Arial Unicode MS"/>
+                <a:cs typeface="Arial Unicode MS"/>
+              </a:defRPr>
+            </a:lvl3pPr>
+            <a:lvl4pPr>
+              <a:defRPr sz="2100">
+                <a:solidFill>
+                  <a:srgbClr val="176B87"/>
+                </a:solidFill>
+                <a:latin typeface="Arial Unicode MS"/>
+                <a:ea typeface="Arial Unicode MS"/>
+                <a:cs typeface="Arial Unicode MS"/>
+              </a:defRPr>
+            </a:lvl4pPr>
+            <a:lvl5pPr>
+              <a:defRPr sz="2100">
+                <a:solidFill>
+                  <a:srgbClr val="176B87"/>
+                </a:solidFill>
+                <a:latin typeface="Arial Unicode MS"/>
+                <a:ea typeface="Arial Unicode MS"/>
+                <a:cs typeface="Arial Unicode MS"/>
+              </a:defRPr>
+            </a:lvl5pPr>
+            <a:lvl6pPr>
+              <a:defRPr sz="2100">
+                <a:solidFill>
+                  <a:srgbClr val="176B87"/>
+                </a:solidFill>
+                <a:latin typeface="Arial Unicode MS"/>
+                <a:ea typeface="Arial Unicode MS"/>
+                <a:cs typeface="Arial Unicode MS"/>
+              </a:defRPr>
+            </a:lvl6pPr>
+            <a:lvl7pPr>
+              <a:defRPr sz="2100">
+                <a:solidFill>
+                  <a:srgbClr val="176B87"/>
+                </a:solidFill>
+                <a:latin typeface="Arial Unicode MS"/>
+                <a:ea typeface="Arial Unicode MS"/>
+                <a:cs typeface="Arial Unicode MS"/>
+              </a:defRPr>
+            </a:lvl7pPr>
+            <a:lvl8pPr>
+              <a:defRPr sz="2100">
+                <a:solidFill>
+                  <a:srgbClr val="176B87"/>
+                </a:solidFill>
+                <a:latin typeface="Arial Unicode MS"/>
+                <a:ea typeface="Arial Unicode MS"/>
+                <a:cs typeface="Arial Unicode MS"/>
+              </a:defRPr>
+            </a:lvl8pPr>
+            <a:lvl9pPr>
+              <a:defRPr sz="2100">
+                <a:solidFill>
+                  <a:srgbClr val="176B87"/>
+                </a:solidFill>
+                <a:latin typeface="Arial Unicode MS"/>
+                <a:ea typeface="Arial Unicode MS"/>
+                <a:cs typeface="Arial Unicode MS"/>
+              </a:defRPr>
+            </a:lvl9pPr>
+          </a:lstStyle>
+          <a:p xmlns:a="http://schemas.openxmlformats.org/drawingml/2006/main">
+            <a:pPr>
+              <a:defRPr sz="2100">
+                <a:solidFill>
+                  <a:srgbClr val="176B87"/>
+                </a:solidFill>
+                <a:latin typeface="Arial Unicode MS"/>
+                <a:ea typeface="Arial Unicode MS"/>
+                <a:cs typeface="Arial Unicode MS"/>
+              </a:defRPr>
+            </a:pPr>
+            <a:r>
+              <a:rPr sz="2100">
+                <a:solidFill>
+                  <a:srgbClr val="176B87"/>
+                </a:solidFill>
+                <a:latin typeface="Arial Unicode MS"/>
+                <a:ea typeface="Arial Unicode MS"/>
+                <a:cs typeface="Arial Unicode MS"/>
+              </a:rPr>
+              <a:t>处理容量 = 上一循环原始容量 + 限幅后的ΔQ</a:t>
+            </a:r>
+          </a:p>
+          <a:p xmlns:a="http://schemas.openxmlformats.org/drawingml/2006/main">
+            <a:pPr>
+              <a:defRPr sz="2100">
+                <a:solidFill>
+                  <a:srgbClr val="176B87"/>
+                </a:solidFill>
+                <a:latin typeface="Arial Unicode MS"/>
+                <a:ea typeface="Arial Unicode MS"/>
+                <a:cs typeface="Arial Unicode MS"/>
+              </a:defRPr>
+            </a:pPr>
+            <a:r>
+              <a:rPr sz="2100">
+                <a:solidFill>
+                  <a:srgbClr val="176B87"/>
+                </a:solidFill>
+                <a:latin typeface="Arial Unicode MS"/>
+                <a:ea typeface="Arial Unicode MS"/>
+                <a:cs typeface="Arial Unicode MS"/>
+              </a:rPr>
+              <a:t>只将极端变化量压到3IQR边界，保留全部636行</a:t>
+            </a:r>
+          </a:p>
+        </p:txBody>
+      </p:sp>
+      <p:graphicFrame>
+        <p:nvGraphicFramePr>
+          <p:cNvPr id="5" name="">
+            <a:extLst xmlns:a="http://schemas.openxmlformats.org/drawingml/2006/main">
+              <a:ext uri="{FF2B5EF4-FFF2-40B4-BE49-F238E27FC236}">
+                <a16:creationId xmlns:a16="http://schemas.microsoft.com/office/drawing/2014/main" id="{076573EA-BC97-4326-BDA5-7C67361E0638}"/>
+              </a:ext>
+            </a:extLst>
+          </p:cNvPr>
+          <p:cNvGraphicFramePr/>
+          <p:nvPr/>
+        </p:nvGraphicFramePr>
+        <p:xfrm>
+          <a:off xmlns:a="http://schemas.openxmlformats.org/drawingml/2006/main" x="619125" y="2762250"/>
+          <a:ext xmlns:a="http://schemas.openxmlformats.org/drawingml/2006/main" cx="10763250" cy="2571750"/>
+        </p:xfrm>
+        <a:graphic xmlns:a="http://schemas.openxmlformats.org/drawingml/2006/main">
+          <a:graphicData uri="http://schemas.openxmlformats.org/drawingml/2006/table">
+            <a:tbl>
+              <a:tblPr/>
+              <a:tblGrid>
+                <a:gridCol w="3048000"/>
+                <a:gridCol w="2571750"/>
+                <a:gridCol w="2571750"/>
+                <a:gridCol w="2571750"/>
+              </a:tblGrid>
+              <a:tr h="514350">
+                <a:tc>
+                  <a:txBody>
+                    <a:bodyPr/>
+                    <a:lstStyle/>
+                    <a:p>
+                      <a:r>
+                        <a:rPr sz="1875">
+                          <a:solidFill>
+                            <a:srgbClr val="FFFFFF"/>
+                          </a:solidFill>
+                          <a:latin typeface="Arial Unicode MS"/>
+                          <a:ea typeface="Arial Unicode MS"/>
+                          <a:cs typeface="Arial Unicode MS"/>
+                        </a:rPr>
+                        <a:t>电池 / 循环</a:t>
+                      </a:r>
+                    </a:p>
+                  </a:txBody>
+                  <a:tcPr marL="91440" marR="91440" marT="45720" marB="45720">
+                    <a:lnL w="9525">
+                      <a:solidFill>
+                        <a:srgbClr val="D6E0E5"/>
+                      </a:solidFill>
+                    </a:lnL>
+                    <a:lnR w="9525">
+                      <a:solidFill>
+                        <a:srgbClr val="D6E0E5"/>
+                      </a:solidFill>
+                    </a:lnR>
+                    <a:lnT w="9525">
+                      <a:solidFill>
+                        <a:srgbClr val="D6E0E5"/>
+                      </a:solidFill>
+                    </a:lnT>
+                    <a:lnB w="9525">
+                      <a:solidFill>
+                        <a:srgbClr val="D6E0E5"/>
+                      </a:solidFill>
+                    </a:lnB>
+                    <a:solidFill>
+                      <a:srgbClr val="176B87"/>
+                    </a:solidFill>
+                  </a:tcPr>
+                </a:tc>
+                <a:tc>
+                  <a:txBody>
+                    <a:bodyPr/>
+                    <a:lstStyle/>
+                    <a:p>
+                      <a:r>
+                        <a:rPr sz="1875">
+                          <a:solidFill>
+                            <a:srgbClr val="FFFFFF"/>
+                          </a:solidFill>
+                          <a:latin typeface="Arial Unicode MS"/>
+                          <a:ea typeface="Arial Unicode MS"/>
+                          <a:cs typeface="Arial Unicode MS"/>
+                        </a:rPr>
+                        <a:t>原容量Ah</a:t>
+                      </a:r>
+                    </a:p>
+                  </a:txBody>
+                  <a:tcPr marL="91440" marR="91440" marT="45720" marB="45720">
+                    <a:lnR w="9525">
+                      <a:solidFill>
+                        <a:srgbClr val="D6E0E5"/>
+                      </a:solidFill>
+                    </a:lnR>
+                    <a:lnT w="9525">
+                      <a:solidFill>
+                        <a:srgbClr val="D6E0E5"/>
+                      </a:solidFill>
+                    </a:lnT>
+                    <a:lnB w="9525">
+                      <a:solidFill>
+                        <a:srgbClr val="D6E0E5"/>
+                      </a:solidFill>
+                    </a:lnB>
+                    <a:solidFill>
+                      <a:srgbClr val="176B87"/>
+                    </a:solidFill>
+                  </a:tcPr>
+                </a:tc>
+                <a:tc>
+                  <a:txBody>
+                    <a:bodyPr/>
+                    <a:lstStyle/>
+                    <a:p>
+                      <a:r>
+                        <a:rPr sz="1875">
+                          <a:solidFill>
+                            <a:srgbClr val="FFFFFF"/>
+                          </a:solidFill>
+                          <a:latin typeface="Arial Unicode MS"/>
+                          <a:ea typeface="Arial Unicode MS"/>
+                          <a:cs typeface="Arial Unicode MS"/>
+                        </a:rPr>
+                        <a:t>相邻变化Ah</a:t>
+                      </a:r>
+                    </a:p>
+                  </a:txBody>
+                  <a:tcPr marL="91440" marR="91440" marT="45720" marB="45720">
+                    <a:lnR w="9525">
+                      <a:solidFill>
+                        <a:srgbClr val="D6E0E5"/>
+                      </a:solidFill>
+                    </a:lnR>
+                    <a:lnT w="9525">
+                      <a:solidFill>
+                        <a:srgbClr val="D6E0E5"/>
+                      </a:solidFill>
+                    </a:lnT>
+                    <a:lnB w="9525">
+                      <a:solidFill>
+                        <a:srgbClr val="D6E0E5"/>
+                      </a:solidFill>
+                    </a:lnB>
+                    <a:solidFill>
+                      <a:srgbClr val="176B87"/>
+                    </a:solidFill>
+                  </a:tcPr>
+                </a:tc>
+                <a:tc>
+                  <a:txBody>
+                    <a:bodyPr/>
+                    <a:lstStyle/>
+                    <a:p>
+                      <a:r>
+                        <a:rPr sz="1875">
+                          <a:solidFill>
+                            <a:srgbClr val="FFFFFF"/>
+                          </a:solidFill>
+                          <a:latin typeface="Arial Unicode MS"/>
+                          <a:ea typeface="Arial Unicode MS"/>
+                          <a:cs typeface="Arial Unicode MS"/>
+                        </a:rPr>
+                        <a:t>处理对照Ah</a:t>
+                      </a:r>
+                    </a:p>
+                  </a:txBody>
+                  <a:tcPr marL="91440" marR="91440" marT="45720" marB="45720">
+                    <a:lnR w="9525">
+                      <a:solidFill>
+                        <a:srgbClr val="D6E0E5"/>
+                      </a:solidFill>
+                    </a:lnR>
+                    <a:lnT w="9525">
+                      <a:solidFill>
+                        <a:srgbClr val="D6E0E5"/>
+                      </a:solidFill>
+                    </a:lnT>
+                    <a:lnB w="9525">
+                      <a:solidFill>
+                        <a:srgbClr val="D6E0E5"/>
+                      </a:solidFill>
+                    </a:lnB>
+                    <a:solidFill>
+                      <a:srgbClr val="176B87"/>
+                    </a:solidFill>
+                  </a:tcPr>
+                </a:tc>
+              </a:tr>
+              <a:tr h="514350">
+                <a:tc>
+                  <a:txBody>
+                    <a:bodyPr/>
+                    <a:lstStyle/>
+                    <a:p>
+                      <a:r>
+                        <a:rPr sz="1875">
+                          <a:solidFill>
+                            <a:srgbClr val="172B3A"/>
+                          </a:solidFill>
+                          <a:latin typeface="Arial Unicode MS"/>
+                          <a:ea typeface="Arial Unicode MS"/>
+                          <a:cs typeface="Arial Unicode MS"/>
+                        </a:rPr>
+                        <a:t>B0006 / 90</a:t>
+                      </a:r>
+                    </a:p>
+                  </a:txBody>
+                  <a:tcPr marL="91440" marR="91440" marT="45720" marB="45720">
+                    <a:lnL w="9525">
+                      <a:solidFill>
+                        <a:srgbClr val="D6E0E5"/>
+                      </a:solidFill>
+                    </a:lnL>
+                    <a:lnR w="9525">
+                      <a:solidFill>
+                        <a:srgbClr val="D6E0E5"/>
+                      </a:solidFill>
+                    </a:lnR>
+                    <a:lnB w="9525">
+                      <a:solidFill>
+                        <a:srgbClr val="D6E0E5"/>
+                      </a:solidFill>
+                    </a:lnB>
+                    <a:solidFill>
+                      <a:srgbClr val="F0F5F7"/>
+                    </a:solidFill>
+                  </a:tcPr>
+                </a:tc>
+                <a:tc>
+                  <a:txBody>
+                    <a:bodyPr/>
+                    <a:lstStyle/>
+                    <a:p>
+                      <a:r>
+                        <a:rPr sz="1875">
+                          <a:solidFill>
+                            <a:srgbClr val="172B3A"/>
+                          </a:solidFill>
+                          <a:latin typeface="Arial Unicode MS"/>
+                          <a:ea typeface="Arial Unicode MS"/>
+                          <a:cs typeface="Arial Unicode MS"/>
+                        </a:rPr>
+                        <a:t>1.5936</a:t>
+                      </a:r>
+                    </a:p>
+                  </a:txBody>
+                  <a:tcPr marL="91440" marR="91440" marT="45720" marB="45720">
+                    <a:lnR w="9525">
+                      <a:solidFill>
+                        <a:srgbClr val="D6E0E5"/>
+                      </a:solidFill>
+                    </a:lnR>
+                    <a:lnB w="9525">
+                      <a:solidFill>
+                        <a:srgbClr val="D6E0E5"/>
+                      </a:solidFill>
+                    </a:lnB>
+                    <a:solidFill>
+                      <a:srgbClr val="F0F5F7"/>
+                    </a:solidFill>
+                  </a:tcPr>
+                </a:tc>
+                <a:tc>
+                  <a:txBody>
+                    <a:bodyPr/>
+                    <a:lstStyle/>
+                    <a:p>
+                      <a:r>
+                        <a:rPr sz="1875">
+                          <a:solidFill>
+                            <a:srgbClr val="172B3A"/>
+                          </a:solidFill>
+                          <a:latin typeface="Arial Unicode MS"/>
+                          <a:ea typeface="Arial Unicode MS"/>
+                          <a:cs typeface="Arial Unicode MS"/>
+                        </a:rPr>
+                        <a:t>0.1519</a:t>
+                      </a:r>
+                    </a:p>
+                  </a:txBody>
+                  <a:tcPr marL="91440" marR="91440" marT="45720" marB="45720">
+                    <a:lnR w="9525">
+                      <a:solidFill>
+                        <a:srgbClr val="D6E0E5"/>
+                      </a:solidFill>
+                    </a:lnR>
+                    <a:lnB w="9525">
+                      <a:solidFill>
+                        <a:srgbClr val="D6E0E5"/>
+                      </a:solidFill>
+                    </a:lnB>
+                    <a:solidFill>
+                      <a:srgbClr val="F0F5F7"/>
+                    </a:solidFill>
+                  </a:tcPr>
+                </a:tc>
+                <a:tc>
+                  <a:txBody>
+                    <a:bodyPr/>
+                    <a:lstStyle/>
+                    <a:p>
+                      <a:r>
+                        <a:rPr sz="1875">
+                          <a:solidFill>
+                            <a:srgbClr val="172B3A"/>
+                          </a:solidFill>
+                          <a:latin typeface="Arial Unicode MS"/>
+                          <a:ea typeface="Arial Unicode MS"/>
+                          <a:cs typeface="Arial Unicode MS"/>
+                        </a:rPr>
+                        <a:t>1.467350</a:t>
+                      </a:r>
+                    </a:p>
+                  </a:txBody>
+                  <a:tcPr marL="91440" marR="91440" marT="45720" marB="45720">
+                    <a:lnR w="9525">
+                      <a:solidFill>
+                        <a:srgbClr val="D6E0E5"/>
+                      </a:solidFill>
+                    </a:lnR>
+                    <a:lnB w="9525">
+                      <a:solidFill>
+                        <a:srgbClr val="D6E0E5"/>
+                      </a:solidFill>
+                    </a:lnB>
+                    <a:solidFill>
+                      <a:srgbClr val="F0F5F7"/>
+                    </a:solidFill>
+                  </a:tcPr>
+                </a:tc>
+              </a:tr>
+              <a:tr h="514350">
+                <a:tc>
+                  <a:txBody>
+                    <a:bodyPr/>
+                    <a:lstStyle/>
+                    <a:p>
+                      <a:r>
+                        <a:rPr sz="1875">
+                          <a:solidFill>
+                            <a:srgbClr val="172B3A"/>
+                          </a:solidFill>
+                          <a:latin typeface="Arial Unicode MS"/>
+                          <a:ea typeface="Arial Unicode MS"/>
+                          <a:cs typeface="Arial Unicode MS"/>
+                        </a:rPr>
+                        <a:t>B0018 / 46</a:t>
+                      </a:r>
+                    </a:p>
+                  </a:txBody>
+                  <a:tcPr marL="91440" marR="91440" marT="45720" marB="45720">
+                    <a:lnL w="9525">
+                      <a:solidFill>
+                        <a:srgbClr val="D6E0E5"/>
+                      </a:solidFill>
+                    </a:lnL>
+                    <a:lnR w="9525">
+                      <a:solidFill>
+                        <a:srgbClr val="D6E0E5"/>
+                      </a:solidFill>
+                    </a:lnR>
+                    <a:lnB w="9525">
+                      <a:solidFill>
+                        <a:srgbClr val="D6E0E5"/>
+                      </a:solidFill>
+                    </a:lnB>
+                    <a:solidFill>
+                      <a:srgbClr val="FFFFFF"/>
+                    </a:solidFill>
+                  </a:tcPr>
+                </a:tc>
+                <a:tc>
+                  <a:txBody>
+                    <a:bodyPr/>
+                    <a:lstStyle/>
+                    <a:p>
+                      <a:r>
+                        <a:rPr sz="1875">
+                          <a:solidFill>
+                            <a:srgbClr val="172B3A"/>
+                          </a:solidFill>
+                          <a:latin typeface="Arial Unicode MS"/>
+                          <a:ea typeface="Arial Unicode MS"/>
+                          <a:cs typeface="Arial Unicode MS"/>
+                        </a:rPr>
+                        <a:t>1.7267</a:t>
+                      </a:r>
+                    </a:p>
+                  </a:txBody>
+                  <a:tcPr marL="91440" marR="91440" marT="45720" marB="45720">
+                    <a:lnR w="9525">
+                      <a:solidFill>
+                        <a:srgbClr val="D6E0E5"/>
+                      </a:solidFill>
+                    </a:lnR>
+                    <a:lnB w="9525">
+                      <a:solidFill>
+                        <a:srgbClr val="D6E0E5"/>
+                      </a:solidFill>
+                    </a:lnB>
+                    <a:solidFill>
+                      <a:srgbClr val="FFFFFF"/>
+                    </a:solidFill>
+                  </a:tcPr>
+                </a:tc>
+                <a:tc>
+                  <a:txBody>
+                    <a:bodyPr/>
+                    <a:lstStyle/>
+                    <a:p>
+                      <a:r>
+                        <a:rPr sz="1875">
+                          <a:solidFill>
+                            <a:srgbClr val="172B3A"/>
+                          </a:solidFill>
+                          <a:latin typeface="Arial Unicode MS"/>
+                          <a:ea typeface="Arial Unicode MS"/>
+                          <a:cs typeface="Arial Unicode MS"/>
+                        </a:rPr>
+                        <a:t>0.1312</a:t>
+                      </a:r>
+                    </a:p>
+                  </a:txBody>
+                  <a:tcPr marL="91440" marR="91440" marT="45720" marB="45720">
+                    <a:lnR w="9525">
+                      <a:solidFill>
+                        <a:srgbClr val="D6E0E5"/>
+                      </a:solidFill>
+                    </a:lnR>
+                    <a:lnB w="9525">
+                      <a:solidFill>
+                        <a:srgbClr val="D6E0E5"/>
+                      </a:solidFill>
+                    </a:lnB>
+                    <a:solidFill>
+                      <a:srgbClr val="FFFFFF"/>
+                    </a:solidFill>
+                  </a:tcPr>
+                </a:tc>
+                <a:tc>
+                  <a:txBody>
+                    <a:bodyPr/>
+                    <a:lstStyle/>
+                    <a:p>
+                      <a:r>
+                        <a:rPr sz="1875">
+                          <a:solidFill>
+                            <a:srgbClr val="172B3A"/>
+                          </a:solidFill>
+                          <a:latin typeface="Arial Unicode MS"/>
+                          <a:ea typeface="Arial Unicode MS"/>
+                          <a:cs typeface="Arial Unicode MS"/>
+                        </a:rPr>
+                        <a:t>1.615675</a:t>
+                      </a:r>
+                    </a:p>
+                  </a:txBody>
+                  <a:tcPr marL="91440" marR="91440" marT="45720" marB="45720">
+                    <a:lnR w="9525">
+                      <a:solidFill>
+                        <a:srgbClr val="D6E0E5"/>
+                      </a:solidFill>
+                    </a:lnR>
+                    <a:lnB w="9525">
+                      <a:solidFill>
+                        <a:srgbClr val="D6E0E5"/>
+                      </a:solidFill>
+                    </a:lnB>
+                    <a:solidFill>
+                      <a:srgbClr val="FFFFFF"/>
+                    </a:solidFill>
+                  </a:tcPr>
+                </a:tc>
+              </a:tr>
+              <a:tr h="514350">
+                <a:tc>
+                  <a:txBody>
+                    <a:bodyPr/>
+                    <a:lstStyle/>
+                    <a:p>
+                      <a:r>
+                        <a:rPr sz="1875">
+                          <a:solidFill>
+                            <a:srgbClr val="172B3A"/>
+                          </a:solidFill>
+                          <a:latin typeface="Arial Unicode MS"/>
+                          <a:ea typeface="Arial Unicode MS"/>
+                          <a:cs typeface="Arial Unicode MS"/>
+                        </a:rPr>
+                        <a:t>B0007 / 90</a:t>
+                      </a:r>
+                    </a:p>
+                  </a:txBody>
+                  <a:tcPr marL="91440" marR="91440" marT="45720" marB="45720">
+                    <a:lnL w="9525">
+                      <a:solidFill>
+                        <a:srgbClr val="D6E0E5"/>
+                      </a:solidFill>
+                    </a:lnL>
+                    <a:lnR w="9525">
+                      <a:solidFill>
+                        <a:srgbClr val="D6E0E5"/>
+                      </a:solidFill>
+                    </a:lnR>
+                    <a:lnB w="9525">
+                      <a:solidFill>
+                        <a:srgbClr val="D6E0E5"/>
+                      </a:solidFill>
+                    </a:lnB>
+                    <a:solidFill>
+                      <a:srgbClr val="F0F5F7"/>
+                    </a:solidFill>
+                  </a:tcPr>
+                </a:tc>
+                <a:tc>
+                  <a:txBody>
+                    <a:bodyPr/>
+                    <a:lstStyle/>
+                    <a:p>
+                      <a:r>
+                        <a:rPr sz="1875">
+                          <a:solidFill>
+                            <a:srgbClr val="172B3A"/>
+                          </a:solidFill>
+                          <a:latin typeface="Arial Unicode MS"/>
+                          <a:ea typeface="Arial Unicode MS"/>
+                          <a:cs typeface="Arial Unicode MS"/>
+                        </a:rPr>
+                        <a:t>1.6888</a:t>
+                      </a:r>
+                    </a:p>
+                  </a:txBody>
+                  <a:tcPr marL="91440" marR="91440" marT="45720" marB="45720">
+                    <a:lnR w="9525">
+                      <a:solidFill>
+                        <a:srgbClr val="D6E0E5"/>
+                      </a:solidFill>
+                    </a:lnR>
+                    <a:lnB w="9525">
+                      <a:solidFill>
+                        <a:srgbClr val="D6E0E5"/>
+                      </a:solidFill>
+                    </a:lnB>
+                    <a:solidFill>
+                      <a:srgbClr val="F0F5F7"/>
+                    </a:solidFill>
+                  </a:tcPr>
+                </a:tc>
+                <a:tc>
+                  <a:txBody>
+                    <a:bodyPr/>
+                    <a:lstStyle/>
+                    <a:p>
+                      <a:r>
+                        <a:rPr sz="1875">
+                          <a:solidFill>
+                            <a:srgbClr val="172B3A"/>
+                          </a:solidFill>
+                          <a:latin typeface="Arial Unicode MS"/>
+                          <a:ea typeface="Arial Unicode MS"/>
+                          <a:cs typeface="Arial Unicode MS"/>
+                        </a:rPr>
+                        <a:t>0.0981</a:t>
+                      </a:r>
+                    </a:p>
+                  </a:txBody>
+                  <a:tcPr marL="91440" marR="91440" marT="45720" marB="45720">
+                    <a:lnR w="9525">
+                      <a:solidFill>
+                        <a:srgbClr val="D6E0E5"/>
+                      </a:solidFill>
+                    </a:lnR>
+                    <a:lnB w="9525">
+                      <a:solidFill>
+                        <a:srgbClr val="D6E0E5"/>
+                      </a:solidFill>
+                    </a:lnB>
+                    <a:solidFill>
+                      <a:srgbClr val="F0F5F7"/>
+                    </a:solidFill>
+                  </a:tcPr>
+                </a:tc>
+                <a:tc>
+                  <a:txBody>
+                    <a:bodyPr/>
+                    <a:lstStyle/>
+                    <a:p>
+                      <a:r>
+                        <a:rPr sz="1875">
+                          <a:solidFill>
+                            <a:srgbClr val="172B3A"/>
+                          </a:solidFill>
+                          <a:latin typeface="Arial Unicode MS"/>
+                          <a:ea typeface="Arial Unicode MS"/>
+                          <a:cs typeface="Arial Unicode MS"/>
+                        </a:rPr>
+                        <a:t>1.621050</a:t>
+                      </a:r>
+                    </a:p>
+                  </a:txBody>
+                  <a:tcPr marL="91440" marR="91440" marT="45720" marB="45720">
+                    <a:lnR w="9525">
+                      <a:solidFill>
+                        <a:srgbClr val="D6E0E5"/>
+                      </a:solidFill>
+                    </a:lnR>
+                    <a:lnB w="9525">
+                      <a:solidFill>
+                        <a:srgbClr val="D6E0E5"/>
+                      </a:solidFill>
+                    </a:lnB>
+                    <a:solidFill>
+                      <a:srgbClr val="F0F5F7"/>
+                    </a:solidFill>
+                  </a:tcPr>
+                </a:tc>
+              </a:tr>
+              <a:tr h="514350">
+                <a:tc>
+                  <a:txBody>
+                    <a:bodyPr/>
+                    <a:lstStyle/>
+                    <a:p>
+                      <a:r>
+                        <a:rPr sz="1875">
+                          <a:solidFill>
+                            <a:srgbClr val="172B3A"/>
+                          </a:solidFill>
+                          <a:latin typeface="Arial Unicode MS"/>
+                          <a:ea typeface="Arial Unicode MS"/>
+                          <a:cs typeface="Arial Unicode MS"/>
+                        </a:rPr>
+                        <a:t>B0005 / 90</a:t>
+                      </a:r>
+                    </a:p>
+                  </a:txBody>
+                  <a:tcPr marL="91440" marR="91440" marT="45720" marB="45720">
+                    <a:lnL w="9525">
+                      <a:solidFill>
+                        <a:srgbClr val="D6E0E5"/>
+                      </a:solidFill>
+                    </a:lnL>
+                    <a:lnR w="9525">
+                      <a:solidFill>
+                        <a:srgbClr val="D6E0E5"/>
+                      </a:solidFill>
+                    </a:lnR>
+                    <a:lnB w="9525">
+                      <a:solidFill>
+                        <a:srgbClr val="D6E0E5"/>
+                      </a:solidFill>
+                    </a:lnB>
+                    <a:solidFill>
+                      <a:srgbClr val="FFFFFF"/>
+                    </a:solidFill>
+                  </a:tcPr>
+                </a:tc>
+                <a:tc>
+                  <a:txBody>
+                    <a:bodyPr/>
+                    <a:lstStyle/>
+                    <a:p>
+                      <a:r>
+                        <a:rPr sz="1875">
+                          <a:solidFill>
+                            <a:srgbClr val="172B3A"/>
+                          </a:solidFill>
+                          <a:latin typeface="Arial Unicode MS"/>
+                          <a:ea typeface="Arial Unicode MS"/>
+                          <a:cs typeface="Arial Unicode MS"/>
+                        </a:rPr>
+                        <a:t>1.6058</a:t>
+                      </a:r>
+                    </a:p>
+                  </a:txBody>
+                  <a:tcPr marL="91440" marR="91440" marT="45720" marB="45720">
+                    <a:lnR w="9525">
+                      <a:solidFill>
+                        <a:srgbClr val="D6E0E5"/>
+                      </a:solidFill>
+                    </a:lnR>
+                    <a:lnB w="9525">
+                      <a:solidFill>
+                        <a:srgbClr val="D6E0E5"/>
+                      </a:solidFill>
+                    </a:lnB>
+                    <a:solidFill>
+                      <a:srgbClr val="FFFFFF"/>
+                    </a:solidFill>
+                  </a:tcPr>
+                </a:tc>
+                <a:tc>
+                  <a:txBody>
+                    <a:bodyPr/>
+                    <a:lstStyle/>
+                    <a:p>
+                      <a:r>
+                        <a:rPr sz="1875">
+                          <a:solidFill>
+                            <a:srgbClr val="172B3A"/>
+                          </a:solidFill>
+                          <a:latin typeface="Arial Unicode MS"/>
+                          <a:ea typeface="Arial Unicode MS"/>
+                          <a:cs typeface="Arial Unicode MS"/>
+                        </a:rPr>
+                        <a:t>0.0883</a:t>
+                      </a:r>
+                    </a:p>
+                  </a:txBody>
+                  <a:tcPr marL="91440" marR="91440" marT="45720" marB="45720">
+                    <a:lnR w="9525">
+                      <a:solidFill>
+                        <a:srgbClr val="D6E0E5"/>
+                      </a:solidFill>
+                    </a:lnR>
+                    <a:lnB w="9525">
+                      <a:solidFill>
+                        <a:srgbClr val="D6E0E5"/>
+                      </a:solidFill>
+                    </a:lnB>
+                    <a:solidFill>
+                      <a:srgbClr val="FFFFFF"/>
+                    </a:solidFill>
+                  </a:tcPr>
+                </a:tc>
+                <a:tc>
+                  <a:txBody>
+                    <a:bodyPr/>
+                    <a:lstStyle/>
+                    <a:p>
+                      <a:r>
+                        <a:rPr sz="1875">
+                          <a:solidFill>
+                            <a:srgbClr val="172B3A"/>
+                          </a:solidFill>
+                          <a:latin typeface="Arial Unicode MS"/>
+                          <a:ea typeface="Arial Unicode MS"/>
+                          <a:cs typeface="Arial Unicode MS"/>
+                        </a:rPr>
+                        <a:t>1.546100</a:t>
+                      </a:r>
+                    </a:p>
+                  </a:txBody>
+                  <a:tcPr marL="91440" marR="91440" marT="45720" marB="45720">
+                    <a:lnR w="9525">
+                      <a:solidFill>
+                        <a:srgbClr val="D6E0E5"/>
+                      </a:solidFill>
+                    </a:lnR>
+                    <a:lnB w="9525">
+                      <a:solidFill>
+                        <a:srgbClr val="D6E0E5"/>
+                      </a:solidFill>
+                    </a:lnB>
+                    <a:solidFill>
+                      <a:srgbClr val="FFFFFF"/>
+                    </a:solidFill>
+                  </a:tcPr>
+                </a:tc>
+              </a:tr>
+            </a:tbl>
+          </a:graphicData>
+        </a:graphic>
+      </p:graphicFrame>
+      <p:sp>
+        <p:nvSpPr>
+          <p:cNvPr id="6" name="">
+            <a:extLst xmlns:a="http://schemas.openxmlformats.org/drawingml/2006/main">
+              <a:ext uri="{FF2B5EF4-FFF2-40B4-BE49-F238E27FC236}">
+                <a16:creationId xmlns:a16="http://schemas.microsoft.com/office/drawing/2014/main" id="{C760F115-3204-4041-832A-A15ACC7382DC}"/>
+              </a:ext>
+            </a:extLst>
+          </p:cNvPr>
+          <p:cNvSpPr>
+            <a:spLocks xmlns:a="http://schemas.openxmlformats.org/drawingml/2006/main" noGrp="1"/>
+          </p:cNvSpPr>
+          <p:nvPr/>
+        </p:nvSpPr>
+        <p:spPr>
+          <a:xfrm xmlns:a="http://schemas.openxmlformats.org/drawingml/2006/main">
+            <a:off x="619125" y="5715000"/>
+            <a:ext cx="10763250" cy="428625"/>
+          </a:xfrm>
+          <a:prstGeom xmlns:a="http://schemas.openxmlformats.org/drawingml/2006/main" prst="rect">
+            <a:avLst/>
+          </a:prstGeom>
+          <a:noFill xmlns:a="http://schemas.openxmlformats.org/drawingml/2006/main"/>
+          <a:ln xmlns:a="http://schemas.openxmlformats.org/drawingml/2006/main" w="0">
+            <a:noFill/>
+          </a:ln>
+        </p:spPr>
+        <p:txBody>
+          <a:bodyPr xmlns:a="http://schemas.openxmlformats.org/drawingml/2006/main"/>
+          <a:lstStyle xmlns:a="http://schemas.openxmlformats.org/drawingml/2006/main">
+            <a:defPPr>
+              <a:defRPr sz="1875">
+                <a:solidFill>
+                  <a:srgbClr val="172B3A"/>
+                </a:solidFill>
+                <a:latin typeface="Arial Unicode MS"/>
+                <a:ea typeface="Arial Unicode MS"/>
+                <a:cs typeface="Arial Unicode MS"/>
+              </a:defRPr>
+            </a:defPPr>
+            <a:lvl1pPr>
+              <a:defRPr sz="1875">
+                <a:solidFill>
+                  <a:srgbClr val="172B3A"/>
+                </a:solidFill>
+                <a:latin typeface="Arial Unicode MS"/>
+                <a:ea typeface="Arial Unicode MS"/>
+                <a:cs typeface="Arial Unicode MS"/>
+              </a:defRPr>
+            </a:lvl1pPr>
+            <a:lvl2pPr>
+              <a:defRPr sz="1875">
+                <a:solidFill>
+                  <a:srgbClr val="172B3A"/>
+                </a:solidFill>
+                <a:latin typeface="Arial Unicode MS"/>
+                <a:ea typeface="Arial Unicode MS"/>
+                <a:cs typeface="Arial Unicode MS"/>
+              </a:defRPr>
+            </a:lvl2pPr>
+            <a:lvl3pPr>
+              <a:defRPr sz="1875">
+                <a:solidFill>
+                  <a:srgbClr val="172B3A"/>
+                </a:solidFill>
+                <a:latin typeface="Arial Unicode MS"/>
+                <a:ea typeface="Arial Unicode MS"/>
+                <a:cs typeface="Arial Unicode MS"/>
+              </a:defRPr>
+            </a:lvl3pPr>
+            <a:lvl4pPr>
+              <a:defRPr sz="1875">
+                <a:solidFill>
+                  <a:srgbClr val="172B3A"/>
+                </a:solidFill>
+                <a:latin typeface="Arial Unicode MS"/>
+                <a:ea typeface="Arial Unicode MS"/>
+                <a:cs typeface="Arial Unicode MS"/>
+              </a:defRPr>
+            </a:lvl4pPr>
+            <a:lvl5pPr>
+              <a:defRPr sz="1875">
+                <a:solidFill>
+                  <a:srgbClr val="172B3A"/>
+                </a:solidFill>
+                <a:latin typeface="Arial Unicode MS"/>
+                <a:ea typeface="Arial Unicode MS"/>
+                <a:cs typeface="Arial Unicode MS"/>
+              </a:defRPr>
+            </a:lvl5pPr>
+            <a:lvl6pPr>
+              <a:defRPr sz="1875">
+                <a:solidFill>
+                  <a:srgbClr val="172B3A"/>
+                </a:solidFill>
+                <a:latin typeface="Arial Unicode MS"/>
+                <a:ea typeface="Arial Unicode MS"/>
+                <a:cs typeface="Arial Unicode MS"/>
+              </a:defRPr>
+            </a:lvl6pPr>
+            <a:lvl7pPr>
+              <a:defRPr sz="1875">
+                <a:solidFill>
+                  <a:srgbClr val="172B3A"/>
+                </a:solidFill>
+                <a:latin typeface="Arial Unicode MS"/>
+                <a:ea typeface="Arial Unicode MS"/>
+                <a:cs typeface="Arial Unicode MS"/>
+              </a:defRPr>
+            </a:lvl7pPr>
+            <a:lvl8pPr>
+              <a:defRPr sz="1875">
+                <a:solidFill>
+                  <a:srgbClr val="172B3A"/>
+                </a:solidFill>
+                <a:latin typeface="Arial Unicode MS"/>
+                <a:ea typeface="Arial Unicode MS"/>
+                <a:cs typeface="Arial Unicode MS"/>
+              </a:defRPr>
+            </a:lvl8pPr>
+            <a:lvl9pPr>
+              <a:defRPr sz="1875">
+                <a:solidFill>
+                  <a:srgbClr val="172B3A"/>
+                </a:solidFill>
+                <a:latin typeface="Arial Unicode MS"/>
+                <a:ea typeface="Arial Unicode MS"/>
+                <a:cs typeface="Arial Unicode MS"/>
+              </a:defRPr>
+            </a:lvl9pPr>
+          </a:lstStyle>
+          <a:p xmlns:a="http://schemas.openxmlformats.org/drawingml/2006/main">
+            <a:pPr>
+              <a:defRPr sz="1875">
+                <a:solidFill>
+                  <a:srgbClr val="172B3A"/>
+                </a:solidFill>
+                <a:latin typeface="Arial Unicode MS"/>
+                <a:ea typeface="Arial Unicode MS"/>
+                <a:cs typeface="Arial Unicode MS"/>
+              </a:defRPr>
+            </a:pPr>
+            <a:r>
+              <a:rPr sz="1875">
+                <a:solidFill>
+                  <a:srgbClr val="172B3A"/>
+                </a:solidFill>
+                <a:latin typeface="Arial Unicode MS"/>
+                <a:ea typeface="Arial Unicode MS"/>
+                <a:cs typeface="Arial Unicode MS"/>
+              </a:rPr>
+              <a:t>代码：01b_check_capacity_jumps.py    Git版本：6aa6676</a:t>
+            </a:r>
+          </a:p>
+        </p:txBody>
+      </p:sp>
+    </p:spTree>
+    <p:extLst>
+      <p:ext uri="{BB962C8B-B14F-4D97-AF65-F5344CB8AC3E}">
+        <p14:creationId xmlns:p14="http://schemas.microsoft.com/office/powerpoint/2010/main" val="2146318608"/>
+      </p:ext>
+    </p:extLst>
+  </p:cSld>
+</p:sld>
+</file>
+
+<file path=ppt/slides/slide22.xml><?xml version="1.0" encoding="utf-8"?>
+<p:sld xmlns:p="http://schemas.openxmlformats.org/presentationml/2006/main">
+  <p:cSld>
+    <p:bg>
+      <p:bgPr>
+        <a:solidFill xmlns:a="http://schemas.openxmlformats.org/drawingml/2006/main">
+          <a:srgbClr val="FFFFFF"/>
+        </a:solidFill>
+      </p:bgPr>
+    </p:bg>
+    <p:spTree>
+      <p:nvGrpSpPr>
+        <p:cNvPr id="1" name=""/>
+        <p:cNvGrpSpPr/>
+        <p:nvPr/>
+      </p:nvGrpSpPr>
+      <p:grpSpPr>
+        <a:xfrm xmlns:a="http://schemas.openxmlformats.org/drawingml/2006/main"/>
+      </p:grpSpPr>
+      <p:sp>
+        <p:nvSpPr>
+          <p:cNvPr id="9" name="">
+            <a:extLst xmlns:a="http://schemas.openxmlformats.org/drawingml/2006/main">
+              <a:ext uri="{FF2B5EF4-FFF2-40B4-BE49-F238E27FC236}">
+                <a16:creationId xmlns:a16="http://schemas.microsoft.com/office/drawing/2014/main" id="{15822E18-F122-4094-8650-BC0F3690C4D0}"/>
+              </a:ext>
+            </a:extLst>
+          </p:cNvPr>
+          <p:cNvSpPr>
+            <a:spLocks xmlns:a="http://schemas.openxmlformats.org/drawingml/2006/main" noGrp="1"/>
+          </p:cNvSpPr>
+          <p:nvPr/>
+        </p:nvSpPr>
+        <p:spPr>
+          <a:xfrm xmlns:a="http://schemas.openxmlformats.org/drawingml/2006/main">
+            <a:off x="571500" y="381000"/>
+            <a:ext cx="11049000" cy="857250"/>
+          </a:xfrm>
+          <a:prstGeom xmlns:a="http://schemas.openxmlformats.org/drawingml/2006/main" prst="rect">
+            <a:avLst/>
+          </a:prstGeom>
+          <a:noFill xmlns:a="http://schemas.openxmlformats.org/drawingml/2006/main"/>
+          <a:ln xmlns:a="http://schemas.openxmlformats.org/drawingml/2006/main" w="0">
+            <a:noFill/>
+          </a:ln>
+        </p:spPr>
+        <p:txBody>
+          <a:bodyPr xmlns:a="http://schemas.openxmlformats.org/drawingml/2006/main"/>
+          <a:lstStyle xmlns:a="http://schemas.openxmlformats.org/drawingml/2006/main">
+            <a:defPPr>
+              <a:defRPr sz="2925">
+                <a:solidFill>
+                  <a:srgbClr val="172B3A"/>
+                </a:solidFill>
+                <a:latin typeface="Arial Unicode MS"/>
+                <a:ea typeface="Arial Unicode MS"/>
+                <a:cs typeface="Arial Unicode MS"/>
+              </a:defRPr>
+            </a:defPPr>
+            <a:lvl1pPr>
+              <a:defRPr sz="2925">
+                <a:solidFill>
+                  <a:srgbClr val="172B3A"/>
+                </a:solidFill>
+                <a:latin typeface="Arial Unicode MS"/>
+                <a:ea typeface="Arial Unicode MS"/>
+                <a:cs typeface="Arial Unicode MS"/>
+              </a:defRPr>
+            </a:lvl1pPr>
+            <a:lvl2pPr>
+              <a:defRPr sz="2925">
+                <a:solidFill>
+                  <a:srgbClr val="172B3A"/>
+                </a:solidFill>
+                <a:latin typeface="Arial Unicode MS"/>
+                <a:ea typeface="Arial Unicode MS"/>
+                <a:cs typeface="Arial Unicode MS"/>
+              </a:defRPr>
+            </a:lvl2pPr>
+            <a:lvl3pPr>
+              <a:defRPr sz="2925">
+                <a:solidFill>
+                  <a:srgbClr val="172B3A"/>
+                </a:solidFill>
+                <a:latin typeface="Arial Unicode MS"/>
+                <a:ea typeface="Arial Unicode MS"/>
+                <a:cs typeface="Arial Unicode MS"/>
+              </a:defRPr>
+            </a:lvl3pPr>
+            <a:lvl4pPr>
+              <a:defRPr sz="2925">
+                <a:solidFill>
+                  <a:srgbClr val="172B3A"/>
+                </a:solidFill>
+                <a:latin typeface="Arial Unicode MS"/>
+                <a:ea typeface="Arial Unicode MS"/>
+                <a:cs typeface="Arial Unicode MS"/>
+              </a:defRPr>
+            </a:lvl4pPr>
+            <a:lvl5pPr>
+              <a:defRPr sz="2925">
+                <a:solidFill>
+                  <a:srgbClr val="172B3A"/>
+                </a:solidFill>
+                <a:latin typeface="Arial Unicode MS"/>
+                <a:ea typeface="Arial Unicode MS"/>
+                <a:cs typeface="Arial Unicode MS"/>
+              </a:defRPr>
+            </a:lvl5pPr>
+            <a:lvl6pPr>
+              <a:defRPr sz="2925">
+                <a:solidFill>
+                  <a:srgbClr val="172B3A"/>
+                </a:solidFill>
+                <a:latin typeface="Arial Unicode MS"/>
+                <a:ea typeface="Arial Unicode MS"/>
+                <a:cs typeface="Arial Unicode MS"/>
+              </a:defRPr>
+            </a:lvl6pPr>
+            <a:lvl7pPr>
+              <a:defRPr sz="2925">
+                <a:solidFill>
+                  <a:srgbClr val="172B3A"/>
+                </a:solidFill>
+                <a:latin typeface="Arial Unicode MS"/>
+                <a:ea typeface="Arial Unicode MS"/>
+                <a:cs typeface="Arial Unicode MS"/>
+              </a:defRPr>
+            </a:lvl7pPr>
+            <a:lvl8pPr>
+              <a:defRPr sz="2925">
+                <a:solidFill>
+                  <a:srgbClr val="172B3A"/>
+                </a:solidFill>
+                <a:latin typeface="Arial Unicode MS"/>
+                <a:ea typeface="Arial Unicode MS"/>
+                <a:cs typeface="Arial Unicode MS"/>
+              </a:defRPr>
+            </a:lvl8pPr>
+            <a:lvl9pPr>
+              <a:defRPr sz="2925">
+                <a:solidFill>
+                  <a:srgbClr val="172B3A"/>
+                </a:solidFill>
+                <a:latin typeface="Arial Unicode MS"/>
+                <a:ea typeface="Arial Unicode MS"/>
+                <a:cs typeface="Arial Unicode MS"/>
+              </a:defRPr>
+            </a:lvl9pPr>
+          </a:lstStyle>
+          <a:p xmlns:a="http://schemas.openxmlformats.org/drawingml/2006/main">
+            <a:pPr>
+              <a:defRPr sz="2925">
+                <a:solidFill>
+                  <a:srgbClr val="172B3A"/>
+                </a:solidFill>
+                <a:latin typeface="Arial Unicode MS"/>
+                <a:ea typeface="Arial Unicode MS"/>
+                <a:cs typeface="Arial Unicode MS"/>
+              </a:defRPr>
+            </a:pPr>
+            <a:r>
+              <a:rPr sz="2925">
+                <a:solidFill>
+                  <a:srgbClr val="172B3A"/>
+                </a:solidFill>
+                <a:latin typeface="Arial Unicode MS"/>
+                <a:ea typeface="Arial Unicode MS"/>
+                <a:cs typeface="Arial Unicode MS"/>
+              </a:rPr>
+              <a:t>补充清洗：处理可能压低真实恢复峰值</a:t>
+            </a:r>
+          </a:p>
+        </p:txBody>
+      </p:sp>
+      <p:sp>
+        <p:nvSpPr>
+          <p:cNvPr id="2" name="">
+            <a:extLst xmlns:a="http://schemas.openxmlformats.org/drawingml/2006/main">
+              <a:ext uri="{FF2B5EF4-FFF2-40B4-BE49-F238E27FC236}">
+                <a16:creationId xmlns:a16="http://schemas.microsoft.com/office/drawing/2014/main" id="{3E00F4FA-545A-4401-ACB4-744236B3AA83}"/>
+              </a:ext>
+            </a:extLst>
+          </p:cNvPr>
+          <p:cNvSpPr>
+            <a:spLocks xmlns:a="http://schemas.openxmlformats.org/drawingml/2006/main" noGrp="1"/>
+          </p:cNvSpPr>
+          <p:nvPr/>
+        </p:nvSpPr>
+        <p:spPr>
+          <a:xfrm xmlns:a="http://schemas.openxmlformats.org/drawingml/2006/main">
+            <a:off x="571500" y="6334125"/>
+            <a:ext cx="10477500" cy="285750"/>
+          </a:xfrm>
+          <a:prstGeom xmlns:a="http://schemas.openxmlformats.org/drawingml/2006/main" prst="rect">
+            <a:avLst/>
+          </a:prstGeom>
+          <a:noFill xmlns:a="http://schemas.openxmlformats.org/drawingml/2006/main"/>
+          <a:ln xmlns:a="http://schemas.openxmlformats.org/drawingml/2006/main" w="0">
+            <a:noFill/>
+          </a:ln>
+        </p:spPr>
+        <p:txBody>
+          <a:bodyPr xmlns:a="http://schemas.openxmlformats.org/drawingml/2006/main"/>
+          <a:lstStyle xmlns:a="http://schemas.openxmlformats.org/drawingml/2006/main">
+            <a:defPPr>
+              <a:defRPr sz="1200">
+                <a:solidFill>
+                  <a:srgbClr val="687985"/>
+                </a:solidFill>
+                <a:latin typeface="Arial Unicode MS"/>
+                <a:ea typeface="Arial Unicode MS"/>
+                <a:cs typeface="Arial Unicode MS"/>
+              </a:defRPr>
+            </a:defPPr>
+            <a:lvl1pPr>
+              <a:defRPr sz="1200">
+                <a:solidFill>
+                  <a:srgbClr val="687985"/>
+                </a:solidFill>
+                <a:latin typeface="Arial Unicode MS"/>
+                <a:ea typeface="Arial Unicode MS"/>
+                <a:cs typeface="Arial Unicode MS"/>
+              </a:defRPr>
+            </a:lvl1pPr>
+            <a:lvl2pPr>
+              <a:defRPr sz="1200">
+                <a:solidFill>
+                  <a:srgbClr val="687985"/>
+                </a:solidFill>
+                <a:latin typeface="Arial Unicode MS"/>
+                <a:ea typeface="Arial Unicode MS"/>
+                <a:cs typeface="Arial Unicode MS"/>
+              </a:defRPr>
+            </a:lvl2pPr>
+            <a:lvl3pPr>
+              <a:defRPr sz="1200">
+                <a:solidFill>
+                  <a:srgbClr val="687985"/>
+                </a:solidFill>
+                <a:latin typeface="Arial Unicode MS"/>
+                <a:ea typeface="Arial Unicode MS"/>
+                <a:cs typeface="Arial Unicode MS"/>
+              </a:defRPr>
+            </a:lvl3pPr>
+            <a:lvl4pPr>
+              <a:defRPr sz="1200">
+                <a:solidFill>
+                  <a:srgbClr val="687985"/>
+                </a:solidFill>
+                <a:latin typeface="Arial Unicode MS"/>
+                <a:ea typeface="Arial Unicode MS"/>
+                <a:cs typeface="Arial Unicode MS"/>
+              </a:defRPr>
+            </a:lvl4pPr>
+            <a:lvl5pPr>
+              <a:defRPr sz="1200">
+                <a:solidFill>
+                  <a:srgbClr val="687985"/>
+                </a:solidFill>
+                <a:latin typeface="Arial Unicode MS"/>
+                <a:ea typeface="Arial Unicode MS"/>
+                <a:cs typeface="Arial Unicode MS"/>
+              </a:defRPr>
+            </a:lvl5pPr>
+            <a:lvl6pPr>
+              <a:defRPr sz="1200">
+                <a:solidFill>
+                  <a:srgbClr val="687985"/>
+                </a:solidFill>
+                <a:latin typeface="Arial Unicode MS"/>
+                <a:ea typeface="Arial Unicode MS"/>
+                <a:cs typeface="Arial Unicode MS"/>
+              </a:defRPr>
+            </a:lvl6pPr>
+            <a:lvl7pPr>
+              <a:defRPr sz="1200">
+                <a:solidFill>
+                  <a:srgbClr val="687985"/>
+                </a:solidFill>
+                <a:latin typeface="Arial Unicode MS"/>
+                <a:ea typeface="Arial Unicode MS"/>
+                <a:cs typeface="Arial Unicode MS"/>
+              </a:defRPr>
+            </a:lvl7pPr>
+            <a:lvl8pPr>
+              <a:defRPr sz="1200">
+                <a:solidFill>
+                  <a:srgbClr val="687985"/>
+                </a:solidFill>
+                <a:latin typeface="Arial Unicode MS"/>
+                <a:ea typeface="Arial Unicode MS"/>
+                <a:cs typeface="Arial Unicode MS"/>
+              </a:defRPr>
+            </a:lvl8pPr>
+            <a:lvl9pPr>
+              <a:defRPr sz="1200">
+                <a:solidFill>
+                  <a:srgbClr val="687985"/>
+                </a:solidFill>
+                <a:latin typeface="Arial Unicode MS"/>
+                <a:ea typeface="Arial Unicode MS"/>
+                <a:cs typeface="Arial Unicode MS"/>
+              </a:defRPr>
+            </a:lvl9pPr>
+          </a:lstStyle>
+          <a:p xmlns:a="http://schemas.openxmlformats.org/drawingml/2006/main">
+            <a:pPr>
+              <a:defRPr sz="1200">
+                <a:solidFill>
+                  <a:srgbClr val="687985"/>
+                </a:solidFill>
+                <a:latin typeface="Arial Unicode MS"/>
+                <a:ea typeface="Arial Unicode MS"/>
+                <a:cs typeface="Arial Unicode MS"/>
+              </a:defRPr>
+            </a:pPr>
+            <a:r>
+              <a:rPr sz="1200">
+                <a:solidFill>
+                  <a:srgbClr val="687985"/>
+                </a:solidFill>
+                <a:latin typeface="Arial Unicode MS"/>
+                <a:ea typeface="Arial Unicode MS"/>
+                <a:cs typeface="Arial Unicode MS"/>
+              </a:rPr>
+              <a:t>工作过程记录  |  杨晓真 25121619  |  2026.10.26</a:t>
+            </a:r>
+          </a:p>
+        </p:txBody>
+      </p:sp>
+      <p:sp>
+        <p:nvSpPr>
+          <p:cNvPr id="3" name="">
+            <a:extLst xmlns:a="http://schemas.openxmlformats.org/drawingml/2006/main">
+              <a:ext uri="{FF2B5EF4-FFF2-40B4-BE49-F238E27FC236}">
+                <a16:creationId xmlns:a16="http://schemas.microsoft.com/office/drawing/2014/main" id="{F7DD2F16-4531-4666-AA31-391E8C4BD82C}"/>
+              </a:ext>
+            </a:extLst>
+          </p:cNvPr>
+          <p:cNvSpPr>
+            <a:spLocks xmlns:a="http://schemas.openxmlformats.org/drawingml/2006/main" noGrp="1"/>
+          </p:cNvSpPr>
+          <p:nvPr/>
+        </p:nvSpPr>
+        <p:spPr>
+          <a:xfrm xmlns:a="http://schemas.openxmlformats.org/drawingml/2006/main">
+            <a:off x="11144250" y="6334125"/>
+            <a:ext cx="714375" cy="285750"/>
+          </a:xfrm>
+          <a:prstGeom xmlns:a="http://schemas.openxmlformats.org/drawingml/2006/main" prst="rect">
+            <a:avLst/>
+          </a:prstGeom>
+          <a:noFill xmlns:a="http://schemas.openxmlformats.org/drawingml/2006/main"/>
+          <a:ln xmlns:a="http://schemas.openxmlformats.org/drawingml/2006/main" w="0">
+            <a:noFill/>
+          </a:ln>
+        </p:spPr>
+        <p:txBody>
+          <a:bodyPr xmlns:a="http://schemas.openxmlformats.org/drawingml/2006/main"/>
+          <a:lstStyle xmlns:a="http://schemas.openxmlformats.org/drawingml/2006/main">
+            <a:defPPr>
+              <a:defRPr sz="1200">
+                <a:solidFill>
+                  <a:srgbClr val="172B3A"/>
+                </a:solidFill>
+                <a:latin typeface="Arial Unicode MS"/>
+                <a:ea typeface="Arial Unicode MS"/>
+                <a:cs typeface="Arial Unicode MS"/>
+              </a:defRPr>
+            </a:defPPr>
+            <a:lvl1pPr>
+              <a:defRPr sz="1200">
+                <a:solidFill>
+                  <a:srgbClr val="172B3A"/>
+                </a:solidFill>
+                <a:latin typeface="Arial Unicode MS"/>
+                <a:ea typeface="Arial Unicode MS"/>
+                <a:cs typeface="Arial Unicode MS"/>
+              </a:defRPr>
+            </a:lvl1pPr>
+            <a:lvl2pPr>
+              <a:defRPr sz="1200">
+                <a:solidFill>
+                  <a:srgbClr val="172B3A"/>
+                </a:solidFill>
+                <a:latin typeface="Arial Unicode MS"/>
+                <a:ea typeface="Arial Unicode MS"/>
+                <a:cs typeface="Arial Unicode MS"/>
+              </a:defRPr>
+            </a:lvl2pPr>
+            <a:lvl3pPr>
+              <a:defRPr sz="1200">
+                <a:solidFill>
+                  <a:srgbClr val="172B3A"/>
+                </a:solidFill>
+                <a:latin typeface="Arial Unicode MS"/>
+                <a:ea typeface="Arial Unicode MS"/>
+                <a:cs typeface="Arial Unicode MS"/>
+              </a:defRPr>
+            </a:lvl3pPr>
+            <a:lvl4pPr>
+              <a:defRPr sz="1200">
+                <a:solidFill>
+                  <a:srgbClr val="172B3A"/>
+                </a:solidFill>
+                <a:latin typeface="Arial Unicode MS"/>
+                <a:ea typeface="Arial Unicode MS"/>
+                <a:cs typeface="Arial Unicode MS"/>
+              </a:defRPr>
+            </a:lvl4pPr>
+            <a:lvl5pPr>
+              <a:defRPr sz="1200">
+                <a:solidFill>
+                  <a:srgbClr val="172B3A"/>
+                </a:solidFill>
+                <a:latin typeface="Arial Unicode MS"/>
+                <a:ea typeface="Arial Unicode MS"/>
+                <a:cs typeface="Arial Unicode MS"/>
+              </a:defRPr>
+            </a:lvl5pPr>
+            <a:lvl6pPr>
+              <a:defRPr sz="1200">
+                <a:solidFill>
+                  <a:srgbClr val="172B3A"/>
+                </a:solidFill>
+                <a:latin typeface="Arial Unicode MS"/>
+                <a:ea typeface="Arial Unicode MS"/>
+                <a:cs typeface="Arial Unicode MS"/>
+              </a:defRPr>
+            </a:lvl6pPr>
+            <a:lvl7pPr>
+              <a:defRPr sz="1200">
+                <a:solidFill>
+                  <a:srgbClr val="172B3A"/>
+                </a:solidFill>
+                <a:latin typeface="Arial Unicode MS"/>
+                <a:ea typeface="Arial Unicode MS"/>
+                <a:cs typeface="Arial Unicode MS"/>
+              </a:defRPr>
+            </a:lvl7pPr>
+            <a:lvl8pPr>
+              <a:defRPr sz="1200">
+                <a:solidFill>
+                  <a:srgbClr val="172B3A"/>
+                </a:solidFill>
+                <a:latin typeface="Arial Unicode MS"/>
+                <a:ea typeface="Arial Unicode MS"/>
+                <a:cs typeface="Arial Unicode MS"/>
+              </a:defRPr>
+            </a:lvl8pPr>
+            <a:lvl9pPr>
+              <a:defRPr sz="1200">
+                <a:solidFill>
+                  <a:srgbClr val="172B3A"/>
+                </a:solidFill>
+                <a:latin typeface="Arial Unicode MS"/>
+                <a:ea typeface="Arial Unicode MS"/>
+                <a:cs typeface="Arial Unicode MS"/>
+              </a:defRPr>
+            </a:lvl9pPr>
+          </a:lstStyle>
+          <a:p xmlns:a="http://schemas.openxmlformats.org/drawingml/2006/main">
+            <a:pPr>
+              <a:defRPr sz="1200">
+                <a:solidFill>
+                  <a:srgbClr val="172B3A"/>
+                </a:solidFill>
+                <a:latin typeface="Arial Unicode MS"/>
+                <a:ea typeface="Arial Unicode MS"/>
+                <a:cs typeface="Arial Unicode MS"/>
+              </a:defRPr>
+            </a:pPr>
+            <a:r>
+              <a:rPr sz="1200">
+                <a:solidFill>
+                  <a:srgbClr val="172B3A"/>
+                </a:solidFill>
+                <a:latin typeface="Arial Unicode MS"/>
+                <a:ea typeface="Arial Unicode MS"/>
+                <a:cs typeface="Arial Unicode MS"/>
+              </a:rPr>
+              <a:t>22</a:t>
+            </a:r>
+          </a:p>
+        </p:txBody>
+      </p:sp>
+      <p:sp>
+        <p:nvSpPr>
+          <p:cNvPr id="4" name="">
+            <a:extLst xmlns:a="http://schemas.openxmlformats.org/drawingml/2006/main">
+              <a:ext uri="{FF2B5EF4-FFF2-40B4-BE49-F238E27FC236}">
+                <a16:creationId xmlns:a16="http://schemas.microsoft.com/office/drawing/2014/main" id="{4729C127-1B37-42AE-BADC-F68833040F62}"/>
+              </a:ext>
+            </a:extLst>
+          </p:cNvPr>
+          <p:cNvSpPr>
+            <a:spLocks xmlns:a="http://schemas.openxmlformats.org/drawingml/2006/main" noGrp="1"/>
+          </p:cNvSpPr>
+          <p:nvPr/>
+        </p:nvSpPr>
+        <p:spPr>
+          <a:xfrm xmlns:a="http://schemas.openxmlformats.org/drawingml/2006/main">
+            <a:off x="619125" y="1428750"/>
+            <a:ext cx="5143500" cy="428625"/>
+          </a:xfrm>
+          <a:prstGeom xmlns:a="http://schemas.openxmlformats.org/drawingml/2006/main" prst="rect">
+            <a:avLst/>
+          </a:prstGeom>
+          <a:noFill xmlns:a="http://schemas.openxmlformats.org/drawingml/2006/main"/>
+          <a:ln xmlns:a="http://schemas.openxmlformats.org/drawingml/2006/main" w="0">
+            <a:noFill/>
+          </a:ln>
+        </p:spPr>
+        <p:txBody>
+          <a:bodyPr xmlns:a="http://schemas.openxmlformats.org/drawingml/2006/main"/>
+          <a:lstStyle xmlns:a="http://schemas.openxmlformats.org/drawingml/2006/main">
+            <a:defPPr>
+              <a:defRPr sz="2100">
+                <a:solidFill>
+                  <a:srgbClr val="176B87"/>
+                </a:solidFill>
+                <a:latin typeface="Arial Unicode MS"/>
+                <a:ea typeface="Arial Unicode MS"/>
+                <a:cs typeface="Arial Unicode MS"/>
+              </a:defRPr>
+            </a:defPPr>
+            <a:lvl1pPr>
+              <a:defRPr sz="2100">
+                <a:solidFill>
+                  <a:srgbClr val="176B87"/>
+                </a:solidFill>
+                <a:latin typeface="Arial Unicode MS"/>
+                <a:ea typeface="Arial Unicode MS"/>
+                <a:cs typeface="Arial Unicode MS"/>
+              </a:defRPr>
+            </a:lvl1pPr>
+            <a:lvl2pPr>
+              <a:defRPr sz="2100">
+                <a:solidFill>
+                  <a:srgbClr val="176B87"/>
+                </a:solidFill>
+                <a:latin typeface="Arial Unicode MS"/>
+                <a:ea typeface="Arial Unicode MS"/>
+                <a:cs typeface="Arial Unicode MS"/>
+              </a:defRPr>
+            </a:lvl2pPr>
+            <a:lvl3pPr>
+              <a:defRPr sz="2100">
+                <a:solidFill>
+                  <a:srgbClr val="176B87"/>
+                </a:solidFill>
+                <a:latin typeface="Arial Unicode MS"/>
+                <a:ea typeface="Arial Unicode MS"/>
+                <a:cs typeface="Arial Unicode MS"/>
+              </a:defRPr>
+            </a:lvl3pPr>
+            <a:lvl4pPr>
+              <a:defRPr sz="2100">
+                <a:solidFill>
+                  <a:srgbClr val="176B87"/>
+                </a:solidFill>
+                <a:latin typeface="Arial Unicode MS"/>
+                <a:ea typeface="Arial Unicode MS"/>
+                <a:cs typeface="Arial Unicode MS"/>
+              </a:defRPr>
+            </a:lvl4pPr>
+            <a:lvl5pPr>
+              <a:defRPr sz="2100">
+                <a:solidFill>
+                  <a:srgbClr val="176B87"/>
+                </a:solidFill>
+                <a:latin typeface="Arial Unicode MS"/>
+                <a:ea typeface="Arial Unicode MS"/>
+                <a:cs typeface="Arial Unicode MS"/>
+              </a:defRPr>
+            </a:lvl5pPr>
+            <a:lvl6pPr>
+              <a:defRPr sz="2100">
+                <a:solidFill>
+                  <a:srgbClr val="176B87"/>
+                </a:solidFill>
+                <a:latin typeface="Arial Unicode MS"/>
+                <a:ea typeface="Arial Unicode MS"/>
+                <a:cs typeface="Arial Unicode MS"/>
+              </a:defRPr>
+            </a:lvl6pPr>
+            <a:lvl7pPr>
+              <a:defRPr sz="2100">
+                <a:solidFill>
+                  <a:srgbClr val="176B87"/>
+                </a:solidFill>
+                <a:latin typeface="Arial Unicode MS"/>
+                <a:ea typeface="Arial Unicode MS"/>
+                <a:cs typeface="Arial Unicode MS"/>
+              </a:defRPr>
+            </a:lvl7pPr>
+            <a:lvl8pPr>
+              <a:defRPr sz="2100">
+                <a:solidFill>
+                  <a:srgbClr val="176B87"/>
+                </a:solidFill>
+                <a:latin typeface="Arial Unicode MS"/>
+                <a:ea typeface="Arial Unicode MS"/>
+                <a:cs typeface="Arial Unicode MS"/>
+              </a:defRPr>
+            </a:lvl8pPr>
+            <a:lvl9pPr>
+              <a:defRPr sz="2100">
+                <a:solidFill>
+                  <a:srgbClr val="176B87"/>
+                </a:solidFill>
+                <a:latin typeface="Arial Unicode MS"/>
+                <a:ea typeface="Arial Unicode MS"/>
+                <a:cs typeface="Arial Unicode MS"/>
+              </a:defRPr>
+            </a:lvl9pPr>
+          </a:lstStyle>
+          <a:p xmlns:a="http://schemas.openxmlformats.org/drawingml/2006/main">
+            <a:pPr>
+              <a:defRPr sz="2100">
+                <a:solidFill>
+                  <a:srgbClr val="176B87"/>
+                </a:solidFill>
+                <a:latin typeface="Arial Unicode MS"/>
+                <a:ea typeface="Arial Unicode MS"/>
+                <a:cs typeface="Arial Unicode MS"/>
+              </a:defRPr>
+            </a:pPr>
+            <a:r>
+              <a:rPr sz="2100">
+                <a:solidFill>
+                  <a:srgbClr val="176B87"/>
+                </a:solidFill>
+                <a:latin typeface="Arial Unicode MS"/>
+                <a:ea typeface="Arial Unicode MS"/>
+                <a:cs typeface="Arial Unicode MS"/>
+              </a:rPr>
+              <a:t>B0006局部窗口</a:t>
+            </a:r>
+          </a:p>
+        </p:txBody>
+      </p:sp>
+      <p:graphicFrame>
+        <p:nvGraphicFramePr>
+          <p:cNvPr id="5" name="Chart">
+            <a:extLst xmlns:a="http://schemas.openxmlformats.org/drawingml/2006/main">
+              <a:ext uri="{FF2B5EF4-FFF2-40B4-BE49-F238E27FC236}">
+                <a16:creationId xmlns:a16="http://schemas.microsoft.com/office/drawing/2014/main" id="{CE14D2C5-586D-4DA5-9699-864BE6074FBF}"/>
+              </a:ext>
+            </a:extLst>
+          </p:cNvPr>
+          <p:cNvGraphicFramePr/>
+          <p:nvPr/>
+        </p:nvGraphicFramePr>
+        <p:xfrm>
+          <a:off xmlns:a="http://schemas.openxmlformats.org/drawingml/2006/main" x="619125" y="1952625"/>
+          <a:ext xmlns:a="http://schemas.openxmlformats.org/drawingml/2006/main" cx="5238750" cy="3190875"/>
+        </p:xfrm>
+        <a:graphic xmlns:a="http://schemas.openxmlformats.org/drawingml/2006/main">
+          <a:graphicData uri="http://schemas.openxmlformats.org/drawingml/2006/chart">
+            <c:chart xmlns:r="http://schemas.openxmlformats.org/officeDocument/2006/relationships" xmlns:c="http://schemas.openxmlformats.org/drawingml/2006/chart" r:id="Rfdf3c092e4c24262"/>
+          </a:graphicData>
+        </a:graphic>
+      </p:graphicFrame>
+      <p:sp>
+        <p:nvSpPr>
+          <p:cNvPr id="6" name="">
+            <a:extLst xmlns:a="http://schemas.openxmlformats.org/drawingml/2006/main">
+              <a:ext uri="{FF2B5EF4-FFF2-40B4-BE49-F238E27FC236}">
+                <a16:creationId xmlns:a16="http://schemas.microsoft.com/office/drawing/2014/main" id="{E92045DD-ACF7-4066-AE23-00FCBD384F23}"/>
+              </a:ext>
+            </a:extLst>
+          </p:cNvPr>
+          <p:cNvSpPr>
+            <a:spLocks xmlns:a="http://schemas.openxmlformats.org/drawingml/2006/main" noGrp="1"/>
+          </p:cNvSpPr>
+          <p:nvPr/>
+        </p:nvSpPr>
+        <p:spPr>
+          <a:xfrm xmlns:a="http://schemas.openxmlformats.org/drawingml/2006/main">
+            <a:off x="6143625" y="1428750"/>
+            <a:ext cx="5143500" cy="428625"/>
+          </a:xfrm>
+          <a:prstGeom xmlns:a="http://schemas.openxmlformats.org/drawingml/2006/main" prst="rect">
+            <a:avLst/>
+          </a:prstGeom>
+          <a:noFill xmlns:a="http://schemas.openxmlformats.org/drawingml/2006/main"/>
+          <a:ln xmlns:a="http://schemas.openxmlformats.org/drawingml/2006/main" w="0">
+            <a:noFill/>
+          </a:ln>
+        </p:spPr>
+        <p:txBody>
+          <a:bodyPr xmlns:a="http://schemas.openxmlformats.org/drawingml/2006/main"/>
+          <a:lstStyle xmlns:a="http://schemas.openxmlformats.org/drawingml/2006/main">
+            <a:defPPr>
+              <a:defRPr sz="2100">
+                <a:solidFill>
+                  <a:srgbClr val="176B87"/>
+                </a:solidFill>
+                <a:latin typeface="Arial Unicode MS"/>
+                <a:ea typeface="Arial Unicode MS"/>
+                <a:cs typeface="Arial Unicode MS"/>
+              </a:defRPr>
+            </a:defPPr>
+            <a:lvl1pPr>
+              <a:defRPr sz="2100">
+                <a:solidFill>
+                  <a:srgbClr val="176B87"/>
+                </a:solidFill>
+                <a:latin typeface="Arial Unicode MS"/>
+                <a:ea typeface="Arial Unicode MS"/>
+                <a:cs typeface="Arial Unicode MS"/>
+              </a:defRPr>
+            </a:lvl1pPr>
+            <a:lvl2pPr>
+              <a:defRPr sz="2100">
+                <a:solidFill>
+                  <a:srgbClr val="176B87"/>
+                </a:solidFill>
+                <a:latin typeface="Arial Unicode MS"/>
+                <a:ea typeface="Arial Unicode MS"/>
+                <a:cs typeface="Arial Unicode MS"/>
+              </a:defRPr>
+            </a:lvl2pPr>
+            <a:lvl3pPr>
+              <a:defRPr sz="2100">
+                <a:solidFill>
+                  <a:srgbClr val="176B87"/>
+                </a:solidFill>
+                <a:latin typeface="Arial Unicode MS"/>
+                <a:ea typeface="Arial Unicode MS"/>
+                <a:cs typeface="Arial Unicode MS"/>
+              </a:defRPr>
+            </a:lvl3pPr>
+            <a:lvl4pPr>
+              <a:defRPr sz="2100">
+                <a:solidFill>
+                  <a:srgbClr val="176B87"/>
+                </a:solidFill>
+                <a:latin typeface="Arial Unicode MS"/>
+                <a:ea typeface="Arial Unicode MS"/>
+                <a:cs typeface="Arial Unicode MS"/>
+              </a:defRPr>
+            </a:lvl4pPr>
+            <a:lvl5pPr>
+              <a:defRPr sz="2100">
+                <a:solidFill>
+                  <a:srgbClr val="176B87"/>
+                </a:solidFill>
+                <a:latin typeface="Arial Unicode MS"/>
+                <a:ea typeface="Arial Unicode MS"/>
+                <a:cs typeface="Arial Unicode MS"/>
+              </a:defRPr>
+            </a:lvl5pPr>
+            <a:lvl6pPr>
+              <a:defRPr sz="2100">
+                <a:solidFill>
+                  <a:srgbClr val="176B87"/>
+                </a:solidFill>
+                <a:latin typeface="Arial Unicode MS"/>
+                <a:ea typeface="Arial Unicode MS"/>
+                <a:cs typeface="Arial Unicode MS"/>
+              </a:defRPr>
+            </a:lvl6pPr>
+            <a:lvl7pPr>
+              <a:defRPr sz="2100">
+                <a:solidFill>
+                  <a:srgbClr val="176B87"/>
+                </a:solidFill>
+                <a:latin typeface="Arial Unicode MS"/>
+                <a:ea typeface="Arial Unicode MS"/>
+                <a:cs typeface="Arial Unicode MS"/>
+              </a:defRPr>
+            </a:lvl7pPr>
+            <a:lvl8pPr>
+              <a:defRPr sz="2100">
+                <a:solidFill>
+                  <a:srgbClr val="176B87"/>
+                </a:solidFill>
+                <a:latin typeface="Arial Unicode MS"/>
+                <a:ea typeface="Arial Unicode MS"/>
+                <a:cs typeface="Arial Unicode MS"/>
+              </a:defRPr>
+            </a:lvl8pPr>
+            <a:lvl9pPr>
+              <a:defRPr sz="2100">
+                <a:solidFill>
+                  <a:srgbClr val="176B87"/>
+                </a:solidFill>
+                <a:latin typeface="Arial Unicode MS"/>
+                <a:ea typeface="Arial Unicode MS"/>
+                <a:cs typeface="Arial Unicode MS"/>
+              </a:defRPr>
+            </a:lvl9pPr>
+          </a:lstStyle>
+          <a:p xmlns:a="http://schemas.openxmlformats.org/drawingml/2006/main">
+            <a:pPr>
+              <a:defRPr sz="2100">
+                <a:solidFill>
+                  <a:srgbClr val="176B87"/>
+                </a:solidFill>
+                <a:latin typeface="Arial Unicode MS"/>
+                <a:ea typeface="Arial Unicode MS"/>
+                <a:cs typeface="Arial Unicode MS"/>
+              </a:defRPr>
+            </a:pPr>
+            <a:r>
+              <a:rPr sz="2100">
+                <a:solidFill>
+                  <a:srgbClr val="176B87"/>
+                </a:solidFill>
+                <a:latin typeface="Arial Unicode MS"/>
+                <a:ea typeface="Arial Unicode MS"/>
+                <a:cs typeface="Arial Unicode MS"/>
+              </a:rPr>
+              <a:t>B0018局部窗口</a:t>
+            </a:r>
+          </a:p>
+        </p:txBody>
+      </p:sp>
+      <p:graphicFrame>
+        <p:nvGraphicFramePr>
+          <p:cNvPr id="7" name="Chart">
+            <a:extLst xmlns:a="http://schemas.openxmlformats.org/drawingml/2006/main">
+              <a:ext uri="{FF2B5EF4-FFF2-40B4-BE49-F238E27FC236}">
+                <a16:creationId xmlns:a16="http://schemas.microsoft.com/office/drawing/2014/main" id="{4D86A08E-DF9D-4ABC-A4B8-CB56C146DE0C}"/>
+              </a:ext>
+            </a:extLst>
+          </p:cNvPr>
+          <p:cNvGraphicFramePr/>
+          <p:nvPr/>
+        </p:nvGraphicFramePr>
+        <p:xfrm>
+          <a:off xmlns:a="http://schemas.openxmlformats.org/drawingml/2006/main" x="6143625" y="1952625"/>
+          <a:ext xmlns:a="http://schemas.openxmlformats.org/drawingml/2006/main" cx="5238750" cy="3190875"/>
+        </p:xfrm>
+        <a:graphic xmlns:a="http://schemas.openxmlformats.org/drawingml/2006/main">
+          <a:graphicData uri="http://schemas.openxmlformats.org/drawingml/2006/chart">
+            <c:chart xmlns:r="http://schemas.openxmlformats.org/officeDocument/2006/relationships" xmlns:c="http://schemas.openxmlformats.org/drawingml/2006/chart" r:id="Rb31735f7dd424a04"/>
+          </a:graphicData>
+        </a:graphic>
+      </p:graphicFrame>
+      <p:sp>
+        <p:nvSpPr>
+          <p:cNvPr id="8" name="">
+            <a:extLst xmlns:a="http://schemas.openxmlformats.org/drawingml/2006/main">
+              <a:ext uri="{FF2B5EF4-FFF2-40B4-BE49-F238E27FC236}">
+                <a16:creationId xmlns:a16="http://schemas.microsoft.com/office/drawing/2014/main" id="{103F0490-90F7-4192-9B47-1E1F409F597B}"/>
+              </a:ext>
+            </a:extLst>
+          </p:cNvPr>
+          <p:cNvSpPr>
+            <a:spLocks xmlns:a="http://schemas.openxmlformats.org/drawingml/2006/main" noGrp="1"/>
+          </p:cNvSpPr>
+          <p:nvPr/>
+        </p:nvSpPr>
+        <p:spPr>
+          <a:xfrm xmlns:a="http://schemas.openxmlformats.org/drawingml/2006/main">
+            <a:off x="619125" y="5381625"/>
+            <a:ext cx="10763250" cy="762000"/>
+          </a:xfrm>
+          <a:prstGeom xmlns:a="http://schemas.openxmlformats.org/drawingml/2006/main" prst="rect">
+            <a:avLst/>
+          </a:prstGeom>
+          <a:noFill xmlns:a="http://schemas.openxmlformats.org/drawingml/2006/main"/>
+          <a:ln xmlns:a="http://schemas.openxmlformats.org/drawingml/2006/main" w="0">
+            <a:noFill/>
+          </a:ln>
+        </p:spPr>
+        <p:txBody>
+          <a:bodyPr xmlns:a="http://schemas.openxmlformats.org/drawingml/2006/main"/>
+          <a:lstStyle xmlns:a="http://schemas.openxmlformats.org/drawingml/2006/main">
+            <a:defPPr>
+              <a:defRPr sz="1950">
+                <a:solidFill>
+                  <a:srgbClr val="172B3A"/>
+                </a:solidFill>
+                <a:latin typeface="Arial Unicode MS"/>
+                <a:ea typeface="Arial Unicode MS"/>
+                <a:cs typeface="Arial Unicode MS"/>
+              </a:defRPr>
+            </a:defPPr>
+            <a:lvl1pPr>
+              <a:defRPr sz="1950">
+                <a:solidFill>
+                  <a:srgbClr val="172B3A"/>
+                </a:solidFill>
+                <a:latin typeface="Arial Unicode MS"/>
+                <a:ea typeface="Arial Unicode MS"/>
+                <a:cs typeface="Arial Unicode MS"/>
+              </a:defRPr>
+            </a:lvl1pPr>
+            <a:lvl2pPr>
+              <a:defRPr sz="1950">
+                <a:solidFill>
+                  <a:srgbClr val="172B3A"/>
+                </a:solidFill>
+                <a:latin typeface="Arial Unicode MS"/>
+                <a:ea typeface="Arial Unicode MS"/>
+                <a:cs typeface="Arial Unicode MS"/>
+              </a:defRPr>
+            </a:lvl2pPr>
+            <a:lvl3pPr>
+              <a:defRPr sz="1950">
+                <a:solidFill>
+                  <a:srgbClr val="172B3A"/>
+                </a:solidFill>
+                <a:latin typeface="Arial Unicode MS"/>
+                <a:ea typeface="Arial Unicode MS"/>
+                <a:cs typeface="Arial Unicode MS"/>
+              </a:defRPr>
+            </a:lvl3pPr>
+            <a:lvl4pPr>
+              <a:defRPr sz="1950">
+                <a:solidFill>
+                  <a:srgbClr val="172B3A"/>
+                </a:solidFill>
+                <a:latin typeface="Arial Unicode MS"/>
+                <a:ea typeface="Arial Unicode MS"/>
+                <a:cs typeface="Arial Unicode MS"/>
+              </a:defRPr>
+            </a:lvl4pPr>
+            <a:lvl5pPr>
+              <a:defRPr sz="1950">
+                <a:solidFill>
+                  <a:srgbClr val="172B3A"/>
+                </a:solidFill>
+                <a:latin typeface="Arial Unicode MS"/>
+                <a:ea typeface="Arial Unicode MS"/>
+                <a:cs typeface="Arial Unicode MS"/>
+              </a:defRPr>
+            </a:lvl5pPr>
+            <a:lvl6pPr>
+              <a:defRPr sz="1950">
+                <a:solidFill>
+                  <a:srgbClr val="172B3A"/>
+                </a:solidFill>
+                <a:latin typeface="Arial Unicode MS"/>
+                <a:ea typeface="Arial Unicode MS"/>
+                <a:cs typeface="Arial Unicode MS"/>
+              </a:defRPr>
+            </a:lvl6pPr>
+            <a:lvl7pPr>
+              <a:defRPr sz="1950">
+                <a:solidFill>
+                  <a:srgbClr val="172B3A"/>
+                </a:solidFill>
+                <a:latin typeface="Arial Unicode MS"/>
+                <a:ea typeface="Arial Unicode MS"/>
+                <a:cs typeface="Arial Unicode MS"/>
+              </a:defRPr>
+            </a:lvl7pPr>
+            <a:lvl8pPr>
+              <a:defRPr sz="1950">
+                <a:solidFill>
+                  <a:srgbClr val="172B3A"/>
+                </a:solidFill>
+                <a:latin typeface="Arial Unicode MS"/>
+                <a:ea typeface="Arial Unicode MS"/>
+                <a:cs typeface="Arial Unicode MS"/>
+              </a:defRPr>
+            </a:lvl8pPr>
+            <a:lvl9pPr>
+              <a:defRPr sz="1950">
+                <a:solidFill>
+                  <a:srgbClr val="172B3A"/>
+                </a:solidFill>
+                <a:latin typeface="Arial Unicode MS"/>
+                <a:ea typeface="Arial Unicode MS"/>
+                <a:cs typeface="Arial Unicode MS"/>
+              </a:defRPr>
+            </a:lvl9pPr>
+          </a:lstStyle>
+          <a:p xmlns:a="http://schemas.openxmlformats.org/drawingml/2006/main">
+            <a:pPr>
+              <a:defRPr sz="1950">
+                <a:solidFill>
+                  <a:srgbClr val="172B3A"/>
+                </a:solidFill>
+                <a:latin typeface="Arial Unicode MS"/>
+                <a:ea typeface="Arial Unicode MS"/>
+                <a:cs typeface="Arial Unicode MS"/>
+              </a:defRPr>
+            </a:pPr>
+            <a:r>
+              <a:rPr sz="1950">
+                <a:solidFill>
+                  <a:srgbClr val="172B3A"/>
+                </a:solidFill>
+                <a:latin typeface="Arial Unicode MS"/>
+                <a:ea typeface="Arial Unicode MS"/>
+                <a:cs typeface="Arial Unicode MS"/>
+              </a:rPr>
+              <a:t>整体下降方向保持，但恢复峰值可能是真实信号。</a:t>
+            </a:r>
+          </a:p>
+          <a:p xmlns:a="http://schemas.openxmlformats.org/drawingml/2006/main">
+            <a:pPr>
+              <a:defRPr sz="1950">
+                <a:solidFill>
+                  <a:srgbClr val="172B3A"/>
+                </a:solidFill>
+                <a:latin typeface="Arial Unicode MS"/>
+                <a:ea typeface="Arial Unicode MS"/>
+                <a:cs typeface="Arial Unicode MS"/>
+              </a:defRPr>
+            </a:pPr>
+            <a:r>
+              <a:rPr sz="1950">
+                <a:solidFill>
+                  <a:srgbClr val="172B3A"/>
+                </a:solidFill>
+                <a:latin typeface="Arial Unicode MS"/>
+                <a:ea typeface="Arial Unicode MS"/>
+                <a:cs typeface="Arial Unicode MS"/>
+              </a:rPr>
+              <a:t>现有模型继续使用原值，处理版用于后续敏感性比较。</a:t>
+            </a:r>
+          </a:p>
+        </p:txBody>
+      </p:sp>
+    </p:spTree>
+    <p:extLst>
+      <p:ext uri="{BB962C8B-B14F-4D97-AF65-F5344CB8AC3E}">
+        <p14:creationId xmlns:p14="http://schemas.microsoft.com/office/powerpoint/2010/main" val="2000202647"/>
+      </p:ext>
+    </p:extLst>
+  </p:cSld>
+</p:sld>
+</file>
+
 <file path=ppt/slides/slide3.xml><?xml version="1.0" encoding="utf-8"?>
 <p:sld xmlns:p="http://schemas.openxmlformats.org/presentationml/2006/main">
   <p:cSld>
@@ -31984,7 +37546,7 @@
           <p:cNvPr id="4" name="Chart">
             <a:extLst xmlns:a="http://schemas.openxmlformats.org/drawingml/2006/main">
               <a:ext uri="{FF2B5EF4-FFF2-40B4-BE49-F238E27FC236}">
-                <a16:creationId xmlns:a16="http://schemas.microsoft.com/office/drawing/2014/main" id="{124FEE57-67E8-4DFD-95C2-BD7218C07994}"/>
+                <a16:creationId xmlns:a16="http://schemas.microsoft.com/office/drawing/2014/main" id="{9348B8BC-3671-427E-B1C7-5A21E6B27FAB}"/>
               </a:ext>
             </a:extLst>
           </p:cNvPr>
@@ -31997,7 +37559,7 @@
         </p:xfrm>
         <a:graphic xmlns:a="http://schemas.openxmlformats.org/drawingml/2006/main">
           <a:graphicData uri="http://schemas.openxmlformats.org/drawingml/2006/chart">
-            <c:chart xmlns:r="http://schemas.openxmlformats.org/officeDocument/2006/relationships" xmlns:c="http://schemas.openxmlformats.org/drawingml/2006/chart" r:id="R20dd9fada2be4521"/>
+            <c:chart xmlns:r="http://schemas.openxmlformats.org/officeDocument/2006/relationships" xmlns:c="http://schemas.openxmlformats.org/drawingml/2006/chart" r:id="R1d3d0c1fbfb647dd"/>
           </a:graphicData>
         </a:graphic>
       </p:graphicFrame>
@@ -32555,7 +38117,7 @@
           <p:cNvPr id="4" name="Chart">
             <a:extLst xmlns:a="http://schemas.openxmlformats.org/drawingml/2006/main">
               <a:ext uri="{FF2B5EF4-FFF2-40B4-BE49-F238E27FC236}">
-                <a16:creationId xmlns:a16="http://schemas.microsoft.com/office/drawing/2014/main" id="{F48B2AD0-A344-4090-8395-AFC5F10C89F7}"/>
+                <a16:creationId xmlns:a16="http://schemas.microsoft.com/office/drawing/2014/main" id="{C816A92E-D895-4A24-AD8A-42784243C03B}"/>
               </a:ext>
             </a:extLst>
           </p:cNvPr>
@@ -32568,7 +38130,7 @@
         </p:xfrm>
         <a:graphic xmlns:a="http://schemas.openxmlformats.org/drawingml/2006/main">
           <a:graphicData uri="http://schemas.openxmlformats.org/drawingml/2006/chart">
-            <c:chart xmlns:r="http://schemas.openxmlformats.org/officeDocument/2006/relationships" xmlns:c="http://schemas.openxmlformats.org/drawingml/2006/chart" r:id="R253c2ff9bbda4564"/>
+            <c:chart xmlns:r="http://schemas.openxmlformats.org/officeDocument/2006/relationships" xmlns:c="http://schemas.openxmlformats.org/drawingml/2006/chart" r:id="R98c8337d7d4f48b4"/>
           </a:graphicData>
         </a:graphic>
       </p:graphicFrame>
@@ -33126,7 +38688,7 @@
           <p:cNvPr id="4" name="Chart">
             <a:extLst xmlns:a="http://schemas.openxmlformats.org/drawingml/2006/main">
               <a:ext uri="{FF2B5EF4-FFF2-40B4-BE49-F238E27FC236}">
-                <a16:creationId xmlns:a16="http://schemas.microsoft.com/office/drawing/2014/main" id="{EA8F89CF-3F4E-47FA-8F1A-2E9A0D34C2FF}"/>
+                <a16:creationId xmlns:a16="http://schemas.microsoft.com/office/drawing/2014/main" id="{D180C064-FCCF-4C4E-9465-9178DD27F65D}"/>
               </a:ext>
             </a:extLst>
           </p:cNvPr>
@@ -33139,7 +38701,7 @@
         </p:xfrm>
         <a:graphic xmlns:a="http://schemas.openxmlformats.org/drawingml/2006/main">
           <a:graphicData uri="http://schemas.openxmlformats.org/drawingml/2006/chart">
-            <c:chart xmlns:r="http://schemas.openxmlformats.org/officeDocument/2006/relationships" xmlns:c="http://schemas.openxmlformats.org/drawingml/2006/chart" r:id="R928e035f45ca4aef"/>
+            <c:chart xmlns:r="http://schemas.openxmlformats.org/officeDocument/2006/relationships" xmlns:c="http://schemas.openxmlformats.org/drawingml/2006/chart" r:id="Rb4a744d086334766"/>
           </a:graphicData>
         </a:graphic>
       </p:graphicFrame>
@@ -33697,7 +39259,7 @@
           <p:cNvPr id="4" name="Chart">
             <a:extLst xmlns:a="http://schemas.openxmlformats.org/drawingml/2006/main">
               <a:ext uri="{FF2B5EF4-FFF2-40B4-BE49-F238E27FC236}">
-                <a16:creationId xmlns:a16="http://schemas.microsoft.com/office/drawing/2014/main" id="{EB699F6B-B913-4785-AE13-EDF30815AC80}"/>
+                <a16:creationId xmlns:a16="http://schemas.microsoft.com/office/drawing/2014/main" id="{481BC69C-CEE5-4E71-B5AA-04D2100025AA}"/>
               </a:ext>
             </a:extLst>
           </p:cNvPr>
@@ -33710,7 +39272,7 @@
         </p:xfrm>
         <a:graphic xmlns:a="http://schemas.openxmlformats.org/drawingml/2006/main">
           <a:graphicData uri="http://schemas.openxmlformats.org/drawingml/2006/chart">
-            <c:chart xmlns:r="http://schemas.openxmlformats.org/officeDocument/2006/relationships" xmlns:c="http://schemas.openxmlformats.org/drawingml/2006/chart" r:id="R5ba4beb0884844e0"/>
+            <c:chart xmlns:r="http://schemas.openxmlformats.org/officeDocument/2006/relationships" xmlns:c="http://schemas.openxmlformats.org/drawingml/2006/chart" r:id="R1529301b0cb14a01"/>
           </a:graphicData>
         </a:graphic>
       </p:graphicFrame>

--- a/deliverables/题目三_工作过程.pptx
+++ b/deliverables/题目三_工作过程.pptx
@@ -2,34 +2,39 @@
 <file path=ppt/presentation.xml><?xml version="1.0" encoding="utf-8"?>
 <p:presentation xmlns:p="http://schemas.openxmlformats.org/presentationml/2006/main">
   <p:sldMasterIdLst>
-    <p:sldMasterId xmlns:r="http://schemas.openxmlformats.org/officeDocument/2006/relationships" id="2147483648" r:id="R32695ca85ca14ff6"/>
+    <p:sldMasterId xmlns:r="http://schemas.openxmlformats.org/officeDocument/2006/relationships" id="2147483648" r:id="R378db67666044ff5"/>
   </p:sldMasterIdLst>
   <p:notesMasterIdLst>
-    <p:notesMasterId xmlns:r="http://schemas.openxmlformats.org/officeDocument/2006/relationships" r:id="R9c35084cb7a44461"/>
+    <p:notesMasterId xmlns:r="http://schemas.openxmlformats.org/officeDocument/2006/relationships" r:id="Rb798787167f445e6"/>
   </p:notesMasterIdLst>
   <p:sldIdLst>
-    <p:sldId xmlns:r="http://schemas.openxmlformats.org/officeDocument/2006/relationships" id="256" r:id="R9ea3d67597d241bc"/>
-    <p:sldId xmlns:r="http://schemas.openxmlformats.org/officeDocument/2006/relationships" id="257" r:id="R644564cd087641c5"/>
-    <p:sldId xmlns:r="http://schemas.openxmlformats.org/officeDocument/2006/relationships" id="258" r:id="R466f0d263d4447a0"/>
-    <p:sldId xmlns:r="http://schemas.openxmlformats.org/officeDocument/2006/relationships" id="259" r:id="Rc8096255cd8c4e86"/>
-    <p:sldId xmlns:r="http://schemas.openxmlformats.org/officeDocument/2006/relationships" id="260" r:id="R6247ef520d5e45dc"/>
-    <p:sldId xmlns:r="http://schemas.openxmlformats.org/officeDocument/2006/relationships" id="261" r:id="R6975797fb06440ff"/>
-    <p:sldId xmlns:r="http://schemas.openxmlformats.org/officeDocument/2006/relationships" id="262" r:id="Rbecc835d43164041"/>
-    <p:sldId xmlns:r="http://schemas.openxmlformats.org/officeDocument/2006/relationships" id="263" r:id="Ra3eed63a1f44476a"/>
-    <p:sldId xmlns:r="http://schemas.openxmlformats.org/officeDocument/2006/relationships" id="264" r:id="Rabc5d011def24f9b"/>
-    <p:sldId xmlns:r="http://schemas.openxmlformats.org/officeDocument/2006/relationships" id="265" r:id="R207b5c63ddb6435b"/>
-    <p:sldId xmlns:r="http://schemas.openxmlformats.org/officeDocument/2006/relationships" id="266" r:id="R1daad9fb874d4450"/>
-    <p:sldId xmlns:r="http://schemas.openxmlformats.org/officeDocument/2006/relationships" id="267" r:id="Rb865c3e0c0384f61"/>
-    <p:sldId xmlns:r="http://schemas.openxmlformats.org/officeDocument/2006/relationships" id="268" r:id="R6f18e6efc0da4c94"/>
-    <p:sldId xmlns:r="http://schemas.openxmlformats.org/officeDocument/2006/relationships" id="269" r:id="R9692f7df03894b4a"/>
-    <p:sldId xmlns:r="http://schemas.openxmlformats.org/officeDocument/2006/relationships" id="270" r:id="Rf17b154808014d8b"/>
-    <p:sldId xmlns:r="http://schemas.openxmlformats.org/officeDocument/2006/relationships" id="271" r:id="Rc8ba226e7fb44546"/>
-    <p:sldId xmlns:r="http://schemas.openxmlformats.org/officeDocument/2006/relationships" id="272" r:id="R63f687c5c5ba4f4e"/>
-    <p:sldId xmlns:r="http://schemas.openxmlformats.org/officeDocument/2006/relationships" id="273" r:id="Reb2a2567c7fc498e"/>
-    <p:sldId xmlns:r="http://schemas.openxmlformats.org/officeDocument/2006/relationships" id="274" r:id="Rf3be89a1e5e344f5"/>
-    <p:sldId xmlns:r="http://schemas.openxmlformats.org/officeDocument/2006/relationships" id="275" r:id="R9835f1d126ae4554"/>
-    <p:sldId xmlns:r="http://schemas.openxmlformats.org/officeDocument/2006/relationships" id="276" r:id="R09033096a4ee45b1"/>
-    <p:sldId xmlns:r="http://schemas.openxmlformats.org/officeDocument/2006/relationships" id="277" r:id="Rda4b88ecaa7b4cd0"/>
+    <p:sldId xmlns:r="http://schemas.openxmlformats.org/officeDocument/2006/relationships" id="256" r:id="Rf58ce4fe7d59409f"/>
+    <p:sldId xmlns:r="http://schemas.openxmlformats.org/officeDocument/2006/relationships" id="257" r:id="R2017ff10d2ee450d"/>
+    <p:sldId xmlns:r="http://schemas.openxmlformats.org/officeDocument/2006/relationships" id="258" r:id="Raf7d185cccab452f"/>
+    <p:sldId xmlns:r="http://schemas.openxmlformats.org/officeDocument/2006/relationships" id="259" r:id="R6398d62ae4fb47a9"/>
+    <p:sldId xmlns:r="http://schemas.openxmlformats.org/officeDocument/2006/relationships" id="260" r:id="Red90c308475443ad"/>
+    <p:sldId xmlns:r="http://schemas.openxmlformats.org/officeDocument/2006/relationships" id="261" r:id="R0aecc54eab2b4793"/>
+    <p:sldId xmlns:r="http://schemas.openxmlformats.org/officeDocument/2006/relationships" id="262" r:id="Ra2dcb0dab20b4c80"/>
+    <p:sldId xmlns:r="http://schemas.openxmlformats.org/officeDocument/2006/relationships" id="263" r:id="Rc7276556f9bc4102"/>
+    <p:sldId xmlns:r="http://schemas.openxmlformats.org/officeDocument/2006/relationships" id="264" r:id="R91e2d898c49949d3"/>
+    <p:sldId xmlns:r="http://schemas.openxmlformats.org/officeDocument/2006/relationships" id="265" r:id="R4601f304cab4492d"/>
+    <p:sldId xmlns:r="http://schemas.openxmlformats.org/officeDocument/2006/relationships" id="266" r:id="Rb2975b32b5894327"/>
+    <p:sldId xmlns:r="http://schemas.openxmlformats.org/officeDocument/2006/relationships" id="267" r:id="Ra6f476fbcb724064"/>
+    <p:sldId xmlns:r="http://schemas.openxmlformats.org/officeDocument/2006/relationships" id="268" r:id="Re43ebb22314447dd"/>
+    <p:sldId xmlns:r="http://schemas.openxmlformats.org/officeDocument/2006/relationships" id="269" r:id="R86e2ac75b7344824"/>
+    <p:sldId xmlns:r="http://schemas.openxmlformats.org/officeDocument/2006/relationships" id="270" r:id="Re2b0de950c174373"/>
+    <p:sldId xmlns:r="http://schemas.openxmlformats.org/officeDocument/2006/relationships" id="271" r:id="R73639cdd954e4b95"/>
+    <p:sldId xmlns:r="http://schemas.openxmlformats.org/officeDocument/2006/relationships" id="272" r:id="R3ca6e41fdf7c40aa"/>
+    <p:sldId xmlns:r="http://schemas.openxmlformats.org/officeDocument/2006/relationships" id="273" r:id="R043e4954e0424081"/>
+    <p:sldId xmlns:r="http://schemas.openxmlformats.org/officeDocument/2006/relationships" id="274" r:id="Rea60dd052e394dcb"/>
+    <p:sldId xmlns:r="http://schemas.openxmlformats.org/officeDocument/2006/relationships" id="275" r:id="R684d0de5e6e744dc"/>
+    <p:sldId xmlns:r="http://schemas.openxmlformats.org/officeDocument/2006/relationships" id="276" r:id="Rf6f2d90fb06d47e0"/>
+    <p:sldId xmlns:r="http://schemas.openxmlformats.org/officeDocument/2006/relationships" id="277" r:id="R0c94f788d4134b63"/>
+    <p:sldId xmlns:r="http://schemas.openxmlformats.org/officeDocument/2006/relationships" id="278" r:id="Rc684c605aa9b4fd1"/>
+    <p:sldId xmlns:r="http://schemas.openxmlformats.org/officeDocument/2006/relationships" id="279" r:id="R4eb30b7da57f48a7"/>
+    <p:sldId xmlns:r="http://schemas.openxmlformats.org/officeDocument/2006/relationships" id="280" r:id="R4a43fe4a70064c0f"/>
+    <p:sldId xmlns:r="http://schemas.openxmlformats.org/officeDocument/2006/relationships" id="281" r:id="R2afdc96bc4504d45"/>
+    <p:sldId xmlns:r="http://schemas.openxmlformats.org/officeDocument/2006/relationships" id="282" r:id="Ra0806404e9fc435c"/>
   </p:sldIdLst>
   <p:sldSz cx="12192000" cy="6858000"/>
   <p:notesSz cx="6858000" cy="9144000"/>
@@ -1538,6 +1543,381 @@
 </p:notes>
 </file>
 
+<file path=ppt/notesSlides/notesSlide23.xml><?xml version="1.0" encoding="utf-8"?>
+<p:notes xmlns:p="http://schemas.openxmlformats.org/presentationml/2006/main">
+  <p:cSld>
+    <p:spTree>
+      <p:nvGrpSpPr>
+        <p:cNvPr id="1" name=""/>
+        <p:cNvGrpSpPr/>
+        <p:nvPr/>
+      </p:nvGrpSpPr>
+      <p:grpSpPr>
+        <a:xfrm xmlns:a="http://schemas.openxmlformats.org/drawingml/2006/main"/>
+      </p:grpSpPr>
+      <p:sp>
+        <p:nvSpPr>
+          <p:cNvPr id="2" name="Slide Image Placeholder 1"/>
+          <p:cNvSpPr>
+            <a:spLocks xmlns:a="http://schemas.openxmlformats.org/drawingml/2006/main" noGrp="1"/>
+          </p:cNvSpPr>
+          <p:nvPr>
+            <p:ph type="sldImg" idx="0"/>
+          </p:nvPr>
+        </p:nvSpPr>
+        <p:spPr/>
+      </p:sp>
+      <p:sp>
+        <p:nvSpPr>
+          <p:cNvPr id="3" name="Notes Placeholder 2"/>
+          <p:cNvSpPr>
+            <a:spLocks xmlns:a="http://schemas.openxmlformats.org/drawingml/2006/main" noGrp="1"/>
+          </p:cNvSpPr>
+          <p:nvPr>
+            <p:ph type="body" idx="1"/>
+          </p:nvPr>
+        </p:nvSpPr>
+        <p:spPr/>
+        <p:txBody>
+          <a:bodyPr xmlns:a="http://schemas.openxmlformats.org/drawingml/2006/main"/>
+          <a:lstStyle xmlns:a="http://schemas.openxmlformats.org/drawingml/2006/main"/>
+          <a:p xmlns:a="http://schemas.openxmlformats.org/drawingml/2006/main">
+            <a:r>
+              <a:t>GitHub账号Buln1120提交第四步代码与结果，见8b282e4和ddec284。本地已快进同步60d0309。第四步未修改第三步模型。首次80%阈值跨越均早于第三步测试，单步状态分类不能证明提前预警能力。滚动实验检出B0006、B0007、B0018，漏报B0005，并存在误报。</a:t>
+            </a:r>
+          </a:p>
+          <a:p xmlns:a="http://schemas.openxmlformats.org/drawingml/2006/main">
+            <a:r>
+              <a:t>来源：src/04_evaluation_and_uncertainty.py，src/05_multihorizon_models.py，results/step04/，results/step05/，本仓库Git日志。</a:t>
+            </a:r>
+          </a:p>
+        </p:txBody>
+      </p:sp>
+      <p:sp>
+        <p:nvSpPr>
+          <p:cNvPr id="4" name="Slide Number Placeholder 3"/>
+          <p:cNvSpPr>
+            <a:spLocks xmlns:a="http://schemas.openxmlformats.org/drawingml/2006/main" noGrp="1"/>
+          </p:cNvSpPr>
+          <p:nvPr>
+            <p:ph type="sldNum" idx="5"/>
+          </p:nvPr>
+        </p:nvSpPr>
+        <p:spPr/>
+        <p:txBody>
+          <a:bodyPr xmlns:a="http://schemas.openxmlformats.org/drawingml/2006/main"/>
+          <a:lstStyle xmlns:a="http://schemas.openxmlformats.org/drawingml/2006/main"/>
+          <a:p xmlns:a="http://schemas.openxmlformats.org/drawingml/2006/main"/>
+        </p:txBody>
+      </p:sp>
+    </p:spTree>
+  </p:cSld>
+  <p:clrMapOvr>
+    <a:masterClrMapping xmlns:a="http://schemas.openxmlformats.org/drawingml/2006/main"/>
+  </p:clrMapOvr>
+</p:notes>
+</file>
+
+<file path=ppt/notesSlides/notesSlide24.xml><?xml version="1.0" encoding="utf-8"?>
+<p:notes xmlns:p="http://schemas.openxmlformats.org/presentationml/2006/main">
+  <p:cSld>
+    <p:spTree>
+      <p:nvGrpSpPr>
+        <p:cNvPr id="1" name=""/>
+        <p:cNvGrpSpPr/>
+        <p:nvPr/>
+      </p:nvGrpSpPr>
+      <p:grpSpPr>
+        <a:xfrm xmlns:a="http://schemas.openxmlformats.org/drawingml/2006/main"/>
+      </p:grpSpPr>
+      <p:sp>
+        <p:nvSpPr>
+          <p:cNvPr id="2" name="Slide Image Placeholder 1"/>
+          <p:cNvSpPr>
+            <a:spLocks xmlns:a="http://schemas.openxmlformats.org/drawingml/2006/main" noGrp="1"/>
+          </p:cNvSpPr>
+          <p:nvPr>
+            <p:ph type="sldImg" idx="0"/>
+          </p:nvPr>
+        </p:nvSpPr>
+        <p:spPr/>
+      </p:sp>
+      <p:sp>
+        <p:nvSpPr>
+          <p:cNvPr id="3" name="Notes Placeholder 2"/>
+          <p:cNvSpPr>
+            <a:spLocks xmlns:a="http://schemas.openxmlformats.org/drawingml/2006/main" noGrp="1"/>
+          </p:cNvSpPr>
+          <p:nvPr>
+            <p:ph type="body" idx="1"/>
+          </p:nvPr>
+        </p:nvSpPr>
+        <p:spPr/>
+        <p:txBody>
+          <a:bodyPr xmlns:a="http://schemas.openxmlformats.org/drawingml/2006/main"/>
+          <a:lstStyle xmlns:a="http://schemas.openxmlformats.org/drawingml/2006/main"/>
+          <a:p xmlns:a="http://schemas.openxmlformats.org/drawingml/2006/main">
+            <a:r>
+              <a:t>本轮提前距离和算法候选在比较前固定。每个起点只使用其以前的容量，分别直接预测h=1、5、10次。测试起点从训练加验证边界开始，避免训练模型用到预测起点以后的目标值。数据使用原值保留版，未采用限幅后的测试目标。</a:t>
+            </a:r>
+          </a:p>
+          <a:p xmlns:a="http://schemas.openxmlformats.org/drawingml/2006/main">
+            <a:r>
+              <a:t>来源：src/04_evaluation_and_uncertainty.py，src/05_multihorizon_models.py，results/step04/，results/step05/，本仓库Git日志。</a:t>
+            </a:r>
+          </a:p>
+        </p:txBody>
+      </p:sp>
+      <p:sp>
+        <p:nvSpPr>
+          <p:cNvPr id="4" name="Slide Number Placeholder 3"/>
+          <p:cNvSpPr>
+            <a:spLocks xmlns:a="http://schemas.openxmlformats.org/drawingml/2006/main" noGrp="1"/>
+          </p:cNvSpPr>
+          <p:nvPr>
+            <p:ph type="sldNum" idx="5"/>
+          </p:nvPr>
+        </p:nvSpPr>
+        <p:spPr/>
+        <p:txBody>
+          <a:bodyPr xmlns:a="http://schemas.openxmlformats.org/drawingml/2006/main"/>
+          <a:lstStyle xmlns:a="http://schemas.openxmlformats.org/drawingml/2006/main"/>
+          <a:p xmlns:a="http://schemas.openxmlformats.org/drawingml/2006/main"/>
+        </p:txBody>
+      </p:sp>
+    </p:spTree>
+  </p:cSld>
+  <p:clrMapOvr>
+    <a:masterClrMapping xmlns:a="http://schemas.openxmlformats.org/drawingml/2006/main"/>
+  </p:clrMapOvr>
+</p:notes>
+</file>
+
+<file path=ppt/notesSlides/notesSlide25.xml><?xml version="1.0" encoding="utf-8"?>
+<p:notes xmlns:p="http://schemas.openxmlformats.org/presentationml/2006/main">
+  <p:cSld>
+    <p:spTree>
+      <p:nvGrpSpPr>
+        <p:cNvPr id="1" name=""/>
+        <p:cNvGrpSpPr/>
+        <p:nvPr/>
+      </p:nvGrpSpPr>
+      <p:grpSpPr>
+        <a:xfrm xmlns:a="http://schemas.openxmlformats.org/drawingml/2006/main"/>
+      </p:grpSpPr>
+      <p:sp>
+        <p:nvSpPr>
+          <p:cNvPr id="2" name="Slide Image Placeholder 1"/>
+          <p:cNvSpPr>
+            <a:spLocks xmlns:a="http://schemas.openxmlformats.org/drawingml/2006/main" noGrp="1"/>
+          </p:cNvSpPr>
+          <p:nvPr>
+            <p:ph type="sldImg" idx="0"/>
+          </p:nvPr>
+        </p:nvSpPr>
+        <p:spPr/>
+      </p:sp>
+      <p:sp>
+        <p:nvSpPr>
+          <p:cNvPr id="3" name="Notes Placeholder 2"/>
+          <p:cNvSpPr>
+            <a:spLocks xmlns:a="http://schemas.openxmlformats.org/drawingml/2006/main" noGrp="1"/>
+          </p:cNvSpPr>
+          <p:nvPr>
+            <p:ph type="body" idx="1"/>
+          </p:nvPr>
+        </p:nvSpPr>
+        <p:spPr/>
+        <p:txBody>
+          <a:bodyPr xmlns:a="http://schemas.openxmlformats.org/drawingml/2006/main"/>
+          <a:lstStyle xmlns:a="http://schemas.openxmlformats.org/drawingml/2006/main"/>
+          <a:p xmlns:a="http://schemas.openxmlformats.org/drawingml/2006/main">
+            <a:r>
+              <a:t>容量保持取起点值，最近20次线性趋势按每起点重拟合。直接多步岭回归按电池与horizon共12个模型，特征为目标循环、起点容量、最近5次均值与斜率。alpha固定5候选，60组搜索结果全部保存。标准化及拟合标签只来自相应拟合段。</a:t>
+            </a:r>
+          </a:p>
+          <a:p xmlns:a="http://schemas.openxmlformats.org/drawingml/2006/main">
+            <a:r>
+              <a:t>来源：src/04_evaluation_and_uncertainty.py，src/05_multihorizon_models.py，results/step04/，results/step05/，本仓库Git日志。</a:t>
+            </a:r>
+          </a:p>
+        </p:txBody>
+      </p:sp>
+      <p:sp>
+        <p:nvSpPr>
+          <p:cNvPr id="4" name="Slide Number Placeholder 3"/>
+          <p:cNvSpPr>
+            <a:spLocks xmlns:a="http://schemas.openxmlformats.org/drawingml/2006/main" noGrp="1"/>
+          </p:cNvSpPr>
+          <p:nvPr>
+            <p:ph type="sldNum" idx="5"/>
+          </p:nvPr>
+        </p:nvSpPr>
+        <p:spPr/>
+        <p:txBody>
+          <a:bodyPr xmlns:a="http://schemas.openxmlformats.org/drawingml/2006/main"/>
+          <a:lstStyle xmlns:a="http://schemas.openxmlformats.org/drawingml/2006/main"/>
+          <a:p xmlns:a="http://schemas.openxmlformats.org/drawingml/2006/main"/>
+        </p:txBody>
+      </p:sp>
+    </p:spTree>
+  </p:cSld>
+  <p:clrMapOvr>
+    <a:masterClrMapping xmlns:a="http://schemas.openxmlformats.org/drawingml/2006/main"/>
+  </p:clrMapOvr>
+</p:notes>
+</file>
+
+<file path=ppt/notesSlides/notesSlide26.xml><?xml version="1.0" encoding="utf-8"?>
+<p:notes xmlns:p="http://schemas.openxmlformats.org/presentationml/2006/main">
+  <p:cSld>
+    <p:spTree>
+      <p:nvGrpSpPr>
+        <p:cNvPr id="1" name=""/>
+        <p:cNvGrpSpPr/>
+        <p:nvPr/>
+      </p:nvGrpSpPr>
+      <p:grpSpPr>
+        <a:xfrm xmlns:a="http://schemas.openxmlformats.org/drawingml/2006/main"/>
+      </p:grpSpPr>
+      <p:sp>
+        <p:nvSpPr>
+          <p:cNvPr id="2" name="Slide Image Placeholder 1"/>
+          <p:cNvSpPr>
+            <a:spLocks xmlns:a="http://schemas.openxmlformats.org/drawingml/2006/main" noGrp="1"/>
+          </p:cNvSpPr>
+          <p:nvPr>
+            <p:ph type="sldImg" idx="0"/>
+          </p:nvPr>
+        </p:nvSpPr>
+        <p:spPr/>
+      </p:sp>
+      <p:sp>
+        <p:nvSpPr>
+          <p:cNvPr id="3" name="Notes Placeholder 2"/>
+          <p:cNvSpPr>
+            <a:spLocks xmlns:a="http://schemas.openxmlformats.org/drawingml/2006/main" noGrp="1"/>
+          </p:cNvSpPr>
+          <p:nvPr>
+            <p:ph type="body" idx="1"/>
+          </p:nvPr>
+        </p:nvSpPr>
+        <p:spPr/>
+        <p:txBody>
+          <a:bodyPr xmlns:a="http://schemas.openxmlformats.org/drawingml/2006/main"/>
+          <a:lstStyle xmlns:a="http://schemas.openxmlformats.org/drawingml/2006/main"/>
+          <a:p xmlns:a="http://schemas.openxmlformats.org/drawingml/2006/main">
+            <a:r>
+              <a:t>图中先计算每块电池RMSE，再将四块电池等权平均，单位Ah。共同起点为前三块电池134至158、B0018为105至122，每种距离和方法均93个电池起点。不同距离对应不同目标，不是相同目标的配对检验。</a:t>
+            </a:r>
+          </a:p>
+          <a:p xmlns:a="http://schemas.openxmlformats.org/drawingml/2006/main">
+            <a:r>
+              <a:t>来源：src/04_evaluation_and_uncertainty.py，src/05_multihorizon_models.py，results/step04/，results/step05/，本仓库Git日志。</a:t>
+            </a:r>
+          </a:p>
+        </p:txBody>
+      </p:sp>
+      <p:sp>
+        <p:nvSpPr>
+          <p:cNvPr id="4" name="Slide Number Placeholder 3"/>
+          <p:cNvSpPr>
+            <a:spLocks xmlns:a="http://schemas.openxmlformats.org/drawingml/2006/main" noGrp="1"/>
+          </p:cNvSpPr>
+          <p:nvPr>
+            <p:ph type="sldNum" idx="5"/>
+          </p:nvPr>
+        </p:nvSpPr>
+        <p:spPr/>
+        <p:txBody>
+          <a:bodyPr xmlns:a="http://schemas.openxmlformats.org/drawingml/2006/main"/>
+          <a:lstStyle xmlns:a="http://schemas.openxmlformats.org/drawingml/2006/main"/>
+          <a:p xmlns:a="http://schemas.openxmlformats.org/drawingml/2006/main"/>
+        </p:txBody>
+      </p:sp>
+    </p:spTree>
+  </p:cSld>
+  <p:clrMapOvr>
+    <a:masterClrMapping xmlns:a="http://schemas.openxmlformats.org/drawingml/2006/main"/>
+  </p:clrMapOvr>
+</p:notes>
+</file>
+
+<file path=ppt/notesSlides/notesSlide27.xml><?xml version="1.0" encoding="utf-8"?>
+<p:notes xmlns:p="http://schemas.openxmlformats.org/presentationml/2006/main">
+  <p:cSld>
+    <p:spTree>
+      <p:nvGrpSpPr>
+        <p:cNvPr id="1" name=""/>
+        <p:cNvGrpSpPr/>
+        <p:nvPr/>
+      </p:nvGrpSpPr>
+      <p:grpSpPr>
+        <a:xfrm xmlns:a="http://schemas.openxmlformats.org/drawingml/2006/main"/>
+      </p:grpSpPr>
+      <p:sp>
+        <p:nvSpPr>
+          <p:cNvPr id="2" name="Slide Image Placeholder 1"/>
+          <p:cNvSpPr>
+            <a:spLocks xmlns:a="http://schemas.openxmlformats.org/drawingml/2006/main" noGrp="1"/>
+          </p:cNvSpPr>
+          <p:nvPr>
+            <p:ph type="sldImg" idx="0"/>
+          </p:nvPr>
+        </p:nvSpPr>
+        <p:spPr/>
+      </p:sp>
+      <p:sp>
+        <p:nvSpPr>
+          <p:cNvPr id="3" name="Notes Placeholder 2"/>
+          <p:cNvSpPr>
+            <a:spLocks xmlns:a="http://schemas.openxmlformats.org/drawingml/2006/main" noGrp="1"/>
+          </p:cNvSpPr>
+          <p:nvPr>
+            <p:ph type="body" idx="1"/>
+          </p:nvPr>
+        </p:nvSpPr>
+        <p:spPr/>
+        <p:txBody>
+          <a:bodyPr xmlns:a="http://schemas.openxmlformats.org/drawingml/2006/main"/>
+          <a:lstStyle xmlns:a="http://schemas.openxmlformats.org/drawingml/2006/main"/>
+          <a:p xmlns:a="http://schemas.openxmlformats.org/drawingml/2006/main">
+            <a:r>
+              <a:t>B0006的岭回归在5和10次预测上RMSE分别0.016766和0.018616Ah，低于其最近20次趋势。B0018岭回归在10次RMSE0.085901Ah，低估较大，不能用平均排序取代个体评估。36项测试含旧27项和新9项，144组指标另由逐点预测重算。当前仍是同4块电池探索性扩展，缺少独立新电池验证。</a:t>
+            </a:r>
+          </a:p>
+          <a:p xmlns:a="http://schemas.openxmlformats.org/drawingml/2006/main">
+            <a:r>
+              <a:t>来源：src/04_evaluation_and_uncertainty.py，src/05_multihorizon_models.py，results/step04/，results/step05/，本仓库Git日志。</a:t>
+            </a:r>
+          </a:p>
+        </p:txBody>
+      </p:sp>
+      <p:sp>
+        <p:nvSpPr>
+          <p:cNvPr id="4" name="Slide Number Placeholder 3"/>
+          <p:cNvSpPr>
+            <a:spLocks xmlns:a="http://schemas.openxmlformats.org/drawingml/2006/main" noGrp="1"/>
+          </p:cNvSpPr>
+          <p:nvPr>
+            <p:ph type="sldNum" idx="5"/>
+          </p:nvPr>
+        </p:nvSpPr>
+        <p:spPr/>
+        <p:txBody>
+          <a:bodyPr xmlns:a="http://schemas.openxmlformats.org/drawingml/2006/main"/>
+          <a:lstStyle xmlns:a="http://schemas.openxmlformats.org/drawingml/2006/main"/>
+          <a:p xmlns:a="http://schemas.openxmlformats.org/drawingml/2006/main"/>
+        </p:txBody>
+      </p:sp>
+    </p:spTree>
+  </p:cSld>
+  <p:clrMapOvr>
+    <a:masterClrMapping xmlns:a="http://schemas.openxmlformats.org/drawingml/2006/main"/>
+  </p:clrMapOvr>
+</p:notes>
+</file>
+
 <file path=ppt/notesSlides/notesSlide3.xml><?xml version="1.0" encoding="utf-8"?>
 <p:notes xmlns:p="http://schemas.openxmlformats.org/presentationml/2006/main">
   <p:cSld>
@@ -4476,12 +4856,12 @@
   </p:cSld>
   <p:clrMap bg1="lt1" tx1="dk1" bg2="lt2" tx2="dk2" accent1="accent1" accent2="accent2" accent3="accent3" accent4="accent4" accent5="accent5" accent6="accent6" hlink="hlink" folHlink="folHlink"/>
   <p:sldLayoutIdLst>
-    <p:sldLayoutId xmlns:r="http://schemas.openxmlformats.org/officeDocument/2006/relationships" id="2147483649" r:id="R0d0a0704eb8d4fe9"/>
-    <p:sldLayoutId xmlns:r="http://schemas.openxmlformats.org/officeDocument/2006/relationships" id="2147483650" r:id="R6bad09a40de046b9"/>
-    <p:sldLayoutId xmlns:r="http://schemas.openxmlformats.org/officeDocument/2006/relationships" id="2147483651" r:id="Ree5f6f2ea9c24115"/>
-    <p:sldLayoutId xmlns:r="http://schemas.openxmlformats.org/officeDocument/2006/relationships" id="2147483652" r:id="Rec3300e1281640f0"/>
-    <p:sldLayoutId xmlns:r="http://schemas.openxmlformats.org/officeDocument/2006/relationships" id="2147483653" r:id="R8d9b90f07c5e457b"/>
-    <p:sldLayoutId xmlns:r="http://schemas.openxmlformats.org/officeDocument/2006/relationships" id="2147483654" r:id="R53a818cd63c34b62"/>
+    <p:sldLayoutId xmlns:r="http://schemas.openxmlformats.org/officeDocument/2006/relationships" id="2147483649" r:id="R8834729396614084"/>
+    <p:sldLayoutId xmlns:r="http://schemas.openxmlformats.org/officeDocument/2006/relationships" id="2147483650" r:id="R65990b1aa1bf41bd"/>
+    <p:sldLayoutId xmlns:r="http://schemas.openxmlformats.org/officeDocument/2006/relationships" id="2147483651" r:id="R5b96437a13244827"/>
+    <p:sldLayoutId xmlns:r="http://schemas.openxmlformats.org/officeDocument/2006/relationships" id="2147483652" r:id="R27e49d5b578b40ae"/>
+    <p:sldLayoutId xmlns:r="http://schemas.openxmlformats.org/officeDocument/2006/relationships" id="2147483653" r:id="R0f4465e5fce84d99"/>
+    <p:sldLayoutId xmlns:r="http://schemas.openxmlformats.org/officeDocument/2006/relationships" id="2147483654" r:id="R82e7f05ce2694d5d"/>
   </p:sldLayoutIdLst>
   <p:txStyles>
     <p:titleStyle>
@@ -10090,6 +10470,315 @@
 </c:chartSpace>
 </file>
 
+<file path=ppt/slides/charts/chart13.xml><?xml version="1.0" encoding="utf-8"?>
+<c:chartSpace xmlns:c="http://schemas.openxmlformats.org/drawingml/2006/chart" xmlns:r="http://schemas.openxmlformats.org/officeDocument/2006/relationships">
+  <c:lang val="en-US"/>
+  <c:chart>
+    <c:plotArea>
+      <c:barChart>
+        <c:barDir val="col"/>
+        <c:grouping val="clustered"/>
+        <c:varyColors val="0"/>
+        <c:ser>
+          <c:idx val="0"/>
+          <c:order val="0"/>
+          <c:tx>
+            <c:v>容量保持基线</c:v>
+          </c:tx>
+          <c:spPr>
+            <a:solidFill xmlns:a="http://schemas.openxmlformats.org/drawingml/2006/main">
+              <a:srgbClr val="176B87"/>
+            </a:solidFill>
+          </c:spPr>
+          <c:invertIfNegative val="0"/>
+          <c:cat>
+            <c:strRef>
+              <c:f>'Chart Data'!$A$2:$A$4</c:f>
+              <c:strCache>
+                <c:ptCount val="3"/>
+                <c:pt idx="0">
+                  <c:v>提前1次</c:v>
+                </c:pt>
+                <c:pt idx="1">
+                  <c:v>提前5次</c:v>
+                </c:pt>
+                <c:pt idx="2">
+                  <c:v>提前10次</c:v>
+                </c:pt>
+              </c:strCache>
+            </c:strRef>
+          </c:cat>
+          <c:val>
+            <c:numRef>
+              <c:f>'Chart Data'!$B$2:$B$4</c:f>
+              <c:numCache>
+                <c:formatCode>General</c:formatCode>
+                <c:ptCount val="3"/>
+                <c:pt idx="0">
+                  <c:v>0.015843</c:v>
+                </c:pt>
+                <c:pt idx="1">
+                  <c:v>0.027493</c:v>
+                </c:pt>
+                <c:pt idx="2">
+                  <c:v>0.039159</c:v>
+                </c:pt>
+              </c:numCache>
+            </c:numRef>
+          </c:val>
+        </c:ser>
+        <c:ser>
+          <c:idx val="1"/>
+          <c:order val="1"/>
+          <c:tx>
+            <c:v>最近20次线性趋势</c:v>
+          </c:tx>
+          <c:spPr>
+            <a:solidFill xmlns:a="http://schemas.openxmlformats.org/drawingml/2006/main">
+              <a:srgbClr val="D3662E"/>
+            </a:solidFill>
+          </c:spPr>
+          <c:invertIfNegative val="0"/>
+          <c:cat>
+            <c:strRef>
+              <c:f>'Chart Data'!$C$2:$C$4</c:f>
+              <c:strCache>
+                <c:ptCount val="3"/>
+                <c:pt idx="0">
+                  <c:v>提前1次</c:v>
+                </c:pt>
+                <c:pt idx="1">
+                  <c:v>提前5次</c:v>
+                </c:pt>
+                <c:pt idx="2">
+                  <c:v>提前10次</c:v>
+                </c:pt>
+              </c:strCache>
+            </c:strRef>
+          </c:cat>
+          <c:val>
+            <c:numRef>
+              <c:f>'Chart Data'!$D$2:$D$4</c:f>
+              <c:numCache>
+                <c:formatCode>General</c:formatCode>
+                <c:ptCount val="3"/>
+                <c:pt idx="0">
+                  <c:v>0.019684</c:v>
+                </c:pt>
+                <c:pt idx="1">
+                  <c:v>0.020587</c:v>
+                </c:pt>
+                <c:pt idx="2">
+                  <c:v>0.022365</c:v>
+                </c:pt>
+              </c:numCache>
+            </c:numRef>
+          </c:val>
+        </c:ser>
+        <c:ser>
+          <c:idx val="2"/>
+          <c:order val="2"/>
+          <c:tx>
+            <c:v>直接多步岭回归</c:v>
+          </c:tx>
+          <c:spPr>
+            <a:solidFill xmlns:a="http://schemas.openxmlformats.org/drawingml/2006/main">
+              <a:srgbClr val="647D32"/>
+            </a:solidFill>
+          </c:spPr>
+          <c:invertIfNegative val="0"/>
+          <c:cat>
+            <c:strRef>
+              <c:f>'Chart Data'!$E$2:$E$4</c:f>
+              <c:strCache>
+                <c:ptCount val="3"/>
+                <c:pt idx="0">
+                  <c:v>提前1次</c:v>
+                </c:pt>
+                <c:pt idx="1">
+                  <c:v>提前5次</c:v>
+                </c:pt>
+                <c:pt idx="2">
+                  <c:v>提前10次</c:v>
+                </c:pt>
+              </c:strCache>
+            </c:strRef>
+          </c:cat>
+          <c:val>
+            <c:numRef>
+              <c:f>'Chart Data'!$F$2:$F$4</c:f>
+              <c:numCache>
+                <c:formatCode>General</c:formatCode>
+                <c:ptCount val="3"/>
+                <c:pt idx="0">
+                  <c:v>0.018593</c:v>
+                </c:pt>
+                <c:pt idx="1">
+                  <c:v>0.030157</c:v>
+                </c:pt>
+                <c:pt idx="2">
+                  <c:v>0.043007</c:v>
+                </c:pt>
+              </c:numCache>
+            </c:numRef>
+          </c:val>
+        </c:ser>
+        <c:dLbls>
+          <c:txPr>
+            <a:bodyPr xmlns:a="http://schemas.openxmlformats.org/drawingml/2006/main" anchorCtr="1"/>
+            <a:lstStyle xmlns:a="http://schemas.openxmlformats.org/drawingml/2006/main"/>
+            <a:p xmlns:a="http://schemas.openxmlformats.org/drawingml/2006/main">
+              <a:pPr>
+                <a:defRPr>
+                  <a:latin typeface="Arial Unicode MS"/>
+                  <a:ea typeface="Arial Unicode MS"/>
+                  <a:cs typeface="Arial Unicode MS"/>
+                </a:defRPr>
+              </a:pPr>
+            </a:p>
+          </c:txPr>
+          <c:showLegendKey val="0"/>
+          <c:showVal val="0"/>
+          <c:showCatName val="0"/>
+          <c:showSerName val="0"/>
+          <c:showPercent val="0"/>
+          <c:showBubbleSize val="0"/>
+          <c:showLeaderLines val="0"/>
+        </c:dLbls>
+        <c:axId val="48650112"/>
+        <c:axId val="48672768"/>
+      </c:barChart>
+      <c:catAx>
+        <c:axId val="48650112"/>
+        <c:scaling>
+          <c:orientation val="minMax"/>
+        </c:scaling>
+        <c:delete val="0"/>
+        <c:axPos val="b"/>
+        <c:numFmt formatCode="General"/>
+        <c:majorTickMark val="none"/>
+        <c:minorTickMark val="none"/>
+        <c:spPr>
+          <a:ln xmlns:a="http://schemas.openxmlformats.org/drawingml/2006/main" w="9525">
+            <a:solidFill>
+              <a:srgbClr val="D4D4D4"/>
+            </a:solidFill>
+            <a:prstDash val="solid"/>
+          </a:ln>
+        </c:spPr>
+        <c:txPr>
+          <a:bodyPr xmlns:a="http://schemas.openxmlformats.org/drawingml/2006/main" anchorCtr="1"/>
+          <a:lstStyle xmlns:a="http://schemas.openxmlformats.org/drawingml/2006/main"/>
+          <a:p xmlns:a="http://schemas.openxmlformats.org/drawingml/2006/main">
+            <a:pPr>
+              <a:defRPr>
+                <a:solidFill>
+                  <a:srgbClr val="666666"/>
+                </a:solidFill>
+                <a:latin typeface="Arial Unicode MS"/>
+                <a:ea typeface="Arial Unicode MS"/>
+                <a:cs typeface="Arial Unicode MS"/>
+              </a:defRPr>
+            </a:pPr>
+          </a:p>
+        </c:txPr>
+        <c:crossAx val="48672768"/>
+      </c:catAx>
+      <c:valAx>
+        <c:axId val="48672768"/>
+        <c:scaling>
+          <c:orientation val="minMax"/>
+        </c:scaling>
+        <c:delete val="0"/>
+        <c:axPos val="l"/>
+        <c:title>
+          <c:tx>
+            <c:rich>
+              <a:bodyPr xmlns:a="http://schemas.openxmlformats.org/drawingml/2006/main"/>
+              <a:lstStyle xmlns:a="http://schemas.openxmlformats.org/drawingml/2006/main"/>
+              <a:p xmlns:a="http://schemas.openxmlformats.org/drawingml/2006/main">
+                <a:r>
+                  <a:rPr>
+                    <a:latin typeface="Arial Unicode MS"/>
+                    <a:ea typeface="Arial Unicode MS"/>
+                    <a:cs typeface="Arial Unicode MS"/>
+                  </a:rPr>
+                  <a:t>四块电池RMSE算术平均（Ah）</a:t>
+                </a:r>
+              </a:p>
+            </c:rich>
+          </c:tx>
+          <c:overlay val="0"/>
+          <c:txPr>
+            <a:bodyPr xmlns:a="http://schemas.openxmlformats.org/drawingml/2006/main" anchorCtr="1"/>
+            <a:lstStyle xmlns:a="http://schemas.openxmlformats.org/drawingml/2006/main"/>
+            <a:p xmlns:a="http://schemas.openxmlformats.org/drawingml/2006/main">
+              <a:pPr>
+                <a:defRPr>
+                  <a:latin typeface="Arial Unicode MS"/>
+                  <a:ea typeface="Arial Unicode MS"/>
+                  <a:cs typeface="Arial Unicode MS"/>
+                </a:defRPr>
+              </a:pPr>
+            </a:p>
+          </c:txPr>
+        </c:title>
+        <c:numFmt formatCode="General"/>
+        <c:majorTickMark val="none"/>
+        <c:minorTickMark val="none"/>
+        <c:spPr>
+          <a:ln xmlns:a="http://schemas.openxmlformats.org/drawingml/2006/main" w="9525">
+            <a:solidFill>
+              <a:srgbClr val="D4D4D4"/>
+            </a:solidFill>
+            <a:prstDash val="solid"/>
+          </a:ln>
+        </c:spPr>
+        <c:txPr>
+          <a:bodyPr xmlns:a="http://schemas.openxmlformats.org/drawingml/2006/main" anchorCtr="1"/>
+          <a:lstStyle xmlns:a="http://schemas.openxmlformats.org/drawingml/2006/main"/>
+          <a:p xmlns:a="http://schemas.openxmlformats.org/drawingml/2006/main">
+            <a:pPr>
+              <a:defRPr>
+                <a:solidFill>
+                  <a:srgbClr val="666666"/>
+                </a:solidFill>
+                <a:latin typeface="Arial Unicode MS"/>
+                <a:ea typeface="Arial Unicode MS"/>
+                <a:cs typeface="Arial Unicode MS"/>
+              </a:defRPr>
+            </a:pPr>
+          </a:p>
+        </c:txPr>
+        <c:crossAx val="48650112"/>
+        <c:crossBetween val="between"/>
+      </c:valAx>
+    </c:plotArea>
+    <c:legend>
+      <c:legendPos val="b"/>
+      <c:overlay val="0"/>
+      <c:txPr>
+        <a:bodyPr xmlns:a="http://schemas.openxmlformats.org/drawingml/2006/main" anchorCtr="1"/>
+        <a:lstStyle xmlns:a="http://schemas.openxmlformats.org/drawingml/2006/main"/>
+        <a:p xmlns:a="http://schemas.openxmlformats.org/drawingml/2006/main">
+          <a:pPr>
+            <a:defRPr>
+              <a:latin typeface="Arial Unicode MS"/>
+              <a:ea typeface="Arial Unicode MS"/>
+              <a:cs typeface="Arial Unicode MS"/>
+            </a:defRPr>
+          </a:pPr>
+        </a:p>
+      </c:txPr>
+    </c:legend>
+    <c:plotVisOnly val="1"/>
+  </c:chart>
+  <c:externalData r:id="rIdChartSnapshot1">
+    <c:autoUpdate val="0"/>
+  </c:externalData>
+</c:chartSpace>
+</file>
+
 <file path=ppt/slides/charts/chart2.xml><?xml version="1.0" encoding="utf-8"?>
 <c:chartSpace xmlns:c="http://schemas.openxmlformats.org/drawingml/2006/chart" xmlns:r="http://schemas.openxmlformats.org/officeDocument/2006/relationships">
   <c:lang val="en-US"/>
@@ -19700,7 +20389,7 @@
                   <a:srgbClr val="172B3A"/>
                 </a:solidFill>
               </a:rPr>
-              <a:t>01  读取与清洗：检查数据能否用于分析</a:t>
+              <a:t>01  读取与清洗：检查数据质量</a:t>
             </a:r>
           </a:p>
           <a:p xmlns:a="http://schemas.openxmlformats.org/drawingml/2006/main">
@@ -19723,7 +20412,7 @@
                   <a:srgbClr val="172B3A"/>
                 </a:solidFill>
               </a:rPr>
-              <a:t>02  可视化退化：观察趋势并比较个体差异</a:t>
+              <a:t>02  可视化退化：比较个体差异</a:t>
             </a:r>
           </a:p>
           <a:p xmlns:a="http://schemas.openxmlformats.org/drawingml/2006/main">
@@ -19746,7 +20435,43 @@
                   <a:srgbClr val="172B3A"/>
                 </a:solidFill>
               </a:rPr>
-              <a:t>03  特征与建模：用历史观测预测下一循环容量</a:t>
+              <a:t>03  单步容量建模</a:t>
+            </a:r>
+          </a:p>
+          <a:p xmlns:a="http://schemas.openxmlformats.org/drawingml/2006/main">
+            <a:pPr>
+              <a:buNone/>
+              <a:defRPr sz="2325">
+                <a:solidFill>
+                  <a:srgbClr val="172B3A"/>
+                </a:solidFill>
+              </a:defRPr>
+            </a:pPr>
+            <a:r>
+              <a:rPr sz="2325">
+                <a:solidFill>
+                  <a:srgbClr val="172B3A"/>
+                </a:solidFill>
+              </a:rPr>
+              <a:t>04  误差、寿命外推与预警分析</a:t>
+            </a:r>
+          </a:p>
+          <a:p xmlns:a="http://schemas.openxmlformats.org/drawingml/2006/main">
+            <a:pPr>
+              <a:buNone/>
+              <a:defRPr sz="2325">
+                <a:solidFill>
+                  <a:srgbClr val="172B3A"/>
+                </a:solidFill>
+              </a:defRPr>
+            </a:pPr>
+            <a:r>
+              <a:rPr sz="2325">
+                <a:solidFill>
+                  <a:srgbClr val="172B3A"/>
+                </a:solidFill>
+              </a:rPr>
+              <a:t>05  提前1、5、10次的容量建模</a:t>
             </a:r>
           </a:p>
         </p:txBody>
@@ -21215,7 +21940,7 @@
           <p:cNvPr id="5" name="">
             <a:extLst xmlns:a="http://schemas.openxmlformats.org/drawingml/2006/main">
               <a:ext uri="{FF2B5EF4-FFF2-40B4-BE49-F238E27FC236}">
-                <a16:creationId xmlns:a16="http://schemas.microsoft.com/office/drawing/2014/main" id="{96471CB0-44B6-4DEB-A902-7067E5AE79E0}"/>
+                <a16:creationId xmlns:a16="http://schemas.microsoft.com/office/drawing/2014/main" id="{4A0FDC32-CFB5-476C-9363-FE2BD4B083D9}"/>
               </a:ext>
             </a:extLst>
           </p:cNvPr>
@@ -22345,7 +23070,7 @@
           <p:cNvPr id="4" name="">
             <a:extLst xmlns:a="http://schemas.openxmlformats.org/drawingml/2006/main">
               <a:ext uri="{FF2B5EF4-FFF2-40B4-BE49-F238E27FC236}">
-                <a16:creationId xmlns:a16="http://schemas.microsoft.com/office/drawing/2014/main" id="{B8718B0A-D896-440B-B29A-4390BF140CBB}"/>
+                <a16:creationId xmlns:a16="http://schemas.microsoft.com/office/drawing/2014/main" id="{752DD94C-7CAA-4FF1-AC13-38917110891E}"/>
               </a:ext>
             </a:extLst>
           </p:cNvPr>
@@ -25122,7 +25847,7 @@
           <p:cNvPr id="4" name="Chart">
             <a:extLst xmlns:a="http://schemas.openxmlformats.org/drawingml/2006/main">
               <a:ext uri="{FF2B5EF4-FFF2-40B4-BE49-F238E27FC236}">
-                <a16:creationId xmlns:a16="http://schemas.microsoft.com/office/drawing/2014/main" id="{9FAB19E9-88AB-4534-9F27-FB94E0A7CE8E}"/>
+                <a16:creationId xmlns:a16="http://schemas.microsoft.com/office/drawing/2014/main" id="{DD4B9F6E-F321-4260-AAD5-7AB889D1F4D8}"/>
               </a:ext>
             </a:extLst>
           </p:cNvPr>
@@ -25135,7 +25860,7 @@
         </p:xfrm>
         <a:graphic xmlns:a="http://schemas.openxmlformats.org/drawingml/2006/main">
           <a:graphicData uri="http://schemas.openxmlformats.org/drawingml/2006/chart">
-            <c:chart xmlns:r="http://schemas.openxmlformats.org/officeDocument/2006/relationships" xmlns:c="http://schemas.openxmlformats.org/drawingml/2006/chart" r:id="Rc1a0f997664248f9"/>
+            <c:chart xmlns:r="http://schemas.openxmlformats.org/officeDocument/2006/relationships" xmlns:c="http://schemas.openxmlformats.org/drawingml/2006/chart" r:id="R003d5aaa902c4b01"/>
           </a:graphicData>
         </a:graphic>
       </p:graphicFrame>
@@ -26256,7 +26981,7 @@
           <p:cNvPr id="4" name="Chart">
             <a:extLst xmlns:a="http://schemas.openxmlformats.org/drawingml/2006/main">
               <a:ext uri="{FF2B5EF4-FFF2-40B4-BE49-F238E27FC236}">
-                <a16:creationId xmlns:a16="http://schemas.microsoft.com/office/drawing/2014/main" id="{E553D21A-2F5D-4DC8-8BB8-B57074C39007}"/>
+                <a16:creationId xmlns:a16="http://schemas.microsoft.com/office/drawing/2014/main" id="{EF985076-DC7B-4A0B-8095-90C5B6F4C7CA}"/>
               </a:ext>
             </a:extLst>
           </p:cNvPr>
@@ -26269,7 +26994,7 @@
         </p:xfrm>
         <a:graphic xmlns:a="http://schemas.openxmlformats.org/drawingml/2006/main">
           <a:graphicData uri="http://schemas.openxmlformats.org/drawingml/2006/chart">
-            <c:chart xmlns:r="http://schemas.openxmlformats.org/officeDocument/2006/relationships" xmlns:c="http://schemas.openxmlformats.org/drawingml/2006/chart" r:id="R050fb125ea6e47fb"/>
+            <c:chart xmlns:r="http://schemas.openxmlformats.org/officeDocument/2006/relationships" xmlns:c="http://schemas.openxmlformats.org/drawingml/2006/chart" r:id="Rde76115d25d14e49"/>
           </a:graphicData>
         </a:graphic>
       </p:graphicFrame>
@@ -27137,7 +27862,7 @@
           <p:cNvPr id="5" name="Chart">
             <a:extLst xmlns:a="http://schemas.openxmlformats.org/drawingml/2006/main">
               <a:ext uri="{FF2B5EF4-FFF2-40B4-BE49-F238E27FC236}">
-                <a16:creationId xmlns:a16="http://schemas.microsoft.com/office/drawing/2014/main" id="{6656CABF-FDE2-4925-87B8-6FA30C7B515D}"/>
+                <a16:creationId xmlns:a16="http://schemas.microsoft.com/office/drawing/2014/main" id="{4ABAC8C3-27D7-4DEC-91C6-8DA67A8B44BD}"/>
               </a:ext>
             </a:extLst>
           </p:cNvPr>
@@ -27150,7 +27875,7 @@
         </p:xfrm>
         <a:graphic xmlns:a="http://schemas.openxmlformats.org/drawingml/2006/main">
           <a:graphicData uri="http://schemas.openxmlformats.org/drawingml/2006/chart">
-            <c:chart xmlns:r="http://schemas.openxmlformats.org/officeDocument/2006/relationships" xmlns:c="http://schemas.openxmlformats.org/drawingml/2006/chart" r:id="R1a0b99262edc4a76"/>
+            <c:chart xmlns:r="http://schemas.openxmlformats.org/officeDocument/2006/relationships" xmlns:c="http://schemas.openxmlformats.org/drawingml/2006/chart" r:id="R950864a51a0f4471"/>
           </a:graphicData>
         </a:graphic>
       </p:graphicFrame>
@@ -27325,7 +28050,7 @@
           <p:cNvPr id="7" name="Chart">
             <a:extLst xmlns:a="http://schemas.openxmlformats.org/drawingml/2006/main">
               <a:ext uri="{FF2B5EF4-FFF2-40B4-BE49-F238E27FC236}">
-                <a16:creationId xmlns:a16="http://schemas.microsoft.com/office/drawing/2014/main" id="{94EAF61D-9440-42DA-8D26-7BDD8BE26D4B}"/>
+                <a16:creationId xmlns:a16="http://schemas.microsoft.com/office/drawing/2014/main" id="{128D852A-DF02-4487-9784-0F1445E2EFD5}"/>
               </a:ext>
             </a:extLst>
           </p:cNvPr>
@@ -27338,7 +28063,7 @@
         </p:xfrm>
         <a:graphic xmlns:a="http://schemas.openxmlformats.org/drawingml/2006/main">
           <a:graphicData uri="http://schemas.openxmlformats.org/drawingml/2006/chart">
-            <c:chart xmlns:r="http://schemas.openxmlformats.org/officeDocument/2006/relationships" xmlns:c="http://schemas.openxmlformats.org/drawingml/2006/chart" r:id="R8fc5723ad81d4304"/>
+            <c:chart xmlns:r="http://schemas.openxmlformats.org/officeDocument/2006/relationships" xmlns:c="http://schemas.openxmlformats.org/drawingml/2006/chart" r:id="Reb0fd05d843b48ce"/>
           </a:graphicData>
         </a:graphic>
       </p:graphicFrame>
@@ -28206,7 +28931,7 @@
           <p:cNvPr id="5" name="Chart">
             <a:extLst xmlns:a="http://schemas.openxmlformats.org/drawingml/2006/main">
               <a:ext uri="{FF2B5EF4-FFF2-40B4-BE49-F238E27FC236}">
-                <a16:creationId xmlns:a16="http://schemas.microsoft.com/office/drawing/2014/main" id="{891A0705-FFC5-47E5-9935-A969C455850E}"/>
+                <a16:creationId xmlns:a16="http://schemas.microsoft.com/office/drawing/2014/main" id="{90C0CA00-C2AE-4B8B-9DCF-E77302427312}"/>
               </a:ext>
             </a:extLst>
           </p:cNvPr>
@@ -28219,7 +28944,7 @@
         </p:xfrm>
         <a:graphic xmlns:a="http://schemas.openxmlformats.org/drawingml/2006/main">
           <a:graphicData uri="http://schemas.openxmlformats.org/drawingml/2006/chart">
-            <c:chart xmlns:r="http://schemas.openxmlformats.org/officeDocument/2006/relationships" xmlns:c="http://schemas.openxmlformats.org/drawingml/2006/chart" r:id="R3274f3a3cf65404d"/>
+            <c:chart xmlns:r="http://schemas.openxmlformats.org/officeDocument/2006/relationships" xmlns:c="http://schemas.openxmlformats.org/drawingml/2006/chart" r:id="Rf896fffb7ae64c75"/>
           </a:graphicData>
         </a:graphic>
       </p:graphicFrame>
@@ -28394,7 +29119,7 @@
           <p:cNvPr id="7" name="Chart">
             <a:extLst xmlns:a="http://schemas.openxmlformats.org/drawingml/2006/main">
               <a:ext uri="{FF2B5EF4-FFF2-40B4-BE49-F238E27FC236}">
-                <a16:creationId xmlns:a16="http://schemas.microsoft.com/office/drawing/2014/main" id="{9E189B30-52AD-4AC6-B2CA-CE12B1E0D471}"/>
+                <a16:creationId xmlns:a16="http://schemas.microsoft.com/office/drawing/2014/main" id="{560BE4AC-E982-4A94-9532-19B145CB3A96}"/>
               </a:ext>
             </a:extLst>
           </p:cNvPr>
@@ -28407,7 +29132,7 @@
         </p:xfrm>
         <a:graphic xmlns:a="http://schemas.openxmlformats.org/drawingml/2006/main">
           <a:graphicData uri="http://schemas.openxmlformats.org/drawingml/2006/chart">
-            <c:chart xmlns:r="http://schemas.openxmlformats.org/officeDocument/2006/relationships" xmlns:c="http://schemas.openxmlformats.org/drawingml/2006/chart" r:id="R852eed8bf5ea4148"/>
+            <c:chart xmlns:r="http://schemas.openxmlformats.org/officeDocument/2006/relationships" xmlns:c="http://schemas.openxmlformats.org/drawingml/2006/chart" r:id="R2a1902b86cfd4c88"/>
           </a:graphicData>
         </a:graphic>
       </p:graphicFrame>
@@ -29109,7 +29834,7 @@
           <p:cNvPr id="4" name="">
             <a:extLst xmlns:a="http://schemas.openxmlformats.org/drawingml/2006/main">
               <a:ext uri="{FF2B5EF4-FFF2-40B4-BE49-F238E27FC236}">
-                <a16:creationId xmlns:a16="http://schemas.microsoft.com/office/drawing/2014/main" id="{E9E422A4-AB36-44FA-955D-FFC1F9886053}"/>
+                <a16:creationId xmlns:a16="http://schemas.microsoft.com/office/drawing/2014/main" id="{53A5BFD7-B3AF-424D-A9D1-7CF533A9E76B}"/>
               </a:ext>
             </a:extLst>
           </p:cNvPr>
@@ -31513,6 +32238,7 @@
               </a:defRPr>
             </a:defPPr>
             <a:lvl1pPr>
+              <a:buNone/>
               <a:defRPr sz="2925">
                 <a:solidFill>
                   <a:srgbClr val="172B3A"/>
@@ -31523,6 +32249,7 @@
               </a:defRPr>
             </a:lvl1pPr>
             <a:lvl2pPr>
+              <a:buNone/>
               <a:defRPr sz="2925">
                 <a:solidFill>
                   <a:srgbClr val="172B3A"/>
@@ -31533,6 +32260,7 @@
               </a:defRPr>
             </a:lvl2pPr>
             <a:lvl3pPr>
+              <a:buNone/>
               <a:defRPr sz="2925">
                 <a:solidFill>
                   <a:srgbClr val="172B3A"/>
@@ -31543,6 +32271,7 @@
               </a:defRPr>
             </a:lvl3pPr>
             <a:lvl4pPr>
+              <a:buNone/>
               <a:defRPr sz="2925">
                 <a:solidFill>
                   <a:srgbClr val="172B3A"/>
@@ -31553,6 +32282,7 @@
               </a:defRPr>
             </a:lvl4pPr>
             <a:lvl5pPr>
+              <a:buNone/>
               <a:defRPr sz="2925">
                 <a:solidFill>
                   <a:srgbClr val="172B3A"/>
@@ -31563,6 +32293,7 @@
               </a:defRPr>
             </a:lvl5pPr>
             <a:lvl6pPr>
+              <a:buNone/>
               <a:defRPr sz="2925">
                 <a:solidFill>
                   <a:srgbClr val="172B3A"/>
@@ -31573,6 +32304,7 @@
               </a:defRPr>
             </a:lvl6pPr>
             <a:lvl7pPr>
+              <a:buNone/>
               <a:defRPr sz="2925">
                 <a:solidFill>
                   <a:srgbClr val="172B3A"/>
@@ -31583,6 +32315,7 @@
               </a:defRPr>
             </a:lvl7pPr>
             <a:lvl8pPr>
+              <a:buNone/>
               <a:defRPr sz="2925">
                 <a:solidFill>
                   <a:srgbClr val="172B3A"/>
@@ -31593,6 +32326,7 @@
               </a:defRPr>
             </a:lvl8pPr>
             <a:lvl9pPr>
+              <a:buNone/>
               <a:defRPr sz="2925">
                 <a:solidFill>
                   <a:srgbClr val="172B3A"/>
@@ -31605,6 +32339,7 @@
           </a:lstStyle>
           <a:p xmlns:a="http://schemas.openxmlformats.org/drawingml/2006/main">
             <a:pPr>
+              <a:buNone/>
               <a:defRPr sz="2925">
                 <a:solidFill>
                   <a:srgbClr val="172B3A"/>
@@ -31669,6 +32404,7 @@
               </a:defRPr>
             </a:defPPr>
             <a:lvl1pPr>
+              <a:buNone/>
               <a:defRPr sz="1200">
                 <a:solidFill>
                   <a:srgbClr val="687985"/>
@@ -31679,6 +32415,7 @@
               </a:defRPr>
             </a:lvl1pPr>
             <a:lvl2pPr>
+              <a:buNone/>
               <a:defRPr sz="1200">
                 <a:solidFill>
                   <a:srgbClr val="687985"/>
@@ -31689,6 +32426,7 @@
               </a:defRPr>
             </a:lvl2pPr>
             <a:lvl3pPr>
+              <a:buNone/>
               <a:defRPr sz="1200">
                 <a:solidFill>
                   <a:srgbClr val="687985"/>
@@ -31699,6 +32437,7 @@
               </a:defRPr>
             </a:lvl3pPr>
             <a:lvl4pPr>
+              <a:buNone/>
               <a:defRPr sz="1200">
                 <a:solidFill>
                   <a:srgbClr val="687985"/>
@@ -31709,6 +32448,7 @@
               </a:defRPr>
             </a:lvl4pPr>
             <a:lvl5pPr>
+              <a:buNone/>
               <a:defRPr sz="1200">
                 <a:solidFill>
                   <a:srgbClr val="687985"/>
@@ -31719,6 +32459,7 @@
               </a:defRPr>
             </a:lvl5pPr>
             <a:lvl6pPr>
+              <a:buNone/>
               <a:defRPr sz="1200">
                 <a:solidFill>
                   <a:srgbClr val="687985"/>
@@ -31729,6 +32470,7 @@
               </a:defRPr>
             </a:lvl6pPr>
             <a:lvl7pPr>
+              <a:buNone/>
               <a:defRPr sz="1200">
                 <a:solidFill>
                   <a:srgbClr val="687985"/>
@@ -31739,6 +32481,7 @@
               </a:defRPr>
             </a:lvl7pPr>
             <a:lvl8pPr>
+              <a:buNone/>
               <a:defRPr sz="1200">
                 <a:solidFill>
                   <a:srgbClr val="687985"/>
@@ -31749,6 +32492,7 @@
               </a:defRPr>
             </a:lvl8pPr>
             <a:lvl9pPr>
+              <a:buNone/>
               <a:defRPr sz="1200">
                 <a:solidFill>
                   <a:srgbClr val="687985"/>
@@ -31761,6 +32505,7 @@
           </a:lstStyle>
           <a:p xmlns:a="http://schemas.openxmlformats.org/drawingml/2006/main">
             <a:pPr>
+              <a:buNone/>
               <a:defRPr sz="1200">
                 <a:solidFill>
                   <a:srgbClr val="687985"/>
@@ -31825,6 +32570,7 @@
               </a:defRPr>
             </a:defPPr>
             <a:lvl1pPr>
+              <a:buNone/>
               <a:defRPr sz="1200">
                 <a:solidFill>
                   <a:srgbClr val="172B3A"/>
@@ -31835,6 +32581,7 @@
               </a:defRPr>
             </a:lvl1pPr>
             <a:lvl2pPr>
+              <a:buNone/>
               <a:defRPr sz="1200">
                 <a:solidFill>
                   <a:srgbClr val="172B3A"/>
@@ -31845,6 +32592,7 @@
               </a:defRPr>
             </a:lvl2pPr>
             <a:lvl3pPr>
+              <a:buNone/>
               <a:defRPr sz="1200">
                 <a:solidFill>
                   <a:srgbClr val="172B3A"/>
@@ -31855,6 +32603,7 @@
               </a:defRPr>
             </a:lvl3pPr>
             <a:lvl4pPr>
+              <a:buNone/>
               <a:defRPr sz="1200">
                 <a:solidFill>
                   <a:srgbClr val="172B3A"/>
@@ -31865,6 +32614,7 @@
               </a:defRPr>
             </a:lvl4pPr>
             <a:lvl5pPr>
+              <a:buNone/>
               <a:defRPr sz="1200">
                 <a:solidFill>
                   <a:srgbClr val="172B3A"/>
@@ -31875,6 +32625,7 @@
               </a:defRPr>
             </a:lvl5pPr>
             <a:lvl6pPr>
+              <a:buNone/>
               <a:defRPr sz="1200">
                 <a:solidFill>
                   <a:srgbClr val="172B3A"/>
@@ -31885,6 +32636,7 @@
               </a:defRPr>
             </a:lvl6pPr>
             <a:lvl7pPr>
+              <a:buNone/>
               <a:defRPr sz="1200">
                 <a:solidFill>
                   <a:srgbClr val="172B3A"/>
@@ -31895,6 +32647,7 @@
               </a:defRPr>
             </a:lvl7pPr>
             <a:lvl8pPr>
+              <a:buNone/>
               <a:defRPr sz="1200">
                 <a:solidFill>
                   <a:srgbClr val="172B3A"/>
@@ -31905,6 +32658,7 @@
               </a:defRPr>
             </a:lvl8pPr>
             <a:lvl9pPr>
+              <a:buNone/>
               <a:defRPr sz="1200">
                 <a:solidFill>
                   <a:srgbClr val="172B3A"/>
@@ -31917,6 +32671,7 @@
           </a:lstStyle>
           <a:p xmlns:a="http://schemas.openxmlformats.org/drawingml/2006/main">
             <a:pPr>
+              <a:buNone/>
               <a:defRPr sz="1200">
                 <a:solidFill>
                   <a:srgbClr val="172B3A"/>
@@ -31981,6 +32736,7 @@
               </a:defRPr>
             </a:defPPr>
             <a:lvl1pPr>
+              <a:buNone/>
               <a:defRPr sz="2175">
                 <a:solidFill>
                   <a:srgbClr val="176B87"/>
@@ -31991,6 +32747,7 @@
               </a:defRPr>
             </a:lvl1pPr>
             <a:lvl2pPr>
+              <a:buNone/>
               <a:defRPr sz="2175">
                 <a:solidFill>
                   <a:srgbClr val="176B87"/>
@@ -32001,6 +32758,7 @@
               </a:defRPr>
             </a:lvl2pPr>
             <a:lvl3pPr>
+              <a:buNone/>
               <a:defRPr sz="2175">
                 <a:solidFill>
                   <a:srgbClr val="176B87"/>
@@ -32011,6 +32769,7 @@
               </a:defRPr>
             </a:lvl3pPr>
             <a:lvl4pPr>
+              <a:buNone/>
               <a:defRPr sz="2175">
                 <a:solidFill>
                   <a:srgbClr val="176B87"/>
@@ -32021,6 +32780,7 @@
               </a:defRPr>
             </a:lvl4pPr>
             <a:lvl5pPr>
+              <a:buNone/>
               <a:defRPr sz="2175">
                 <a:solidFill>
                   <a:srgbClr val="176B87"/>
@@ -32031,6 +32791,7 @@
               </a:defRPr>
             </a:lvl5pPr>
             <a:lvl6pPr>
+              <a:buNone/>
               <a:defRPr sz="2175">
                 <a:solidFill>
                   <a:srgbClr val="176B87"/>
@@ -32041,6 +32802,7 @@
               </a:defRPr>
             </a:lvl6pPr>
             <a:lvl7pPr>
+              <a:buNone/>
               <a:defRPr sz="2175">
                 <a:solidFill>
                   <a:srgbClr val="176B87"/>
@@ -32051,6 +32813,7 @@
               </a:defRPr>
             </a:lvl7pPr>
             <a:lvl8pPr>
+              <a:buNone/>
               <a:defRPr sz="2175">
                 <a:solidFill>
                   <a:srgbClr val="176B87"/>
@@ -32061,6 +32824,7 @@
               </a:defRPr>
             </a:lvl8pPr>
             <a:lvl9pPr>
+              <a:buNone/>
               <a:defRPr sz="2175">
                 <a:solidFill>
                   <a:srgbClr val="176B87"/>
@@ -32073,6 +32837,7 @@
           </a:lstStyle>
           <a:p xmlns:a="http://schemas.openxmlformats.org/drawingml/2006/main">
             <a:pPr>
+              <a:buNone/>
               <a:defRPr sz="2175">
                 <a:solidFill>
                   <a:srgbClr val="176B87"/>
@@ -32101,7 +32866,7 @@
           <p:cNvPr id="5" name="">
             <a:extLst xmlns:a="http://schemas.openxmlformats.org/drawingml/2006/main">
               <a:ext uri="{FF2B5EF4-FFF2-40B4-BE49-F238E27FC236}">
-                <a16:creationId xmlns:a16="http://schemas.microsoft.com/office/drawing/2014/main" id="{4FA4D58B-8BCA-4D88-81A1-F686FDD1EFD6}"/>
+                <a16:creationId xmlns:a16="http://schemas.microsoft.com/office/drawing/2014/main" id="{E9F519FF-CC77-402A-B6AB-F5863B2AF281}"/>
               </a:ext>
             </a:extLst>
           </p:cNvPr>
@@ -32726,6 +33491,7 @@
               </a:defRPr>
             </a:defPPr>
             <a:lvl1pPr>
+              <a:buNone/>
               <a:defRPr sz="1875">
                 <a:solidFill>
                   <a:srgbClr val="172B3A"/>
@@ -32736,6 +33502,7 @@
               </a:defRPr>
             </a:lvl1pPr>
             <a:lvl2pPr>
+              <a:buNone/>
               <a:defRPr sz="1875">
                 <a:solidFill>
                   <a:srgbClr val="172B3A"/>
@@ -32746,6 +33513,7 @@
               </a:defRPr>
             </a:lvl2pPr>
             <a:lvl3pPr>
+              <a:buNone/>
               <a:defRPr sz="1875">
                 <a:solidFill>
                   <a:srgbClr val="172B3A"/>
@@ -32756,6 +33524,7 @@
               </a:defRPr>
             </a:lvl3pPr>
             <a:lvl4pPr>
+              <a:buNone/>
               <a:defRPr sz="1875">
                 <a:solidFill>
                   <a:srgbClr val="172B3A"/>
@@ -32766,6 +33535,7 @@
               </a:defRPr>
             </a:lvl4pPr>
             <a:lvl5pPr>
+              <a:buNone/>
               <a:defRPr sz="1875">
                 <a:solidFill>
                   <a:srgbClr val="172B3A"/>
@@ -32776,6 +33546,7 @@
               </a:defRPr>
             </a:lvl5pPr>
             <a:lvl6pPr>
+              <a:buNone/>
               <a:defRPr sz="1875">
                 <a:solidFill>
                   <a:srgbClr val="172B3A"/>
@@ -32786,6 +33557,7 @@
               </a:defRPr>
             </a:lvl6pPr>
             <a:lvl7pPr>
+              <a:buNone/>
               <a:defRPr sz="1875">
                 <a:solidFill>
                   <a:srgbClr val="172B3A"/>
@@ -32796,6 +33568,7 @@
               </a:defRPr>
             </a:lvl7pPr>
             <a:lvl8pPr>
+              <a:buNone/>
               <a:defRPr sz="1875">
                 <a:solidFill>
                   <a:srgbClr val="172B3A"/>
@@ -32806,6 +33579,7 @@
               </a:defRPr>
             </a:lvl8pPr>
             <a:lvl9pPr>
+              <a:buNone/>
               <a:defRPr sz="1875">
                 <a:solidFill>
                   <a:srgbClr val="172B3A"/>
@@ -32818,6 +33592,7 @@
           </a:lstStyle>
           <a:p xmlns:a="http://schemas.openxmlformats.org/drawingml/2006/main">
             <a:pPr>
+              <a:buNone/>
               <a:defRPr sz="1875">
                 <a:solidFill>
                   <a:srgbClr val="172B3A"/>
@@ -32841,6 +33616,7 @@
           </a:p>
           <a:p xmlns:a="http://schemas.openxmlformats.org/drawingml/2006/main">
             <a:pPr>
+              <a:buNone/>
               <a:defRPr sz="1875">
                 <a:solidFill>
                   <a:srgbClr val="172B3A"/>
@@ -32934,6 +33710,7 @@
               </a:defRPr>
             </a:defPPr>
             <a:lvl1pPr>
+              <a:buNone/>
               <a:defRPr sz="2925">
                 <a:solidFill>
                   <a:srgbClr val="172B3A"/>
@@ -32944,6 +33721,7 @@
               </a:defRPr>
             </a:lvl1pPr>
             <a:lvl2pPr>
+              <a:buNone/>
               <a:defRPr sz="2925">
                 <a:solidFill>
                   <a:srgbClr val="172B3A"/>
@@ -32954,6 +33732,7 @@
               </a:defRPr>
             </a:lvl2pPr>
             <a:lvl3pPr>
+              <a:buNone/>
               <a:defRPr sz="2925">
                 <a:solidFill>
                   <a:srgbClr val="172B3A"/>
@@ -32964,6 +33743,7 @@
               </a:defRPr>
             </a:lvl3pPr>
             <a:lvl4pPr>
+              <a:buNone/>
               <a:defRPr sz="2925">
                 <a:solidFill>
                   <a:srgbClr val="172B3A"/>
@@ -32974,6 +33754,7 @@
               </a:defRPr>
             </a:lvl4pPr>
             <a:lvl5pPr>
+              <a:buNone/>
               <a:defRPr sz="2925">
                 <a:solidFill>
                   <a:srgbClr val="172B3A"/>
@@ -32984,6 +33765,7 @@
               </a:defRPr>
             </a:lvl5pPr>
             <a:lvl6pPr>
+              <a:buNone/>
               <a:defRPr sz="2925">
                 <a:solidFill>
                   <a:srgbClr val="172B3A"/>
@@ -32994,6 +33776,7 @@
               </a:defRPr>
             </a:lvl6pPr>
             <a:lvl7pPr>
+              <a:buNone/>
               <a:defRPr sz="2925">
                 <a:solidFill>
                   <a:srgbClr val="172B3A"/>
@@ -33004,6 +33787,7 @@
               </a:defRPr>
             </a:lvl7pPr>
             <a:lvl8pPr>
+              <a:buNone/>
               <a:defRPr sz="2925">
                 <a:solidFill>
                   <a:srgbClr val="172B3A"/>
@@ -33014,6 +33798,7 @@
               </a:defRPr>
             </a:lvl8pPr>
             <a:lvl9pPr>
+              <a:buNone/>
               <a:defRPr sz="2925">
                 <a:solidFill>
                   <a:srgbClr val="172B3A"/>
@@ -33026,6 +33811,7 @@
           </a:lstStyle>
           <a:p xmlns:a="http://schemas.openxmlformats.org/drawingml/2006/main">
             <a:pPr>
+              <a:buNone/>
               <a:defRPr sz="2925">
                 <a:solidFill>
                   <a:srgbClr val="172B3A"/>
@@ -33090,6 +33876,7 @@
               </a:defRPr>
             </a:defPPr>
             <a:lvl1pPr>
+              <a:buNone/>
               <a:defRPr sz="1200">
                 <a:solidFill>
                   <a:srgbClr val="687985"/>
@@ -33100,6 +33887,7 @@
               </a:defRPr>
             </a:lvl1pPr>
             <a:lvl2pPr>
+              <a:buNone/>
               <a:defRPr sz="1200">
                 <a:solidFill>
                   <a:srgbClr val="687985"/>
@@ -33110,6 +33898,7 @@
               </a:defRPr>
             </a:lvl2pPr>
             <a:lvl3pPr>
+              <a:buNone/>
               <a:defRPr sz="1200">
                 <a:solidFill>
                   <a:srgbClr val="687985"/>
@@ -33120,6 +33909,7 @@
               </a:defRPr>
             </a:lvl3pPr>
             <a:lvl4pPr>
+              <a:buNone/>
               <a:defRPr sz="1200">
                 <a:solidFill>
                   <a:srgbClr val="687985"/>
@@ -33130,6 +33920,7 @@
               </a:defRPr>
             </a:lvl4pPr>
             <a:lvl5pPr>
+              <a:buNone/>
               <a:defRPr sz="1200">
                 <a:solidFill>
                   <a:srgbClr val="687985"/>
@@ -33140,6 +33931,7 @@
               </a:defRPr>
             </a:lvl5pPr>
             <a:lvl6pPr>
+              <a:buNone/>
               <a:defRPr sz="1200">
                 <a:solidFill>
                   <a:srgbClr val="687985"/>
@@ -33150,6 +33942,7 @@
               </a:defRPr>
             </a:lvl6pPr>
             <a:lvl7pPr>
+              <a:buNone/>
               <a:defRPr sz="1200">
                 <a:solidFill>
                   <a:srgbClr val="687985"/>
@@ -33160,6 +33953,7 @@
               </a:defRPr>
             </a:lvl7pPr>
             <a:lvl8pPr>
+              <a:buNone/>
               <a:defRPr sz="1200">
                 <a:solidFill>
                   <a:srgbClr val="687985"/>
@@ -33170,6 +33964,7 @@
               </a:defRPr>
             </a:lvl8pPr>
             <a:lvl9pPr>
+              <a:buNone/>
               <a:defRPr sz="1200">
                 <a:solidFill>
                   <a:srgbClr val="687985"/>
@@ -33182,6 +33977,7 @@
           </a:lstStyle>
           <a:p xmlns:a="http://schemas.openxmlformats.org/drawingml/2006/main">
             <a:pPr>
+              <a:buNone/>
               <a:defRPr sz="1200">
                 <a:solidFill>
                   <a:srgbClr val="687985"/>
@@ -33246,6 +34042,7 @@
               </a:defRPr>
             </a:defPPr>
             <a:lvl1pPr>
+              <a:buNone/>
               <a:defRPr sz="1200">
                 <a:solidFill>
                   <a:srgbClr val="172B3A"/>
@@ -33256,6 +34053,7 @@
               </a:defRPr>
             </a:lvl1pPr>
             <a:lvl2pPr>
+              <a:buNone/>
               <a:defRPr sz="1200">
                 <a:solidFill>
                   <a:srgbClr val="172B3A"/>
@@ -33266,6 +34064,7 @@
               </a:defRPr>
             </a:lvl2pPr>
             <a:lvl3pPr>
+              <a:buNone/>
               <a:defRPr sz="1200">
                 <a:solidFill>
                   <a:srgbClr val="172B3A"/>
@@ -33276,6 +34075,7 @@
               </a:defRPr>
             </a:lvl3pPr>
             <a:lvl4pPr>
+              <a:buNone/>
               <a:defRPr sz="1200">
                 <a:solidFill>
                   <a:srgbClr val="172B3A"/>
@@ -33286,6 +34086,7 @@
               </a:defRPr>
             </a:lvl4pPr>
             <a:lvl5pPr>
+              <a:buNone/>
               <a:defRPr sz="1200">
                 <a:solidFill>
                   <a:srgbClr val="172B3A"/>
@@ -33296,6 +34097,7 @@
               </a:defRPr>
             </a:lvl5pPr>
             <a:lvl6pPr>
+              <a:buNone/>
               <a:defRPr sz="1200">
                 <a:solidFill>
                   <a:srgbClr val="172B3A"/>
@@ -33306,6 +34108,7 @@
               </a:defRPr>
             </a:lvl6pPr>
             <a:lvl7pPr>
+              <a:buNone/>
               <a:defRPr sz="1200">
                 <a:solidFill>
                   <a:srgbClr val="172B3A"/>
@@ -33316,6 +34119,7 @@
               </a:defRPr>
             </a:lvl7pPr>
             <a:lvl8pPr>
+              <a:buNone/>
               <a:defRPr sz="1200">
                 <a:solidFill>
                   <a:srgbClr val="172B3A"/>
@@ -33326,6 +34130,7 @@
               </a:defRPr>
             </a:lvl8pPr>
             <a:lvl9pPr>
+              <a:buNone/>
               <a:defRPr sz="1200">
                 <a:solidFill>
                   <a:srgbClr val="172B3A"/>
@@ -33338,6 +34143,7 @@
           </a:lstStyle>
           <a:p xmlns:a="http://schemas.openxmlformats.org/drawingml/2006/main">
             <a:pPr>
+              <a:buNone/>
               <a:defRPr sz="1200">
                 <a:solidFill>
                   <a:srgbClr val="172B3A"/>
@@ -33402,6 +34208,7 @@
               </a:defRPr>
             </a:defPPr>
             <a:lvl1pPr>
+              <a:buNone/>
               <a:defRPr sz="2100">
                 <a:solidFill>
                   <a:srgbClr val="176B87"/>
@@ -33412,6 +34219,7 @@
               </a:defRPr>
             </a:lvl1pPr>
             <a:lvl2pPr>
+              <a:buNone/>
               <a:defRPr sz="2100">
                 <a:solidFill>
                   <a:srgbClr val="176B87"/>
@@ -33422,6 +34230,7 @@
               </a:defRPr>
             </a:lvl2pPr>
             <a:lvl3pPr>
+              <a:buNone/>
               <a:defRPr sz="2100">
                 <a:solidFill>
                   <a:srgbClr val="176B87"/>
@@ -33432,6 +34241,7 @@
               </a:defRPr>
             </a:lvl3pPr>
             <a:lvl4pPr>
+              <a:buNone/>
               <a:defRPr sz="2100">
                 <a:solidFill>
                   <a:srgbClr val="176B87"/>
@@ -33442,6 +34252,7 @@
               </a:defRPr>
             </a:lvl4pPr>
             <a:lvl5pPr>
+              <a:buNone/>
               <a:defRPr sz="2100">
                 <a:solidFill>
                   <a:srgbClr val="176B87"/>
@@ -33452,6 +34263,7 @@
               </a:defRPr>
             </a:lvl5pPr>
             <a:lvl6pPr>
+              <a:buNone/>
               <a:defRPr sz="2100">
                 <a:solidFill>
                   <a:srgbClr val="176B87"/>
@@ -33462,6 +34274,7 @@
               </a:defRPr>
             </a:lvl6pPr>
             <a:lvl7pPr>
+              <a:buNone/>
               <a:defRPr sz="2100">
                 <a:solidFill>
                   <a:srgbClr val="176B87"/>
@@ -33472,6 +34285,7 @@
               </a:defRPr>
             </a:lvl7pPr>
             <a:lvl8pPr>
+              <a:buNone/>
               <a:defRPr sz="2100">
                 <a:solidFill>
                   <a:srgbClr val="176B87"/>
@@ -33482,6 +34296,7 @@
               </a:defRPr>
             </a:lvl8pPr>
             <a:lvl9pPr>
+              <a:buNone/>
               <a:defRPr sz="2100">
                 <a:solidFill>
                   <a:srgbClr val="176B87"/>
@@ -33494,6 +34309,7 @@
           </a:lstStyle>
           <a:p xmlns:a="http://schemas.openxmlformats.org/drawingml/2006/main">
             <a:pPr>
+              <a:buNone/>
               <a:defRPr sz="2100">
                 <a:solidFill>
                   <a:srgbClr val="176B87"/>
@@ -33517,6 +34333,7 @@
           </a:p>
           <a:p xmlns:a="http://schemas.openxmlformats.org/drawingml/2006/main">
             <a:pPr>
+              <a:buNone/>
               <a:defRPr sz="2100">
                 <a:solidFill>
                   <a:srgbClr val="176B87"/>
@@ -33545,7 +34362,7 @@
           <p:cNvPr id="5" name="">
             <a:extLst xmlns:a="http://schemas.openxmlformats.org/drawingml/2006/main">
               <a:ext uri="{FF2B5EF4-FFF2-40B4-BE49-F238E27FC236}">
-                <a16:creationId xmlns:a16="http://schemas.microsoft.com/office/drawing/2014/main" id="{076573EA-BC97-4326-BDA5-7C67361E0638}"/>
+                <a16:creationId xmlns:a16="http://schemas.microsoft.com/office/drawing/2014/main" id="{756DF6B9-491C-40DC-94A8-21EEFC2891F4}"/>
               </a:ext>
             </a:extLst>
           </p:cNvPr>
@@ -34346,6 +35163,7 @@
               </a:defRPr>
             </a:defPPr>
             <a:lvl1pPr>
+              <a:buNone/>
               <a:defRPr sz="1875">
                 <a:solidFill>
                   <a:srgbClr val="172B3A"/>
@@ -34356,6 +35174,7 @@
               </a:defRPr>
             </a:lvl1pPr>
             <a:lvl2pPr>
+              <a:buNone/>
               <a:defRPr sz="1875">
                 <a:solidFill>
                   <a:srgbClr val="172B3A"/>
@@ -34366,6 +35185,7 @@
               </a:defRPr>
             </a:lvl2pPr>
             <a:lvl3pPr>
+              <a:buNone/>
               <a:defRPr sz="1875">
                 <a:solidFill>
                   <a:srgbClr val="172B3A"/>
@@ -34376,6 +35196,7 @@
               </a:defRPr>
             </a:lvl3pPr>
             <a:lvl4pPr>
+              <a:buNone/>
               <a:defRPr sz="1875">
                 <a:solidFill>
                   <a:srgbClr val="172B3A"/>
@@ -34386,6 +35207,7 @@
               </a:defRPr>
             </a:lvl4pPr>
             <a:lvl5pPr>
+              <a:buNone/>
               <a:defRPr sz="1875">
                 <a:solidFill>
                   <a:srgbClr val="172B3A"/>
@@ -34396,6 +35218,7 @@
               </a:defRPr>
             </a:lvl5pPr>
             <a:lvl6pPr>
+              <a:buNone/>
               <a:defRPr sz="1875">
                 <a:solidFill>
                   <a:srgbClr val="172B3A"/>
@@ -34406,6 +35229,7 @@
               </a:defRPr>
             </a:lvl6pPr>
             <a:lvl7pPr>
+              <a:buNone/>
               <a:defRPr sz="1875">
                 <a:solidFill>
                   <a:srgbClr val="172B3A"/>
@@ -34416,6 +35240,7 @@
               </a:defRPr>
             </a:lvl7pPr>
             <a:lvl8pPr>
+              <a:buNone/>
               <a:defRPr sz="1875">
                 <a:solidFill>
                   <a:srgbClr val="172B3A"/>
@@ -34426,6 +35251,7 @@
               </a:defRPr>
             </a:lvl8pPr>
             <a:lvl9pPr>
+              <a:buNone/>
               <a:defRPr sz="1875">
                 <a:solidFill>
                   <a:srgbClr val="172B3A"/>
@@ -34438,6 +35264,7 @@
           </a:lstStyle>
           <a:p xmlns:a="http://schemas.openxmlformats.org/drawingml/2006/main">
             <a:pPr>
+              <a:buNone/>
               <a:defRPr sz="1875">
                 <a:solidFill>
                   <a:srgbClr val="172B3A"/>
@@ -34531,6 +35358,7 @@
               </a:defRPr>
             </a:defPPr>
             <a:lvl1pPr>
+              <a:buNone/>
               <a:defRPr sz="2925">
                 <a:solidFill>
                   <a:srgbClr val="172B3A"/>
@@ -34541,6 +35369,7 @@
               </a:defRPr>
             </a:lvl1pPr>
             <a:lvl2pPr>
+              <a:buNone/>
               <a:defRPr sz="2925">
                 <a:solidFill>
                   <a:srgbClr val="172B3A"/>
@@ -34551,6 +35380,7 @@
               </a:defRPr>
             </a:lvl2pPr>
             <a:lvl3pPr>
+              <a:buNone/>
               <a:defRPr sz="2925">
                 <a:solidFill>
                   <a:srgbClr val="172B3A"/>
@@ -34561,6 +35391,7 @@
               </a:defRPr>
             </a:lvl3pPr>
             <a:lvl4pPr>
+              <a:buNone/>
               <a:defRPr sz="2925">
                 <a:solidFill>
                   <a:srgbClr val="172B3A"/>
@@ -34571,6 +35402,7 @@
               </a:defRPr>
             </a:lvl4pPr>
             <a:lvl5pPr>
+              <a:buNone/>
               <a:defRPr sz="2925">
                 <a:solidFill>
                   <a:srgbClr val="172B3A"/>
@@ -34581,6 +35413,7 @@
               </a:defRPr>
             </a:lvl5pPr>
             <a:lvl6pPr>
+              <a:buNone/>
               <a:defRPr sz="2925">
                 <a:solidFill>
                   <a:srgbClr val="172B3A"/>
@@ -34591,6 +35424,7 @@
               </a:defRPr>
             </a:lvl6pPr>
             <a:lvl7pPr>
+              <a:buNone/>
               <a:defRPr sz="2925">
                 <a:solidFill>
                   <a:srgbClr val="172B3A"/>
@@ -34601,6 +35435,7 @@
               </a:defRPr>
             </a:lvl7pPr>
             <a:lvl8pPr>
+              <a:buNone/>
               <a:defRPr sz="2925">
                 <a:solidFill>
                   <a:srgbClr val="172B3A"/>
@@ -34611,6 +35446,7 @@
               </a:defRPr>
             </a:lvl8pPr>
             <a:lvl9pPr>
+              <a:buNone/>
               <a:defRPr sz="2925">
                 <a:solidFill>
                   <a:srgbClr val="172B3A"/>
@@ -34623,6 +35459,7 @@
           </a:lstStyle>
           <a:p xmlns:a="http://schemas.openxmlformats.org/drawingml/2006/main">
             <a:pPr>
+              <a:buNone/>
               <a:defRPr sz="2925">
                 <a:solidFill>
                   <a:srgbClr val="172B3A"/>
@@ -34687,6 +35524,7 @@
               </a:defRPr>
             </a:defPPr>
             <a:lvl1pPr>
+              <a:buNone/>
               <a:defRPr sz="1200">
                 <a:solidFill>
                   <a:srgbClr val="687985"/>
@@ -34697,6 +35535,7 @@
               </a:defRPr>
             </a:lvl1pPr>
             <a:lvl2pPr>
+              <a:buNone/>
               <a:defRPr sz="1200">
                 <a:solidFill>
                   <a:srgbClr val="687985"/>
@@ -34707,6 +35546,7 @@
               </a:defRPr>
             </a:lvl2pPr>
             <a:lvl3pPr>
+              <a:buNone/>
               <a:defRPr sz="1200">
                 <a:solidFill>
                   <a:srgbClr val="687985"/>
@@ -34717,6 +35557,7 @@
               </a:defRPr>
             </a:lvl3pPr>
             <a:lvl4pPr>
+              <a:buNone/>
               <a:defRPr sz="1200">
                 <a:solidFill>
                   <a:srgbClr val="687985"/>
@@ -34727,6 +35568,7 @@
               </a:defRPr>
             </a:lvl4pPr>
             <a:lvl5pPr>
+              <a:buNone/>
               <a:defRPr sz="1200">
                 <a:solidFill>
                   <a:srgbClr val="687985"/>
@@ -34737,6 +35579,7 @@
               </a:defRPr>
             </a:lvl5pPr>
             <a:lvl6pPr>
+              <a:buNone/>
               <a:defRPr sz="1200">
                 <a:solidFill>
                   <a:srgbClr val="687985"/>
@@ -34747,6 +35590,7 @@
               </a:defRPr>
             </a:lvl6pPr>
             <a:lvl7pPr>
+              <a:buNone/>
               <a:defRPr sz="1200">
                 <a:solidFill>
                   <a:srgbClr val="687985"/>
@@ -34757,6 +35601,7 @@
               </a:defRPr>
             </a:lvl7pPr>
             <a:lvl8pPr>
+              <a:buNone/>
               <a:defRPr sz="1200">
                 <a:solidFill>
                   <a:srgbClr val="687985"/>
@@ -34767,6 +35612,7 @@
               </a:defRPr>
             </a:lvl8pPr>
             <a:lvl9pPr>
+              <a:buNone/>
               <a:defRPr sz="1200">
                 <a:solidFill>
                   <a:srgbClr val="687985"/>
@@ -34779,6 +35625,7 @@
           </a:lstStyle>
           <a:p xmlns:a="http://schemas.openxmlformats.org/drawingml/2006/main">
             <a:pPr>
+              <a:buNone/>
               <a:defRPr sz="1200">
                 <a:solidFill>
                   <a:srgbClr val="687985"/>
@@ -34843,6 +35690,7 @@
               </a:defRPr>
             </a:defPPr>
             <a:lvl1pPr>
+              <a:buNone/>
               <a:defRPr sz="1200">
                 <a:solidFill>
                   <a:srgbClr val="172B3A"/>
@@ -34853,6 +35701,7 @@
               </a:defRPr>
             </a:lvl1pPr>
             <a:lvl2pPr>
+              <a:buNone/>
               <a:defRPr sz="1200">
                 <a:solidFill>
                   <a:srgbClr val="172B3A"/>
@@ -34863,6 +35712,7 @@
               </a:defRPr>
             </a:lvl2pPr>
             <a:lvl3pPr>
+              <a:buNone/>
               <a:defRPr sz="1200">
                 <a:solidFill>
                   <a:srgbClr val="172B3A"/>
@@ -34873,6 +35723,7 @@
               </a:defRPr>
             </a:lvl3pPr>
             <a:lvl4pPr>
+              <a:buNone/>
               <a:defRPr sz="1200">
                 <a:solidFill>
                   <a:srgbClr val="172B3A"/>
@@ -34883,6 +35734,7 @@
               </a:defRPr>
             </a:lvl4pPr>
             <a:lvl5pPr>
+              <a:buNone/>
               <a:defRPr sz="1200">
                 <a:solidFill>
                   <a:srgbClr val="172B3A"/>
@@ -34893,6 +35745,7 @@
               </a:defRPr>
             </a:lvl5pPr>
             <a:lvl6pPr>
+              <a:buNone/>
               <a:defRPr sz="1200">
                 <a:solidFill>
                   <a:srgbClr val="172B3A"/>
@@ -34903,6 +35756,7 @@
               </a:defRPr>
             </a:lvl6pPr>
             <a:lvl7pPr>
+              <a:buNone/>
               <a:defRPr sz="1200">
                 <a:solidFill>
                   <a:srgbClr val="172B3A"/>
@@ -34913,6 +35767,7 @@
               </a:defRPr>
             </a:lvl7pPr>
             <a:lvl8pPr>
+              <a:buNone/>
               <a:defRPr sz="1200">
                 <a:solidFill>
                   <a:srgbClr val="172B3A"/>
@@ -34923,6 +35778,7 @@
               </a:defRPr>
             </a:lvl8pPr>
             <a:lvl9pPr>
+              <a:buNone/>
               <a:defRPr sz="1200">
                 <a:solidFill>
                   <a:srgbClr val="172B3A"/>
@@ -34935,6 +35791,7 @@
           </a:lstStyle>
           <a:p xmlns:a="http://schemas.openxmlformats.org/drawingml/2006/main">
             <a:pPr>
+              <a:buNone/>
               <a:defRPr sz="1200">
                 <a:solidFill>
                   <a:srgbClr val="172B3A"/>
@@ -34999,6 +35856,7 @@
               </a:defRPr>
             </a:defPPr>
             <a:lvl1pPr>
+              <a:buNone/>
               <a:defRPr sz="2100">
                 <a:solidFill>
                   <a:srgbClr val="176B87"/>
@@ -35009,6 +35867,7 @@
               </a:defRPr>
             </a:lvl1pPr>
             <a:lvl2pPr>
+              <a:buNone/>
               <a:defRPr sz="2100">
                 <a:solidFill>
                   <a:srgbClr val="176B87"/>
@@ -35019,6 +35878,7 @@
               </a:defRPr>
             </a:lvl2pPr>
             <a:lvl3pPr>
+              <a:buNone/>
               <a:defRPr sz="2100">
                 <a:solidFill>
                   <a:srgbClr val="176B87"/>
@@ -35029,6 +35889,7 @@
               </a:defRPr>
             </a:lvl3pPr>
             <a:lvl4pPr>
+              <a:buNone/>
               <a:defRPr sz="2100">
                 <a:solidFill>
                   <a:srgbClr val="176B87"/>
@@ -35039,6 +35900,7 @@
               </a:defRPr>
             </a:lvl4pPr>
             <a:lvl5pPr>
+              <a:buNone/>
               <a:defRPr sz="2100">
                 <a:solidFill>
                   <a:srgbClr val="176B87"/>
@@ -35049,6 +35911,7 @@
               </a:defRPr>
             </a:lvl5pPr>
             <a:lvl6pPr>
+              <a:buNone/>
               <a:defRPr sz="2100">
                 <a:solidFill>
                   <a:srgbClr val="176B87"/>
@@ -35059,6 +35922,7 @@
               </a:defRPr>
             </a:lvl6pPr>
             <a:lvl7pPr>
+              <a:buNone/>
               <a:defRPr sz="2100">
                 <a:solidFill>
                   <a:srgbClr val="176B87"/>
@@ -35069,6 +35933,7 @@
               </a:defRPr>
             </a:lvl7pPr>
             <a:lvl8pPr>
+              <a:buNone/>
               <a:defRPr sz="2100">
                 <a:solidFill>
                   <a:srgbClr val="176B87"/>
@@ -35079,6 +35944,7 @@
               </a:defRPr>
             </a:lvl8pPr>
             <a:lvl9pPr>
+              <a:buNone/>
               <a:defRPr sz="2100">
                 <a:solidFill>
                   <a:srgbClr val="176B87"/>
@@ -35091,6 +35957,7 @@
           </a:lstStyle>
           <a:p xmlns:a="http://schemas.openxmlformats.org/drawingml/2006/main">
             <a:pPr>
+              <a:buNone/>
               <a:defRPr sz="2100">
                 <a:solidFill>
                   <a:srgbClr val="176B87"/>
@@ -35119,7 +35986,7 @@
           <p:cNvPr id="5" name="Chart">
             <a:extLst xmlns:a="http://schemas.openxmlformats.org/drawingml/2006/main">
               <a:ext uri="{FF2B5EF4-FFF2-40B4-BE49-F238E27FC236}">
-                <a16:creationId xmlns:a16="http://schemas.microsoft.com/office/drawing/2014/main" id="{CE14D2C5-586D-4DA5-9699-864BE6074FBF}"/>
+                <a16:creationId xmlns:a16="http://schemas.microsoft.com/office/drawing/2014/main" id="{43539548-A14C-47A0-93A0-30C726931E8E}"/>
               </a:ext>
             </a:extLst>
           </p:cNvPr>
@@ -35132,7 +35999,7 @@
         </p:xfrm>
         <a:graphic xmlns:a="http://schemas.openxmlformats.org/drawingml/2006/main">
           <a:graphicData uri="http://schemas.openxmlformats.org/drawingml/2006/chart">
-            <c:chart xmlns:r="http://schemas.openxmlformats.org/officeDocument/2006/relationships" xmlns:c="http://schemas.openxmlformats.org/drawingml/2006/chart" r:id="Rfdf3c092e4c24262"/>
+            <c:chart xmlns:r="http://schemas.openxmlformats.org/officeDocument/2006/relationships" xmlns:c="http://schemas.openxmlformats.org/drawingml/2006/chart" r:id="Re9764e43ecb94f71"/>
           </a:graphicData>
         </a:graphic>
       </p:graphicFrame>
@@ -35177,6 +36044,7 @@
               </a:defRPr>
             </a:defPPr>
             <a:lvl1pPr>
+              <a:buNone/>
               <a:defRPr sz="2100">
                 <a:solidFill>
                   <a:srgbClr val="176B87"/>
@@ -35187,6 +36055,7 @@
               </a:defRPr>
             </a:lvl1pPr>
             <a:lvl2pPr>
+              <a:buNone/>
               <a:defRPr sz="2100">
                 <a:solidFill>
                   <a:srgbClr val="176B87"/>
@@ -35197,6 +36066,7 @@
               </a:defRPr>
             </a:lvl2pPr>
             <a:lvl3pPr>
+              <a:buNone/>
               <a:defRPr sz="2100">
                 <a:solidFill>
                   <a:srgbClr val="176B87"/>
@@ -35207,6 +36077,7 @@
               </a:defRPr>
             </a:lvl3pPr>
             <a:lvl4pPr>
+              <a:buNone/>
               <a:defRPr sz="2100">
                 <a:solidFill>
                   <a:srgbClr val="176B87"/>
@@ -35217,6 +36088,7 @@
               </a:defRPr>
             </a:lvl4pPr>
             <a:lvl5pPr>
+              <a:buNone/>
               <a:defRPr sz="2100">
                 <a:solidFill>
                   <a:srgbClr val="176B87"/>
@@ -35227,6 +36099,7 @@
               </a:defRPr>
             </a:lvl5pPr>
             <a:lvl6pPr>
+              <a:buNone/>
               <a:defRPr sz="2100">
                 <a:solidFill>
                   <a:srgbClr val="176B87"/>
@@ -35237,6 +36110,7 @@
               </a:defRPr>
             </a:lvl6pPr>
             <a:lvl7pPr>
+              <a:buNone/>
               <a:defRPr sz="2100">
                 <a:solidFill>
                   <a:srgbClr val="176B87"/>
@@ -35247,6 +36121,7 @@
               </a:defRPr>
             </a:lvl7pPr>
             <a:lvl8pPr>
+              <a:buNone/>
               <a:defRPr sz="2100">
                 <a:solidFill>
                   <a:srgbClr val="176B87"/>
@@ -35257,6 +36132,7 @@
               </a:defRPr>
             </a:lvl8pPr>
             <a:lvl9pPr>
+              <a:buNone/>
               <a:defRPr sz="2100">
                 <a:solidFill>
                   <a:srgbClr val="176B87"/>
@@ -35269,6 +36145,7 @@
           </a:lstStyle>
           <a:p xmlns:a="http://schemas.openxmlformats.org/drawingml/2006/main">
             <a:pPr>
+              <a:buNone/>
               <a:defRPr sz="2100">
                 <a:solidFill>
                   <a:srgbClr val="176B87"/>
@@ -35297,7 +36174,7 @@
           <p:cNvPr id="7" name="Chart">
             <a:extLst xmlns:a="http://schemas.openxmlformats.org/drawingml/2006/main">
               <a:ext uri="{FF2B5EF4-FFF2-40B4-BE49-F238E27FC236}">
-                <a16:creationId xmlns:a16="http://schemas.microsoft.com/office/drawing/2014/main" id="{4D86A08E-DF9D-4ABC-A4B8-CB56C146DE0C}"/>
+                <a16:creationId xmlns:a16="http://schemas.microsoft.com/office/drawing/2014/main" id="{6BD0C3FE-0704-4AEF-85A1-E3AC98436274}"/>
               </a:ext>
             </a:extLst>
           </p:cNvPr>
@@ -35310,7 +36187,7 @@
         </p:xfrm>
         <a:graphic xmlns:a="http://schemas.openxmlformats.org/drawingml/2006/main">
           <a:graphicData uri="http://schemas.openxmlformats.org/drawingml/2006/chart">
-            <c:chart xmlns:r="http://schemas.openxmlformats.org/officeDocument/2006/relationships" xmlns:c="http://schemas.openxmlformats.org/drawingml/2006/chart" r:id="Rb31735f7dd424a04"/>
+            <c:chart xmlns:r="http://schemas.openxmlformats.org/officeDocument/2006/relationships" xmlns:c="http://schemas.openxmlformats.org/drawingml/2006/chart" r:id="Rb289aea552844145"/>
           </a:graphicData>
         </a:graphic>
       </p:graphicFrame>
@@ -35355,6 +36232,7 @@
               </a:defRPr>
             </a:defPPr>
             <a:lvl1pPr>
+              <a:buNone/>
               <a:defRPr sz="1950">
                 <a:solidFill>
                   <a:srgbClr val="172B3A"/>
@@ -35365,6 +36243,7 @@
               </a:defRPr>
             </a:lvl1pPr>
             <a:lvl2pPr>
+              <a:buNone/>
               <a:defRPr sz="1950">
                 <a:solidFill>
                   <a:srgbClr val="172B3A"/>
@@ -35375,6 +36254,7 @@
               </a:defRPr>
             </a:lvl2pPr>
             <a:lvl3pPr>
+              <a:buNone/>
               <a:defRPr sz="1950">
                 <a:solidFill>
                   <a:srgbClr val="172B3A"/>
@@ -35385,6 +36265,7 @@
               </a:defRPr>
             </a:lvl3pPr>
             <a:lvl4pPr>
+              <a:buNone/>
               <a:defRPr sz="1950">
                 <a:solidFill>
                   <a:srgbClr val="172B3A"/>
@@ -35395,6 +36276,7 @@
               </a:defRPr>
             </a:lvl4pPr>
             <a:lvl5pPr>
+              <a:buNone/>
               <a:defRPr sz="1950">
                 <a:solidFill>
                   <a:srgbClr val="172B3A"/>
@@ -35405,6 +36287,7 @@
               </a:defRPr>
             </a:lvl5pPr>
             <a:lvl6pPr>
+              <a:buNone/>
               <a:defRPr sz="1950">
                 <a:solidFill>
                   <a:srgbClr val="172B3A"/>
@@ -35415,6 +36298,7 @@
               </a:defRPr>
             </a:lvl6pPr>
             <a:lvl7pPr>
+              <a:buNone/>
               <a:defRPr sz="1950">
                 <a:solidFill>
                   <a:srgbClr val="172B3A"/>
@@ -35425,6 +36309,7 @@
               </a:defRPr>
             </a:lvl7pPr>
             <a:lvl8pPr>
+              <a:buNone/>
               <a:defRPr sz="1950">
                 <a:solidFill>
                   <a:srgbClr val="172B3A"/>
@@ -35435,6 +36320,7 @@
               </a:defRPr>
             </a:lvl8pPr>
             <a:lvl9pPr>
+              <a:buNone/>
               <a:defRPr sz="1950">
                 <a:solidFill>
                   <a:srgbClr val="172B3A"/>
@@ -35447,6 +36333,7 @@
           </a:lstStyle>
           <a:p xmlns:a="http://schemas.openxmlformats.org/drawingml/2006/main">
             <a:pPr>
+              <a:buNone/>
               <a:defRPr sz="1950">
                 <a:solidFill>
                   <a:srgbClr val="172B3A"/>
@@ -35470,6 +36357,7 @@
           </a:p>
           <a:p xmlns:a="http://schemas.openxmlformats.org/drawingml/2006/main">
             <a:pPr>
+              <a:buNone/>
               <a:defRPr sz="1950">
                 <a:solidFill>
                   <a:srgbClr val="172B3A"/>
@@ -35497,6 +36385,5491 @@
     <p:extLst>
       <p:ext uri="{BB962C8B-B14F-4D97-AF65-F5344CB8AC3E}">
         <p14:creationId xmlns:p14="http://schemas.microsoft.com/office/powerpoint/2010/main" val="2000202647"/>
+      </p:ext>
+    </p:extLst>
+  </p:cSld>
+</p:sld>
+</file>
+
+<file path=ppt/slides/slide23.xml><?xml version="1.0" encoding="utf-8"?>
+<p:sld xmlns:p="http://schemas.openxmlformats.org/presentationml/2006/main">
+  <p:cSld>
+    <p:bg>
+      <p:bgPr>
+        <a:solidFill xmlns:a="http://schemas.openxmlformats.org/drawingml/2006/main">
+          <a:srgbClr val="FFFFFF"/>
+        </a:solidFill>
+      </p:bgPr>
+    </p:bg>
+    <p:spTree>
+      <p:nvGrpSpPr>
+        <p:cNvPr id="1" name=""/>
+        <p:cNvGrpSpPr/>
+        <p:nvPr/>
+      </p:nvGrpSpPr>
+      <p:grpSpPr>
+        <a:xfrm xmlns:a="http://schemas.openxmlformats.org/drawingml/2006/main"/>
+      </p:grpSpPr>
+      <p:sp>
+        <p:nvSpPr>
+          <p:cNvPr id="7" name="">
+            <a:extLst xmlns:a="http://schemas.openxmlformats.org/drawingml/2006/main">
+              <a:ext uri="{FF2B5EF4-FFF2-40B4-BE49-F238E27FC236}">
+                <a16:creationId xmlns:a16="http://schemas.microsoft.com/office/drawing/2014/main" id="{9A5773DE-0D8B-4798-B9F4-D5DFA01FFB18}"/>
+              </a:ext>
+            </a:extLst>
+          </p:cNvPr>
+          <p:cNvSpPr>
+            <a:spLocks xmlns:a="http://schemas.openxmlformats.org/drawingml/2006/main" noGrp="1"/>
+          </p:cNvSpPr>
+          <p:nvPr/>
+        </p:nvSpPr>
+        <p:spPr>
+          <a:xfrm xmlns:a="http://schemas.openxmlformats.org/drawingml/2006/main">
+            <a:off x="571500" y="381000"/>
+            <a:ext cx="11049000" cy="857250"/>
+          </a:xfrm>
+          <a:prstGeom xmlns:a="http://schemas.openxmlformats.org/drawingml/2006/main" prst="rect">
+            <a:avLst/>
+          </a:prstGeom>
+          <a:noFill xmlns:a="http://schemas.openxmlformats.org/drawingml/2006/main"/>
+          <a:ln xmlns:a="http://schemas.openxmlformats.org/drawingml/2006/main" w="0">
+            <a:noFill/>
+          </a:ln>
+        </p:spPr>
+        <p:txBody>
+          <a:bodyPr xmlns:a="http://schemas.openxmlformats.org/drawingml/2006/main"/>
+          <a:lstStyle xmlns:a="http://schemas.openxmlformats.org/drawingml/2006/main">
+            <a:defPPr>
+              <a:defRPr sz="2925">
+                <a:solidFill>
+                  <a:srgbClr val="172B3A"/>
+                </a:solidFill>
+                <a:latin typeface="Arial Unicode MS"/>
+                <a:ea typeface="Arial Unicode MS"/>
+                <a:cs typeface="Arial Unicode MS"/>
+              </a:defRPr>
+            </a:defPPr>
+            <a:lvl1pPr>
+              <a:defRPr sz="2925">
+                <a:solidFill>
+                  <a:srgbClr val="172B3A"/>
+                </a:solidFill>
+                <a:latin typeface="Arial Unicode MS"/>
+                <a:ea typeface="Arial Unicode MS"/>
+                <a:cs typeface="Arial Unicode MS"/>
+              </a:defRPr>
+            </a:lvl1pPr>
+            <a:lvl2pPr>
+              <a:defRPr sz="2925">
+                <a:solidFill>
+                  <a:srgbClr val="172B3A"/>
+                </a:solidFill>
+                <a:latin typeface="Arial Unicode MS"/>
+                <a:ea typeface="Arial Unicode MS"/>
+                <a:cs typeface="Arial Unicode MS"/>
+              </a:defRPr>
+            </a:lvl2pPr>
+            <a:lvl3pPr>
+              <a:defRPr sz="2925">
+                <a:solidFill>
+                  <a:srgbClr val="172B3A"/>
+                </a:solidFill>
+                <a:latin typeface="Arial Unicode MS"/>
+                <a:ea typeface="Arial Unicode MS"/>
+                <a:cs typeface="Arial Unicode MS"/>
+              </a:defRPr>
+            </a:lvl3pPr>
+            <a:lvl4pPr>
+              <a:defRPr sz="2925">
+                <a:solidFill>
+                  <a:srgbClr val="172B3A"/>
+                </a:solidFill>
+                <a:latin typeface="Arial Unicode MS"/>
+                <a:ea typeface="Arial Unicode MS"/>
+                <a:cs typeface="Arial Unicode MS"/>
+              </a:defRPr>
+            </a:lvl4pPr>
+            <a:lvl5pPr>
+              <a:defRPr sz="2925">
+                <a:solidFill>
+                  <a:srgbClr val="172B3A"/>
+                </a:solidFill>
+                <a:latin typeface="Arial Unicode MS"/>
+                <a:ea typeface="Arial Unicode MS"/>
+                <a:cs typeface="Arial Unicode MS"/>
+              </a:defRPr>
+            </a:lvl5pPr>
+            <a:lvl6pPr>
+              <a:defRPr sz="2925">
+                <a:solidFill>
+                  <a:srgbClr val="172B3A"/>
+                </a:solidFill>
+                <a:latin typeface="Arial Unicode MS"/>
+                <a:ea typeface="Arial Unicode MS"/>
+                <a:cs typeface="Arial Unicode MS"/>
+              </a:defRPr>
+            </a:lvl6pPr>
+            <a:lvl7pPr>
+              <a:defRPr sz="2925">
+                <a:solidFill>
+                  <a:srgbClr val="172B3A"/>
+                </a:solidFill>
+                <a:latin typeface="Arial Unicode MS"/>
+                <a:ea typeface="Arial Unicode MS"/>
+                <a:cs typeface="Arial Unicode MS"/>
+              </a:defRPr>
+            </a:lvl7pPr>
+            <a:lvl8pPr>
+              <a:defRPr sz="2925">
+                <a:solidFill>
+                  <a:srgbClr val="172B3A"/>
+                </a:solidFill>
+                <a:latin typeface="Arial Unicode MS"/>
+                <a:ea typeface="Arial Unicode MS"/>
+                <a:cs typeface="Arial Unicode MS"/>
+              </a:defRPr>
+            </a:lvl8pPr>
+            <a:lvl9pPr>
+              <a:defRPr sz="2925">
+                <a:solidFill>
+                  <a:srgbClr val="172B3A"/>
+                </a:solidFill>
+                <a:latin typeface="Arial Unicode MS"/>
+                <a:ea typeface="Arial Unicode MS"/>
+                <a:cs typeface="Arial Unicode MS"/>
+              </a:defRPr>
+            </a:lvl9pPr>
+          </a:lstStyle>
+          <a:p xmlns:a="http://schemas.openxmlformats.org/drawingml/2006/main">
+            <a:pPr>
+              <a:defRPr sz="2925">
+                <a:solidFill>
+                  <a:srgbClr val="172B3A"/>
+                </a:solidFill>
+                <a:latin typeface="Arial Unicode MS"/>
+                <a:ea typeface="Arial Unicode MS"/>
+                <a:cs typeface="Arial Unicode MS"/>
+              </a:defRPr>
+            </a:pPr>
+            <a:r>
+              <a:rPr sz="2925">
+                <a:solidFill>
+                  <a:srgbClr val="172B3A"/>
+                </a:solidFill>
+                <a:latin typeface="Arial Unicode MS"/>
+                <a:ea typeface="Arial Unicode MS"/>
+                <a:cs typeface="Arial Unicode MS"/>
+              </a:rPr>
+              <a:t>04 / 组员新增的评估与不确定性分析</a:t>
+            </a:r>
+          </a:p>
+        </p:txBody>
+      </p:sp>
+      <p:sp>
+        <p:nvSpPr>
+          <p:cNvPr id="2" name="">
+            <a:extLst xmlns:a="http://schemas.openxmlformats.org/drawingml/2006/main">
+              <a:ext uri="{FF2B5EF4-FFF2-40B4-BE49-F238E27FC236}">
+                <a16:creationId xmlns:a16="http://schemas.microsoft.com/office/drawing/2014/main" id="{E8FFD56D-947C-4A78-8038-221FDA1CD181}"/>
+              </a:ext>
+            </a:extLst>
+          </p:cNvPr>
+          <p:cNvSpPr>
+            <a:spLocks xmlns:a="http://schemas.openxmlformats.org/drawingml/2006/main" noGrp="1"/>
+          </p:cNvSpPr>
+          <p:nvPr/>
+        </p:nvSpPr>
+        <p:spPr>
+          <a:xfrm xmlns:a="http://schemas.openxmlformats.org/drawingml/2006/main">
+            <a:off x="571500" y="6334125"/>
+            <a:ext cx="10477500" cy="285750"/>
+          </a:xfrm>
+          <a:prstGeom xmlns:a="http://schemas.openxmlformats.org/drawingml/2006/main" prst="rect">
+            <a:avLst/>
+          </a:prstGeom>
+          <a:noFill xmlns:a="http://schemas.openxmlformats.org/drawingml/2006/main"/>
+          <a:ln xmlns:a="http://schemas.openxmlformats.org/drawingml/2006/main" w="0">
+            <a:noFill/>
+          </a:ln>
+        </p:spPr>
+        <p:txBody>
+          <a:bodyPr xmlns:a="http://schemas.openxmlformats.org/drawingml/2006/main"/>
+          <a:lstStyle xmlns:a="http://schemas.openxmlformats.org/drawingml/2006/main">
+            <a:defPPr>
+              <a:defRPr sz="1200">
+                <a:solidFill>
+                  <a:srgbClr val="687985"/>
+                </a:solidFill>
+                <a:latin typeface="Arial Unicode MS"/>
+                <a:ea typeface="Arial Unicode MS"/>
+                <a:cs typeface="Arial Unicode MS"/>
+              </a:defRPr>
+            </a:defPPr>
+            <a:lvl1pPr>
+              <a:defRPr sz="1200">
+                <a:solidFill>
+                  <a:srgbClr val="687985"/>
+                </a:solidFill>
+                <a:latin typeface="Arial Unicode MS"/>
+                <a:ea typeface="Arial Unicode MS"/>
+                <a:cs typeface="Arial Unicode MS"/>
+              </a:defRPr>
+            </a:lvl1pPr>
+            <a:lvl2pPr>
+              <a:defRPr sz="1200">
+                <a:solidFill>
+                  <a:srgbClr val="687985"/>
+                </a:solidFill>
+                <a:latin typeface="Arial Unicode MS"/>
+                <a:ea typeface="Arial Unicode MS"/>
+                <a:cs typeface="Arial Unicode MS"/>
+              </a:defRPr>
+            </a:lvl2pPr>
+            <a:lvl3pPr>
+              <a:defRPr sz="1200">
+                <a:solidFill>
+                  <a:srgbClr val="687985"/>
+                </a:solidFill>
+                <a:latin typeface="Arial Unicode MS"/>
+                <a:ea typeface="Arial Unicode MS"/>
+                <a:cs typeface="Arial Unicode MS"/>
+              </a:defRPr>
+            </a:lvl3pPr>
+            <a:lvl4pPr>
+              <a:defRPr sz="1200">
+                <a:solidFill>
+                  <a:srgbClr val="687985"/>
+                </a:solidFill>
+                <a:latin typeface="Arial Unicode MS"/>
+                <a:ea typeface="Arial Unicode MS"/>
+                <a:cs typeface="Arial Unicode MS"/>
+              </a:defRPr>
+            </a:lvl4pPr>
+            <a:lvl5pPr>
+              <a:defRPr sz="1200">
+                <a:solidFill>
+                  <a:srgbClr val="687985"/>
+                </a:solidFill>
+                <a:latin typeface="Arial Unicode MS"/>
+                <a:ea typeface="Arial Unicode MS"/>
+                <a:cs typeface="Arial Unicode MS"/>
+              </a:defRPr>
+            </a:lvl5pPr>
+            <a:lvl6pPr>
+              <a:defRPr sz="1200">
+                <a:solidFill>
+                  <a:srgbClr val="687985"/>
+                </a:solidFill>
+                <a:latin typeface="Arial Unicode MS"/>
+                <a:ea typeface="Arial Unicode MS"/>
+                <a:cs typeface="Arial Unicode MS"/>
+              </a:defRPr>
+            </a:lvl6pPr>
+            <a:lvl7pPr>
+              <a:defRPr sz="1200">
+                <a:solidFill>
+                  <a:srgbClr val="687985"/>
+                </a:solidFill>
+                <a:latin typeface="Arial Unicode MS"/>
+                <a:ea typeface="Arial Unicode MS"/>
+                <a:cs typeface="Arial Unicode MS"/>
+              </a:defRPr>
+            </a:lvl7pPr>
+            <a:lvl8pPr>
+              <a:defRPr sz="1200">
+                <a:solidFill>
+                  <a:srgbClr val="687985"/>
+                </a:solidFill>
+                <a:latin typeface="Arial Unicode MS"/>
+                <a:ea typeface="Arial Unicode MS"/>
+                <a:cs typeface="Arial Unicode MS"/>
+              </a:defRPr>
+            </a:lvl8pPr>
+            <a:lvl9pPr>
+              <a:defRPr sz="1200">
+                <a:solidFill>
+                  <a:srgbClr val="687985"/>
+                </a:solidFill>
+                <a:latin typeface="Arial Unicode MS"/>
+                <a:ea typeface="Arial Unicode MS"/>
+                <a:cs typeface="Arial Unicode MS"/>
+              </a:defRPr>
+            </a:lvl9pPr>
+          </a:lstStyle>
+          <a:p xmlns:a="http://schemas.openxmlformats.org/drawingml/2006/main">
+            <a:pPr>
+              <a:defRPr sz="1200">
+                <a:solidFill>
+                  <a:srgbClr val="687985"/>
+                </a:solidFill>
+                <a:latin typeface="Arial Unicode MS"/>
+                <a:ea typeface="Arial Unicode MS"/>
+                <a:cs typeface="Arial Unicode MS"/>
+              </a:defRPr>
+            </a:pPr>
+            <a:r>
+              <a:rPr sz="1200">
+                <a:solidFill>
+                  <a:srgbClr val="687985"/>
+                </a:solidFill>
+                <a:latin typeface="Arial Unicode MS"/>
+                <a:ea typeface="Arial Unicode MS"/>
+                <a:cs typeface="Arial Unicode MS"/>
+              </a:rPr>
+              <a:t>工作过程记录  |  杨晓真 25121619  |  2026.10.28</a:t>
+            </a:r>
+          </a:p>
+        </p:txBody>
+      </p:sp>
+      <p:sp>
+        <p:nvSpPr>
+          <p:cNvPr id="3" name="">
+            <a:extLst xmlns:a="http://schemas.openxmlformats.org/drawingml/2006/main">
+              <a:ext uri="{FF2B5EF4-FFF2-40B4-BE49-F238E27FC236}">
+                <a16:creationId xmlns:a16="http://schemas.microsoft.com/office/drawing/2014/main" id="{C0D15731-1CC4-456E-AA80-851E136E287F}"/>
+              </a:ext>
+            </a:extLst>
+          </p:cNvPr>
+          <p:cNvSpPr>
+            <a:spLocks xmlns:a="http://schemas.openxmlformats.org/drawingml/2006/main" noGrp="1"/>
+          </p:cNvSpPr>
+          <p:nvPr/>
+        </p:nvSpPr>
+        <p:spPr>
+          <a:xfrm xmlns:a="http://schemas.openxmlformats.org/drawingml/2006/main">
+            <a:off x="11144250" y="6334125"/>
+            <a:ext cx="714375" cy="285750"/>
+          </a:xfrm>
+          <a:prstGeom xmlns:a="http://schemas.openxmlformats.org/drawingml/2006/main" prst="rect">
+            <a:avLst/>
+          </a:prstGeom>
+          <a:noFill xmlns:a="http://schemas.openxmlformats.org/drawingml/2006/main"/>
+          <a:ln xmlns:a="http://schemas.openxmlformats.org/drawingml/2006/main" w="0">
+            <a:noFill/>
+          </a:ln>
+        </p:spPr>
+        <p:txBody>
+          <a:bodyPr xmlns:a="http://schemas.openxmlformats.org/drawingml/2006/main"/>
+          <a:lstStyle xmlns:a="http://schemas.openxmlformats.org/drawingml/2006/main">
+            <a:defPPr>
+              <a:defRPr sz="1200">
+                <a:solidFill>
+                  <a:srgbClr val="172B3A"/>
+                </a:solidFill>
+                <a:latin typeface="Arial Unicode MS"/>
+                <a:ea typeface="Arial Unicode MS"/>
+                <a:cs typeface="Arial Unicode MS"/>
+              </a:defRPr>
+            </a:defPPr>
+            <a:lvl1pPr>
+              <a:defRPr sz="1200">
+                <a:solidFill>
+                  <a:srgbClr val="172B3A"/>
+                </a:solidFill>
+                <a:latin typeface="Arial Unicode MS"/>
+                <a:ea typeface="Arial Unicode MS"/>
+                <a:cs typeface="Arial Unicode MS"/>
+              </a:defRPr>
+            </a:lvl1pPr>
+            <a:lvl2pPr>
+              <a:defRPr sz="1200">
+                <a:solidFill>
+                  <a:srgbClr val="172B3A"/>
+                </a:solidFill>
+                <a:latin typeface="Arial Unicode MS"/>
+                <a:ea typeface="Arial Unicode MS"/>
+                <a:cs typeface="Arial Unicode MS"/>
+              </a:defRPr>
+            </a:lvl2pPr>
+            <a:lvl3pPr>
+              <a:defRPr sz="1200">
+                <a:solidFill>
+                  <a:srgbClr val="172B3A"/>
+                </a:solidFill>
+                <a:latin typeface="Arial Unicode MS"/>
+                <a:ea typeface="Arial Unicode MS"/>
+                <a:cs typeface="Arial Unicode MS"/>
+              </a:defRPr>
+            </a:lvl3pPr>
+            <a:lvl4pPr>
+              <a:defRPr sz="1200">
+                <a:solidFill>
+                  <a:srgbClr val="172B3A"/>
+                </a:solidFill>
+                <a:latin typeface="Arial Unicode MS"/>
+                <a:ea typeface="Arial Unicode MS"/>
+                <a:cs typeface="Arial Unicode MS"/>
+              </a:defRPr>
+            </a:lvl4pPr>
+            <a:lvl5pPr>
+              <a:defRPr sz="1200">
+                <a:solidFill>
+                  <a:srgbClr val="172B3A"/>
+                </a:solidFill>
+                <a:latin typeface="Arial Unicode MS"/>
+                <a:ea typeface="Arial Unicode MS"/>
+                <a:cs typeface="Arial Unicode MS"/>
+              </a:defRPr>
+            </a:lvl5pPr>
+            <a:lvl6pPr>
+              <a:defRPr sz="1200">
+                <a:solidFill>
+                  <a:srgbClr val="172B3A"/>
+                </a:solidFill>
+                <a:latin typeface="Arial Unicode MS"/>
+                <a:ea typeface="Arial Unicode MS"/>
+                <a:cs typeface="Arial Unicode MS"/>
+              </a:defRPr>
+            </a:lvl6pPr>
+            <a:lvl7pPr>
+              <a:defRPr sz="1200">
+                <a:solidFill>
+                  <a:srgbClr val="172B3A"/>
+                </a:solidFill>
+                <a:latin typeface="Arial Unicode MS"/>
+                <a:ea typeface="Arial Unicode MS"/>
+                <a:cs typeface="Arial Unicode MS"/>
+              </a:defRPr>
+            </a:lvl7pPr>
+            <a:lvl8pPr>
+              <a:defRPr sz="1200">
+                <a:solidFill>
+                  <a:srgbClr val="172B3A"/>
+                </a:solidFill>
+                <a:latin typeface="Arial Unicode MS"/>
+                <a:ea typeface="Arial Unicode MS"/>
+                <a:cs typeface="Arial Unicode MS"/>
+              </a:defRPr>
+            </a:lvl8pPr>
+            <a:lvl9pPr>
+              <a:defRPr sz="1200">
+                <a:solidFill>
+                  <a:srgbClr val="172B3A"/>
+                </a:solidFill>
+                <a:latin typeface="Arial Unicode MS"/>
+                <a:ea typeface="Arial Unicode MS"/>
+                <a:cs typeface="Arial Unicode MS"/>
+              </a:defRPr>
+            </a:lvl9pPr>
+          </a:lstStyle>
+          <a:p xmlns:a="http://schemas.openxmlformats.org/drawingml/2006/main">
+            <a:pPr>
+              <a:defRPr sz="1200">
+                <a:solidFill>
+                  <a:srgbClr val="172B3A"/>
+                </a:solidFill>
+                <a:latin typeface="Arial Unicode MS"/>
+                <a:ea typeface="Arial Unicode MS"/>
+                <a:cs typeface="Arial Unicode MS"/>
+              </a:defRPr>
+            </a:pPr>
+            <a:r>
+              <a:rPr sz="1200">
+                <a:solidFill>
+                  <a:srgbClr val="172B3A"/>
+                </a:solidFill>
+                <a:latin typeface="Arial Unicode MS"/>
+                <a:ea typeface="Arial Unicode MS"/>
+                <a:cs typeface="Arial Unicode MS"/>
+              </a:rPr>
+              <a:t>23</a:t>
+            </a:r>
+          </a:p>
+        </p:txBody>
+      </p:sp>
+      <p:sp>
+        <p:nvSpPr>
+          <p:cNvPr id="4" name="">
+            <a:extLst xmlns:a="http://schemas.openxmlformats.org/drawingml/2006/main">
+              <a:ext uri="{FF2B5EF4-FFF2-40B4-BE49-F238E27FC236}">
+                <a16:creationId xmlns:a16="http://schemas.microsoft.com/office/drawing/2014/main" id="{68B82484-8E6E-441A-8565-9F01C3AD735D}"/>
+              </a:ext>
+            </a:extLst>
+          </p:cNvPr>
+          <p:cNvSpPr>
+            <a:spLocks xmlns:a="http://schemas.openxmlformats.org/drawingml/2006/main" noGrp="1"/>
+          </p:cNvSpPr>
+          <p:nvPr/>
+        </p:nvSpPr>
+        <p:spPr>
+          <a:xfrm xmlns:a="http://schemas.openxmlformats.org/drawingml/2006/main">
+            <a:off x="619125" y="1476375"/>
+            <a:ext cx="10763250" cy="952500"/>
+          </a:xfrm>
+          <a:prstGeom xmlns:a="http://schemas.openxmlformats.org/drawingml/2006/main" prst="rect">
+            <a:avLst/>
+          </a:prstGeom>
+          <a:noFill xmlns:a="http://schemas.openxmlformats.org/drawingml/2006/main"/>
+          <a:ln xmlns:a="http://schemas.openxmlformats.org/drawingml/2006/main" w="0">
+            <a:noFill/>
+          </a:ln>
+        </p:spPr>
+        <p:txBody>
+          <a:bodyPr xmlns:a="http://schemas.openxmlformats.org/drawingml/2006/main"/>
+          <a:lstStyle xmlns:a="http://schemas.openxmlformats.org/drawingml/2006/main">
+            <a:defPPr>
+              <a:defRPr sz="2175">
+                <a:solidFill>
+                  <a:srgbClr val="176B87"/>
+                </a:solidFill>
+                <a:latin typeface="Arial Unicode MS"/>
+                <a:ea typeface="Arial Unicode MS"/>
+                <a:cs typeface="Arial Unicode MS"/>
+              </a:defRPr>
+            </a:defPPr>
+            <a:lvl1pPr>
+              <a:defRPr sz="2175">
+                <a:solidFill>
+                  <a:srgbClr val="176B87"/>
+                </a:solidFill>
+                <a:latin typeface="Arial Unicode MS"/>
+                <a:ea typeface="Arial Unicode MS"/>
+                <a:cs typeface="Arial Unicode MS"/>
+              </a:defRPr>
+            </a:lvl1pPr>
+            <a:lvl2pPr>
+              <a:defRPr sz="2175">
+                <a:solidFill>
+                  <a:srgbClr val="176B87"/>
+                </a:solidFill>
+                <a:latin typeface="Arial Unicode MS"/>
+                <a:ea typeface="Arial Unicode MS"/>
+                <a:cs typeface="Arial Unicode MS"/>
+              </a:defRPr>
+            </a:lvl2pPr>
+            <a:lvl3pPr>
+              <a:defRPr sz="2175">
+                <a:solidFill>
+                  <a:srgbClr val="176B87"/>
+                </a:solidFill>
+                <a:latin typeface="Arial Unicode MS"/>
+                <a:ea typeface="Arial Unicode MS"/>
+                <a:cs typeface="Arial Unicode MS"/>
+              </a:defRPr>
+            </a:lvl3pPr>
+            <a:lvl4pPr>
+              <a:defRPr sz="2175">
+                <a:solidFill>
+                  <a:srgbClr val="176B87"/>
+                </a:solidFill>
+                <a:latin typeface="Arial Unicode MS"/>
+                <a:ea typeface="Arial Unicode MS"/>
+                <a:cs typeface="Arial Unicode MS"/>
+              </a:defRPr>
+            </a:lvl4pPr>
+            <a:lvl5pPr>
+              <a:defRPr sz="2175">
+                <a:solidFill>
+                  <a:srgbClr val="176B87"/>
+                </a:solidFill>
+                <a:latin typeface="Arial Unicode MS"/>
+                <a:ea typeface="Arial Unicode MS"/>
+                <a:cs typeface="Arial Unicode MS"/>
+              </a:defRPr>
+            </a:lvl5pPr>
+            <a:lvl6pPr>
+              <a:defRPr sz="2175">
+                <a:solidFill>
+                  <a:srgbClr val="176B87"/>
+                </a:solidFill>
+                <a:latin typeface="Arial Unicode MS"/>
+                <a:ea typeface="Arial Unicode MS"/>
+                <a:cs typeface="Arial Unicode MS"/>
+              </a:defRPr>
+            </a:lvl6pPr>
+            <a:lvl7pPr>
+              <a:defRPr sz="2175">
+                <a:solidFill>
+                  <a:srgbClr val="176B87"/>
+                </a:solidFill>
+                <a:latin typeface="Arial Unicode MS"/>
+                <a:ea typeface="Arial Unicode MS"/>
+                <a:cs typeface="Arial Unicode MS"/>
+              </a:defRPr>
+            </a:lvl7pPr>
+            <a:lvl8pPr>
+              <a:defRPr sz="2175">
+                <a:solidFill>
+                  <a:srgbClr val="176B87"/>
+                </a:solidFill>
+                <a:latin typeface="Arial Unicode MS"/>
+                <a:ea typeface="Arial Unicode MS"/>
+                <a:cs typeface="Arial Unicode MS"/>
+              </a:defRPr>
+            </a:lvl8pPr>
+            <a:lvl9pPr>
+              <a:defRPr sz="2175">
+                <a:solidFill>
+                  <a:srgbClr val="176B87"/>
+                </a:solidFill>
+                <a:latin typeface="Arial Unicode MS"/>
+                <a:ea typeface="Arial Unicode MS"/>
+                <a:cs typeface="Arial Unicode MS"/>
+              </a:defRPr>
+            </a:lvl9pPr>
+          </a:lstStyle>
+          <a:p xmlns:a="http://schemas.openxmlformats.org/drawingml/2006/main">
+            <a:pPr>
+              <a:defRPr sz="2175">
+                <a:solidFill>
+                  <a:srgbClr val="176B87"/>
+                </a:solidFill>
+                <a:latin typeface="Arial Unicode MS"/>
+                <a:ea typeface="Arial Unicode MS"/>
+                <a:cs typeface="Arial Unicode MS"/>
+              </a:defRPr>
+            </a:pPr>
+            <a:r>
+              <a:rPr sz="2175">
+                <a:solidFill>
+                  <a:srgbClr val="176B87"/>
+                </a:solidFill>
+                <a:latin typeface="Arial Unicode MS"/>
+                <a:ea typeface="Arial Unicode MS"/>
+                <a:cs typeface="Arial Unicode MS"/>
+              </a:rPr>
+              <a:t>Buln1120提交：误差分析、寿命外推敏感性与滚动预警</a:t>
+            </a:r>
+          </a:p>
+          <a:p xmlns:a="http://schemas.openxmlformats.org/drawingml/2006/main">
+            <a:pPr>
+              <a:defRPr sz="2175">
+                <a:solidFill>
+                  <a:srgbClr val="176B87"/>
+                </a:solidFill>
+                <a:latin typeface="Arial Unicode MS"/>
+                <a:ea typeface="Arial Unicode MS"/>
+                <a:cs typeface="Arial Unicode MS"/>
+              </a:defRPr>
+            </a:pPr>
+            <a:r>
+              <a:rPr sz="2175">
+                <a:solidFill>
+                  <a:srgbClr val="176B87"/>
+                </a:solidFill>
+                <a:latin typeface="Arial Unicode MS"/>
+                <a:ea typeface="Arial Unicode MS"/>
+                <a:cs typeface="Arial Unicode MS"/>
+              </a:rPr>
+              <a:t>Git版本：8b282e4、ddec284</a:t>
+            </a:r>
+          </a:p>
+        </p:txBody>
+      </p:sp>
+      <p:graphicFrame>
+        <p:nvGraphicFramePr>
+          <p:cNvPr id="5" name="">
+            <a:extLst xmlns:a="http://schemas.openxmlformats.org/drawingml/2006/main">
+              <a:ext uri="{FF2B5EF4-FFF2-40B4-BE49-F238E27FC236}">
+                <a16:creationId xmlns:a16="http://schemas.microsoft.com/office/drawing/2014/main" id="{1E580735-7726-4211-9861-453128303609}"/>
+              </a:ext>
+            </a:extLst>
+          </p:cNvPr>
+          <p:cNvGraphicFramePr/>
+          <p:nvPr/>
+        </p:nvGraphicFramePr>
+        <p:xfrm>
+          <a:off xmlns:a="http://schemas.openxmlformats.org/drawingml/2006/main" x="619125" y="2762250"/>
+          <a:ext xmlns:a="http://schemas.openxmlformats.org/drawingml/2006/main" cx="10763250" cy="2571750"/>
+        </p:xfrm>
+        <a:graphic xmlns:a="http://schemas.openxmlformats.org/drawingml/2006/main">
+          <a:graphicData uri="http://schemas.openxmlformats.org/drawingml/2006/table">
+            <a:tbl>
+              <a:tblPr/>
+              <a:tblGrid>
+                <a:gridCol w="2762250"/>
+                <a:gridCol w="2667000"/>
+                <a:gridCol w="2667000"/>
+                <a:gridCol w="2667000"/>
+              </a:tblGrid>
+              <a:tr h="514350">
+                <a:tc>
+                  <a:txBody>
+                    <a:bodyPr/>
+                    <a:lstStyle/>
+                    <a:p>
+                      <a:r>
+                        <a:rPr sz="1875">
+                          <a:solidFill>
+                            <a:srgbClr val="FFFFFF"/>
+                          </a:solidFill>
+                          <a:latin typeface="Arial Unicode MS"/>
+                          <a:ea typeface="Arial Unicode MS"/>
+                          <a:cs typeface="Arial Unicode MS"/>
+                        </a:rPr>
+                        <a:t>电池</a:t>
+                      </a:r>
+                    </a:p>
+                  </a:txBody>
+                  <a:tcPr marL="91440" marR="91440" marT="45720" marB="45720">
+                    <a:lnL w="9525">
+                      <a:solidFill>
+                        <a:srgbClr val="D6E0E5"/>
+                      </a:solidFill>
+                    </a:lnL>
+                    <a:lnR w="9525">
+                      <a:solidFill>
+                        <a:srgbClr val="D6E0E5"/>
+                      </a:solidFill>
+                    </a:lnR>
+                    <a:lnT w="9525">
+                      <a:solidFill>
+                        <a:srgbClr val="D6E0E5"/>
+                      </a:solidFill>
+                    </a:lnT>
+                    <a:lnB w="9525">
+                      <a:solidFill>
+                        <a:srgbClr val="D6E0E5"/>
+                      </a:solidFill>
+                    </a:lnB>
+                    <a:solidFill>
+                      <a:srgbClr val="176B87"/>
+                    </a:solidFill>
+                  </a:tcPr>
+                </a:tc>
+                <a:tc>
+                  <a:txBody>
+                    <a:bodyPr/>
+                    <a:lstStyle/>
+                    <a:p>
+                      <a:r>
+                        <a:rPr sz="1875">
+                          <a:solidFill>
+                            <a:srgbClr val="FFFFFF"/>
+                          </a:solidFill>
+                          <a:latin typeface="Arial Unicode MS"/>
+                          <a:ea typeface="Arial Unicode MS"/>
+                          <a:cs typeface="Arial Unicode MS"/>
+                        </a:rPr>
+                        <a:t>最近20次趋势检出</a:t>
+                      </a:r>
+                    </a:p>
+                  </a:txBody>
+                  <a:tcPr marL="91440" marR="91440" marT="45720" marB="45720">
+                    <a:lnR w="9525">
+                      <a:solidFill>
+                        <a:srgbClr val="D6E0E5"/>
+                      </a:solidFill>
+                    </a:lnR>
+                    <a:lnT w="9525">
+                      <a:solidFill>
+                        <a:srgbClr val="D6E0E5"/>
+                      </a:solidFill>
+                    </a:lnT>
+                    <a:lnB w="9525">
+                      <a:solidFill>
+                        <a:srgbClr val="D6E0E5"/>
+                      </a:solidFill>
+                    </a:lnB>
+                    <a:solidFill>
+                      <a:srgbClr val="176B87"/>
+                    </a:solidFill>
+                  </a:tcPr>
+                </a:tc>
+                <a:tc>
+                  <a:txBody>
+                    <a:bodyPr/>
+                    <a:lstStyle/>
+                    <a:p>
+                      <a:r>
+                        <a:rPr sz="1875">
+                          <a:solidFill>
+                            <a:srgbClr val="FFFFFF"/>
+                          </a:solidFill>
+                          <a:latin typeface="Arial Unicode MS"/>
+                          <a:ea typeface="Arial Unicode MS"/>
+                          <a:cs typeface="Arial Unicode MS"/>
+                        </a:rPr>
+                        <a:t>有效提前量</a:t>
+                      </a:r>
+                    </a:p>
+                  </a:txBody>
+                  <a:tcPr marL="91440" marR="91440" marT="45720" marB="45720">
+                    <a:lnR w="9525">
+                      <a:solidFill>
+                        <a:srgbClr val="D6E0E5"/>
+                      </a:solidFill>
+                    </a:lnR>
+                    <a:lnT w="9525">
+                      <a:solidFill>
+                        <a:srgbClr val="D6E0E5"/>
+                      </a:solidFill>
+                    </a:lnT>
+                    <a:lnB w="9525">
+                      <a:solidFill>
+                        <a:srgbClr val="D6E0E5"/>
+                      </a:solidFill>
+                    </a:lnB>
+                    <a:solidFill>
+                      <a:srgbClr val="176B87"/>
+                    </a:solidFill>
+                  </a:tcPr>
+                </a:tc>
+                <a:tc>
+                  <a:txBody>
+                    <a:bodyPr/>
+                    <a:lstStyle/>
+                    <a:p>
+                      <a:r>
+                        <a:rPr sz="1875">
+                          <a:solidFill>
+                            <a:srgbClr val="FFFFFF"/>
+                          </a:solidFill>
+                          <a:latin typeface="Arial Unicode MS"/>
+                          <a:ea typeface="Arial Unicode MS"/>
+                          <a:cs typeface="Arial Unicode MS"/>
+                        </a:rPr>
+                        <a:t>误报起点数</a:t>
+                      </a:r>
+                    </a:p>
+                  </a:txBody>
+                  <a:tcPr marL="91440" marR="91440" marT="45720" marB="45720">
+                    <a:lnR w="9525">
+                      <a:solidFill>
+                        <a:srgbClr val="D6E0E5"/>
+                      </a:solidFill>
+                    </a:lnR>
+                    <a:lnT w="9525">
+                      <a:solidFill>
+                        <a:srgbClr val="D6E0E5"/>
+                      </a:solidFill>
+                    </a:lnT>
+                    <a:lnB w="9525">
+                      <a:solidFill>
+                        <a:srgbClr val="D6E0E5"/>
+                      </a:solidFill>
+                    </a:lnB>
+                    <a:solidFill>
+                      <a:srgbClr val="176B87"/>
+                    </a:solidFill>
+                  </a:tcPr>
+                </a:tc>
+              </a:tr>
+              <a:tr h="514350">
+                <a:tc>
+                  <a:txBody>
+                    <a:bodyPr/>
+                    <a:lstStyle/>
+                    <a:p>
+                      <a:r>
+                        <a:rPr sz="1875">
+                          <a:solidFill>
+                            <a:srgbClr val="172B3A"/>
+                          </a:solidFill>
+                          <a:latin typeface="Arial Unicode MS"/>
+                          <a:ea typeface="Arial Unicode MS"/>
+                          <a:cs typeface="Arial Unicode MS"/>
+                        </a:rPr>
+                        <a:t>B0005</a:t>
+                      </a:r>
+                    </a:p>
+                  </a:txBody>
+                  <a:tcPr marL="91440" marR="91440" marT="45720" marB="45720">
+                    <a:lnL w="9525">
+                      <a:solidFill>
+                        <a:srgbClr val="D6E0E5"/>
+                      </a:solidFill>
+                    </a:lnL>
+                    <a:lnR w="9525">
+                      <a:solidFill>
+                        <a:srgbClr val="D6E0E5"/>
+                      </a:solidFill>
+                    </a:lnR>
+                    <a:lnB w="9525">
+                      <a:solidFill>
+                        <a:srgbClr val="D6E0E5"/>
+                      </a:solidFill>
+                    </a:lnB>
+                    <a:solidFill>
+                      <a:srgbClr val="F0F5F7"/>
+                    </a:solidFill>
+                  </a:tcPr>
+                </a:tc>
+                <a:tc>
+                  <a:txBody>
+                    <a:bodyPr/>
+                    <a:lstStyle/>
+                    <a:p>
+                      <a:r>
+                        <a:rPr sz="1875">
+                          <a:solidFill>
+                            <a:srgbClr val="172B3A"/>
+                          </a:solidFill>
+                          <a:latin typeface="Arial Unicode MS"/>
+                          <a:ea typeface="Arial Unicode MS"/>
+                          <a:cs typeface="Arial Unicode MS"/>
+                        </a:rPr>
+                        <a:t>漏报</a:t>
+                      </a:r>
+                    </a:p>
+                  </a:txBody>
+                  <a:tcPr marL="91440" marR="91440" marT="45720" marB="45720">
+                    <a:lnR w="9525">
+                      <a:solidFill>
+                        <a:srgbClr val="D6E0E5"/>
+                      </a:solidFill>
+                    </a:lnR>
+                    <a:lnB w="9525">
+                      <a:solidFill>
+                        <a:srgbClr val="D6E0E5"/>
+                      </a:solidFill>
+                    </a:lnB>
+                    <a:solidFill>
+                      <a:srgbClr val="F0F5F7"/>
+                    </a:solidFill>
+                  </a:tcPr>
+                </a:tc>
+                <a:tc>
+                  <a:txBody>
+                    <a:bodyPr/>
+                    <a:lstStyle/>
+                    <a:p>
+                      <a:r>
+                        <a:rPr sz="1875">
+                          <a:solidFill>
+                            <a:srgbClr val="172B3A"/>
+                          </a:solidFill>
+                          <a:latin typeface="Arial Unicode MS"/>
+                          <a:ea typeface="Arial Unicode MS"/>
+                          <a:cs typeface="Arial Unicode MS"/>
+                        </a:rPr>
+                        <a:t>不适用</a:t>
+                      </a:r>
+                    </a:p>
+                  </a:txBody>
+                  <a:tcPr marL="91440" marR="91440" marT="45720" marB="45720">
+                    <a:lnR w="9525">
+                      <a:solidFill>
+                        <a:srgbClr val="D6E0E5"/>
+                      </a:solidFill>
+                    </a:lnR>
+                    <a:lnB w="9525">
+                      <a:solidFill>
+                        <a:srgbClr val="D6E0E5"/>
+                      </a:solidFill>
+                    </a:lnB>
+                    <a:solidFill>
+                      <a:srgbClr val="F0F5F7"/>
+                    </a:solidFill>
+                  </a:tcPr>
+                </a:tc>
+                <a:tc>
+                  <a:txBody>
+                    <a:bodyPr/>
+                    <a:lstStyle/>
+                    <a:p>
+                      <a:r>
+                        <a:rPr sz="1875">
+                          <a:solidFill>
+                            <a:srgbClr val="172B3A"/>
+                          </a:solidFill>
+                          <a:latin typeface="Arial Unicode MS"/>
+                          <a:ea typeface="Arial Unicode MS"/>
+                          <a:cs typeface="Arial Unicode MS"/>
+                        </a:rPr>
+                        <a:t>0</a:t>
+                      </a:r>
+                    </a:p>
+                  </a:txBody>
+                  <a:tcPr marL="91440" marR="91440" marT="45720" marB="45720">
+                    <a:lnR w="9525">
+                      <a:solidFill>
+                        <a:srgbClr val="D6E0E5"/>
+                      </a:solidFill>
+                    </a:lnR>
+                    <a:lnB w="9525">
+                      <a:solidFill>
+                        <a:srgbClr val="D6E0E5"/>
+                      </a:solidFill>
+                    </a:lnB>
+                    <a:solidFill>
+                      <a:srgbClr val="F0F5F7"/>
+                    </a:solidFill>
+                  </a:tcPr>
+                </a:tc>
+              </a:tr>
+              <a:tr h="514350">
+                <a:tc>
+                  <a:txBody>
+                    <a:bodyPr/>
+                    <a:lstStyle/>
+                    <a:p>
+                      <a:r>
+                        <a:rPr sz="1875">
+                          <a:solidFill>
+                            <a:srgbClr val="172B3A"/>
+                          </a:solidFill>
+                          <a:latin typeface="Arial Unicode MS"/>
+                          <a:ea typeface="Arial Unicode MS"/>
+                          <a:cs typeface="Arial Unicode MS"/>
+                        </a:rPr>
+                        <a:t>B0006</a:t>
+                      </a:r>
+                    </a:p>
+                  </a:txBody>
+                  <a:tcPr marL="91440" marR="91440" marT="45720" marB="45720">
+                    <a:lnL w="9525">
+                      <a:solidFill>
+                        <a:srgbClr val="D6E0E5"/>
+                      </a:solidFill>
+                    </a:lnL>
+                    <a:lnR w="9525">
+                      <a:solidFill>
+                        <a:srgbClr val="D6E0E5"/>
+                      </a:solidFill>
+                    </a:lnR>
+                    <a:lnB w="9525">
+                      <a:solidFill>
+                        <a:srgbClr val="D6E0E5"/>
+                      </a:solidFill>
+                    </a:lnB>
+                    <a:solidFill>
+                      <a:srgbClr val="FFFFFF"/>
+                    </a:solidFill>
+                  </a:tcPr>
+                </a:tc>
+                <a:tc>
+                  <a:txBody>
+                    <a:bodyPr/>
+                    <a:lstStyle/>
+                    <a:p>
+                      <a:r>
+                        <a:rPr sz="1875">
+                          <a:solidFill>
+                            <a:srgbClr val="172B3A"/>
+                          </a:solidFill>
+                          <a:latin typeface="Arial Unicode MS"/>
+                          <a:ea typeface="Arial Unicode MS"/>
+                          <a:cs typeface="Arial Unicode MS"/>
+                        </a:rPr>
+                        <a:t>检出</a:t>
+                      </a:r>
+                    </a:p>
+                  </a:txBody>
+                  <a:tcPr marL="91440" marR="91440" marT="45720" marB="45720">
+                    <a:lnR w="9525">
+                      <a:solidFill>
+                        <a:srgbClr val="D6E0E5"/>
+                      </a:solidFill>
+                    </a:lnR>
+                    <a:lnB w="9525">
+                      <a:solidFill>
+                        <a:srgbClr val="D6E0E5"/>
+                      </a:solidFill>
+                    </a:lnB>
+                    <a:solidFill>
+                      <a:srgbClr val="FFFFFF"/>
+                    </a:solidFill>
+                  </a:tcPr>
+                </a:tc>
+                <a:tc>
+                  <a:txBody>
+                    <a:bodyPr/>
+                    <a:lstStyle/>
+                    <a:p>
+                      <a:r>
+                        <a:rPr sz="1875">
+                          <a:solidFill>
+                            <a:srgbClr val="172B3A"/>
+                          </a:solidFill>
+                          <a:latin typeface="Arial Unicode MS"/>
+                          <a:ea typeface="Arial Unicode MS"/>
+                          <a:cs typeface="Arial Unicode MS"/>
+                        </a:rPr>
+                        <a:t>1次</a:t>
+                      </a:r>
+                    </a:p>
+                  </a:txBody>
+                  <a:tcPr marL="91440" marR="91440" marT="45720" marB="45720">
+                    <a:lnR w="9525">
+                      <a:solidFill>
+                        <a:srgbClr val="D6E0E5"/>
+                      </a:solidFill>
+                    </a:lnR>
+                    <a:lnB w="9525">
+                      <a:solidFill>
+                        <a:srgbClr val="D6E0E5"/>
+                      </a:solidFill>
+                    </a:lnB>
+                    <a:solidFill>
+                      <a:srgbClr val="FFFFFF"/>
+                    </a:solidFill>
+                  </a:tcPr>
+                </a:tc>
+                <a:tc>
+                  <a:txBody>
+                    <a:bodyPr/>
+                    <a:lstStyle/>
+                    <a:p>
+                      <a:r>
+                        <a:rPr sz="1875">
+                          <a:solidFill>
+                            <a:srgbClr val="172B3A"/>
+                          </a:solidFill>
+                          <a:latin typeface="Arial Unicode MS"/>
+                          <a:ea typeface="Arial Unicode MS"/>
+                          <a:cs typeface="Arial Unicode MS"/>
+                        </a:rPr>
+                        <a:t>0</a:t>
+                      </a:r>
+                    </a:p>
+                  </a:txBody>
+                  <a:tcPr marL="91440" marR="91440" marT="45720" marB="45720">
+                    <a:lnR w="9525">
+                      <a:solidFill>
+                        <a:srgbClr val="D6E0E5"/>
+                      </a:solidFill>
+                    </a:lnR>
+                    <a:lnB w="9525">
+                      <a:solidFill>
+                        <a:srgbClr val="D6E0E5"/>
+                      </a:solidFill>
+                    </a:lnB>
+                    <a:solidFill>
+                      <a:srgbClr val="FFFFFF"/>
+                    </a:solidFill>
+                  </a:tcPr>
+                </a:tc>
+              </a:tr>
+              <a:tr h="514350">
+                <a:tc>
+                  <a:txBody>
+                    <a:bodyPr/>
+                    <a:lstStyle/>
+                    <a:p>
+                      <a:r>
+                        <a:rPr sz="1875">
+                          <a:solidFill>
+                            <a:srgbClr val="172B3A"/>
+                          </a:solidFill>
+                          <a:latin typeface="Arial Unicode MS"/>
+                          <a:ea typeface="Arial Unicode MS"/>
+                          <a:cs typeface="Arial Unicode MS"/>
+                        </a:rPr>
+                        <a:t>B0007</a:t>
+                      </a:r>
+                    </a:p>
+                  </a:txBody>
+                  <a:tcPr marL="91440" marR="91440" marT="45720" marB="45720">
+                    <a:lnL w="9525">
+                      <a:solidFill>
+                        <a:srgbClr val="D6E0E5"/>
+                      </a:solidFill>
+                    </a:lnL>
+                    <a:lnR w="9525">
+                      <a:solidFill>
+                        <a:srgbClr val="D6E0E5"/>
+                      </a:solidFill>
+                    </a:lnR>
+                    <a:lnB w="9525">
+                      <a:solidFill>
+                        <a:srgbClr val="D6E0E5"/>
+                      </a:solidFill>
+                    </a:lnB>
+                    <a:solidFill>
+                      <a:srgbClr val="F0F5F7"/>
+                    </a:solidFill>
+                  </a:tcPr>
+                </a:tc>
+                <a:tc>
+                  <a:txBody>
+                    <a:bodyPr/>
+                    <a:lstStyle/>
+                    <a:p>
+                      <a:r>
+                        <a:rPr sz="1875">
+                          <a:solidFill>
+                            <a:srgbClr val="172B3A"/>
+                          </a:solidFill>
+                          <a:latin typeface="Arial Unicode MS"/>
+                          <a:ea typeface="Arial Unicode MS"/>
+                          <a:cs typeface="Arial Unicode MS"/>
+                        </a:rPr>
+                        <a:t>检出</a:t>
+                      </a:r>
+                    </a:p>
+                  </a:txBody>
+                  <a:tcPr marL="91440" marR="91440" marT="45720" marB="45720">
+                    <a:lnR w="9525">
+                      <a:solidFill>
+                        <a:srgbClr val="D6E0E5"/>
+                      </a:solidFill>
+                    </a:lnR>
+                    <a:lnB w="9525">
+                      <a:solidFill>
+                        <a:srgbClr val="D6E0E5"/>
+                      </a:solidFill>
+                    </a:lnB>
+                    <a:solidFill>
+                      <a:srgbClr val="F0F5F7"/>
+                    </a:solidFill>
+                  </a:tcPr>
+                </a:tc>
+                <a:tc>
+                  <a:txBody>
+                    <a:bodyPr/>
+                    <a:lstStyle/>
+                    <a:p>
+                      <a:r>
+                        <a:rPr sz="1875">
+                          <a:solidFill>
+                            <a:srgbClr val="172B3A"/>
+                          </a:solidFill>
+                          <a:latin typeface="Arial Unicode MS"/>
+                          <a:ea typeface="Arial Unicode MS"/>
+                          <a:cs typeface="Arial Unicode MS"/>
+                        </a:rPr>
+                        <a:t>5次</a:t>
+                      </a:r>
+                    </a:p>
+                  </a:txBody>
+                  <a:tcPr marL="91440" marR="91440" marT="45720" marB="45720">
+                    <a:lnR w="9525">
+                      <a:solidFill>
+                        <a:srgbClr val="D6E0E5"/>
+                      </a:solidFill>
+                    </a:lnR>
+                    <a:lnB w="9525">
+                      <a:solidFill>
+                        <a:srgbClr val="D6E0E5"/>
+                      </a:solidFill>
+                    </a:lnB>
+                    <a:solidFill>
+                      <a:srgbClr val="F0F5F7"/>
+                    </a:solidFill>
+                  </a:tcPr>
+                </a:tc>
+                <a:tc>
+                  <a:txBody>
+                    <a:bodyPr/>
+                    <a:lstStyle/>
+                    <a:p>
+                      <a:r>
+                        <a:rPr sz="1875">
+                          <a:solidFill>
+                            <a:srgbClr val="172B3A"/>
+                          </a:solidFill>
+                          <a:latin typeface="Arial Unicode MS"/>
+                          <a:ea typeface="Arial Unicode MS"/>
+                          <a:cs typeface="Arial Unicode MS"/>
+                        </a:rPr>
+                        <a:t>5</a:t>
+                      </a:r>
+                    </a:p>
+                  </a:txBody>
+                  <a:tcPr marL="91440" marR="91440" marT="45720" marB="45720">
+                    <a:lnR w="9525">
+                      <a:solidFill>
+                        <a:srgbClr val="D6E0E5"/>
+                      </a:solidFill>
+                    </a:lnR>
+                    <a:lnB w="9525">
+                      <a:solidFill>
+                        <a:srgbClr val="D6E0E5"/>
+                      </a:solidFill>
+                    </a:lnB>
+                    <a:solidFill>
+                      <a:srgbClr val="F0F5F7"/>
+                    </a:solidFill>
+                  </a:tcPr>
+                </a:tc>
+              </a:tr>
+              <a:tr h="514350">
+                <a:tc>
+                  <a:txBody>
+                    <a:bodyPr/>
+                    <a:lstStyle/>
+                    <a:p>
+                      <a:r>
+                        <a:rPr sz="1875">
+                          <a:solidFill>
+                            <a:srgbClr val="172B3A"/>
+                          </a:solidFill>
+                          <a:latin typeface="Arial Unicode MS"/>
+                          <a:ea typeface="Arial Unicode MS"/>
+                          <a:cs typeface="Arial Unicode MS"/>
+                        </a:rPr>
+                        <a:t>B0018</a:t>
+                      </a:r>
+                    </a:p>
+                  </a:txBody>
+                  <a:tcPr marL="91440" marR="91440" marT="45720" marB="45720">
+                    <a:lnL w="9525">
+                      <a:solidFill>
+                        <a:srgbClr val="D6E0E5"/>
+                      </a:solidFill>
+                    </a:lnL>
+                    <a:lnR w="9525">
+                      <a:solidFill>
+                        <a:srgbClr val="D6E0E5"/>
+                      </a:solidFill>
+                    </a:lnR>
+                    <a:lnB w="9525">
+                      <a:solidFill>
+                        <a:srgbClr val="D6E0E5"/>
+                      </a:solidFill>
+                    </a:lnB>
+                    <a:solidFill>
+                      <a:srgbClr val="FFFFFF"/>
+                    </a:solidFill>
+                  </a:tcPr>
+                </a:tc>
+                <a:tc>
+                  <a:txBody>
+                    <a:bodyPr/>
+                    <a:lstStyle/>
+                    <a:p>
+                      <a:r>
+                        <a:rPr sz="1875">
+                          <a:solidFill>
+                            <a:srgbClr val="172B3A"/>
+                          </a:solidFill>
+                          <a:latin typeface="Arial Unicode MS"/>
+                          <a:ea typeface="Arial Unicode MS"/>
+                          <a:cs typeface="Arial Unicode MS"/>
+                        </a:rPr>
+                        <a:t>检出</a:t>
+                      </a:r>
+                    </a:p>
+                  </a:txBody>
+                  <a:tcPr marL="91440" marR="91440" marT="45720" marB="45720">
+                    <a:lnR w="9525">
+                      <a:solidFill>
+                        <a:srgbClr val="D6E0E5"/>
+                      </a:solidFill>
+                    </a:lnR>
+                    <a:lnB w="9525">
+                      <a:solidFill>
+                        <a:srgbClr val="D6E0E5"/>
+                      </a:solidFill>
+                    </a:lnB>
+                    <a:solidFill>
+                      <a:srgbClr val="FFFFFF"/>
+                    </a:solidFill>
+                  </a:tcPr>
+                </a:tc>
+                <a:tc>
+                  <a:txBody>
+                    <a:bodyPr/>
+                    <a:lstStyle/>
+                    <a:p>
+                      <a:r>
+                        <a:rPr sz="1875">
+                          <a:solidFill>
+                            <a:srgbClr val="172B3A"/>
+                          </a:solidFill>
+                          <a:latin typeface="Arial Unicode MS"/>
+                          <a:ea typeface="Arial Unicode MS"/>
+                          <a:cs typeface="Arial Unicode MS"/>
+                        </a:rPr>
+                        <a:t>5次</a:t>
+                      </a:r>
+                    </a:p>
+                  </a:txBody>
+                  <a:tcPr marL="91440" marR="91440" marT="45720" marB="45720">
+                    <a:lnR w="9525">
+                      <a:solidFill>
+                        <a:srgbClr val="D6E0E5"/>
+                      </a:solidFill>
+                    </a:lnR>
+                    <a:lnB w="9525">
+                      <a:solidFill>
+                        <a:srgbClr val="D6E0E5"/>
+                      </a:solidFill>
+                    </a:lnB>
+                    <a:solidFill>
+                      <a:srgbClr val="FFFFFF"/>
+                    </a:solidFill>
+                  </a:tcPr>
+                </a:tc>
+                <a:tc>
+                  <a:txBody>
+                    <a:bodyPr/>
+                    <a:lstStyle/>
+                    <a:p>
+                      <a:r>
+                        <a:rPr sz="1875">
+                          <a:solidFill>
+                            <a:srgbClr val="172B3A"/>
+                          </a:solidFill>
+                          <a:latin typeface="Arial Unicode MS"/>
+                          <a:ea typeface="Arial Unicode MS"/>
+                          <a:cs typeface="Arial Unicode MS"/>
+                        </a:rPr>
+                        <a:t>3</a:t>
+                      </a:r>
+                    </a:p>
+                  </a:txBody>
+                  <a:tcPr marL="91440" marR="91440" marT="45720" marB="45720">
+                    <a:lnR w="9525">
+                      <a:solidFill>
+                        <a:srgbClr val="D6E0E5"/>
+                      </a:solidFill>
+                    </a:lnR>
+                    <a:lnB w="9525">
+                      <a:solidFill>
+                        <a:srgbClr val="D6E0E5"/>
+                      </a:solidFill>
+                    </a:lnB>
+                    <a:solidFill>
+                      <a:srgbClr val="FFFFFF"/>
+                    </a:solidFill>
+                  </a:tcPr>
+                </a:tc>
+              </a:tr>
+            </a:tbl>
+          </a:graphicData>
+        </a:graphic>
+      </p:graphicFrame>
+      <p:sp>
+        <p:nvSpPr>
+          <p:cNvPr id="6" name="">
+            <a:extLst xmlns:a="http://schemas.openxmlformats.org/drawingml/2006/main">
+              <a:ext uri="{FF2B5EF4-FFF2-40B4-BE49-F238E27FC236}">
+                <a16:creationId xmlns:a16="http://schemas.microsoft.com/office/drawing/2014/main" id="{EEF6A1DE-7B67-4B53-A2FB-0FDF6FE14348}"/>
+              </a:ext>
+            </a:extLst>
+          </p:cNvPr>
+          <p:cNvSpPr>
+            <a:spLocks xmlns:a="http://schemas.openxmlformats.org/drawingml/2006/main" noGrp="1"/>
+          </p:cNvSpPr>
+          <p:nvPr/>
+        </p:nvSpPr>
+        <p:spPr>
+          <a:xfrm xmlns:a="http://schemas.openxmlformats.org/drawingml/2006/main">
+            <a:off x="619125" y="5762625"/>
+            <a:ext cx="10763250" cy="428625"/>
+          </a:xfrm>
+          <a:prstGeom xmlns:a="http://schemas.openxmlformats.org/drawingml/2006/main" prst="rect">
+            <a:avLst/>
+          </a:prstGeom>
+          <a:noFill xmlns:a="http://schemas.openxmlformats.org/drawingml/2006/main"/>
+          <a:ln xmlns:a="http://schemas.openxmlformats.org/drawingml/2006/main" w="0">
+            <a:noFill/>
+          </a:ln>
+        </p:spPr>
+        <p:txBody>
+          <a:bodyPr xmlns:a="http://schemas.openxmlformats.org/drawingml/2006/main"/>
+          <a:lstStyle xmlns:a="http://schemas.openxmlformats.org/drawingml/2006/main">
+            <a:defPPr>
+              <a:defRPr sz="1875">
+                <a:solidFill>
+                  <a:srgbClr val="172B3A"/>
+                </a:solidFill>
+                <a:latin typeface="Arial Unicode MS"/>
+                <a:ea typeface="Arial Unicode MS"/>
+                <a:cs typeface="Arial Unicode MS"/>
+              </a:defRPr>
+            </a:defPPr>
+            <a:lvl1pPr>
+              <a:defRPr sz="1875">
+                <a:solidFill>
+                  <a:srgbClr val="172B3A"/>
+                </a:solidFill>
+                <a:latin typeface="Arial Unicode MS"/>
+                <a:ea typeface="Arial Unicode MS"/>
+                <a:cs typeface="Arial Unicode MS"/>
+              </a:defRPr>
+            </a:lvl1pPr>
+            <a:lvl2pPr>
+              <a:defRPr sz="1875">
+                <a:solidFill>
+                  <a:srgbClr val="172B3A"/>
+                </a:solidFill>
+                <a:latin typeface="Arial Unicode MS"/>
+                <a:ea typeface="Arial Unicode MS"/>
+                <a:cs typeface="Arial Unicode MS"/>
+              </a:defRPr>
+            </a:lvl2pPr>
+            <a:lvl3pPr>
+              <a:defRPr sz="1875">
+                <a:solidFill>
+                  <a:srgbClr val="172B3A"/>
+                </a:solidFill>
+                <a:latin typeface="Arial Unicode MS"/>
+                <a:ea typeface="Arial Unicode MS"/>
+                <a:cs typeface="Arial Unicode MS"/>
+              </a:defRPr>
+            </a:lvl3pPr>
+            <a:lvl4pPr>
+              <a:defRPr sz="1875">
+                <a:solidFill>
+                  <a:srgbClr val="172B3A"/>
+                </a:solidFill>
+                <a:latin typeface="Arial Unicode MS"/>
+                <a:ea typeface="Arial Unicode MS"/>
+                <a:cs typeface="Arial Unicode MS"/>
+              </a:defRPr>
+            </a:lvl4pPr>
+            <a:lvl5pPr>
+              <a:defRPr sz="1875">
+                <a:solidFill>
+                  <a:srgbClr val="172B3A"/>
+                </a:solidFill>
+                <a:latin typeface="Arial Unicode MS"/>
+                <a:ea typeface="Arial Unicode MS"/>
+                <a:cs typeface="Arial Unicode MS"/>
+              </a:defRPr>
+            </a:lvl5pPr>
+            <a:lvl6pPr>
+              <a:defRPr sz="1875">
+                <a:solidFill>
+                  <a:srgbClr val="172B3A"/>
+                </a:solidFill>
+                <a:latin typeface="Arial Unicode MS"/>
+                <a:ea typeface="Arial Unicode MS"/>
+                <a:cs typeface="Arial Unicode MS"/>
+              </a:defRPr>
+            </a:lvl6pPr>
+            <a:lvl7pPr>
+              <a:defRPr sz="1875">
+                <a:solidFill>
+                  <a:srgbClr val="172B3A"/>
+                </a:solidFill>
+                <a:latin typeface="Arial Unicode MS"/>
+                <a:ea typeface="Arial Unicode MS"/>
+                <a:cs typeface="Arial Unicode MS"/>
+              </a:defRPr>
+            </a:lvl7pPr>
+            <a:lvl8pPr>
+              <a:defRPr sz="1875">
+                <a:solidFill>
+                  <a:srgbClr val="172B3A"/>
+                </a:solidFill>
+                <a:latin typeface="Arial Unicode MS"/>
+                <a:ea typeface="Arial Unicode MS"/>
+                <a:cs typeface="Arial Unicode MS"/>
+              </a:defRPr>
+            </a:lvl8pPr>
+            <a:lvl9pPr>
+              <a:defRPr sz="1875">
+                <a:solidFill>
+                  <a:srgbClr val="172B3A"/>
+                </a:solidFill>
+                <a:latin typeface="Arial Unicode MS"/>
+                <a:ea typeface="Arial Unicode MS"/>
+                <a:cs typeface="Arial Unicode MS"/>
+              </a:defRPr>
+            </a:lvl9pPr>
+          </a:lstStyle>
+          <a:p xmlns:a="http://schemas.openxmlformats.org/drawingml/2006/main">
+            <a:pPr>
+              <a:defRPr sz="1875">
+                <a:solidFill>
+                  <a:srgbClr val="172B3A"/>
+                </a:solidFill>
+                <a:latin typeface="Arial Unicode MS"/>
+                <a:ea typeface="Arial Unicode MS"/>
+                <a:cs typeface="Arial Unicode MS"/>
+              </a:defRPr>
+            </a:pPr>
+            <a:r>
+              <a:rPr sz="1875">
+                <a:solidFill>
+                  <a:srgbClr val="172B3A"/>
+                </a:solidFill>
+                <a:latin typeface="Arial Unicode MS"/>
+                <a:ea typeface="Arial Unicode MS"/>
+                <a:cs typeface="Arial Unicode MS"/>
+              </a:rPr>
+              <a:t>4块电池仅有4次首次事件，重叠起点不代表独立失效样本。</a:t>
+            </a:r>
+          </a:p>
+        </p:txBody>
+      </p:sp>
+    </p:spTree>
+    <p:extLst>
+      <p:ext uri="{BB962C8B-B14F-4D97-AF65-F5344CB8AC3E}">
+        <p14:creationId xmlns:p14="http://schemas.microsoft.com/office/powerpoint/2010/main" val="1704093003"/>
+      </p:ext>
+    </p:extLst>
+  </p:cSld>
+</p:sld>
+</file>
+
+<file path=ppt/slides/slide24.xml><?xml version="1.0" encoding="utf-8"?>
+<p:sld xmlns:p="http://schemas.openxmlformats.org/presentationml/2006/main">
+  <p:cSld>
+    <p:bg>
+      <p:bgPr>
+        <a:solidFill xmlns:a="http://schemas.openxmlformats.org/drawingml/2006/main">
+          <a:srgbClr val="FFFFFF"/>
+        </a:solidFill>
+      </p:bgPr>
+    </p:bg>
+    <p:spTree>
+      <p:nvGrpSpPr>
+        <p:cNvPr id="1" name=""/>
+        <p:cNvGrpSpPr/>
+        <p:nvPr/>
+      </p:nvGrpSpPr>
+      <p:grpSpPr>
+        <a:xfrm xmlns:a="http://schemas.openxmlformats.org/drawingml/2006/main"/>
+      </p:grpSpPr>
+      <p:sp>
+        <p:nvSpPr>
+          <p:cNvPr id="7" name="">
+            <a:extLst xmlns:a="http://schemas.openxmlformats.org/drawingml/2006/main">
+              <a:ext uri="{FF2B5EF4-FFF2-40B4-BE49-F238E27FC236}">
+                <a16:creationId xmlns:a16="http://schemas.microsoft.com/office/drawing/2014/main" id="{067C6520-B040-479F-8937-7299CE42BD0A}"/>
+              </a:ext>
+            </a:extLst>
+          </p:cNvPr>
+          <p:cNvSpPr>
+            <a:spLocks xmlns:a="http://schemas.openxmlformats.org/drawingml/2006/main" noGrp="1"/>
+          </p:cNvSpPr>
+          <p:nvPr/>
+        </p:nvSpPr>
+        <p:spPr>
+          <a:xfrm xmlns:a="http://schemas.openxmlformats.org/drawingml/2006/main">
+            <a:off x="571500" y="381000"/>
+            <a:ext cx="11049000" cy="857250"/>
+          </a:xfrm>
+          <a:prstGeom xmlns:a="http://schemas.openxmlformats.org/drawingml/2006/main" prst="rect">
+            <a:avLst/>
+          </a:prstGeom>
+          <a:noFill xmlns:a="http://schemas.openxmlformats.org/drawingml/2006/main"/>
+          <a:ln xmlns:a="http://schemas.openxmlformats.org/drawingml/2006/main" w="0">
+            <a:noFill/>
+          </a:ln>
+        </p:spPr>
+        <p:txBody>
+          <a:bodyPr xmlns:a="http://schemas.openxmlformats.org/drawingml/2006/main"/>
+          <a:lstStyle xmlns:a="http://schemas.openxmlformats.org/drawingml/2006/main">
+            <a:defPPr>
+              <a:defRPr sz="2925">
+                <a:solidFill>
+                  <a:srgbClr val="172B3A"/>
+                </a:solidFill>
+                <a:latin typeface="Arial Unicode MS"/>
+                <a:ea typeface="Arial Unicode MS"/>
+                <a:cs typeface="Arial Unicode MS"/>
+              </a:defRPr>
+            </a:defPPr>
+            <a:lvl1pPr>
+              <a:defRPr sz="2925">
+                <a:solidFill>
+                  <a:srgbClr val="172B3A"/>
+                </a:solidFill>
+                <a:latin typeface="Arial Unicode MS"/>
+                <a:ea typeface="Arial Unicode MS"/>
+                <a:cs typeface="Arial Unicode MS"/>
+              </a:defRPr>
+            </a:lvl1pPr>
+            <a:lvl2pPr>
+              <a:defRPr sz="2925">
+                <a:solidFill>
+                  <a:srgbClr val="172B3A"/>
+                </a:solidFill>
+                <a:latin typeface="Arial Unicode MS"/>
+                <a:ea typeface="Arial Unicode MS"/>
+                <a:cs typeface="Arial Unicode MS"/>
+              </a:defRPr>
+            </a:lvl2pPr>
+            <a:lvl3pPr>
+              <a:defRPr sz="2925">
+                <a:solidFill>
+                  <a:srgbClr val="172B3A"/>
+                </a:solidFill>
+                <a:latin typeface="Arial Unicode MS"/>
+                <a:ea typeface="Arial Unicode MS"/>
+                <a:cs typeface="Arial Unicode MS"/>
+              </a:defRPr>
+            </a:lvl3pPr>
+            <a:lvl4pPr>
+              <a:defRPr sz="2925">
+                <a:solidFill>
+                  <a:srgbClr val="172B3A"/>
+                </a:solidFill>
+                <a:latin typeface="Arial Unicode MS"/>
+                <a:ea typeface="Arial Unicode MS"/>
+                <a:cs typeface="Arial Unicode MS"/>
+              </a:defRPr>
+            </a:lvl4pPr>
+            <a:lvl5pPr>
+              <a:defRPr sz="2925">
+                <a:solidFill>
+                  <a:srgbClr val="172B3A"/>
+                </a:solidFill>
+                <a:latin typeface="Arial Unicode MS"/>
+                <a:ea typeface="Arial Unicode MS"/>
+                <a:cs typeface="Arial Unicode MS"/>
+              </a:defRPr>
+            </a:lvl5pPr>
+            <a:lvl6pPr>
+              <a:defRPr sz="2925">
+                <a:solidFill>
+                  <a:srgbClr val="172B3A"/>
+                </a:solidFill>
+                <a:latin typeface="Arial Unicode MS"/>
+                <a:ea typeface="Arial Unicode MS"/>
+                <a:cs typeface="Arial Unicode MS"/>
+              </a:defRPr>
+            </a:lvl6pPr>
+            <a:lvl7pPr>
+              <a:defRPr sz="2925">
+                <a:solidFill>
+                  <a:srgbClr val="172B3A"/>
+                </a:solidFill>
+                <a:latin typeface="Arial Unicode MS"/>
+                <a:ea typeface="Arial Unicode MS"/>
+                <a:cs typeface="Arial Unicode MS"/>
+              </a:defRPr>
+            </a:lvl7pPr>
+            <a:lvl8pPr>
+              <a:defRPr sz="2925">
+                <a:solidFill>
+                  <a:srgbClr val="172B3A"/>
+                </a:solidFill>
+                <a:latin typeface="Arial Unicode MS"/>
+                <a:ea typeface="Arial Unicode MS"/>
+                <a:cs typeface="Arial Unicode MS"/>
+              </a:defRPr>
+            </a:lvl8pPr>
+            <a:lvl9pPr>
+              <a:defRPr sz="2925">
+                <a:solidFill>
+                  <a:srgbClr val="172B3A"/>
+                </a:solidFill>
+                <a:latin typeface="Arial Unicode MS"/>
+                <a:ea typeface="Arial Unicode MS"/>
+                <a:cs typeface="Arial Unicode MS"/>
+              </a:defRPr>
+            </a:lvl9pPr>
+          </a:lstStyle>
+          <a:p xmlns:a="http://schemas.openxmlformats.org/drawingml/2006/main">
+            <a:pPr>
+              <a:defRPr sz="2925">
+                <a:solidFill>
+                  <a:srgbClr val="172B3A"/>
+                </a:solidFill>
+                <a:latin typeface="Arial Unicode MS"/>
+                <a:ea typeface="Arial Unicode MS"/>
+                <a:cs typeface="Arial Unicode MS"/>
+              </a:defRPr>
+            </a:pPr>
+            <a:r>
+              <a:rPr sz="2925">
+                <a:solidFill>
+                  <a:srgbClr val="172B3A"/>
+                </a:solidFill>
+                <a:latin typeface="Arial Unicode MS"/>
+                <a:ea typeface="Arial Unicode MS"/>
+                <a:cs typeface="Arial Unicode MS"/>
+              </a:rPr>
+              <a:t>05 / 多步建模的预测问题</a:t>
+            </a:r>
+          </a:p>
+        </p:txBody>
+      </p:sp>
+      <p:sp>
+        <p:nvSpPr>
+          <p:cNvPr id="2" name="">
+            <a:extLst xmlns:a="http://schemas.openxmlformats.org/drawingml/2006/main">
+              <a:ext uri="{FF2B5EF4-FFF2-40B4-BE49-F238E27FC236}">
+                <a16:creationId xmlns:a16="http://schemas.microsoft.com/office/drawing/2014/main" id="{D77023CF-AE41-40F9-AF85-170F70C57F14}"/>
+              </a:ext>
+            </a:extLst>
+          </p:cNvPr>
+          <p:cNvSpPr>
+            <a:spLocks xmlns:a="http://schemas.openxmlformats.org/drawingml/2006/main" noGrp="1"/>
+          </p:cNvSpPr>
+          <p:nvPr/>
+        </p:nvSpPr>
+        <p:spPr>
+          <a:xfrm xmlns:a="http://schemas.openxmlformats.org/drawingml/2006/main">
+            <a:off x="571500" y="6334125"/>
+            <a:ext cx="10477500" cy="285750"/>
+          </a:xfrm>
+          <a:prstGeom xmlns:a="http://schemas.openxmlformats.org/drawingml/2006/main" prst="rect">
+            <a:avLst/>
+          </a:prstGeom>
+          <a:noFill xmlns:a="http://schemas.openxmlformats.org/drawingml/2006/main"/>
+          <a:ln xmlns:a="http://schemas.openxmlformats.org/drawingml/2006/main" w="0">
+            <a:noFill/>
+          </a:ln>
+        </p:spPr>
+        <p:txBody>
+          <a:bodyPr xmlns:a="http://schemas.openxmlformats.org/drawingml/2006/main"/>
+          <a:lstStyle xmlns:a="http://schemas.openxmlformats.org/drawingml/2006/main">
+            <a:defPPr>
+              <a:defRPr sz="1200">
+                <a:solidFill>
+                  <a:srgbClr val="687985"/>
+                </a:solidFill>
+                <a:latin typeface="Arial Unicode MS"/>
+                <a:ea typeface="Arial Unicode MS"/>
+                <a:cs typeface="Arial Unicode MS"/>
+              </a:defRPr>
+            </a:defPPr>
+            <a:lvl1pPr>
+              <a:defRPr sz="1200">
+                <a:solidFill>
+                  <a:srgbClr val="687985"/>
+                </a:solidFill>
+                <a:latin typeface="Arial Unicode MS"/>
+                <a:ea typeface="Arial Unicode MS"/>
+                <a:cs typeface="Arial Unicode MS"/>
+              </a:defRPr>
+            </a:lvl1pPr>
+            <a:lvl2pPr>
+              <a:defRPr sz="1200">
+                <a:solidFill>
+                  <a:srgbClr val="687985"/>
+                </a:solidFill>
+                <a:latin typeface="Arial Unicode MS"/>
+                <a:ea typeface="Arial Unicode MS"/>
+                <a:cs typeface="Arial Unicode MS"/>
+              </a:defRPr>
+            </a:lvl2pPr>
+            <a:lvl3pPr>
+              <a:defRPr sz="1200">
+                <a:solidFill>
+                  <a:srgbClr val="687985"/>
+                </a:solidFill>
+                <a:latin typeface="Arial Unicode MS"/>
+                <a:ea typeface="Arial Unicode MS"/>
+                <a:cs typeface="Arial Unicode MS"/>
+              </a:defRPr>
+            </a:lvl3pPr>
+            <a:lvl4pPr>
+              <a:defRPr sz="1200">
+                <a:solidFill>
+                  <a:srgbClr val="687985"/>
+                </a:solidFill>
+                <a:latin typeface="Arial Unicode MS"/>
+                <a:ea typeface="Arial Unicode MS"/>
+                <a:cs typeface="Arial Unicode MS"/>
+              </a:defRPr>
+            </a:lvl4pPr>
+            <a:lvl5pPr>
+              <a:defRPr sz="1200">
+                <a:solidFill>
+                  <a:srgbClr val="687985"/>
+                </a:solidFill>
+                <a:latin typeface="Arial Unicode MS"/>
+                <a:ea typeface="Arial Unicode MS"/>
+                <a:cs typeface="Arial Unicode MS"/>
+              </a:defRPr>
+            </a:lvl5pPr>
+            <a:lvl6pPr>
+              <a:defRPr sz="1200">
+                <a:solidFill>
+                  <a:srgbClr val="687985"/>
+                </a:solidFill>
+                <a:latin typeface="Arial Unicode MS"/>
+                <a:ea typeface="Arial Unicode MS"/>
+                <a:cs typeface="Arial Unicode MS"/>
+              </a:defRPr>
+            </a:lvl6pPr>
+            <a:lvl7pPr>
+              <a:defRPr sz="1200">
+                <a:solidFill>
+                  <a:srgbClr val="687985"/>
+                </a:solidFill>
+                <a:latin typeface="Arial Unicode MS"/>
+                <a:ea typeface="Arial Unicode MS"/>
+                <a:cs typeface="Arial Unicode MS"/>
+              </a:defRPr>
+            </a:lvl7pPr>
+            <a:lvl8pPr>
+              <a:defRPr sz="1200">
+                <a:solidFill>
+                  <a:srgbClr val="687985"/>
+                </a:solidFill>
+                <a:latin typeface="Arial Unicode MS"/>
+                <a:ea typeface="Arial Unicode MS"/>
+                <a:cs typeface="Arial Unicode MS"/>
+              </a:defRPr>
+            </a:lvl8pPr>
+            <a:lvl9pPr>
+              <a:defRPr sz="1200">
+                <a:solidFill>
+                  <a:srgbClr val="687985"/>
+                </a:solidFill>
+                <a:latin typeface="Arial Unicode MS"/>
+                <a:ea typeface="Arial Unicode MS"/>
+                <a:cs typeface="Arial Unicode MS"/>
+              </a:defRPr>
+            </a:lvl9pPr>
+          </a:lstStyle>
+          <a:p xmlns:a="http://schemas.openxmlformats.org/drawingml/2006/main">
+            <a:pPr>
+              <a:defRPr sz="1200">
+                <a:solidFill>
+                  <a:srgbClr val="687985"/>
+                </a:solidFill>
+                <a:latin typeface="Arial Unicode MS"/>
+                <a:ea typeface="Arial Unicode MS"/>
+                <a:cs typeface="Arial Unicode MS"/>
+              </a:defRPr>
+            </a:pPr>
+            <a:r>
+              <a:rPr sz="1200">
+                <a:solidFill>
+                  <a:srgbClr val="687985"/>
+                </a:solidFill>
+                <a:latin typeface="Arial Unicode MS"/>
+                <a:ea typeface="Arial Unicode MS"/>
+                <a:cs typeface="Arial Unicode MS"/>
+              </a:rPr>
+              <a:t>工作过程记录  |  杨晓真 25121619  |  2026.10.28</a:t>
+            </a:r>
+          </a:p>
+        </p:txBody>
+      </p:sp>
+      <p:sp>
+        <p:nvSpPr>
+          <p:cNvPr id="3" name="">
+            <a:extLst xmlns:a="http://schemas.openxmlformats.org/drawingml/2006/main">
+              <a:ext uri="{FF2B5EF4-FFF2-40B4-BE49-F238E27FC236}">
+                <a16:creationId xmlns:a16="http://schemas.microsoft.com/office/drawing/2014/main" id="{03B1E2F7-2742-4C43-8278-A9EA94CE022A}"/>
+              </a:ext>
+            </a:extLst>
+          </p:cNvPr>
+          <p:cNvSpPr>
+            <a:spLocks xmlns:a="http://schemas.openxmlformats.org/drawingml/2006/main" noGrp="1"/>
+          </p:cNvSpPr>
+          <p:nvPr/>
+        </p:nvSpPr>
+        <p:spPr>
+          <a:xfrm xmlns:a="http://schemas.openxmlformats.org/drawingml/2006/main">
+            <a:off x="11144250" y="6334125"/>
+            <a:ext cx="714375" cy="285750"/>
+          </a:xfrm>
+          <a:prstGeom xmlns:a="http://schemas.openxmlformats.org/drawingml/2006/main" prst="rect">
+            <a:avLst/>
+          </a:prstGeom>
+          <a:noFill xmlns:a="http://schemas.openxmlformats.org/drawingml/2006/main"/>
+          <a:ln xmlns:a="http://schemas.openxmlformats.org/drawingml/2006/main" w="0">
+            <a:noFill/>
+          </a:ln>
+        </p:spPr>
+        <p:txBody>
+          <a:bodyPr xmlns:a="http://schemas.openxmlformats.org/drawingml/2006/main"/>
+          <a:lstStyle xmlns:a="http://schemas.openxmlformats.org/drawingml/2006/main">
+            <a:defPPr>
+              <a:defRPr sz="1200">
+                <a:solidFill>
+                  <a:srgbClr val="172B3A"/>
+                </a:solidFill>
+                <a:latin typeface="Arial Unicode MS"/>
+                <a:ea typeface="Arial Unicode MS"/>
+                <a:cs typeface="Arial Unicode MS"/>
+              </a:defRPr>
+            </a:defPPr>
+            <a:lvl1pPr>
+              <a:defRPr sz="1200">
+                <a:solidFill>
+                  <a:srgbClr val="172B3A"/>
+                </a:solidFill>
+                <a:latin typeface="Arial Unicode MS"/>
+                <a:ea typeface="Arial Unicode MS"/>
+                <a:cs typeface="Arial Unicode MS"/>
+              </a:defRPr>
+            </a:lvl1pPr>
+            <a:lvl2pPr>
+              <a:defRPr sz="1200">
+                <a:solidFill>
+                  <a:srgbClr val="172B3A"/>
+                </a:solidFill>
+                <a:latin typeface="Arial Unicode MS"/>
+                <a:ea typeface="Arial Unicode MS"/>
+                <a:cs typeface="Arial Unicode MS"/>
+              </a:defRPr>
+            </a:lvl2pPr>
+            <a:lvl3pPr>
+              <a:defRPr sz="1200">
+                <a:solidFill>
+                  <a:srgbClr val="172B3A"/>
+                </a:solidFill>
+                <a:latin typeface="Arial Unicode MS"/>
+                <a:ea typeface="Arial Unicode MS"/>
+                <a:cs typeface="Arial Unicode MS"/>
+              </a:defRPr>
+            </a:lvl3pPr>
+            <a:lvl4pPr>
+              <a:defRPr sz="1200">
+                <a:solidFill>
+                  <a:srgbClr val="172B3A"/>
+                </a:solidFill>
+                <a:latin typeface="Arial Unicode MS"/>
+                <a:ea typeface="Arial Unicode MS"/>
+                <a:cs typeface="Arial Unicode MS"/>
+              </a:defRPr>
+            </a:lvl4pPr>
+            <a:lvl5pPr>
+              <a:defRPr sz="1200">
+                <a:solidFill>
+                  <a:srgbClr val="172B3A"/>
+                </a:solidFill>
+                <a:latin typeface="Arial Unicode MS"/>
+                <a:ea typeface="Arial Unicode MS"/>
+                <a:cs typeface="Arial Unicode MS"/>
+              </a:defRPr>
+            </a:lvl5pPr>
+            <a:lvl6pPr>
+              <a:defRPr sz="1200">
+                <a:solidFill>
+                  <a:srgbClr val="172B3A"/>
+                </a:solidFill>
+                <a:latin typeface="Arial Unicode MS"/>
+                <a:ea typeface="Arial Unicode MS"/>
+                <a:cs typeface="Arial Unicode MS"/>
+              </a:defRPr>
+            </a:lvl6pPr>
+            <a:lvl7pPr>
+              <a:defRPr sz="1200">
+                <a:solidFill>
+                  <a:srgbClr val="172B3A"/>
+                </a:solidFill>
+                <a:latin typeface="Arial Unicode MS"/>
+                <a:ea typeface="Arial Unicode MS"/>
+                <a:cs typeface="Arial Unicode MS"/>
+              </a:defRPr>
+            </a:lvl7pPr>
+            <a:lvl8pPr>
+              <a:defRPr sz="1200">
+                <a:solidFill>
+                  <a:srgbClr val="172B3A"/>
+                </a:solidFill>
+                <a:latin typeface="Arial Unicode MS"/>
+                <a:ea typeface="Arial Unicode MS"/>
+                <a:cs typeface="Arial Unicode MS"/>
+              </a:defRPr>
+            </a:lvl8pPr>
+            <a:lvl9pPr>
+              <a:defRPr sz="1200">
+                <a:solidFill>
+                  <a:srgbClr val="172B3A"/>
+                </a:solidFill>
+                <a:latin typeface="Arial Unicode MS"/>
+                <a:ea typeface="Arial Unicode MS"/>
+                <a:cs typeface="Arial Unicode MS"/>
+              </a:defRPr>
+            </a:lvl9pPr>
+          </a:lstStyle>
+          <a:p xmlns:a="http://schemas.openxmlformats.org/drawingml/2006/main">
+            <a:pPr>
+              <a:defRPr sz="1200">
+                <a:solidFill>
+                  <a:srgbClr val="172B3A"/>
+                </a:solidFill>
+                <a:latin typeface="Arial Unicode MS"/>
+                <a:ea typeface="Arial Unicode MS"/>
+                <a:cs typeface="Arial Unicode MS"/>
+              </a:defRPr>
+            </a:pPr>
+            <a:r>
+              <a:rPr sz="1200">
+                <a:solidFill>
+                  <a:srgbClr val="172B3A"/>
+                </a:solidFill>
+                <a:latin typeface="Arial Unicode MS"/>
+                <a:ea typeface="Arial Unicode MS"/>
+                <a:cs typeface="Arial Unicode MS"/>
+              </a:rPr>
+              <a:t>24</a:t>
+            </a:r>
+          </a:p>
+        </p:txBody>
+      </p:sp>
+      <p:sp>
+        <p:nvSpPr>
+          <p:cNvPr id="4" name="">
+            <a:extLst xmlns:a="http://schemas.openxmlformats.org/drawingml/2006/main">
+              <a:ext uri="{FF2B5EF4-FFF2-40B4-BE49-F238E27FC236}">
+                <a16:creationId xmlns:a16="http://schemas.microsoft.com/office/drawing/2014/main" id="{0B92FDD7-EF64-4296-82A4-2402BD2DDB39}"/>
+              </a:ext>
+            </a:extLst>
+          </p:cNvPr>
+          <p:cNvSpPr>
+            <a:spLocks xmlns:a="http://schemas.openxmlformats.org/drawingml/2006/main" noGrp="1"/>
+          </p:cNvSpPr>
+          <p:nvPr/>
+        </p:nvSpPr>
+        <p:spPr>
+          <a:xfrm xmlns:a="http://schemas.openxmlformats.org/drawingml/2006/main">
+            <a:off x="619125" y="1476375"/>
+            <a:ext cx="10763250" cy="1095375"/>
+          </a:xfrm>
+          <a:prstGeom xmlns:a="http://schemas.openxmlformats.org/drawingml/2006/main" prst="rect">
+            <a:avLst/>
+          </a:prstGeom>
+          <a:noFill xmlns:a="http://schemas.openxmlformats.org/drawingml/2006/main"/>
+          <a:ln xmlns:a="http://schemas.openxmlformats.org/drawingml/2006/main" w="0">
+            <a:noFill/>
+          </a:ln>
+        </p:spPr>
+        <p:txBody>
+          <a:bodyPr xmlns:a="http://schemas.openxmlformats.org/drawingml/2006/main"/>
+          <a:lstStyle xmlns:a="http://schemas.openxmlformats.org/drawingml/2006/main">
+            <a:defPPr>
+              <a:defRPr sz="2325">
+                <a:solidFill>
+                  <a:srgbClr val="176B87"/>
+                </a:solidFill>
+                <a:latin typeface="Arial Unicode MS"/>
+                <a:ea typeface="Arial Unicode MS"/>
+                <a:cs typeface="Arial Unicode MS"/>
+              </a:defRPr>
+            </a:defPPr>
+            <a:lvl1pPr>
+              <a:defRPr sz="2325">
+                <a:solidFill>
+                  <a:srgbClr val="176B87"/>
+                </a:solidFill>
+                <a:latin typeface="Arial Unicode MS"/>
+                <a:ea typeface="Arial Unicode MS"/>
+                <a:cs typeface="Arial Unicode MS"/>
+              </a:defRPr>
+            </a:lvl1pPr>
+            <a:lvl2pPr>
+              <a:defRPr sz="2325">
+                <a:solidFill>
+                  <a:srgbClr val="176B87"/>
+                </a:solidFill>
+                <a:latin typeface="Arial Unicode MS"/>
+                <a:ea typeface="Arial Unicode MS"/>
+                <a:cs typeface="Arial Unicode MS"/>
+              </a:defRPr>
+            </a:lvl2pPr>
+            <a:lvl3pPr>
+              <a:defRPr sz="2325">
+                <a:solidFill>
+                  <a:srgbClr val="176B87"/>
+                </a:solidFill>
+                <a:latin typeface="Arial Unicode MS"/>
+                <a:ea typeface="Arial Unicode MS"/>
+                <a:cs typeface="Arial Unicode MS"/>
+              </a:defRPr>
+            </a:lvl3pPr>
+            <a:lvl4pPr>
+              <a:defRPr sz="2325">
+                <a:solidFill>
+                  <a:srgbClr val="176B87"/>
+                </a:solidFill>
+                <a:latin typeface="Arial Unicode MS"/>
+                <a:ea typeface="Arial Unicode MS"/>
+                <a:cs typeface="Arial Unicode MS"/>
+              </a:defRPr>
+            </a:lvl4pPr>
+            <a:lvl5pPr>
+              <a:defRPr sz="2325">
+                <a:solidFill>
+                  <a:srgbClr val="176B87"/>
+                </a:solidFill>
+                <a:latin typeface="Arial Unicode MS"/>
+                <a:ea typeface="Arial Unicode MS"/>
+                <a:cs typeface="Arial Unicode MS"/>
+              </a:defRPr>
+            </a:lvl5pPr>
+            <a:lvl6pPr>
+              <a:defRPr sz="2325">
+                <a:solidFill>
+                  <a:srgbClr val="176B87"/>
+                </a:solidFill>
+                <a:latin typeface="Arial Unicode MS"/>
+                <a:ea typeface="Arial Unicode MS"/>
+                <a:cs typeface="Arial Unicode MS"/>
+              </a:defRPr>
+            </a:lvl6pPr>
+            <a:lvl7pPr>
+              <a:defRPr sz="2325">
+                <a:solidFill>
+                  <a:srgbClr val="176B87"/>
+                </a:solidFill>
+                <a:latin typeface="Arial Unicode MS"/>
+                <a:ea typeface="Arial Unicode MS"/>
+                <a:cs typeface="Arial Unicode MS"/>
+              </a:defRPr>
+            </a:lvl7pPr>
+            <a:lvl8pPr>
+              <a:defRPr sz="2325">
+                <a:solidFill>
+                  <a:srgbClr val="176B87"/>
+                </a:solidFill>
+                <a:latin typeface="Arial Unicode MS"/>
+                <a:ea typeface="Arial Unicode MS"/>
+                <a:cs typeface="Arial Unicode MS"/>
+              </a:defRPr>
+            </a:lvl8pPr>
+            <a:lvl9pPr>
+              <a:defRPr sz="2325">
+                <a:solidFill>
+                  <a:srgbClr val="176B87"/>
+                </a:solidFill>
+                <a:latin typeface="Arial Unicode MS"/>
+                <a:ea typeface="Arial Unicode MS"/>
+                <a:cs typeface="Arial Unicode MS"/>
+              </a:defRPr>
+            </a:lvl9pPr>
+          </a:lstStyle>
+          <a:p xmlns:a="http://schemas.openxmlformats.org/drawingml/2006/main">
+            <a:pPr>
+              <a:defRPr sz="2325">
+                <a:solidFill>
+                  <a:srgbClr val="176B87"/>
+                </a:solidFill>
+                <a:latin typeface="Arial Unicode MS"/>
+                <a:ea typeface="Arial Unicode MS"/>
+                <a:cs typeface="Arial Unicode MS"/>
+              </a:defRPr>
+            </a:pPr>
+            <a:r>
+              <a:rPr sz="2325">
+                <a:solidFill>
+                  <a:srgbClr val="176B87"/>
+                </a:solidFill>
+                <a:latin typeface="Arial Unicode MS"/>
+                <a:ea typeface="Arial Unicode MS"/>
+                <a:cs typeface="Arial Unicode MS"/>
+              </a:rPr>
+              <a:t>起点o：使用截至第o次的已知容量</a:t>
+            </a:r>
+          </a:p>
+          <a:p xmlns:a="http://schemas.openxmlformats.org/drawingml/2006/main">
+            <a:pPr>
+              <a:defRPr sz="2325">
+                <a:solidFill>
+                  <a:srgbClr val="176B87"/>
+                </a:solidFill>
+                <a:latin typeface="Arial Unicode MS"/>
+                <a:ea typeface="Arial Unicode MS"/>
+                <a:cs typeface="Arial Unicode MS"/>
+              </a:defRPr>
+            </a:pPr>
+            <a:r>
+              <a:rPr sz="2325">
+                <a:solidFill>
+                  <a:srgbClr val="176B87"/>
+                </a:solidFill>
+                <a:latin typeface="Arial Unicode MS"/>
+                <a:ea typeface="Arial Unicode MS"/>
+                <a:cs typeface="Arial Unicode MS"/>
+              </a:rPr>
+              <a:t>目标：第o＋h次容量，h固定为1、5、10</a:t>
+            </a:r>
+          </a:p>
+        </p:txBody>
+      </p:sp>
+      <p:sp>
+        <p:nvSpPr>
+          <p:cNvPr id="5" name="">
+            <a:extLst xmlns:a="http://schemas.openxmlformats.org/drawingml/2006/main">
+              <a:ext uri="{FF2B5EF4-FFF2-40B4-BE49-F238E27FC236}">
+                <a16:creationId xmlns:a16="http://schemas.microsoft.com/office/drawing/2014/main" id="{EE3E4BA6-E083-4AA5-83C7-F9E1B4D7917A}"/>
+              </a:ext>
+            </a:extLst>
+          </p:cNvPr>
+          <p:cNvSpPr>
+            <a:spLocks xmlns:a="http://schemas.openxmlformats.org/drawingml/2006/main" noGrp="1"/>
+          </p:cNvSpPr>
+          <p:nvPr/>
+        </p:nvSpPr>
+        <p:spPr>
+          <a:xfrm xmlns:a="http://schemas.openxmlformats.org/drawingml/2006/main">
+            <a:off x="619125" y="3095625"/>
+            <a:ext cx="10763250" cy="1619250"/>
+          </a:xfrm>
+          <a:prstGeom xmlns:a="http://schemas.openxmlformats.org/drawingml/2006/main" prst="rect">
+            <a:avLst/>
+          </a:prstGeom>
+          <a:noFill xmlns:a="http://schemas.openxmlformats.org/drawingml/2006/main"/>
+          <a:ln xmlns:a="http://schemas.openxmlformats.org/drawingml/2006/main" w="0">
+            <a:noFill/>
+          </a:ln>
+        </p:spPr>
+        <p:txBody>
+          <a:bodyPr xmlns:a="http://schemas.openxmlformats.org/drawingml/2006/main"/>
+          <a:lstStyle xmlns:a="http://schemas.openxmlformats.org/drawingml/2006/main">
+            <a:defPPr>
+              <a:defRPr sz="2175">
+                <a:solidFill>
+                  <a:srgbClr val="172B3A"/>
+                </a:solidFill>
+                <a:latin typeface="Arial Unicode MS"/>
+                <a:ea typeface="Arial Unicode MS"/>
+                <a:cs typeface="Arial Unicode MS"/>
+              </a:defRPr>
+            </a:defPPr>
+            <a:lvl1pPr>
+              <a:defRPr sz="2175">
+                <a:solidFill>
+                  <a:srgbClr val="172B3A"/>
+                </a:solidFill>
+                <a:latin typeface="Arial Unicode MS"/>
+                <a:ea typeface="Arial Unicode MS"/>
+                <a:cs typeface="Arial Unicode MS"/>
+              </a:defRPr>
+            </a:lvl1pPr>
+            <a:lvl2pPr>
+              <a:defRPr sz="2175">
+                <a:solidFill>
+                  <a:srgbClr val="172B3A"/>
+                </a:solidFill>
+                <a:latin typeface="Arial Unicode MS"/>
+                <a:ea typeface="Arial Unicode MS"/>
+                <a:cs typeface="Arial Unicode MS"/>
+              </a:defRPr>
+            </a:lvl2pPr>
+            <a:lvl3pPr>
+              <a:defRPr sz="2175">
+                <a:solidFill>
+                  <a:srgbClr val="172B3A"/>
+                </a:solidFill>
+                <a:latin typeface="Arial Unicode MS"/>
+                <a:ea typeface="Arial Unicode MS"/>
+                <a:cs typeface="Arial Unicode MS"/>
+              </a:defRPr>
+            </a:lvl3pPr>
+            <a:lvl4pPr>
+              <a:defRPr sz="2175">
+                <a:solidFill>
+                  <a:srgbClr val="172B3A"/>
+                </a:solidFill>
+                <a:latin typeface="Arial Unicode MS"/>
+                <a:ea typeface="Arial Unicode MS"/>
+                <a:cs typeface="Arial Unicode MS"/>
+              </a:defRPr>
+            </a:lvl4pPr>
+            <a:lvl5pPr>
+              <a:defRPr sz="2175">
+                <a:solidFill>
+                  <a:srgbClr val="172B3A"/>
+                </a:solidFill>
+                <a:latin typeface="Arial Unicode MS"/>
+                <a:ea typeface="Arial Unicode MS"/>
+                <a:cs typeface="Arial Unicode MS"/>
+              </a:defRPr>
+            </a:lvl5pPr>
+            <a:lvl6pPr>
+              <a:defRPr sz="2175">
+                <a:solidFill>
+                  <a:srgbClr val="172B3A"/>
+                </a:solidFill>
+                <a:latin typeface="Arial Unicode MS"/>
+                <a:ea typeface="Arial Unicode MS"/>
+                <a:cs typeface="Arial Unicode MS"/>
+              </a:defRPr>
+            </a:lvl6pPr>
+            <a:lvl7pPr>
+              <a:defRPr sz="2175">
+                <a:solidFill>
+                  <a:srgbClr val="172B3A"/>
+                </a:solidFill>
+                <a:latin typeface="Arial Unicode MS"/>
+                <a:ea typeface="Arial Unicode MS"/>
+                <a:cs typeface="Arial Unicode MS"/>
+              </a:defRPr>
+            </a:lvl7pPr>
+            <a:lvl8pPr>
+              <a:defRPr sz="2175">
+                <a:solidFill>
+                  <a:srgbClr val="172B3A"/>
+                </a:solidFill>
+                <a:latin typeface="Arial Unicode MS"/>
+                <a:ea typeface="Arial Unicode MS"/>
+                <a:cs typeface="Arial Unicode MS"/>
+              </a:defRPr>
+            </a:lvl8pPr>
+            <a:lvl9pPr>
+              <a:defRPr sz="2175">
+                <a:solidFill>
+                  <a:srgbClr val="172B3A"/>
+                </a:solidFill>
+                <a:latin typeface="Arial Unicode MS"/>
+                <a:ea typeface="Arial Unicode MS"/>
+                <a:cs typeface="Arial Unicode MS"/>
+              </a:defRPr>
+            </a:lvl9pPr>
+          </a:lstStyle>
+          <a:p xmlns:a="http://schemas.openxmlformats.org/drawingml/2006/main">
+            <a:pPr>
+              <a:defRPr sz="2175">
+                <a:solidFill>
+                  <a:srgbClr val="172B3A"/>
+                </a:solidFill>
+                <a:latin typeface="Arial Unicode MS"/>
+                <a:ea typeface="Arial Unicode MS"/>
+                <a:cs typeface="Arial Unicode MS"/>
+              </a:defRPr>
+            </a:pPr>
+            <a:r>
+              <a:rPr sz="2175">
+                <a:solidFill>
+                  <a:srgbClr val="172B3A"/>
+                </a:solidFill>
+                <a:latin typeface="Arial Unicode MS"/>
+                <a:ea typeface="Arial Unicode MS"/>
+                <a:cs typeface="Arial Unicode MS"/>
+              </a:rPr>
+              <a:t>例：第134次预测第144次容量</a:t>
+            </a:r>
+          </a:p>
+          <a:p xmlns:a="http://schemas.openxmlformats.org/drawingml/2006/main">
+            <a:pPr>
+              <a:defRPr sz="2175">
+                <a:solidFill>
+                  <a:srgbClr val="172B3A"/>
+                </a:solidFill>
+                <a:latin typeface="Arial Unicode MS"/>
+                <a:ea typeface="Arial Unicode MS"/>
+                <a:cs typeface="Arial Unicode MS"/>
+              </a:defRPr>
+            </a:pPr>
+            <a:r>
+              <a:rPr sz="2175">
+                <a:solidFill>
+                  <a:srgbClr val="172B3A"/>
+                </a:solidFill>
+                <a:latin typeface="Arial Unicode MS"/>
+                <a:ea typeface="Arial Unicode MS"/>
+                <a:cs typeface="Arial Unicode MS"/>
+              </a:rPr>
+              <a:t>模型拟合所用目标最多到第134次</a:t>
+            </a:r>
+          </a:p>
+          <a:p xmlns:a="http://schemas.openxmlformats.org/drawingml/2006/main">
+            <a:pPr>
+              <a:defRPr sz="2175">
+                <a:solidFill>
+                  <a:srgbClr val="172B3A"/>
+                </a:solidFill>
+                <a:latin typeface="Arial Unicode MS"/>
+                <a:ea typeface="Arial Unicode MS"/>
+                <a:cs typeface="Arial Unicode MS"/>
+              </a:defRPr>
+            </a:pPr>
+            <a:r>
+              <a:rPr sz="2175">
+                <a:solidFill>
+                  <a:srgbClr val="172B3A"/>
+                </a:solidFill>
+                <a:latin typeface="Arial Unicode MS"/>
+                <a:ea typeface="Arial Unicode MS"/>
+                <a:cs typeface="Arial Unicode MS"/>
+              </a:rPr>
+              <a:t>这次预测不读取第135至143次的真实容量</a:t>
+            </a:r>
+          </a:p>
+        </p:txBody>
+      </p:sp>
+      <p:sp>
+        <p:nvSpPr>
+          <p:cNvPr id="6" name="">
+            <a:extLst xmlns:a="http://schemas.openxmlformats.org/drawingml/2006/main">
+              <a:ext uri="{FF2B5EF4-FFF2-40B4-BE49-F238E27FC236}">
+                <a16:creationId xmlns:a16="http://schemas.microsoft.com/office/drawing/2014/main" id="{40935D91-68AE-468E-8D33-93D6A4505BD8}"/>
+              </a:ext>
+            </a:extLst>
+          </p:cNvPr>
+          <p:cNvSpPr>
+            <a:spLocks xmlns:a="http://schemas.openxmlformats.org/drawingml/2006/main" noGrp="1"/>
+          </p:cNvSpPr>
+          <p:nvPr/>
+        </p:nvSpPr>
+        <p:spPr>
+          <a:xfrm xmlns:a="http://schemas.openxmlformats.org/drawingml/2006/main">
+            <a:off x="619125" y="5476875"/>
+            <a:ext cx="10763250" cy="571500"/>
+          </a:xfrm>
+          <a:prstGeom xmlns:a="http://schemas.openxmlformats.org/drawingml/2006/main" prst="rect">
+            <a:avLst/>
+          </a:prstGeom>
+          <a:noFill xmlns:a="http://schemas.openxmlformats.org/drawingml/2006/main"/>
+          <a:ln xmlns:a="http://schemas.openxmlformats.org/drawingml/2006/main" w="0">
+            <a:noFill/>
+          </a:ln>
+        </p:spPr>
+        <p:txBody>
+          <a:bodyPr xmlns:a="http://schemas.openxmlformats.org/drawingml/2006/main"/>
+          <a:lstStyle xmlns:a="http://schemas.openxmlformats.org/drawingml/2006/main">
+            <a:defPPr>
+              <a:defRPr sz="1950">
+                <a:solidFill>
+                  <a:srgbClr val="172B3A"/>
+                </a:solidFill>
+                <a:latin typeface="Arial Unicode MS"/>
+                <a:ea typeface="Arial Unicode MS"/>
+                <a:cs typeface="Arial Unicode MS"/>
+              </a:defRPr>
+            </a:defPPr>
+            <a:lvl1pPr>
+              <a:defRPr sz="1950">
+                <a:solidFill>
+                  <a:srgbClr val="172B3A"/>
+                </a:solidFill>
+                <a:latin typeface="Arial Unicode MS"/>
+                <a:ea typeface="Arial Unicode MS"/>
+                <a:cs typeface="Arial Unicode MS"/>
+              </a:defRPr>
+            </a:lvl1pPr>
+            <a:lvl2pPr>
+              <a:defRPr sz="1950">
+                <a:solidFill>
+                  <a:srgbClr val="172B3A"/>
+                </a:solidFill>
+                <a:latin typeface="Arial Unicode MS"/>
+                <a:ea typeface="Arial Unicode MS"/>
+                <a:cs typeface="Arial Unicode MS"/>
+              </a:defRPr>
+            </a:lvl2pPr>
+            <a:lvl3pPr>
+              <a:defRPr sz="1950">
+                <a:solidFill>
+                  <a:srgbClr val="172B3A"/>
+                </a:solidFill>
+                <a:latin typeface="Arial Unicode MS"/>
+                <a:ea typeface="Arial Unicode MS"/>
+                <a:cs typeface="Arial Unicode MS"/>
+              </a:defRPr>
+            </a:lvl3pPr>
+            <a:lvl4pPr>
+              <a:defRPr sz="1950">
+                <a:solidFill>
+                  <a:srgbClr val="172B3A"/>
+                </a:solidFill>
+                <a:latin typeface="Arial Unicode MS"/>
+                <a:ea typeface="Arial Unicode MS"/>
+                <a:cs typeface="Arial Unicode MS"/>
+              </a:defRPr>
+            </a:lvl4pPr>
+            <a:lvl5pPr>
+              <a:defRPr sz="1950">
+                <a:solidFill>
+                  <a:srgbClr val="172B3A"/>
+                </a:solidFill>
+                <a:latin typeface="Arial Unicode MS"/>
+                <a:ea typeface="Arial Unicode MS"/>
+                <a:cs typeface="Arial Unicode MS"/>
+              </a:defRPr>
+            </a:lvl5pPr>
+            <a:lvl6pPr>
+              <a:defRPr sz="1950">
+                <a:solidFill>
+                  <a:srgbClr val="172B3A"/>
+                </a:solidFill>
+                <a:latin typeface="Arial Unicode MS"/>
+                <a:ea typeface="Arial Unicode MS"/>
+                <a:cs typeface="Arial Unicode MS"/>
+              </a:defRPr>
+            </a:lvl6pPr>
+            <a:lvl7pPr>
+              <a:defRPr sz="1950">
+                <a:solidFill>
+                  <a:srgbClr val="172B3A"/>
+                </a:solidFill>
+                <a:latin typeface="Arial Unicode MS"/>
+                <a:ea typeface="Arial Unicode MS"/>
+                <a:cs typeface="Arial Unicode MS"/>
+              </a:defRPr>
+            </a:lvl7pPr>
+            <a:lvl8pPr>
+              <a:defRPr sz="1950">
+                <a:solidFill>
+                  <a:srgbClr val="172B3A"/>
+                </a:solidFill>
+                <a:latin typeface="Arial Unicode MS"/>
+                <a:ea typeface="Arial Unicode MS"/>
+                <a:cs typeface="Arial Unicode MS"/>
+              </a:defRPr>
+            </a:lvl8pPr>
+            <a:lvl9pPr>
+              <a:defRPr sz="1950">
+                <a:solidFill>
+                  <a:srgbClr val="172B3A"/>
+                </a:solidFill>
+                <a:latin typeface="Arial Unicode MS"/>
+                <a:ea typeface="Arial Unicode MS"/>
+                <a:cs typeface="Arial Unicode MS"/>
+              </a:defRPr>
+            </a:lvl9pPr>
+          </a:lstStyle>
+          <a:p xmlns:a="http://schemas.openxmlformats.org/drawingml/2006/main">
+            <a:pPr>
+              <a:defRPr sz="1950">
+                <a:solidFill>
+                  <a:srgbClr val="172B3A"/>
+                </a:solidFill>
+                <a:latin typeface="Arial Unicode MS"/>
+                <a:ea typeface="Arial Unicode MS"/>
+                <a:cs typeface="Arial Unicode MS"/>
+              </a:defRPr>
+            </a:pPr>
+            <a:r>
+              <a:rPr sz="1950">
+                <a:solidFill>
+                  <a:srgbClr val="172B3A"/>
+                </a:solidFill>
+                <a:latin typeface="Arial Unicode MS"/>
+                <a:ea typeface="Arial Unicode MS"/>
+                <a:cs typeface="Arial Unicode MS"/>
+              </a:rPr>
+              <a:t>移动到下一个预测起点后，才加入当时新获得的历史观测。</a:t>
+            </a:r>
+          </a:p>
+        </p:txBody>
+      </p:sp>
+    </p:spTree>
+    <p:extLst>
+      <p:ext uri="{BB962C8B-B14F-4D97-AF65-F5344CB8AC3E}">
+        <p14:creationId xmlns:p14="http://schemas.microsoft.com/office/powerpoint/2010/main" val="1556267206"/>
+      </p:ext>
+    </p:extLst>
+  </p:cSld>
+</p:sld>
+</file>
+
+<file path=ppt/slides/slide25.xml><?xml version="1.0" encoding="utf-8"?>
+<p:sld xmlns:p="http://schemas.openxmlformats.org/presentationml/2006/main">
+  <p:cSld>
+    <p:bg>
+      <p:bgPr>
+        <a:solidFill xmlns:a="http://schemas.openxmlformats.org/drawingml/2006/main">
+          <a:srgbClr val="FFFFFF"/>
+        </a:solidFill>
+      </p:bgPr>
+    </p:bg>
+    <p:spTree>
+      <p:nvGrpSpPr>
+        <p:cNvPr id="1" name=""/>
+        <p:cNvGrpSpPr/>
+        <p:nvPr/>
+      </p:nvGrpSpPr>
+      <p:grpSpPr>
+        <a:xfrm xmlns:a="http://schemas.openxmlformats.org/drawingml/2006/main"/>
+      </p:grpSpPr>
+      <p:sp>
+        <p:nvSpPr>
+          <p:cNvPr id="6" name="">
+            <a:extLst xmlns:a="http://schemas.openxmlformats.org/drawingml/2006/main">
+              <a:ext uri="{FF2B5EF4-FFF2-40B4-BE49-F238E27FC236}">
+                <a16:creationId xmlns:a16="http://schemas.microsoft.com/office/drawing/2014/main" id="{349AB7F9-C75E-4D44-AFF5-A712F635C362}"/>
+              </a:ext>
+            </a:extLst>
+          </p:cNvPr>
+          <p:cNvSpPr>
+            <a:spLocks xmlns:a="http://schemas.openxmlformats.org/drawingml/2006/main" noGrp="1"/>
+          </p:cNvSpPr>
+          <p:nvPr/>
+        </p:nvSpPr>
+        <p:spPr>
+          <a:xfrm xmlns:a="http://schemas.openxmlformats.org/drawingml/2006/main">
+            <a:off x="571500" y="381000"/>
+            <a:ext cx="11049000" cy="857250"/>
+          </a:xfrm>
+          <a:prstGeom xmlns:a="http://schemas.openxmlformats.org/drawingml/2006/main" prst="rect">
+            <a:avLst/>
+          </a:prstGeom>
+          <a:noFill xmlns:a="http://schemas.openxmlformats.org/drawingml/2006/main"/>
+          <a:ln xmlns:a="http://schemas.openxmlformats.org/drawingml/2006/main" w="0">
+            <a:noFill/>
+          </a:ln>
+        </p:spPr>
+        <p:txBody>
+          <a:bodyPr xmlns:a="http://schemas.openxmlformats.org/drawingml/2006/main"/>
+          <a:lstStyle xmlns:a="http://schemas.openxmlformats.org/drawingml/2006/main">
+            <a:defPPr>
+              <a:defRPr sz="2925">
+                <a:solidFill>
+                  <a:srgbClr val="172B3A"/>
+                </a:solidFill>
+                <a:latin typeface="Arial Unicode MS"/>
+                <a:ea typeface="Arial Unicode MS"/>
+                <a:cs typeface="Arial Unicode MS"/>
+              </a:defRPr>
+            </a:defPPr>
+            <a:lvl1pPr>
+              <a:defRPr sz="2925">
+                <a:solidFill>
+                  <a:srgbClr val="172B3A"/>
+                </a:solidFill>
+                <a:latin typeface="Arial Unicode MS"/>
+                <a:ea typeface="Arial Unicode MS"/>
+                <a:cs typeface="Arial Unicode MS"/>
+              </a:defRPr>
+            </a:lvl1pPr>
+            <a:lvl2pPr>
+              <a:defRPr sz="2925">
+                <a:solidFill>
+                  <a:srgbClr val="172B3A"/>
+                </a:solidFill>
+                <a:latin typeface="Arial Unicode MS"/>
+                <a:ea typeface="Arial Unicode MS"/>
+                <a:cs typeface="Arial Unicode MS"/>
+              </a:defRPr>
+            </a:lvl2pPr>
+            <a:lvl3pPr>
+              <a:defRPr sz="2925">
+                <a:solidFill>
+                  <a:srgbClr val="172B3A"/>
+                </a:solidFill>
+                <a:latin typeface="Arial Unicode MS"/>
+                <a:ea typeface="Arial Unicode MS"/>
+                <a:cs typeface="Arial Unicode MS"/>
+              </a:defRPr>
+            </a:lvl3pPr>
+            <a:lvl4pPr>
+              <a:defRPr sz="2925">
+                <a:solidFill>
+                  <a:srgbClr val="172B3A"/>
+                </a:solidFill>
+                <a:latin typeface="Arial Unicode MS"/>
+                <a:ea typeface="Arial Unicode MS"/>
+                <a:cs typeface="Arial Unicode MS"/>
+              </a:defRPr>
+            </a:lvl4pPr>
+            <a:lvl5pPr>
+              <a:defRPr sz="2925">
+                <a:solidFill>
+                  <a:srgbClr val="172B3A"/>
+                </a:solidFill>
+                <a:latin typeface="Arial Unicode MS"/>
+                <a:ea typeface="Arial Unicode MS"/>
+                <a:cs typeface="Arial Unicode MS"/>
+              </a:defRPr>
+            </a:lvl5pPr>
+            <a:lvl6pPr>
+              <a:defRPr sz="2925">
+                <a:solidFill>
+                  <a:srgbClr val="172B3A"/>
+                </a:solidFill>
+                <a:latin typeface="Arial Unicode MS"/>
+                <a:ea typeface="Arial Unicode MS"/>
+                <a:cs typeface="Arial Unicode MS"/>
+              </a:defRPr>
+            </a:lvl6pPr>
+            <a:lvl7pPr>
+              <a:defRPr sz="2925">
+                <a:solidFill>
+                  <a:srgbClr val="172B3A"/>
+                </a:solidFill>
+                <a:latin typeface="Arial Unicode MS"/>
+                <a:ea typeface="Arial Unicode MS"/>
+                <a:cs typeface="Arial Unicode MS"/>
+              </a:defRPr>
+            </a:lvl7pPr>
+            <a:lvl8pPr>
+              <a:defRPr sz="2925">
+                <a:solidFill>
+                  <a:srgbClr val="172B3A"/>
+                </a:solidFill>
+                <a:latin typeface="Arial Unicode MS"/>
+                <a:ea typeface="Arial Unicode MS"/>
+                <a:cs typeface="Arial Unicode MS"/>
+              </a:defRPr>
+            </a:lvl8pPr>
+            <a:lvl9pPr>
+              <a:defRPr sz="2925">
+                <a:solidFill>
+                  <a:srgbClr val="172B3A"/>
+                </a:solidFill>
+                <a:latin typeface="Arial Unicode MS"/>
+                <a:ea typeface="Arial Unicode MS"/>
+                <a:cs typeface="Arial Unicode MS"/>
+              </a:defRPr>
+            </a:lvl9pPr>
+          </a:lstStyle>
+          <a:p xmlns:a="http://schemas.openxmlformats.org/drawingml/2006/main">
+            <a:pPr>
+              <a:defRPr sz="2925">
+                <a:solidFill>
+                  <a:srgbClr val="172B3A"/>
+                </a:solidFill>
+                <a:latin typeface="Arial Unicode MS"/>
+                <a:ea typeface="Arial Unicode MS"/>
+                <a:cs typeface="Arial Unicode MS"/>
+              </a:defRPr>
+            </a:pPr>
+            <a:r>
+              <a:rPr sz="2925">
+                <a:solidFill>
+                  <a:srgbClr val="172B3A"/>
+                </a:solidFill>
+                <a:latin typeface="Arial Unicode MS"/>
+                <a:ea typeface="Arial Unicode MS"/>
+                <a:cs typeface="Arial Unicode MS"/>
+              </a:rPr>
+              <a:t>05 / 三种方法与验证段选参</a:t>
+            </a:r>
+          </a:p>
+        </p:txBody>
+      </p:sp>
+      <p:sp>
+        <p:nvSpPr>
+          <p:cNvPr id="2" name="">
+            <a:extLst xmlns:a="http://schemas.openxmlformats.org/drawingml/2006/main">
+              <a:ext uri="{FF2B5EF4-FFF2-40B4-BE49-F238E27FC236}">
+                <a16:creationId xmlns:a16="http://schemas.microsoft.com/office/drawing/2014/main" id="{FE183C7F-C178-453B-9CE1-CDC2E5766057}"/>
+              </a:ext>
+            </a:extLst>
+          </p:cNvPr>
+          <p:cNvSpPr>
+            <a:spLocks xmlns:a="http://schemas.openxmlformats.org/drawingml/2006/main" noGrp="1"/>
+          </p:cNvSpPr>
+          <p:nvPr/>
+        </p:nvSpPr>
+        <p:spPr>
+          <a:xfrm xmlns:a="http://schemas.openxmlformats.org/drawingml/2006/main">
+            <a:off x="571500" y="6334125"/>
+            <a:ext cx="10477500" cy="285750"/>
+          </a:xfrm>
+          <a:prstGeom xmlns:a="http://schemas.openxmlformats.org/drawingml/2006/main" prst="rect">
+            <a:avLst/>
+          </a:prstGeom>
+          <a:noFill xmlns:a="http://schemas.openxmlformats.org/drawingml/2006/main"/>
+          <a:ln xmlns:a="http://schemas.openxmlformats.org/drawingml/2006/main" w="0">
+            <a:noFill/>
+          </a:ln>
+        </p:spPr>
+        <p:txBody>
+          <a:bodyPr xmlns:a="http://schemas.openxmlformats.org/drawingml/2006/main"/>
+          <a:lstStyle xmlns:a="http://schemas.openxmlformats.org/drawingml/2006/main">
+            <a:defPPr>
+              <a:defRPr sz="1200">
+                <a:solidFill>
+                  <a:srgbClr val="687985"/>
+                </a:solidFill>
+                <a:latin typeface="Arial Unicode MS"/>
+                <a:ea typeface="Arial Unicode MS"/>
+                <a:cs typeface="Arial Unicode MS"/>
+              </a:defRPr>
+            </a:defPPr>
+            <a:lvl1pPr>
+              <a:defRPr sz="1200">
+                <a:solidFill>
+                  <a:srgbClr val="687985"/>
+                </a:solidFill>
+                <a:latin typeface="Arial Unicode MS"/>
+                <a:ea typeface="Arial Unicode MS"/>
+                <a:cs typeface="Arial Unicode MS"/>
+              </a:defRPr>
+            </a:lvl1pPr>
+            <a:lvl2pPr>
+              <a:defRPr sz="1200">
+                <a:solidFill>
+                  <a:srgbClr val="687985"/>
+                </a:solidFill>
+                <a:latin typeface="Arial Unicode MS"/>
+                <a:ea typeface="Arial Unicode MS"/>
+                <a:cs typeface="Arial Unicode MS"/>
+              </a:defRPr>
+            </a:lvl2pPr>
+            <a:lvl3pPr>
+              <a:defRPr sz="1200">
+                <a:solidFill>
+                  <a:srgbClr val="687985"/>
+                </a:solidFill>
+                <a:latin typeface="Arial Unicode MS"/>
+                <a:ea typeface="Arial Unicode MS"/>
+                <a:cs typeface="Arial Unicode MS"/>
+              </a:defRPr>
+            </a:lvl3pPr>
+            <a:lvl4pPr>
+              <a:defRPr sz="1200">
+                <a:solidFill>
+                  <a:srgbClr val="687985"/>
+                </a:solidFill>
+                <a:latin typeface="Arial Unicode MS"/>
+                <a:ea typeface="Arial Unicode MS"/>
+                <a:cs typeface="Arial Unicode MS"/>
+              </a:defRPr>
+            </a:lvl4pPr>
+            <a:lvl5pPr>
+              <a:defRPr sz="1200">
+                <a:solidFill>
+                  <a:srgbClr val="687985"/>
+                </a:solidFill>
+                <a:latin typeface="Arial Unicode MS"/>
+                <a:ea typeface="Arial Unicode MS"/>
+                <a:cs typeface="Arial Unicode MS"/>
+              </a:defRPr>
+            </a:lvl5pPr>
+            <a:lvl6pPr>
+              <a:defRPr sz="1200">
+                <a:solidFill>
+                  <a:srgbClr val="687985"/>
+                </a:solidFill>
+                <a:latin typeface="Arial Unicode MS"/>
+                <a:ea typeface="Arial Unicode MS"/>
+                <a:cs typeface="Arial Unicode MS"/>
+              </a:defRPr>
+            </a:lvl6pPr>
+            <a:lvl7pPr>
+              <a:defRPr sz="1200">
+                <a:solidFill>
+                  <a:srgbClr val="687985"/>
+                </a:solidFill>
+                <a:latin typeface="Arial Unicode MS"/>
+                <a:ea typeface="Arial Unicode MS"/>
+                <a:cs typeface="Arial Unicode MS"/>
+              </a:defRPr>
+            </a:lvl7pPr>
+            <a:lvl8pPr>
+              <a:defRPr sz="1200">
+                <a:solidFill>
+                  <a:srgbClr val="687985"/>
+                </a:solidFill>
+                <a:latin typeface="Arial Unicode MS"/>
+                <a:ea typeface="Arial Unicode MS"/>
+                <a:cs typeface="Arial Unicode MS"/>
+              </a:defRPr>
+            </a:lvl8pPr>
+            <a:lvl9pPr>
+              <a:defRPr sz="1200">
+                <a:solidFill>
+                  <a:srgbClr val="687985"/>
+                </a:solidFill>
+                <a:latin typeface="Arial Unicode MS"/>
+                <a:ea typeface="Arial Unicode MS"/>
+                <a:cs typeface="Arial Unicode MS"/>
+              </a:defRPr>
+            </a:lvl9pPr>
+          </a:lstStyle>
+          <a:p xmlns:a="http://schemas.openxmlformats.org/drawingml/2006/main">
+            <a:pPr>
+              <a:defRPr sz="1200">
+                <a:solidFill>
+                  <a:srgbClr val="687985"/>
+                </a:solidFill>
+                <a:latin typeface="Arial Unicode MS"/>
+                <a:ea typeface="Arial Unicode MS"/>
+                <a:cs typeface="Arial Unicode MS"/>
+              </a:defRPr>
+            </a:pPr>
+            <a:r>
+              <a:rPr sz="1200">
+                <a:solidFill>
+                  <a:srgbClr val="687985"/>
+                </a:solidFill>
+                <a:latin typeface="Arial Unicode MS"/>
+                <a:ea typeface="Arial Unicode MS"/>
+                <a:cs typeface="Arial Unicode MS"/>
+              </a:rPr>
+              <a:t>工作过程记录  |  杨晓真 25121619  |  2026.10.28</a:t>
+            </a:r>
+          </a:p>
+        </p:txBody>
+      </p:sp>
+      <p:sp>
+        <p:nvSpPr>
+          <p:cNvPr id="3" name="">
+            <a:extLst xmlns:a="http://schemas.openxmlformats.org/drawingml/2006/main">
+              <a:ext uri="{FF2B5EF4-FFF2-40B4-BE49-F238E27FC236}">
+                <a16:creationId xmlns:a16="http://schemas.microsoft.com/office/drawing/2014/main" id="{2CBCC410-B29C-4B71-AEA3-8B5B78102945}"/>
+              </a:ext>
+            </a:extLst>
+          </p:cNvPr>
+          <p:cNvSpPr>
+            <a:spLocks xmlns:a="http://schemas.openxmlformats.org/drawingml/2006/main" noGrp="1"/>
+          </p:cNvSpPr>
+          <p:nvPr/>
+        </p:nvSpPr>
+        <p:spPr>
+          <a:xfrm xmlns:a="http://schemas.openxmlformats.org/drawingml/2006/main">
+            <a:off x="11144250" y="6334125"/>
+            <a:ext cx="714375" cy="285750"/>
+          </a:xfrm>
+          <a:prstGeom xmlns:a="http://schemas.openxmlformats.org/drawingml/2006/main" prst="rect">
+            <a:avLst/>
+          </a:prstGeom>
+          <a:noFill xmlns:a="http://schemas.openxmlformats.org/drawingml/2006/main"/>
+          <a:ln xmlns:a="http://schemas.openxmlformats.org/drawingml/2006/main" w="0">
+            <a:noFill/>
+          </a:ln>
+        </p:spPr>
+        <p:txBody>
+          <a:bodyPr xmlns:a="http://schemas.openxmlformats.org/drawingml/2006/main"/>
+          <a:lstStyle xmlns:a="http://schemas.openxmlformats.org/drawingml/2006/main">
+            <a:defPPr>
+              <a:defRPr sz="1200">
+                <a:solidFill>
+                  <a:srgbClr val="172B3A"/>
+                </a:solidFill>
+                <a:latin typeface="Arial Unicode MS"/>
+                <a:ea typeface="Arial Unicode MS"/>
+                <a:cs typeface="Arial Unicode MS"/>
+              </a:defRPr>
+            </a:defPPr>
+            <a:lvl1pPr>
+              <a:defRPr sz="1200">
+                <a:solidFill>
+                  <a:srgbClr val="172B3A"/>
+                </a:solidFill>
+                <a:latin typeface="Arial Unicode MS"/>
+                <a:ea typeface="Arial Unicode MS"/>
+                <a:cs typeface="Arial Unicode MS"/>
+              </a:defRPr>
+            </a:lvl1pPr>
+            <a:lvl2pPr>
+              <a:defRPr sz="1200">
+                <a:solidFill>
+                  <a:srgbClr val="172B3A"/>
+                </a:solidFill>
+                <a:latin typeface="Arial Unicode MS"/>
+                <a:ea typeface="Arial Unicode MS"/>
+                <a:cs typeface="Arial Unicode MS"/>
+              </a:defRPr>
+            </a:lvl2pPr>
+            <a:lvl3pPr>
+              <a:defRPr sz="1200">
+                <a:solidFill>
+                  <a:srgbClr val="172B3A"/>
+                </a:solidFill>
+                <a:latin typeface="Arial Unicode MS"/>
+                <a:ea typeface="Arial Unicode MS"/>
+                <a:cs typeface="Arial Unicode MS"/>
+              </a:defRPr>
+            </a:lvl3pPr>
+            <a:lvl4pPr>
+              <a:defRPr sz="1200">
+                <a:solidFill>
+                  <a:srgbClr val="172B3A"/>
+                </a:solidFill>
+                <a:latin typeface="Arial Unicode MS"/>
+                <a:ea typeface="Arial Unicode MS"/>
+                <a:cs typeface="Arial Unicode MS"/>
+              </a:defRPr>
+            </a:lvl4pPr>
+            <a:lvl5pPr>
+              <a:defRPr sz="1200">
+                <a:solidFill>
+                  <a:srgbClr val="172B3A"/>
+                </a:solidFill>
+                <a:latin typeface="Arial Unicode MS"/>
+                <a:ea typeface="Arial Unicode MS"/>
+                <a:cs typeface="Arial Unicode MS"/>
+              </a:defRPr>
+            </a:lvl5pPr>
+            <a:lvl6pPr>
+              <a:defRPr sz="1200">
+                <a:solidFill>
+                  <a:srgbClr val="172B3A"/>
+                </a:solidFill>
+                <a:latin typeface="Arial Unicode MS"/>
+                <a:ea typeface="Arial Unicode MS"/>
+                <a:cs typeface="Arial Unicode MS"/>
+              </a:defRPr>
+            </a:lvl6pPr>
+            <a:lvl7pPr>
+              <a:defRPr sz="1200">
+                <a:solidFill>
+                  <a:srgbClr val="172B3A"/>
+                </a:solidFill>
+                <a:latin typeface="Arial Unicode MS"/>
+                <a:ea typeface="Arial Unicode MS"/>
+                <a:cs typeface="Arial Unicode MS"/>
+              </a:defRPr>
+            </a:lvl7pPr>
+            <a:lvl8pPr>
+              <a:defRPr sz="1200">
+                <a:solidFill>
+                  <a:srgbClr val="172B3A"/>
+                </a:solidFill>
+                <a:latin typeface="Arial Unicode MS"/>
+                <a:ea typeface="Arial Unicode MS"/>
+                <a:cs typeface="Arial Unicode MS"/>
+              </a:defRPr>
+            </a:lvl8pPr>
+            <a:lvl9pPr>
+              <a:defRPr sz="1200">
+                <a:solidFill>
+                  <a:srgbClr val="172B3A"/>
+                </a:solidFill>
+                <a:latin typeface="Arial Unicode MS"/>
+                <a:ea typeface="Arial Unicode MS"/>
+                <a:cs typeface="Arial Unicode MS"/>
+              </a:defRPr>
+            </a:lvl9pPr>
+          </a:lstStyle>
+          <a:p xmlns:a="http://schemas.openxmlformats.org/drawingml/2006/main">
+            <a:pPr>
+              <a:defRPr sz="1200">
+                <a:solidFill>
+                  <a:srgbClr val="172B3A"/>
+                </a:solidFill>
+                <a:latin typeface="Arial Unicode MS"/>
+                <a:ea typeface="Arial Unicode MS"/>
+                <a:cs typeface="Arial Unicode MS"/>
+              </a:defRPr>
+            </a:pPr>
+            <a:r>
+              <a:rPr sz="1200">
+                <a:solidFill>
+                  <a:srgbClr val="172B3A"/>
+                </a:solidFill>
+                <a:latin typeface="Arial Unicode MS"/>
+                <a:ea typeface="Arial Unicode MS"/>
+                <a:cs typeface="Arial Unicode MS"/>
+              </a:rPr>
+              <a:t>25</a:t>
+            </a:r>
+          </a:p>
+        </p:txBody>
+      </p:sp>
+      <p:sp>
+        <p:nvSpPr>
+          <p:cNvPr id="4" name="">
+            <a:extLst xmlns:a="http://schemas.openxmlformats.org/drawingml/2006/main">
+              <a:ext uri="{FF2B5EF4-FFF2-40B4-BE49-F238E27FC236}">
+                <a16:creationId xmlns:a16="http://schemas.microsoft.com/office/drawing/2014/main" id="{B0137F67-6443-4189-A044-26ADEE010479}"/>
+              </a:ext>
+            </a:extLst>
+          </p:cNvPr>
+          <p:cNvSpPr>
+            <a:spLocks xmlns:a="http://schemas.openxmlformats.org/drawingml/2006/main" noGrp="1"/>
+          </p:cNvSpPr>
+          <p:nvPr/>
+        </p:nvSpPr>
+        <p:spPr>
+          <a:xfrm xmlns:a="http://schemas.openxmlformats.org/drawingml/2006/main">
+            <a:off x="619125" y="1524000"/>
+            <a:ext cx="10763250" cy="2286000"/>
+          </a:xfrm>
+          <a:prstGeom xmlns:a="http://schemas.openxmlformats.org/drawingml/2006/main" prst="rect">
+            <a:avLst/>
+          </a:prstGeom>
+          <a:noFill xmlns:a="http://schemas.openxmlformats.org/drawingml/2006/main"/>
+          <a:ln xmlns:a="http://schemas.openxmlformats.org/drawingml/2006/main" w="0">
+            <a:noFill/>
+          </a:ln>
+        </p:spPr>
+        <p:txBody>
+          <a:bodyPr xmlns:a="http://schemas.openxmlformats.org/drawingml/2006/main"/>
+          <a:lstStyle xmlns:a="http://schemas.openxmlformats.org/drawingml/2006/main">
+            <a:defPPr>
+              <a:defRPr sz="2175">
+                <a:solidFill>
+                  <a:srgbClr val="172B3A"/>
+                </a:solidFill>
+                <a:latin typeface="Arial Unicode MS"/>
+                <a:ea typeface="Arial Unicode MS"/>
+                <a:cs typeface="Arial Unicode MS"/>
+              </a:defRPr>
+            </a:defPPr>
+            <a:lvl1pPr>
+              <a:defRPr sz="2175">
+                <a:solidFill>
+                  <a:srgbClr val="172B3A"/>
+                </a:solidFill>
+                <a:latin typeface="Arial Unicode MS"/>
+                <a:ea typeface="Arial Unicode MS"/>
+                <a:cs typeface="Arial Unicode MS"/>
+              </a:defRPr>
+            </a:lvl1pPr>
+            <a:lvl2pPr>
+              <a:defRPr sz="2175">
+                <a:solidFill>
+                  <a:srgbClr val="172B3A"/>
+                </a:solidFill>
+                <a:latin typeface="Arial Unicode MS"/>
+                <a:ea typeface="Arial Unicode MS"/>
+                <a:cs typeface="Arial Unicode MS"/>
+              </a:defRPr>
+            </a:lvl2pPr>
+            <a:lvl3pPr>
+              <a:defRPr sz="2175">
+                <a:solidFill>
+                  <a:srgbClr val="172B3A"/>
+                </a:solidFill>
+                <a:latin typeface="Arial Unicode MS"/>
+                <a:ea typeface="Arial Unicode MS"/>
+                <a:cs typeface="Arial Unicode MS"/>
+              </a:defRPr>
+            </a:lvl3pPr>
+            <a:lvl4pPr>
+              <a:defRPr sz="2175">
+                <a:solidFill>
+                  <a:srgbClr val="172B3A"/>
+                </a:solidFill>
+                <a:latin typeface="Arial Unicode MS"/>
+                <a:ea typeface="Arial Unicode MS"/>
+                <a:cs typeface="Arial Unicode MS"/>
+              </a:defRPr>
+            </a:lvl4pPr>
+            <a:lvl5pPr>
+              <a:defRPr sz="2175">
+                <a:solidFill>
+                  <a:srgbClr val="172B3A"/>
+                </a:solidFill>
+                <a:latin typeface="Arial Unicode MS"/>
+                <a:ea typeface="Arial Unicode MS"/>
+                <a:cs typeface="Arial Unicode MS"/>
+              </a:defRPr>
+            </a:lvl5pPr>
+            <a:lvl6pPr>
+              <a:defRPr sz="2175">
+                <a:solidFill>
+                  <a:srgbClr val="172B3A"/>
+                </a:solidFill>
+                <a:latin typeface="Arial Unicode MS"/>
+                <a:ea typeface="Arial Unicode MS"/>
+                <a:cs typeface="Arial Unicode MS"/>
+              </a:defRPr>
+            </a:lvl6pPr>
+            <a:lvl7pPr>
+              <a:defRPr sz="2175">
+                <a:solidFill>
+                  <a:srgbClr val="172B3A"/>
+                </a:solidFill>
+                <a:latin typeface="Arial Unicode MS"/>
+                <a:ea typeface="Arial Unicode MS"/>
+                <a:cs typeface="Arial Unicode MS"/>
+              </a:defRPr>
+            </a:lvl7pPr>
+            <a:lvl8pPr>
+              <a:defRPr sz="2175">
+                <a:solidFill>
+                  <a:srgbClr val="172B3A"/>
+                </a:solidFill>
+                <a:latin typeface="Arial Unicode MS"/>
+                <a:ea typeface="Arial Unicode MS"/>
+                <a:cs typeface="Arial Unicode MS"/>
+              </a:defRPr>
+            </a:lvl8pPr>
+            <a:lvl9pPr>
+              <a:defRPr sz="2175">
+                <a:solidFill>
+                  <a:srgbClr val="172B3A"/>
+                </a:solidFill>
+                <a:latin typeface="Arial Unicode MS"/>
+                <a:ea typeface="Arial Unicode MS"/>
+                <a:cs typeface="Arial Unicode MS"/>
+              </a:defRPr>
+            </a:lvl9pPr>
+          </a:lstStyle>
+          <a:p xmlns:a="http://schemas.openxmlformats.org/drawingml/2006/main">
+            <a:pPr>
+              <a:defRPr sz="2175">
+                <a:solidFill>
+                  <a:srgbClr val="172B3A"/>
+                </a:solidFill>
+                <a:latin typeface="Arial Unicode MS"/>
+                <a:ea typeface="Arial Unicode MS"/>
+                <a:cs typeface="Arial Unicode MS"/>
+              </a:defRPr>
+            </a:pPr>
+            <a:r>
+              <a:rPr sz="2175">
+                <a:solidFill>
+                  <a:srgbClr val="172B3A"/>
+                </a:solidFill>
+                <a:latin typeface="Arial Unicode MS"/>
+                <a:ea typeface="Arial Unicode MS"/>
+                <a:cs typeface="Arial Unicode MS"/>
+              </a:rPr>
+              <a:t>容量保持基线：后h次容量等于起点容量</a:t>
+            </a:r>
+          </a:p>
+          <a:p xmlns:a="http://schemas.openxmlformats.org/drawingml/2006/main">
+            <a:r>
+              <a:t/>
+            </a:r>
+          </a:p>
+          <a:p xmlns:a="http://schemas.openxmlformats.org/drawingml/2006/main">
+            <a:pPr>
+              <a:defRPr sz="2175">
+                <a:solidFill>
+                  <a:srgbClr val="172B3A"/>
+                </a:solidFill>
+                <a:latin typeface="Arial Unicode MS"/>
+                <a:ea typeface="Arial Unicode MS"/>
+                <a:cs typeface="Arial Unicode MS"/>
+              </a:defRPr>
+            </a:pPr>
+            <a:r>
+              <a:rPr sz="2175">
+                <a:solidFill>
+                  <a:srgbClr val="172B3A"/>
+                </a:solidFill>
+                <a:latin typeface="Arial Unicode MS"/>
+                <a:ea typeface="Arial Unicode MS"/>
+                <a:cs typeface="Arial Unicode MS"/>
+              </a:rPr>
+              <a:t>最近20次线性趋势：当前历史拟合后直接外推h次</a:t>
+            </a:r>
+          </a:p>
+          <a:p xmlns:a="http://schemas.openxmlformats.org/drawingml/2006/main">
+            <a:r>
+              <a:t/>
+            </a:r>
+          </a:p>
+          <a:p xmlns:a="http://schemas.openxmlformats.org/drawingml/2006/main">
+            <a:pPr>
+              <a:defRPr sz="2175">
+                <a:solidFill>
+                  <a:srgbClr val="172B3A"/>
+                </a:solidFill>
+                <a:latin typeface="Arial Unicode MS"/>
+                <a:ea typeface="Arial Unicode MS"/>
+                <a:cs typeface="Arial Unicode MS"/>
+              </a:defRPr>
+            </a:pPr>
+            <a:r>
+              <a:rPr sz="2175">
+                <a:solidFill>
+                  <a:srgbClr val="172B3A"/>
+                </a:solidFill>
+                <a:latin typeface="Arial Unicode MS"/>
+                <a:ea typeface="Arial Unicode MS"/>
+                <a:cs typeface="Arial Unicode MS"/>
+              </a:rPr>
+              <a:t>直接多步岭回归：每个电池、每个距离独立拟合</a:t>
+            </a:r>
+          </a:p>
+        </p:txBody>
+      </p:sp>
+      <p:sp>
+        <p:nvSpPr>
+          <p:cNvPr id="5" name="">
+            <a:extLst xmlns:a="http://schemas.openxmlformats.org/drawingml/2006/main">
+              <a:ext uri="{FF2B5EF4-FFF2-40B4-BE49-F238E27FC236}">
+                <a16:creationId xmlns:a16="http://schemas.microsoft.com/office/drawing/2014/main" id="{40B15852-0272-43D9-A0FA-E7A5F7FC388C}"/>
+              </a:ext>
+            </a:extLst>
+          </p:cNvPr>
+          <p:cNvSpPr>
+            <a:spLocks xmlns:a="http://schemas.openxmlformats.org/drawingml/2006/main" noGrp="1"/>
+          </p:cNvSpPr>
+          <p:nvPr/>
+        </p:nvSpPr>
+        <p:spPr>
+          <a:xfrm xmlns:a="http://schemas.openxmlformats.org/drawingml/2006/main">
+            <a:off x="619125" y="4333875"/>
+            <a:ext cx="10763250" cy="1476375"/>
+          </a:xfrm>
+          <a:prstGeom xmlns:a="http://schemas.openxmlformats.org/drawingml/2006/main" prst="rect">
+            <a:avLst/>
+          </a:prstGeom>
+          <a:noFill xmlns:a="http://schemas.openxmlformats.org/drawingml/2006/main"/>
+          <a:ln xmlns:a="http://schemas.openxmlformats.org/drawingml/2006/main" w="0">
+            <a:noFill/>
+          </a:ln>
+        </p:spPr>
+        <p:txBody>
+          <a:bodyPr xmlns:a="http://schemas.openxmlformats.org/drawingml/2006/main"/>
+          <a:lstStyle xmlns:a="http://schemas.openxmlformats.org/drawingml/2006/main">
+            <a:defPPr>
+              <a:defRPr sz="2025">
+                <a:solidFill>
+                  <a:srgbClr val="176B87"/>
+                </a:solidFill>
+                <a:latin typeface="Arial Unicode MS"/>
+                <a:ea typeface="Arial Unicode MS"/>
+                <a:cs typeface="Arial Unicode MS"/>
+              </a:defRPr>
+            </a:defPPr>
+            <a:lvl1pPr>
+              <a:defRPr sz="2025">
+                <a:solidFill>
+                  <a:srgbClr val="176B87"/>
+                </a:solidFill>
+                <a:latin typeface="Arial Unicode MS"/>
+                <a:ea typeface="Arial Unicode MS"/>
+                <a:cs typeface="Arial Unicode MS"/>
+              </a:defRPr>
+            </a:lvl1pPr>
+            <a:lvl2pPr>
+              <a:defRPr sz="2025">
+                <a:solidFill>
+                  <a:srgbClr val="176B87"/>
+                </a:solidFill>
+                <a:latin typeface="Arial Unicode MS"/>
+                <a:ea typeface="Arial Unicode MS"/>
+                <a:cs typeface="Arial Unicode MS"/>
+              </a:defRPr>
+            </a:lvl2pPr>
+            <a:lvl3pPr>
+              <a:defRPr sz="2025">
+                <a:solidFill>
+                  <a:srgbClr val="176B87"/>
+                </a:solidFill>
+                <a:latin typeface="Arial Unicode MS"/>
+                <a:ea typeface="Arial Unicode MS"/>
+                <a:cs typeface="Arial Unicode MS"/>
+              </a:defRPr>
+            </a:lvl3pPr>
+            <a:lvl4pPr>
+              <a:defRPr sz="2025">
+                <a:solidFill>
+                  <a:srgbClr val="176B87"/>
+                </a:solidFill>
+                <a:latin typeface="Arial Unicode MS"/>
+                <a:ea typeface="Arial Unicode MS"/>
+                <a:cs typeface="Arial Unicode MS"/>
+              </a:defRPr>
+            </a:lvl4pPr>
+            <a:lvl5pPr>
+              <a:defRPr sz="2025">
+                <a:solidFill>
+                  <a:srgbClr val="176B87"/>
+                </a:solidFill>
+                <a:latin typeface="Arial Unicode MS"/>
+                <a:ea typeface="Arial Unicode MS"/>
+                <a:cs typeface="Arial Unicode MS"/>
+              </a:defRPr>
+            </a:lvl5pPr>
+            <a:lvl6pPr>
+              <a:defRPr sz="2025">
+                <a:solidFill>
+                  <a:srgbClr val="176B87"/>
+                </a:solidFill>
+                <a:latin typeface="Arial Unicode MS"/>
+                <a:ea typeface="Arial Unicode MS"/>
+                <a:cs typeface="Arial Unicode MS"/>
+              </a:defRPr>
+            </a:lvl6pPr>
+            <a:lvl7pPr>
+              <a:defRPr sz="2025">
+                <a:solidFill>
+                  <a:srgbClr val="176B87"/>
+                </a:solidFill>
+                <a:latin typeface="Arial Unicode MS"/>
+                <a:ea typeface="Arial Unicode MS"/>
+                <a:cs typeface="Arial Unicode MS"/>
+              </a:defRPr>
+            </a:lvl7pPr>
+            <a:lvl8pPr>
+              <a:defRPr sz="2025">
+                <a:solidFill>
+                  <a:srgbClr val="176B87"/>
+                </a:solidFill>
+                <a:latin typeface="Arial Unicode MS"/>
+                <a:ea typeface="Arial Unicode MS"/>
+                <a:cs typeface="Arial Unicode MS"/>
+              </a:defRPr>
+            </a:lvl8pPr>
+            <a:lvl9pPr>
+              <a:defRPr sz="2025">
+                <a:solidFill>
+                  <a:srgbClr val="176B87"/>
+                </a:solidFill>
+                <a:latin typeface="Arial Unicode MS"/>
+                <a:ea typeface="Arial Unicode MS"/>
+                <a:cs typeface="Arial Unicode MS"/>
+              </a:defRPr>
+            </a:lvl9pPr>
+          </a:lstStyle>
+          <a:p xmlns:a="http://schemas.openxmlformats.org/drawingml/2006/main">
+            <a:pPr>
+              <a:defRPr sz="2025">
+                <a:solidFill>
+                  <a:srgbClr val="176B87"/>
+                </a:solidFill>
+                <a:latin typeface="Arial Unicode MS"/>
+                <a:ea typeface="Arial Unicode MS"/>
+                <a:cs typeface="Arial Unicode MS"/>
+              </a:defRPr>
+            </a:pPr>
+            <a:r>
+              <a:rPr sz="2025">
+                <a:solidFill>
+                  <a:srgbClr val="176B87"/>
+                </a:solidFill>
+                <a:latin typeface="Arial Unicode MS"/>
+                <a:ea typeface="Arial Unicode MS"/>
+                <a:cs typeface="Arial Unicode MS"/>
+              </a:rPr>
+              <a:t>输入：目标循环、起点容量、最近5次容量均值和斜率</a:t>
+            </a:r>
+          </a:p>
+          <a:p xmlns:a="http://schemas.openxmlformats.org/drawingml/2006/main">
+            <a:pPr>
+              <a:defRPr sz="2025">
+                <a:solidFill>
+                  <a:srgbClr val="176B87"/>
+                </a:solidFill>
+                <a:latin typeface="Arial Unicode MS"/>
+                <a:ea typeface="Arial Unicode MS"/>
+                <a:cs typeface="Arial Unicode MS"/>
+              </a:defRPr>
+            </a:pPr>
+            <a:r>
+              <a:rPr sz="2025">
+                <a:solidFill>
+                  <a:srgbClr val="176B87"/>
+                </a:solidFill>
+                <a:latin typeface="Arial Unicode MS"/>
+                <a:ea typeface="Arial Unicode MS"/>
+                <a:cs typeface="Arial Unicode MS"/>
+              </a:rPr>
+              <a:t>alpha候选：0.01、0.1、1、10、100</a:t>
+            </a:r>
+          </a:p>
+          <a:p xmlns:a="http://schemas.openxmlformats.org/drawingml/2006/main">
+            <a:pPr>
+              <a:defRPr sz="2025">
+                <a:solidFill>
+                  <a:srgbClr val="176B87"/>
+                </a:solidFill>
+                <a:latin typeface="Arial Unicode MS"/>
+                <a:ea typeface="Arial Unicode MS"/>
+                <a:cs typeface="Arial Unicode MS"/>
+              </a:defRPr>
+            </a:pPr>
+            <a:r>
+              <a:rPr sz="2025">
+                <a:solidFill>
+                  <a:srgbClr val="176B87"/>
+                </a:solidFill>
+                <a:latin typeface="Arial Unicode MS"/>
+                <a:ea typeface="Arial Unicode MS"/>
+                <a:cs typeface="Arial Unicode MS"/>
+              </a:rPr>
+              <a:t>按验证RMSE选择，保存60组搜索和12个最终模型</a:t>
+            </a:r>
+          </a:p>
+        </p:txBody>
+      </p:sp>
+    </p:spTree>
+    <p:extLst>
+      <p:ext uri="{BB962C8B-B14F-4D97-AF65-F5344CB8AC3E}">
+        <p14:creationId xmlns:p14="http://schemas.microsoft.com/office/powerpoint/2010/main" val="1878550188"/>
+      </p:ext>
+    </p:extLst>
+  </p:cSld>
+</p:sld>
+</file>
+
+<file path=ppt/slides/slide26.xml><?xml version="1.0" encoding="utf-8"?>
+<p:sld xmlns:p="http://schemas.openxmlformats.org/presentationml/2006/main">
+  <p:cSld>
+    <p:bg>
+      <p:bgPr>
+        <a:solidFill xmlns:a="http://schemas.openxmlformats.org/drawingml/2006/main">
+          <a:srgbClr val="FFFFFF"/>
+        </a:solidFill>
+      </p:bgPr>
+    </p:bg>
+    <p:spTree>
+      <p:nvGrpSpPr>
+        <p:cNvPr id="1" name=""/>
+        <p:cNvGrpSpPr/>
+        <p:nvPr/>
+      </p:nvGrpSpPr>
+      <p:grpSpPr>
+        <a:xfrm xmlns:a="http://schemas.openxmlformats.org/drawingml/2006/main"/>
+      </p:grpSpPr>
+      <p:sp>
+        <p:nvSpPr>
+          <p:cNvPr id="6" name="">
+            <a:extLst xmlns:a="http://schemas.openxmlformats.org/drawingml/2006/main">
+              <a:ext uri="{FF2B5EF4-FFF2-40B4-BE49-F238E27FC236}">
+                <a16:creationId xmlns:a16="http://schemas.microsoft.com/office/drawing/2014/main" id="{BD873FCD-B3EF-47CE-A22C-266FD49AB933}"/>
+              </a:ext>
+            </a:extLst>
+          </p:cNvPr>
+          <p:cNvSpPr>
+            <a:spLocks xmlns:a="http://schemas.openxmlformats.org/drawingml/2006/main" noGrp="1"/>
+          </p:cNvSpPr>
+          <p:nvPr/>
+        </p:nvSpPr>
+        <p:spPr>
+          <a:xfrm xmlns:a="http://schemas.openxmlformats.org/drawingml/2006/main">
+            <a:off x="571500" y="381000"/>
+            <a:ext cx="11049000" cy="857250"/>
+          </a:xfrm>
+          <a:prstGeom xmlns:a="http://schemas.openxmlformats.org/drawingml/2006/main" prst="rect">
+            <a:avLst/>
+          </a:prstGeom>
+          <a:noFill xmlns:a="http://schemas.openxmlformats.org/drawingml/2006/main"/>
+          <a:ln xmlns:a="http://schemas.openxmlformats.org/drawingml/2006/main" w="0">
+            <a:noFill/>
+          </a:ln>
+        </p:spPr>
+        <p:txBody>
+          <a:bodyPr xmlns:a="http://schemas.openxmlformats.org/drawingml/2006/main"/>
+          <a:lstStyle xmlns:a="http://schemas.openxmlformats.org/drawingml/2006/main">
+            <a:defPPr>
+              <a:defRPr sz="2925">
+                <a:solidFill>
+                  <a:srgbClr val="172B3A"/>
+                </a:solidFill>
+                <a:latin typeface="Arial Unicode MS"/>
+                <a:ea typeface="Arial Unicode MS"/>
+                <a:cs typeface="Arial Unicode MS"/>
+              </a:defRPr>
+            </a:defPPr>
+            <a:lvl1pPr>
+              <a:defRPr sz="2925">
+                <a:solidFill>
+                  <a:srgbClr val="172B3A"/>
+                </a:solidFill>
+                <a:latin typeface="Arial Unicode MS"/>
+                <a:ea typeface="Arial Unicode MS"/>
+                <a:cs typeface="Arial Unicode MS"/>
+              </a:defRPr>
+            </a:lvl1pPr>
+            <a:lvl2pPr>
+              <a:defRPr sz="2925">
+                <a:solidFill>
+                  <a:srgbClr val="172B3A"/>
+                </a:solidFill>
+                <a:latin typeface="Arial Unicode MS"/>
+                <a:ea typeface="Arial Unicode MS"/>
+                <a:cs typeface="Arial Unicode MS"/>
+              </a:defRPr>
+            </a:lvl2pPr>
+            <a:lvl3pPr>
+              <a:defRPr sz="2925">
+                <a:solidFill>
+                  <a:srgbClr val="172B3A"/>
+                </a:solidFill>
+                <a:latin typeface="Arial Unicode MS"/>
+                <a:ea typeface="Arial Unicode MS"/>
+                <a:cs typeface="Arial Unicode MS"/>
+              </a:defRPr>
+            </a:lvl3pPr>
+            <a:lvl4pPr>
+              <a:defRPr sz="2925">
+                <a:solidFill>
+                  <a:srgbClr val="172B3A"/>
+                </a:solidFill>
+                <a:latin typeface="Arial Unicode MS"/>
+                <a:ea typeface="Arial Unicode MS"/>
+                <a:cs typeface="Arial Unicode MS"/>
+              </a:defRPr>
+            </a:lvl4pPr>
+            <a:lvl5pPr>
+              <a:defRPr sz="2925">
+                <a:solidFill>
+                  <a:srgbClr val="172B3A"/>
+                </a:solidFill>
+                <a:latin typeface="Arial Unicode MS"/>
+                <a:ea typeface="Arial Unicode MS"/>
+                <a:cs typeface="Arial Unicode MS"/>
+              </a:defRPr>
+            </a:lvl5pPr>
+            <a:lvl6pPr>
+              <a:defRPr sz="2925">
+                <a:solidFill>
+                  <a:srgbClr val="172B3A"/>
+                </a:solidFill>
+                <a:latin typeface="Arial Unicode MS"/>
+                <a:ea typeface="Arial Unicode MS"/>
+                <a:cs typeface="Arial Unicode MS"/>
+              </a:defRPr>
+            </a:lvl6pPr>
+            <a:lvl7pPr>
+              <a:defRPr sz="2925">
+                <a:solidFill>
+                  <a:srgbClr val="172B3A"/>
+                </a:solidFill>
+                <a:latin typeface="Arial Unicode MS"/>
+                <a:ea typeface="Arial Unicode MS"/>
+                <a:cs typeface="Arial Unicode MS"/>
+              </a:defRPr>
+            </a:lvl7pPr>
+            <a:lvl8pPr>
+              <a:defRPr sz="2925">
+                <a:solidFill>
+                  <a:srgbClr val="172B3A"/>
+                </a:solidFill>
+                <a:latin typeface="Arial Unicode MS"/>
+                <a:ea typeface="Arial Unicode MS"/>
+                <a:cs typeface="Arial Unicode MS"/>
+              </a:defRPr>
+            </a:lvl8pPr>
+            <a:lvl9pPr>
+              <a:defRPr sz="2925">
+                <a:solidFill>
+                  <a:srgbClr val="172B3A"/>
+                </a:solidFill>
+                <a:latin typeface="Arial Unicode MS"/>
+                <a:ea typeface="Arial Unicode MS"/>
+                <a:cs typeface="Arial Unicode MS"/>
+              </a:defRPr>
+            </a:lvl9pPr>
+          </a:lstStyle>
+          <a:p xmlns:a="http://schemas.openxmlformats.org/drawingml/2006/main">
+            <a:pPr>
+              <a:defRPr sz="2925">
+                <a:solidFill>
+                  <a:srgbClr val="172B3A"/>
+                </a:solidFill>
+                <a:latin typeface="Arial Unicode MS"/>
+                <a:ea typeface="Arial Unicode MS"/>
+                <a:cs typeface="Arial Unicode MS"/>
+              </a:defRPr>
+            </a:pPr>
+            <a:r>
+              <a:rPr sz="2925">
+                <a:solidFill>
+                  <a:srgbClr val="172B3A"/>
+                </a:solidFill>
+                <a:latin typeface="Arial Unicode MS"/>
+                <a:ea typeface="Arial Unicode MS"/>
+                <a:cs typeface="Arial Unicode MS"/>
+              </a:rPr>
+              <a:t>05 / 共同起点上的模型对比</a:t>
+            </a:r>
+          </a:p>
+        </p:txBody>
+      </p:sp>
+      <p:sp>
+        <p:nvSpPr>
+          <p:cNvPr id="2" name="">
+            <a:extLst xmlns:a="http://schemas.openxmlformats.org/drawingml/2006/main">
+              <a:ext uri="{FF2B5EF4-FFF2-40B4-BE49-F238E27FC236}">
+                <a16:creationId xmlns:a16="http://schemas.microsoft.com/office/drawing/2014/main" id="{C91710F2-197E-4C07-AE47-2950E460E4B5}"/>
+              </a:ext>
+            </a:extLst>
+          </p:cNvPr>
+          <p:cNvSpPr>
+            <a:spLocks xmlns:a="http://schemas.openxmlformats.org/drawingml/2006/main" noGrp="1"/>
+          </p:cNvSpPr>
+          <p:nvPr/>
+        </p:nvSpPr>
+        <p:spPr>
+          <a:xfrm xmlns:a="http://schemas.openxmlformats.org/drawingml/2006/main">
+            <a:off x="571500" y="6334125"/>
+            <a:ext cx="10477500" cy="285750"/>
+          </a:xfrm>
+          <a:prstGeom xmlns:a="http://schemas.openxmlformats.org/drawingml/2006/main" prst="rect">
+            <a:avLst/>
+          </a:prstGeom>
+          <a:noFill xmlns:a="http://schemas.openxmlformats.org/drawingml/2006/main"/>
+          <a:ln xmlns:a="http://schemas.openxmlformats.org/drawingml/2006/main" w="0">
+            <a:noFill/>
+          </a:ln>
+        </p:spPr>
+        <p:txBody>
+          <a:bodyPr xmlns:a="http://schemas.openxmlformats.org/drawingml/2006/main"/>
+          <a:lstStyle xmlns:a="http://schemas.openxmlformats.org/drawingml/2006/main">
+            <a:defPPr>
+              <a:defRPr sz="1200">
+                <a:solidFill>
+                  <a:srgbClr val="687985"/>
+                </a:solidFill>
+                <a:latin typeface="Arial Unicode MS"/>
+                <a:ea typeface="Arial Unicode MS"/>
+                <a:cs typeface="Arial Unicode MS"/>
+              </a:defRPr>
+            </a:defPPr>
+            <a:lvl1pPr>
+              <a:defRPr sz="1200">
+                <a:solidFill>
+                  <a:srgbClr val="687985"/>
+                </a:solidFill>
+                <a:latin typeface="Arial Unicode MS"/>
+                <a:ea typeface="Arial Unicode MS"/>
+                <a:cs typeface="Arial Unicode MS"/>
+              </a:defRPr>
+            </a:lvl1pPr>
+            <a:lvl2pPr>
+              <a:defRPr sz="1200">
+                <a:solidFill>
+                  <a:srgbClr val="687985"/>
+                </a:solidFill>
+                <a:latin typeface="Arial Unicode MS"/>
+                <a:ea typeface="Arial Unicode MS"/>
+                <a:cs typeface="Arial Unicode MS"/>
+              </a:defRPr>
+            </a:lvl2pPr>
+            <a:lvl3pPr>
+              <a:defRPr sz="1200">
+                <a:solidFill>
+                  <a:srgbClr val="687985"/>
+                </a:solidFill>
+                <a:latin typeface="Arial Unicode MS"/>
+                <a:ea typeface="Arial Unicode MS"/>
+                <a:cs typeface="Arial Unicode MS"/>
+              </a:defRPr>
+            </a:lvl3pPr>
+            <a:lvl4pPr>
+              <a:defRPr sz="1200">
+                <a:solidFill>
+                  <a:srgbClr val="687985"/>
+                </a:solidFill>
+                <a:latin typeface="Arial Unicode MS"/>
+                <a:ea typeface="Arial Unicode MS"/>
+                <a:cs typeface="Arial Unicode MS"/>
+              </a:defRPr>
+            </a:lvl4pPr>
+            <a:lvl5pPr>
+              <a:defRPr sz="1200">
+                <a:solidFill>
+                  <a:srgbClr val="687985"/>
+                </a:solidFill>
+                <a:latin typeface="Arial Unicode MS"/>
+                <a:ea typeface="Arial Unicode MS"/>
+                <a:cs typeface="Arial Unicode MS"/>
+              </a:defRPr>
+            </a:lvl5pPr>
+            <a:lvl6pPr>
+              <a:defRPr sz="1200">
+                <a:solidFill>
+                  <a:srgbClr val="687985"/>
+                </a:solidFill>
+                <a:latin typeface="Arial Unicode MS"/>
+                <a:ea typeface="Arial Unicode MS"/>
+                <a:cs typeface="Arial Unicode MS"/>
+              </a:defRPr>
+            </a:lvl6pPr>
+            <a:lvl7pPr>
+              <a:defRPr sz="1200">
+                <a:solidFill>
+                  <a:srgbClr val="687985"/>
+                </a:solidFill>
+                <a:latin typeface="Arial Unicode MS"/>
+                <a:ea typeface="Arial Unicode MS"/>
+                <a:cs typeface="Arial Unicode MS"/>
+              </a:defRPr>
+            </a:lvl7pPr>
+            <a:lvl8pPr>
+              <a:defRPr sz="1200">
+                <a:solidFill>
+                  <a:srgbClr val="687985"/>
+                </a:solidFill>
+                <a:latin typeface="Arial Unicode MS"/>
+                <a:ea typeface="Arial Unicode MS"/>
+                <a:cs typeface="Arial Unicode MS"/>
+              </a:defRPr>
+            </a:lvl8pPr>
+            <a:lvl9pPr>
+              <a:defRPr sz="1200">
+                <a:solidFill>
+                  <a:srgbClr val="687985"/>
+                </a:solidFill>
+                <a:latin typeface="Arial Unicode MS"/>
+                <a:ea typeface="Arial Unicode MS"/>
+                <a:cs typeface="Arial Unicode MS"/>
+              </a:defRPr>
+            </a:lvl9pPr>
+          </a:lstStyle>
+          <a:p xmlns:a="http://schemas.openxmlformats.org/drawingml/2006/main">
+            <a:pPr>
+              <a:defRPr sz="1200">
+                <a:solidFill>
+                  <a:srgbClr val="687985"/>
+                </a:solidFill>
+                <a:latin typeface="Arial Unicode MS"/>
+                <a:ea typeface="Arial Unicode MS"/>
+                <a:cs typeface="Arial Unicode MS"/>
+              </a:defRPr>
+            </a:pPr>
+            <a:r>
+              <a:rPr sz="1200">
+                <a:solidFill>
+                  <a:srgbClr val="687985"/>
+                </a:solidFill>
+                <a:latin typeface="Arial Unicode MS"/>
+                <a:ea typeface="Arial Unicode MS"/>
+                <a:cs typeface="Arial Unicode MS"/>
+              </a:rPr>
+              <a:t>工作过程记录  |  杨晓真 25121619  |  2026.10.28</a:t>
+            </a:r>
+          </a:p>
+        </p:txBody>
+      </p:sp>
+      <p:sp>
+        <p:nvSpPr>
+          <p:cNvPr id="3" name="">
+            <a:extLst xmlns:a="http://schemas.openxmlformats.org/drawingml/2006/main">
+              <a:ext uri="{FF2B5EF4-FFF2-40B4-BE49-F238E27FC236}">
+                <a16:creationId xmlns:a16="http://schemas.microsoft.com/office/drawing/2014/main" id="{FB8C8F4E-B687-4E6F-A1B3-CF5EE93733C7}"/>
+              </a:ext>
+            </a:extLst>
+          </p:cNvPr>
+          <p:cNvSpPr>
+            <a:spLocks xmlns:a="http://schemas.openxmlformats.org/drawingml/2006/main" noGrp="1"/>
+          </p:cNvSpPr>
+          <p:nvPr/>
+        </p:nvSpPr>
+        <p:spPr>
+          <a:xfrm xmlns:a="http://schemas.openxmlformats.org/drawingml/2006/main">
+            <a:off x="11144250" y="6334125"/>
+            <a:ext cx="714375" cy="285750"/>
+          </a:xfrm>
+          <a:prstGeom xmlns:a="http://schemas.openxmlformats.org/drawingml/2006/main" prst="rect">
+            <a:avLst/>
+          </a:prstGeom>
+          <a:noFill xmlns:a="http://schemas.openxmlformats.org/drawingml/2006/main"/>
+          <a:ln xmlns:a="http://schemas.openxmlformats.org/drawingml/2006/main" w="0">
+            <a:noFill/>
+          </a:ln>
+        </p:spPr>
+        <p:txBody>
+          <a:bodyPr xmlns:a="http://schemas.openxmlformats.org/drawingml/2006/main"/>
+          <a:lstStyle xmlns:a="http://schemas.openxmlformats.org/drawingml/2006/main">
+            <a:defPPr>
+              <a:defRPr sz="1200">
+                <a:solidFill>
+                  <a:srgbClr val="172B3A"/>
+                </a:solidFill>
+                <a:latin typeface="Arial Unicode MS"/>
+                <a:ea typeface="Arial Unicode MS"/>
+                <a:cs typeface="Arial Unicode MS"/>
+              </a:defRPr>
+            </a:defPPr>
+            <a:lvl1pPr>
+              <a:defRPr sz="1200">
+                <a:solidFill>
+                  <a:srgbClr val="172B3A"/>
+                </a:solidFill>
+                <a:latin typeface="Arial Unicode MS"/>
+                <a:ea typeface="Arial Unicode MS"/>
+                <a:cs typeface="Arial Unicode MS"/>
+              </a:defRPr>
+            </a:lvl1pPr>
+            <a:lvl2pPr>
+              <a:defRPr sz="1200">
+                <a:solidFill>
+                  <a:srgbClr val="172B3A"/>
+                </a:solidFill>
+                <a:latin typeface="Arial Unicode MS"/>
+                <a:ea typeface="Arial Unicode MS"/>
+                <a:cs typeface="Arial Unicode MS"/>
+              </a:defRPr>
+            </a:lvl2pPr>
+            <a:lvl3pPr>
+              <a:defRPr sz="1200">
+                <a:solidFill>
+                  <a:srgbClr val="172B3A"/>
+                </a:solidFill>
+                <a:latin typeface="Arial Unicode MS"/>
+                <a:ea typeface="Arial Unicode MS"/>
+                <a:cs typeface="Arial Unicode MS"/>
+              </a:defRPr>
+            </a:lvl3pPr>
+            <a:lvl4pPr>
+              <a:defRPr sz="1200">
+                <a:solidFill>
+                  <a:srgbClr val="172B3A"/>
+                </a:solidFill>
+                <a:latin typeface="Arial Unicode MS"/>
+                <a:ea typeface="Arial Unicode MS"/>
+                <a:cs typeface="Arial Unicode MS"/>
+              </a:defRPr>
+            </a:lvl4pPr>
+            <a:lvl5pPr>
+              <a:defRPr sz="1200">
+                <a:solidFill>
+                  <a:srgbClr val="172B3A"/>
+                </a:solidFill>
+                <a:latin typeface="Arial Unicode MS"/>
+                <a:ea typeface="Arial Unicode MS"/>
+                <a:cs typeface="Arial Unicode MS"/>
+              </a:defRPr>
+            </a:lvl5pPr>
+            <a:lvl6pPr>
+              <a:defRPr sz="1200">
+                <a:solidFill>
+                  <a:srgbClr val="172B3A"/>
+                </a:solidFill>
+                <a:latin typeface="Arial Unicode MS"/>
+                <a:ea typeface="Arial Unicode MS"/>
+                <a:cs typeface="Arial Unicode MS"/>
+              </a:defRPr>
+            </a:lvl6pPr>
+            <a:lvl7pPr>
+              <a:defRPr sz="1200">
+                <a:solidFill>
+                  <a:srgbClr val="172B3A"/>
+                </a:solidFill>
+                <a:latin typeface="Arial Unicode MS"/>
+                <a:ea typeface="Arial Unicode MS"/>
+                <a:cs typeface="Arial Unicode MS"/>
+              </a:defRPr>
+            </a:lvl7pPr>
+            <a:lvl8pPr>
+              <a:defRPr sz="1200">
+                <a:solidFill>
+                  <a:srgbClr val="172B3A"/>
+                </a:solidFill>
+                <a:latin typeface="Arial Unicode MS"/>
+                <a:ea typeface="Arial Unicode MS"/>
+                <a:cs typeface="Arial Unicode MS"/>
+              </a:defRPr>
+            </a:lvl8pPr>
+            <a:lvl9pPr>
+              <a:defRPr sz="1200">
+                <a:solidFill>
+                  <a:srgbClr val="172B3A"/>
+                </a:solidFill>
+                <a:latin typeface="Arial Unicode MS"/>
+                <a:ea typeface="Arial Unicode MS"/>
+                <a:cs typeface="Arial Unicode MS"/>
+              </a:defRPr>
+            </a:lvl9pPr>
+          </a:lstStyle>
+          <a:p xmlns:a="http://schemas.openxmlformats.org/drawingml/2006/main">
+            <a:pPr>
+              <a:defRPr sz="1200">
+                <a:solidFill>
+                  <a:srgbClr val="172B3A"/>
+                </a:solidFill>
+                <a:latin typeface="Arial Unicode MS"/>
+                <a:ea typeface="Arial Unicode MS"/>
+                <a:cs typeface="Arial Unicode MS"/>
+              </a:defRPr>
+            </a:pPr>
+            <a:r>
+              <a:rPr sz="1200">
+                <a:solidFill>
+                  <a:srgbClr val="172B3A"/>
+                </a:solidFill>
+                <a:latin typeface="Arial Unicode MS"/>
+                <a:ea typeface="Arial Unicode MS"/>
+                <a:cs typeface="Arial Unicode MS"/>
+              </a:rPr>
+              <a:t>26</a:t>
+            </a:r>
+          </a:p>
+        </p:txBody>
+      </p:sp>
+      <p:graphicFrame>
+        <p:nvGraphicFramePr>
+          <p:cNvPr id="4" name="Chart">
+            <a:extLst xmlns:a="http://schemas.openxmlformats.org/drawingml/2006/main">
+              <a:ext uri="{FF2B5EF4-FFF2-40B4-BE49-F238E27FC236}">
+                <a16:creationId xmlns:a16="http://schemas.microsoft.com/office/drawing/2014/main" id="{2AB47ECB-0478-4328-8F1B-44291DD93FE4}"/>
+              </a:ext>
+            </a:extLst>
+          </p:cNvPr>
+          <p:cNvGraphicFramePr/>
+          <p:nvPr/>
+        </p:nvGraphicFramePr>
+        <p:xfrm>
+          <a:off xmlns:a="http://schemas.openxmlformats.org/drawingml/2006/main" x="619125" y="1476375"/>
+          <a:ext xmlns:a="http://schemas.openxmlformats.org/drawingml/2006/main" cx="10763250" cy="3952875"/>
+        </p:xfrm>
+        <a:graphic xmlns:a="http://schemas.openxmlformats.org/drawingml/2006/main">
+          <a:graphicData uri="http://schemas.openxmlformats.org/drawingml/2006/chart">
+            <c:chart xmlns:r="http://schemas.openxmlformats.org/officeDocument/2006/relationships" xmlns:c="http://schemas.openxmlformats.org/drawingml/2006/chart" r:id="R18b19ca86a3740e9"/>
+          </a:graphicData>
+        </a:graphic>
+      </p:graphicFrame>
+      <p:sp>
+        <p:nvSpPr>
+          <p:cNvPr id="5" name="">
+            <a:extLst xmlns:a="http://schemas.openxmlformats.org/drawingml/2006/main">
+              <a:ext uri="{FF2B5EF4-FFF2-40B4-BE49-F238E27FC236}">
+                <a16:creationId xmlns:a16="http://schemas.microsoft.com/office/drawing/2014/main" id="{5063B3CB-0CF5-493D-A076-FD462F503027}"/>
+              </a:ext>
+            </a:extLst>
+          </p:cNvPr>
+          <p:cNvSpPr>
+            <a:spLocks xmlns:a="http://schemas.openxmlformats.org/drawingml/2006/main" noGrp="1"/>
+          </p:cNvSpPr>
+          <p:nvPr/>
+        </p:nvSpPr>
+        <p:spPr>
+          <a:xfrm xmlns:a="http://schemas.openxmlformats.org/drawingml/2006/main">
+            <a:off x="619125" y="5762625"/>
+            <a:ext cx="10763250" cy="428625"/>
+          </a:xfrm>
+          <a:prstGeom xmlns:a="http://schemas.openxmlformats.org/drawingml/2006/main" prst="rect">
+            <a:avLst/>
+          </a:prstGeom>
+          <a:noFill xmlns:a="http://schemas.openxmlformats.org/drawingml/2006/main"/>
+          <a:ln xmlns:a="http://schemas.openxmlformats.org/drawingml/2006/main" w="0">
+            <a:noFill/>
+          </a:ln>
+        </p:spPr>
+        <p:txBody>
+          <a:bodyPr xmlns:a="http://schemas.openxmlformats.org/drawingml/2006/main"/>
+          <a:lstStyle xmlns:a="http://schemas.openxmlformats.org/drawingml/2006/main">
+            <a:defPPr>
+              <a:defRPr sz="1875">
+                <a:solidFill>
+                  <a:srgbClr val="172B3A"/>
+                </a:solidFill>
+                <a:latin typeface="Arial Unicode MS"/>
+                <a:ea typeface="Arial Unicode MS"/>
+                <a:cs typeface="Arial Unicode MS"/>
+              </a:defRPr>
+            </a:defPPr>
+            <a:lvl1pPr>
+              <a:defRPr sz="1875">
+                <a:solidFill>
+                  <a:srgbClr val="172B3A"/>
+                </a:solidFill>
+                <a:latin typeface="Arial Unicode MS"/>
+                <a:ea typeface="Arial Unicode MS"/>
+                <a:cs typeface="Arial Unicode MS"/>
+              </a:defRPr>
+            </a:lvl1pPr>
+            <a:lvl2pPr>
+              <a:defRPr sz="1875">
+                <a:solidFill>
+                  <a:srgbClr val="172B3A"/>
+                </a:solidFill>
+                <a:latin typeface="Arial Unicode MS"/>
+                <a:ea typeface="Arial Unicode MS"/>
+                <a:cs typeface="Arial Unicode MS"/>
+              </a:defRPr>
+            </a:lvl2pPr>
+            <a:lvl3pPr>
+              <a:defRPr sz="1875">
+                <a:solidFill>
+                  <a:srgbClr val="172B3A"/>
+                </a:solidFill>
+                <a:latin typeface="Arial Unicode MS"/>
+                <a:ea typeface="Arial Unicode MS"/>
+                <a:cs typeface="Arial Unicode MS"/>
+              </a:defRPr>
+            </a:lvl3pPr>
+            <a:lvl4pPr>
+              <a:defRPr sz="1875">
+                <a:solidFill>
+                  <a:srgbClr val="172B3A"/>
+                </a:solidFill>
+                <a:latin typeface="Arial Unicode MS"/>
+                <a:ea typeface="Arial Unicode MS"/>
+                <a:cs typeface="Arial Unicode MS"/>
+              </a:defRPr>
+            </a:lvl4pPr>
+            <a:lvl5pPr>
+              <a:defRPr sz="1875">
+                <a:solidFill>
+                  <a:srgbClr val="172B3A"/>
+                </a:solidFill>
+                <a:latin typeface="Arial Unicode MS"/>
+                <a:ea typeface="Arial Unicode MS"/>
+                <a:cs typeface="Arial Unicode MS"/>
+              </a:defRPr>
+            </a:lvl5pPr>
+            <a:lvl6pPr>
+              <a:defRPr sz="1875">
+                <a:solidFill>
+                  <a:srgbClr val="172B3A"/>
+                </a:solidFill>
+                <a:latin typeface="Arial Unicode MS"/>
+                <a:ea typeface="Arial Unicode MS"/>
+                <a:cs typeface="Arial Unicode MS"/>
+              </a:defRPr>
+            </a:lvl6pPr>
+            <a:lvl7pPr>
+              <a:defRPr sz="1875">
+                <a:solidFill>
+                  <a:srgbClr val="172B3A"/>
+                </a:solidFill>
+                <a:latin typeface="Arial Unicode MS"/>
+                <a:ea typeface="Arial Unicode MS"/>
+                <a:cs typeface="Arial Unicode MS"/>
+              </a:defRPr>
+            </a:lvl7pPr>
+            <a:lvl8pPr>
+              <a:defRPr sz="1875">
+                <a:solidFill>
+                  <a:srgbClr val="172B3A"/>
+                </a:solidFill>
+                <a:latin typeface="Arial Unicode MS"/>
+                <a:ea typeface="Arial Unicode MS"/>
+                <a:cs typeface="Arial Unicode MS"/>
+              </a:defRPr>
+            </a:lvl8pPr>
+            <a:lvl9pPr>
+              <a:defRPr sz="1875">
+                <a:solidFill>
+                  <a:srgbClr val="172B3A"/>
+                </a:solidFill>
+                <a:latin typeface="Arial Unicode MS"/>
+                <a:ea typeface="Arial Unicode MS"/>
+                <a:cs typeface="Arial Unicode MS"/>
+              </a:defRPr>
+            </a:lvl9pPr>
+          </a:lstStyle>
+          <a:p xmlns:a="http://schemas.openxmlformats.org/drawingml/2006/main">
+            <a:pPr>
+              <a:defRPr sz="1875">
+                <a:solidFill>
+                  <a:srgbClr val="172B3A"/>
+                </a:solidFill>
+                <a:latin typeface="Arial Unicode MS"/>
+                <a:ea typeface="Arial Unicode MS"/>
+                <a:cs typeface="Arial Unicode MS"/>
+              </a:defRPr>
+            </a:pPr>
+            <a:r>
+              <a:rPr sz="1875">
+                <a:solidFill>
+                  <a:srgbClr val="172B3A"/>
+                </a:solidFill>
+                <a:latin typeface="Arial Unicode MS"/>
+                <a:ea typeface="Arial Unicode MS"/>
+                <a:cs typeface="Arial Unicode MS"/>
+              </a:rPr>
+              <a:t>1次时容量保持最低，5次和10次时最近20次线性趋势最低。</a:t>
+            </a:r>
+          </a:p>
+        </p:txBody>
+      </p:sp>
+    </p:spTree>
+    <p:extLst>
+      <p:ext uri="{BB962C8B-B14F-4D97-AF65-F5344CB8AC3E}">
+        <p14:creationId xmlns:p14="http://schemas.microsoft.com/office/powerpoint/2010/main" val="2000212103"/>
+      </p:ext>
+    </p:extLst>
+  </p:cSld>
+</p:sld>
+</file>
+
+<file path=ppt/slides/slide27.xml><?xml version="1.0" encoding="utf-8"?>
+<p:sld xmlns:p="http://schemas.openxmlformats.org/presentationml/2006/main">
+  <p:cSld>
+    <p:bg>
+      <p:bgPr>
+        <a:solidFill xmlns:a="http://schemas.openxmlformats.org/drawingml/2006/main">
+          <a:srgbClr val="FFFFFF"/>
+        </a:solidFill>
+      </p:bgPr>
+    </p:bg>
+    <p:spTree>
+      <p:nvGrpSpPr>
+        <p:cNvPr id="1" name=""/>
+        <p:cNvGrpSpPr/>
+        <p:nvPr/>
+      </p:nvGrpSpPr>
+      <p:grpSpPr>
+        <a:xfrm xmlns:a="http://schemas.openxmlformats.org/drawingml/2006/main"/>
+      </p:grpSpPr>
+      <p:sp>
+        <p:nvSpPr>
+          <p:cNvPr id="7" name="">
+            <a:extLst xmlns:a="http://schemas.openxmlformats.org/drawingml/2006/main">
+              <a:ext uri="{FF2B5EF4-FFF2-40B4-BE49-F238E27FC236}">
+                <a16:creationId xmlns:a16="http://schemas.microsoft.com/office/drawing/2014/main" id="{4FEB23C2-7B59-4B51-AC7E-0F1933676B41}"/>
+              </a:ext>
+            </a:extLst>
+          </p:cNvPr>
+          <p:cNvSpPr>
+            <a:spLocks xmlns:a="http://schemas.openxmlformats.org/drawingml/2006/main" noGrp="1"/>
+          </p:cNvSpPr>
+          <p:nvPr/>
+        </p:nvSpPr>
+        <p:spPr>
+          <a:xfrm xmlns:a="http://schemas.openxmlformats.org/drawingml/2006/main">
+            <a:off x="571500" y="381000"/>
+            <a:ext cx="11049000" cy="857250"/>
+          </a:xfrm>
+          <a:prstGeom xmlns:a="http://schemas.openxmlformats.org/drawingml/2006/main" prst="rect">
+            <a:avLst/>
+          </a:prstGeom>
+          <a:noFill xmlns:a="http://schemas.openxmlformats.org/drawingml/2006/main"/>
+          <a:ln xmlns:a="http://schemas.openxmlformats.org/drawingml/2006/main" w="0">
+            <a:noFill/>
+          </a:ln>
+        </p:spPr>
+        <p:txBody>
+          <a:bodyPr xmlns:a="http://schemas.openxmlformats.org/drawingml/2006/main"/>
+          <a:lstStyle xmlns:a="http://schemas.openxmlformats.org/drawingml/2006/main">
+            <a:defPPr>
+              <a:defRPr sz="2925">
+                <a:solidFill>
+                  <a:srgbClr val="172B3A"/>
+                </a:solidFill>
+                <a:latin typeface="Arial Unicode MS"/>
+                <a:ea typeface="Arial Unicode MS"/>
+                <a:cs typeface="Arial Unicode MS"/>
+              </a:defRPr>
+            </a:defPPr>
+            <a:lvl1pPr>
+              <a:defRPr sz="2925">
+                <a:solidFill>
+                  <a:srgbClr val="172B3A"/>
+                </a:solidFill>
+                <a:latin typeface="Arial Unicode MS"/>
+                <a:ea typeface="Arial Unicode MS"/>
+                <a:cs typeface="Arial Unicode MS"/>
+              </a:defRPr>
+            </a:lvl1pPr>
+            <a:lvl2pPr>
+              <a:defRPr sz="2925">
+                <a:solidFill>
+                  <a:srgbClr val="172B3A"/>
+                </a:solidFill>
+                <a:latin typeface="Arial Unicode MS"/>
+                <a:ea typeface="Arial Unicode MS"/>
+                <a:cs typeface="Arial Unicode MS"/>
+              </a:defRPr>
+            </a:lvl2pPr>
+            <a:lvl3pPr>
+              <a:defRPr sz="2925">
+                <a:solidFill>
+                  <a:srgbClr val="172B3A"/>
+                </a:solidFill>
+                <a:latin typeface="Arial Unicode MS"/>
+                <a:ea typeface="Arial Unicode MS"/>
+                <a:cs typeface="Arial Unicode MS"/>
+              </a:defRPr>
+            </a:lvl3pPr>
+            <a:lvl4pPr>
+              <a:defRPr sz="2925">
+                <a:solidFill>
+                  <a:srgbClr val="172B3A"/>
+                </a:solidFill>
+                <a:latin typeface="Arial Unicode MS"/>
+                <a:ea typeface="Arial Unicode MS"/>
+                <a:cs typeface="Arial Unicode MS"/>
+              </a:defRPr>
+            </a:lvl4pPr>
+            <a:lvl5pPr>
+              <a:defRPr sz="2925">
+                <a:solidFill>
+                  <a:srgbClr val="172B3A"/>
+                </a:solidFill>
+                <a:latin typeface="Arial Unicode MS"/>
+                <a:ea typeface="Arial Unicode MS"/>
+                <a:cs typeface="Arial Unicode MS"/>
+              </a:defRPr>
+            </a:lvl5pPr>
+            <a:lvl6pPr>
+              <a:defRPr sz="2925">
+                <a:solidFill>
+                  <a:srgbClr val="172B3A"/>
+                </a:solidFill>
+                <a:latin typeface="Arial Unicode MS"/>
+                <a:ea typeface="Arial Unicode MS"/>
+                <a:cs typeface="Arial Unicode MS"/>
+              </a:defRPr>
+            </a:lvl6pPr>
+            <a:lvl7pPr>
+              <a:defRPr sz="2925">
+                <a:solidFill>
+                  <a:srgbClr val="172B3A"/>
+                </a:solidFill>
+                <a:latin typeface="Arial Unicode MS"/>
+                <a:ea typeface="Arial Unicode MS"/>
+                <a:cs typeface="Arial Unicode MS"/>
+              </a:defRPr>
+            </a:lvl7pPr>
+            <a:lvl8pPr>
+              <a:defRPr sz="2925">
+                <a:solidFill>
+                  <a:srgbClr val="172B3A"/>
+                </a:solidFill>
+                <a:latin typeface="Arial Unicode MS"/>
+                <a:ea typeface="Arial Unicode MS"/>
+                <a:cs typeface="Arial Unicode MS"/>
+              </a:defRPr>
+            </a:lvl8pPr>
+            <a:lvl9pPr>
+              <a:defRPr sz="2925">
+                <a:solidFill>
+                  <a:srgbClr val="172B3A"/>
+                </a:solidFill>
+                <a:latin typeface="Arial Unicode MS"/>
+                <a:ea typeface="Arial Unicode MS"/>
+                <a:cs typeface="Arial Unicode MS"/>
+              </a:defRPr>
+            </a:lvl9pPr>
+          </a:lstStyle>
+          <a:p xmlns:a="http://schemas.openxmlformats.org/drawingml/2006/main">
+            <a:pPr>
+              <a:defRPr sz="2925">
+                <a:solidFill>
+                  <a:srgbClr val="172B3A"/>
+                </a:solidFill>
+                <a:latin typeface="Arial Unicode MS"/>
+                <a:ea typeface="Arial Unicode MS"/>
+                <a:cs typeface="Arial Unicode MS"/>
+              </a:defRPr>
+            </a:pPr>
+            <a:r>
+              <a:rPr sz="2925">
+                <a:solidFill>
+                  <a:srgbClr val="172B3A"/>
+                </a:solidFill>
+                <a:latin typeface="Arial Unicode MS"/>
+                <a:ea typeface="Arial Unicode MS"/>
+                <a:cs typeface="Arial Unicode MS"/>
+              </a:rPr>
+              <a:t>05 / 个体差异与版本留痕</a:t>
+            </a:r>
+          </a:p>
+        </p:txBody>
+      </p:sp>
+      <p:sp>
+        <p:nvSpPr>
+          <p:cNvPr id="2" name="">
+            <a:extLst xmlns:a="http://schemas.openxmlformats.org/drawingml/2006/main">
+              <a:ext uri="{FF2B5EF4-FFF2-40B4-BE49-F238E27FC236}">
+                <a16:creationId xmlns:a16="http://schemas.microsoft.com/office/drawing/2014/main" id="{2AE02E6D-B424-492F-B8D4-489BC7430352}"/>
+              </a:ext>
+            </a:extLst>
+          </p:cNvPr>
+          <p:cNvSpPr>
+            <a:spLocks xmlns:a="http://schemas.openxmlformats.org/drawingml/2006/main" noGrp="1"/>
+          </p:cNvSpPr>
+          <p:nvPr/>
+        </p:nvSpPr>
+        <p:spPr>
+          <a:xfrm xmlns:a="http://schemas.openxmlformats.org/drawingml/2006/main">
+            <a:off x="571500" y="6334125"/>
+            <a:ext cx="10477500" cy="285750"/>
+          </a:xfrm>
+          <a:prstGeom xmlns:a="http://schemas.openxmlformats.org/drawingml/2006/main" prst="rect">
+            <a:avLst/>
+          </a:prstGeom>
+          <a:noFill xmlns:a="http://schemas.openxmlformats.org/drawingml/2006/main"/>
+          <a:ln xmlns:a="http://schemas.openxmlformats.org/drawingml/2006/main" w="0">
+            <a:noFill/>
+          </a:ln>
+        </p:spPr>
+        <p:txBody>
+          <a:bodyPr xmlns:a="http://schemas.openxmlformats.org/drawingml/2006/main"/>
+          <a:lstStyle xmlns:a="http://schemas.openxmlformats.org/drawingml/2006/main">
+            <a:defPPr>
+              <a:defRPr sz="1200">
+                <a:solidFill>
+                  <a:srgbClr val="687985"/>
+                </a:solidFill>
+                <a:latin typeface="Arial Unicode MS"/>
+                <a:ea typeface="Arial Unicode MS"/>
+                <a:cs typeface="Arial Unicode MS"/>
+              </a:defRPr>
+            </a:defPPr>
+            <a:lvl1pPr>
+              <a:defRPr sz="1200">
+                <a:solidFill>
+                  <a:srgbClr val="687985"/>
+                </a:solidFill>
+                <a:latin typeface="Arial Unicode MS"/>
+                <a:ea typeface="Arial Unicode MS"/>
+                <a:cs typeface="Arial Unicode MS"/>
+              </a:defRPr>
+            </a:lvl1pPr>
+            <a:lvl2pPr>
+              <a:defRPr sz="1200">
+                <a:solidFill>
+                  <a:srgbClr val="687985"/>
+                </a:solidFill>
+                <a:latin typeface="Arial Unicode MS"/>
+                <a:ea typeface="Arial Unicode MS"/>
+                <a:cs typeface="Arial Unicode MS"/>
+              </a:defRPr>
+            </a:lvl2pPr>
+            <a:lvl3pPr>
+              <a:defRPr sz="1200">
+                <a:solidFill>
+                  <a:srgbClr val="687985"/>
+                </a:solidFill>
+                <a:latin typeface="Arial Unicode MS"/>
+                <a:ea typeface="Arial Unicode MS"/>
+                <a:cs typeface="Arial Unicode MS"/>
+              </a:defRPr>
+            </a:lvl3pPr>
+            <a:lvl4pPr>
+              <a:defRPr sz="1200">
+                <a:solidFill>
+                  <a:srgbClr val="687985"/>
+                </a:solidFill>
+                <a:latin typeface="Arial Unicode MS"/>
+                <a:ea typeface="Arial Unicode MS"/>
+                <a:cs typeface="Arial Unicode MS"/>
+              </a:defRPr>
+            </a:lvl4pPr>
+            <a:lvl5pPr>
+              <a:defRPr sz="1200">
+                <a:solidFill>
+                  <a:srgbClr val="687985"/>
+                </a:solidFill>
+                <a:latin typeface="Arial Unicode MS"/>
+                <a:ea typeface="Arial Unicode MS"/>
+                <a:cs typeface="Arial Unicode MS"/>
+              </a:defRPr>
+            </a:lvl5pPr>
+            <a:lvl6pPr>
+              <a:defRPr sz="1200">
+                <a:solidFill>
+                  <a:srgbClr val="687985"/>
+                </a:solidFill>
+                <a:latin typeface="Arial Unicode MS"/>
+                <a:ea typeface="Arial Unicode MS"/>
+                <a:cs typeface="Arial Unicode MS"/>
+              </a:defRPr>
+            </a:lvl6pPr>
+            <a:lvl7pPr>
+              <a:defRPr sz="1200">
+                <a:solidFill>
+                  <a:srgbClr val="687985"/>
+                </a:solidFill>
+                <a:latin typeface="Arial Unicode MS"/>
+                <a:ea typeface="Arial Unicode MS"/>
+                <a:cs typeface="Arial Unicode MS"/>
+              </a:defRPr>
+            </a:lvl7pPr>
+            <a:lvl8pPr>
+              <a:defRPr sz="1200">
+                <a:solidFill>
+                  <a:srgbClr val="687985"/>
+                </a:solidFill>
+                <a:latin typeface="Arial Unicode MS"/>
+                <a:ea typeface="Arial Unicode MS"/>
+                <a:cs typeface="Arial Unicode MS"/>
+              </a:defRPr>
+            </a:lvl8pPr>
+            <a:lvl9pPr>
+              <a:defRPr sz="1200">
+                <a:solidFill>
+                  <a:srgbClr val="687985"/>
+                </a:solidFill>
+                <a:latin typeface="Arial Unicode MS"/>
+                <a:ea typeface="Arial Unicode MS"/>
+                <a:cs typeface="Arial Unicode MS"/>
+              </a:defRPr>
+            </a:lvl9pPr>
+          </a:lstStyle>
+          <a:p xmlns:a="http://schemas.openxmlformats.org/drawingml/2006/main">
+            <a:pPr>
+              <a:defRPr sz="1200">
+                <a:solidFill>
+                  <a:srgbClr val="687985"/>
+                </a:solidFill>
+                <a:latin typeface="Arial Unicode MS"/>
+                <a:ea typeface="Arial Unicode MS"/>
+                <a:cs typeface="Arial Unicode MS"/>
+              </a:defRPr>
+            </a:pPr>
+            <a:r>
+              <a:rPr sz="1200">
+                <a:solidFill>
+                  <a:srgbClr val="687985"/>
+                </a:solidFill>
+                <a:latin typeface="Arial Unicode MS"/>
+                <a:ea typeface="Arial Unicode MS"/>
+                <a:cs typeface="Arial Unicode MS"/>
+              </a:rPr>
+              <a:t>工作过程记录  |  杨晓真 25121619  |  2026.10.28</a:t>
+            </a:r>
+          </a:p>
+        </p:txBody>
+      </p:sp>
+      <p:sp>
+        <p:nvSpPr>
+          <p:cNvPr id="3" name="">
+            <a:extLst xmlns:a="http://schemas.openxmlformats.org/drawingml/2006/main">
+              <a:ext uri="{FF2B5EF4-FFF2-40B4-BE49-F238E27FC236}">
+                <a16:creationId xmlns:a16="http://schemas.microsoft.com/office/drawing/2014/main" id="{E4619838-6E46-4D26-B626-F286B4375109}"/>
+              </a:ext>
+            </a:extLst>
+          </p:cNvPr>
+          <p:cNvSpPr>
+            <a:spLocks xmlns:a="http://schemas.openxmlformats.org/drawingml/2006/main" noGrp="1"/>
+          </p:cNvSpPr>
+          <p:nvPr/>
+        </p:nvSpPr>
+        <p:spPr>
+          <a:xfrm xmlns:a="http://schemas.openxmlformats.org/drawingml/2006/main">
+            <a:off x="11144250" y="6334125"/>
+            <a:ext cx="714375" cy="285750"/>
+          </a:xfrm>
+          <a:prstGeom xmlns:a="http://schemas.openxmlformats.org/drawingml/2006/main" prst="rect">
+            <a:avLst/>
+          </a:prstGeom>
+          <a:noFill xmlns:a="http://schemas.openxmlformats.org/drawingml/2006/main"/>
+          <a:ln xmlns:a="http://schemas.openxmlformats.org/drawingml/2006/main" w="0">
+            <a:noFill/>
+          </a:ln>
+        </p:spPr>
+        <p:txBody>
+          <a:bodyPr xmlns:a="http://schemas.openxmlformats.org/drawingml/2006/main"/>
+          <a:lstStyle xmlns:a="http://schemas.openxmlformats.org/drawingml/2006/main">
+            <a:defPPr>
+              <a:defRPr sz="1200">
+                <a:solidFill>
+                  <a:srgbClr val="172B3A"/>
+                </a:solidFill>
+                <a:latin typeface="Arial Unicode MS"/>
+                <a:ea typeface="Arial Unicode MS"/>
+                <a:cs typeface="Arial Unicode MS"/>
+              </a:defRPr>
+            </a:defPPr>
+            <a:lvl1pPr>
+              <a:defRPr sz="1200">
+                <a:solidFill>
+                  <a:srgbClr val="172B3A"/>
+                </a:solidFill>
+                <a:latin typeface="Arial Unicode MS"/>
+                <a:ea typeface="Arial Unicode MS"/>
+                <a:cs typeface="Arial Unicode MS"/>
+              </a:defRPr>
+            </a:lvl1pPr>
+            <a:lvl2pPr>
+              <a:defRPr sz="1200">
+                <a:solidFill>
+                  <a:srgbClr val="172B3A"/>
+                </a:solidFill>
+                <a:latin typeface="Arial Unicode MS"/>
+                <a:ea typeface="Arial Unicode MS"/>
+                <a:cs typeface="Arial Unicode MS"/>
+              </a:defRPr>
+            </a:lvl2pPr>
+            <a:lvl3pPr>
+              <a:defRPr sz="1200">
+                <a:solidFill>
+                  <a:srgbClr val="172B3A"/>
+                </a:solidFill>
+                <a:latin typeface="Arial Unicode MS"/>
+                <a:ea typeface="Arial Unicode MS"/>
+                <a:cs typeface="Arial Unicode MS"/>
+              </a:defRPr>
+            </a:lvl3pPr>
+            <a:lvl4pPr>
+              <a:defRPr sz="1200">
+                <a:solidFill>
+                  <a:srgbClr val="172B3A"/>
+                </a:solidFill>
+                <a:latin typeface="Arial Unicode MS"/>
+                <a:ea typeface="Arial Unicode MS"/>
+                <a:cs typeface="Arial Unicode MS"/>
+              </a:defRPr>
+            </a:lvl4pPr>
+            <a:lvl5pPr>
+              <a:defRPr sz="1200">
+                <a:solidFill>
+                  <a:srgbClr val="172B3A"/>
+                </a:solidFill>
+                <a:latin typeface="Arial Unicode MS"/>
+                <a:ea typeface="Arial Unicode MS"/>
+                <a:cs typeface="Arial Unicode MS"/>
+              </a:defRPr>
+            </a:lvl5pPr>
+            <a:lvl6pPr>
+              <a:defRPr sz="1200">
+                <a:solidFill>
+                  <a:srgbClr val="172B3A"/>
+                </a:solidFill>
+                <a:latin typeface="Arial Unicode MS"/>
+                <a:ea typeface="Arial Unicode MS"/>
+                <a:cs typeface="Arial Unicode MS"/>
+              </a:defRPr>
+            </a:lvl6pPr>
+            <a:lvl7pPr>
+              <a:defRPr sz="1200">
+                <a:solidFill>
+                  <a:srgbClr val="172B3A"/>
+                </a:solidFill>
+                <a:latin typeface="Arial Unicode MS"/>
+                <a:ea typeface="Arial Unicode MS"/>
+                <a:cs typeface="Arial Unicode MS"/>
+              </a:defRPr>
+            </a:lvl7pPr>
+            <a:lvl8pPr>
+              <a:defRPr sz="1200">
+                <a:solidFill>
+                  <a:srgbClr val="172B3A"/>
+                </a:solidFill>
+                <a:latin typeface="Arial Unicode MS"/>
+                <a:ea typeface="Arial Unicode MS"/>
+                <a:cs typeface="Arial Unicode MS"/>
+              </a:defRPr>
+            </a:lvl8pPr>
+            <a:lvl9pPr>
+              <a:defRPr sz="1200">
+                <a:solidFill>
+                  <a:srgbClr val="172B3A"/>
+                </a:solidFill>
+                <a:latin typeface="Arial Unicode MS"/>
+                <a:ea typeface="Arial Unicode MS"/>
+                <a:cs typeface="Arial Unicode MS"/>
+              </a:defRPr>
+            </a:lvl9pPr>
+          </a:lstStyle>
+          <a:p xmlns:a="http://schemas.openxmlformats.org/drawingml/2006/main">
+            <a:pPr>
+              <a:defRPr sz="1200">
+                <a:solidFill>
+                  <a:srgbClr val="172B3A"/>
+                </a:solidFill>
+                <a:latin typeface="Arial Unicode MS"/>
+                <a:ea typeface="Arial Unicode MS"/>
+                <a:cs typeface="Arial Unicode MS"/>
+              </a:defRPr>
+            </a:pPr>
+            <a:r>
+              <a:rPr sz="1200">
+                <a:solidFill>
+                  <a:srgbClr val="172B3A"/>
+                </a:solidFill>
+                <a:latin typeface="Arial Unicode MS"/>
+                <a:ea typeface="Arial Unicode MS"/>
+                <a:cs typeface="Arial Unicode MS"/>
+              </a:rPr>
+              <a:t>27</a:t>
+            </a:r>
+          </a:p>
+        </p:txBody>
+      </p:sp>
+      <p:sp>
+        <p:nvSpPr>
+          <p:cNvPr id="4" name="">
+            <a:extLst xmlns:a="http://schemas.openxmlformats.org/drawingml/2006/main">
+              <a:ext uri="{FF2B5EF4-FFF2-40B4-BE49-F238E27FC236}">
+                <a16:creationId xmlns:a16="http://schemas.microsoft.com/office/drawing/2014/main" id="{7729C70A-6234-45F3-9E6B-F639DBA0E654}"/>
+              </a:ext>
+            </a:extLst>
+          </p:cNvPr>
+          <p:cNvSpPr>
+            <a:spLocks xmlns:a="http://schemas.openxmlformats.org/drawingml/2006/main" noGrp="1"/>
+          </p:cNvSpPr>
+          <p:nvPr/>
+        </p:nvSpPr>
+        <p:spPr>
+          <a:xfrm xmlns:a="http://schemas.openxmlformats.org/drawingml/2006/main">
+            <a:off x="619125" y="1476375"/>
+            <a:ext cx="10763250" cy="1476375"/>
+          </a:xfrm>
+          <a:prstGeom xmlns:a="http://schemas.openxmlformats.org/drawingml/2006/main" prst="rect">
+            <a:avLst/>
+          </a:prstGeom>
+          <a:noFill xmlns:a="http://schemas.openxmlformats.org/drawingml/2006/main"/>
+          <a:ln xmlns:a="http://schemas.openxmlformats.org/drawingml/2006/main" w="0">
+            <a:noFill/>
+          </a:ln>
+        </p:spPr>
+        <p:txBody>
+          <a:bodyPr xmlns:a="http://schemas.openxmlformats.org/drawingml/2006/main"/>
+          <a:lstStyle xmlns:a="http://schemas.openxmlformats.org/drawingml/2006/main">
+            <a:defPPr>
+              <a:defRPr sz="2175">
+                <a:solidFill>
+                  <a:srgbClr val="176B87"/>
+                </a:solidFill>
+                <a:latin typeface="Arial Unicode MS"/>
+                <a:ea typeface="Arial Unicode MS"/>
+                <a:cs typeface="Arial Unicode MS"/>
+              </a:defRPr>
+            </a:defPPr>
+            <a:lvl1pPr>
+              <a:defRPr sz="2175">
+                <a:solidFill>
+                  <a:srgbClr val="176B87"/>
+                </a:solidFill>
+                <a:latin typeface="Arial Unicode MS"/>
+                <a:ea typeface="Arial Unicode MS"/>
+                <a:cs typeface="Arial Unicode MS"/>
+              </a:defRPr>
+            </a:lvl1pPr>
+            <a:lvl2pPr>
+              <a:defRPr sz="2175">
+                <a:solidFill>
+                  <a:srgbClr val="176B87"/>
+                </a:solidFill>
+                <a:latin typeface="Arial Unicode MS"/>
+                <a:ea typeface="Arial Unicode MS"/>
+                <a:cs typeface="Arial Unicode MS"/>
+              </a:defRPr>
+            </a:lvl2pPr>
+            <a:lvl3pPr>
+              <a:defRPr sz="2175">
+                <a:solidFill>
+                  <a:srgbClr val="176B87"/>
+                </a:solidFill>
+                <a:latin typeface="Arial Unicode MS"/>
+                <a:ea typeface="Arial Unicode MS"/>
+                <a:cs typeface="Arial Unicode MS"/>
+              </a:defRPr>
+            </a:lvl3pPr>
+            <a:lvl4pPr>
+              <a:defRPr sz="2175">
+                <a:solidFill>
+                  <a:srgbClr val="176B87"/>
+                </a:solidFill>
+                <a:latin typeface="Arial Unicode MS"/>
+                <a:ea typeface="Arial Unicode MS"/>
+                <a:cs typeface="Arial Unicode MS"/>
+              </a:defRPr>
+            </a:lvl4pPr>
+            <a:lvl5pPr>
+              <a:defRPr sz="2175">
+                <a:solidFill>
+                  <a:srgbClr val="176B87"/>
+                </a:solidFill>
+                <a:latin typeface="Arial Unicode MS"/>
+                <a:ea typeface="Arial Unicode MS"/>
+                <a:cs typeface="Arial Unicode MS"/>
+              </a:defRPr>
+            </a:lvl5pPr>
+            <a:lvl6pPr>
+              <a:defRPr sz="2175">
+                <a:solidFill>
+                  <a:srgbClr val="176B87"/>
+                </a:solidFill>
+                <a:latin typeface="Arial Unicode MS"/>
+                <a:ea typeface="Arial Unicode MS"/>
+                <a:cs typeface="Arial Unicode MS"/>
+              </a:defRPr>
+            </a:lvl6pPr>
+            <a:lvl7pPr>
+              <a:defRPr sz="2175">
+                <a:solidFill>
+                  <a:srgbClr val="176B87"/>
+                </a:solidFill>
+                <a:latin typeface="Arial Unicode MS"/>
+                <a:ea typeface="Arial Unicode MS"/>
+                <a:cs typeface="Arial Unicode MS"/>
+              </a:defRPr>
+            </a:lvl7pPr>
+            <a:lvl8pPr>
+              <a:defRPr sz="2175">
+                <a:solidFill>
+                  <a:srgbClr val="176B87"/>
+                </a:solidFill>
+                <a:latin typeface="Arial Unicode MS"/>
+                <a:ea typeface="Arial Unicode MS"/>
+                <a:cs typeface="Arial Unicode MS"/>
+              </a:defRPr>
+            </a:lvl8pPr>
+            <a:lvl9pPr>
+              <a:defRPr sz="2175">
+                <a:solidFill>
+                  <a:srgbClr val="176B87"/>
+                </a:solidFill>
+                <a:latin typeface="Arial Unicode MS"/>
+                <a:ea typeface="Arial Unicode MS"/>
+                <a:cs typeface="Arial Unicode MS"/>
+              </a:defRPr>
+            </a:lvl9pPr>
+          </a:lstStyle>
+          <a:p xmlns:a="http://schemas.openxmlformats.org/drawingml/2006/main">
+            <a:pPr>
+              <a:defRPr sz="2175">
+                <a:solidFill>
+                  <a:srgbClr val="176B87"/>
+                </a:solidFill>
+                <a:latin typeface="Arial Unicode MS"/>
+                <a:ea typeface="Arial Unicode MS"/>
+                <a:cs typeface="Arial Unicode MS"/>
+              </a:defRPr>
+            </a:pPr>
+            <a:r>
+              <a:rPr sz="2175">
+                <a:solidFill>
+                  <a:srgbClr val="176B87"/>
+                </a:solidFill>
+                <a:latin typeface="Arial Unicode MS"/>
+                <a:ea typeface="Arial Unicode MS"/>
+                <a:cs typeface="Arial Unicode MS"/>
+              </a:rPr>
+              <a:t>B0006：岭回归在提前5次和10次预测上更好</a:t>
+            </a:r>
+          </a:p>
+          <a:p xmlns:a="http://schemas.openxmlformats.org/drawingml/2006/main">
+            <a:pPr>
+              <a:defRPr sz="2175">
+                <a:solidFill>
+                  <a:srgbClr val="176B87"/>
+                </a:solidFill>
+                <a:latin typeface="Arial Unicode MS"/>
+                <a:ea typeface="Arial Unicode MS"/>
+                <a:cs typeface="Arial Unicode MS"/>
+              </a:defRPr>
+            </a:pPr>
+            <a:r>
+              <a:rPr sz="2175">
+                <a:solidFill>
+                  <a:srgbClr val="176B87"/>
+                </a:solidFill>
+                <a:latin typeface="Arial Unicode MS"/>
+                <a:ea typeface="Arial Unicode MS"/>
+                <a:cs typeface="Arial Unicode MS"/>
+              </a:rPr>
+              <a:t>B0018：岭回归提前10次RMSE为0.085901 Ah</a:t>
+            </a:r>
+          </a:p>
+          <a:p xmlns:a="http://schemas.openxmlformats.org/drawingml/2006/main">
+            <a:pPr>
+              <a:defRPr sz="2175">
+                <a:solidFill>
+                  <a:srgbClr val="176B87"/>
+                </a:solidFill>
+                <a:latin typeface="Arial Unicode MS"/>
+                <a:ea typeface="Arial Unicode MS"/>
+                <a:cs typeface="Arial Unicode MS"/>
+              </a:defRPr>
+            </a:pPr>
+            <a:r>
+              <a:rPr sz="2175">
+                <a:solidFill>
+                  <a:srgbClr val="176B87"/>
+                </a:solidFill>
+                <a:latin typeface="Arial Unicode MS"/>
+                <a:ea typeface="Arial Unicode MS"/>
+                <a:cs typeface="Arial Unicode MS"/>
+              </a:rPr>
+              <a:t>各电池的最佳方法并不相同</a:t>
+            </a:r>
+          </a:p>
+        </p:txBody>
+      </p:sp>
+      <p:graphicFrame>
+        <p:nvGraphicFramePr>
+          <p:cNvPr id="5" name="">
+            <a:extLst xmlns:a="http://schemas.openxmlformats.org/drawingml/2006/main">
+              <a:ext uri="{FF2B5EF4-FFF2-40B4-BE49-F238E27FC236}">
+                <a16:creationId xmlns:a16="http://schemas.microsoft.com/office/drawing/2014/main" id="{38F9E9D2-D8B8-48B8-A695-B5FB961466A5}"/>
+              </a:ext>
+            </a:extLst>
+          </p:cNvPr>
+          <p:cNvGraphicFramePr/>
+          <p:nvPr/>
+        </p:nvGraphicFramePr>
+        <p:xfrm>
+          <a:off xmlns:a="http://schemas.openxmlformats.org/drawingml/2006/main" x="619125" y="3429000"/>
+          <a:ext xmlns:a="http://schemas.openxmlformats.org/drawingml/2006/main" cx="10763250" cy="2333625"/>
+        </p:xfrm>
+        <a:graphic xmlns:a="http://schemas.openxmlformats.org/drawingml/2006/main">
+          <a:graphicData uri="http://schemas.openxmlformats.org/drawingml/2006/table">
+            <a:tbl>
+              <a:tblPr/>
+              <a:tblGrid>
+                <a:gridCol w="2571750"/>
+                <a:gridCol w="8191500"/>
+              </a:tblGrid>
+              <a:tr h="466725">
+                <a:tc>
+                  <a:txBody>
+                    <a:bodyPr/>
+                    <a:lstStyle/>
+                    <a:p>
+                      <a:r>
+                        <a:rPr sz="1875">
+                          <a:solidFill>
+                            <a:srgbClr val="FFFFFF"/>
+                          </a:solidFill>
+                          <a:latin typeface="Arial Unicode MS"/>
+                          <a:ea typeface="Arial Unicode MS"/>
+                          <a:cs typeface="Arial Unicode MS"/>
+                        </a:rPr>
+                        <a:t>Git版本</a:t>
+                      </a:r>
+                    </a:p>
+                  </a:txBody>
+                  <a:tcPr marL="91440" marR="91440" marT="45720" marB="45720">
+                    <a:lnL w="9525">
+                      <a:solidFill>
+                        <a:srgbClr val="D6E0E5"/>
+                      </a:solidFill>
+                    </a:lnL>
+                    <a:lnR w="9525">
+                      <a:solidFill>
+                        <a:srgbClr val="D6E0E5"/>
+                      </a:solidFill>
+                    </a:lnR>
+                    <a:lnT w="9525">
+                      <a:solidFill>
+                        <a:srgbClr val="D6E0E5"/>
+                      </a:solidFill>
+                    </a:lnT>
+                    <a:lnB w="9525">
+                      <a:solidFill>
+                        <a:srgbClr val="D6E0E5"/>
+                      </a:solidFill>
+                    </a:lnB>
+                    <a:solidFill>
+                      <a:srgbClr val="176B87"/>
+                    </a:solidFill>
+                  </a:tcPr>
+                </a:tc>
+                <a:tc>
+                  <a:txBody>
+                    <a:bodyPr/>
+                    <a:lstStyle/>
+                    <a:p>
+                      <a:r>
+                        <a:rPr sz="1875">
+                          <a:solidFill>
+                            <a:srgbClr val="FFFFFF"/>
+                          </a:solidFill>
+                          <a:latin typeface="Arial Unicode MS"/>
+                          <a:ea typeface="Arial Unicode MS"/>
+                          <a:cs typeface="Arial Unicode MS"/>
+                        </a:rPr>
+                        <a:t>保存内容</a:t>
+                      </a:r>
+                    </a:p>
+                  </a:txBody>
+                  <a:tcPr marL="91440" marR="91440" marT="45720" marB="45720">
+                    <a:lnR w="9525">
+                      <a:solidFill>
+                        <a:srgbClr val="D6E0E5"/>
+                      </a:solidFill>
+                    </a:lnR>
+                    <a:lnT w="9525">
+                      <a:solidFill>
+                        <a:srgbClr val="D6E0E5"/>
+                      </a:solidFill>
+                    </a:lnT>
+                    <a:lnB w="9525">
+                      <a:solidFill>
+                        <a:srgbClr val="D6E0E5"/>
+                      </a:solidFill>
+                    </a:lnB>
+                    <a:solidFill>
+                      <a:srgbClr val="176B87"/>
+                    </a:solidFill>
+                  </a:tcPr>
+                </a:tc>
+              </a:tr>
+              <a:tr h="466725">
+                <a:tc>
+                  <a:txBody>
+                    <a:bodyPr/>
+                    <a:lstStyle/>
+                    <a:p>
+                      <a:r>
+                        <a:rPr sz="1875">
+                          <a:solidFill>
+                            <a:srgbClr val="172B3A"/>
+                          </a:solidFill>
+                          <a:latin typeface="Arial Unicode MS"/>
+                          <a:ea typeface="Arial Unicode MS"/>
+                          <a:cs typeface="Arial Unicode MS"/>
+                        </a:rPr>
+                        <a:t>b089f67</a:t>
+                      </a:r>
+                    </a:p>
+                  </a:txBody>
+                  <a:tcPr marL="91440" marR="91440" marT="45720" marB="45720">
+                    <a:lnL w="9525">
+                      <a:solidFill>
+                        <a:srgbClr val="D6E0E5"/>
+                      </a:solidFill>
+                    </a:lnL>
+                    <a:lnR w="9525">
+                      <a:solidFill>
+                        <a:srgbClr val="D6E0E5"/>
+                      </a:solidFill>
+                    </a:lnR>
+                    <a:lnB w="9525">
+                      <a:solidFill>
+                        <a:srgbClr val="D6E0E5"/>
+                      </a:solidFill>
+                    </a:lnB>
+                    <a:solidFill>
+                      <a:srgbClr val="F0F5F7"/>
+                    </a:solidFill>
+                  </a:tcPr>
+                </a:tc>
+                <a:tc>
+                  <a:txBody>
+                    <a:bodyPr/>
+                    <a:lstStyle/>
+                    <a:p>
+                      <a:r>
+                        <a:rPr sz="1875">
+                          <a:solidFill>
+                            <a:srgbClr val="172B3A"/>
+                          </a:solidFill>
+                          <a:latin typeface="Arial Unicode MS"/>
+                          <a:ea typeface="Arial Unicode MS"/>
+                          <a:cs typeface="Arial Unicode MS"/>
+                        </a:rPr>
+                        <a:t>多步配对与容量保持、最近20次线性趋势</a:t>
+                      </a:r>
+                    </a:p>
+                  </a:txBody>
+                  <a:tcPr marL="91440" marR="91440" marT="45720" marB="45720">
+                    <a:lnR w="9525">
+                      <a:solidFill>
+                        <a:srgbClr val="D6E0E5"/>
+                      </a:solidFill>
+                    </a:lnR>
+                    <a:lnB w="9525">
+                      <a:solidFill>
+                        <a:srgbClr val="D6E0E5"/>
+                      </a:solidFill>
+                    </a:lnB>
+                    <a:solidFill>
+                      <a:srgbClr val="F0F5F7"/>
+                    </a:solidFill>
+                  </a:tcPr>
+                </a:tc>
+              </a:tr>
+              <a:tr h="466725">
+                <a:tc>
+                  <a:txBody>
+                    <a:bodyPr/>
+                    <a:lstStyle/>
+                    <a:p>
+                      <a:r>
+                        <a:rPr sz="1875">
+                          <a:solidFill>
+                            <a:srgbClr val="172B3A"/>
+                          </a:solidFill>
+                          <a:latin typeface="Arial Unicode MS"/>
+                          <a:ea typeface="Arial Unicode MS"/>
+                          <a:cs typeface="Arial Unicode MS"/>
+                        </a:rPr>
+                        <a:t>c624a14</a:t>
+                      </a:r>
+                    </a:p>
+                  </a:txBody>
+                  <a:tcPr marL="91440" marR="91440" marT="45720" marB="45720">
+                    <a:lnL w="9525">
+                      <a:solidFill>
+                        <a:srgbClr val="D6E0E5"/>
+                      </a:solidFill>
+                    </a:lnL>
+                    <a:lnR w="9525">
+                      <a:solidFill>
+                        <a:srgbClr val="D6E0E5"/>
+                      </a:solidFill>
+                    </a:lnR>
+                    <a:lnB w="9525">
+                      <a:solidFill>
+                        <a:srgbClr val="D6E0E5"/>
+                      </a:solidFill>
+                    </a:lnB>
+                    <a:solidFill>
+                      <a:srgbClr val="FFFFFF"/>
+                    </a:solidFill>
+                  </a:tcPr>
+                </a:tc>
+                <a:tc>
+                  <a:txBody>
+                    <a:bodyPr/>
+                    <a:lstStyle/>
+                    <a:p>
+                      <a:r>
+                        <a:rPr sz="1875">
+                          <a:solidFill>
+                            <a:srgbClr val="172B3A"/>
+                          </a:solidFill>
+                          <a:latin typeface="Arial Unicode MS"/>
+                          <a:ea typeface="Arial Unicode MS"/>
+                          <a:cs typeface="Arial Unicode MS"/>
+                        </a:rPr>
+                        <a:t>共同起点同时遵守验证段结束边界</a:t>
+                      </a:r>
+                    </a:p>
+                  </a:txBody>
+                  <a:tcPr marL="91440" marR="91440" marT="45720" marB="45720">
+                    <a:lnR w="9525">
+                      <a:solidFill>
+                        <a:srgbClr val="D6E0E5"/>
+                      </a:solidFill>
+                    </a:lnR>
+                    <a:lnB w="9525">
+                      <a:solidFill>
+                        <a:srgbClr val="D6E0E5"/>
+                      </a:solidFill>
+                    </a:lnB>
+                    <a:solidFill>
+                      <a:srgbClr val="FFFFFF"/>
+                    </a:solidFill>
+                  </a:tcPr>
+                </a:tc>
+              </a:tr>
+              <a:tr h="466725">
+                <a:tc>
+                  <a:txBody>
+                    <a:bodyPr/>
+                    <a:lstStyle/>
+                    <a:p>
+                      <a:r>
+                        <a:rPr sz="1875">
+                          <a:solidFill>
+                            <a:srgbClr val="172B3A"/>
+                          </a:solidFill>
+                          <a:latin typeface="Arial Unicode MS"/>
+                          <a:ea typeface="Arial Unicode MS"/>
+                          <a:cs typeface="Arial Unicode MS"/>
+                        </a:rPr>
+                        <a:t>914a154</a:t>
+                      </a:r>
+                    </a:p>
+                  </a:txBody>
+                  <a:tcPr marL="91440" marR="91440" marT="45720" marB="45720">
+                    <a:lnL w="9525">
+                      <a:solidFill>
+                        <a:srgbClr val="D6E0E5"/>
+                      </a:solidFill>
+                    </a:lnL>
+                    <a:lnR w="9525">
+                      <a:solidFill>
+                        <a:srgbClr val="D6E0E5"/>
+                      </a:solidFill>
+                    </a:lnR>
+                    <a:lnB w="9525">
+                      <a:solidFill>
+                        <a:srgbClr val="D6E0E5"/>
+                      </a:solidFill>
+                    </a:lnB>
+                    <a:solidFill>
+                      <a:srgbClr val="F0F5F7"/>
+                    </a:solidFill>
+                  </a:tcPr>
+                </a:tc>
+                <a:tc>
+                  <a:txBody>
+                    <a:bodyPr/>
+                    <a:lstStyle/>
+                    <a:p>
+                      <a:r>
+                        <a:rPr sz="1875">
+                          <a:solidFill>
+                            <a:srgbClr val="172B3A"/>
+                          </a:solidFill>
+                          <a:latin typeface="Arial Unicode MS"/>
+                          <a:ea typeface="Arial Unicode MS"/>
+                          <a:cs typeface="Arial Unicode MS"/>
+                        </a:rPr>
+                        <a:t>直接多步岭回归与验证段选参</a:t>
+                      </a:r>
+                    </a:p>
+                  </a:txBody>
+                  <a:tcPr marL="91440" marR="91440" marT="45720" marB="45720">
+                    <a:lnR w="9525">
+                      <a:solidFill>
+                        <a:srgbClr val="D6E0E5"/>
+                      </a:solidFill>
+                    </a:lnR>
+                    <a:lnB w="9525">
+                      <a:solidFill>
+                        <a:srgbClr val="D6E0E5"/>
+                      </a:solidFill>
+                    </a:lnB>
+                    <a:solidFill>
+                      <a:srgbClr val="F0F5F7"/>
+                    </a:solidFill>
+                  </a:tcPr>
+                </a:tc>
+              </a:tr>
+              <a:tr h="466725">
+                <a:tc>
+                  <a:txBody>
+                    <a:bodyPr/>
+                    <a:lstStyle/>
+                    <a:p>
+                      <a:r>
+                        <a:rPr sz="1875">
+                          <a:solidFill>
+                            <a:srgbClr val="172B3A"/>
+                          </a:solidFill>
+                          <a:latin typeface="Arial Unicode MS"/>
+                          <a:ea typeface="Arial Unicode MS"/>
+                          <a:cs typeface="Arial Unicode MS"/>
+                        </a:rPr>
+                        <a:t>cd73031</a:t>
+                      </a:r>
+                    </a:p>
+                  </a:txBody>
+                  <a:tcPr marL="91440" marR="91440" marT="45720" marB="45720">
+                    <a:lnL w="9525">
+                      <a:solidFill>
+                        <a:srgbClr val="D6E0E5"/>
+                      </a:solidFill>
+                    </a:lnL>
+                    <a:lnR w="9525">
+                      <a:solidFill>
+                        <a:srgbClr val="D6E0E5"/>
+                      </a:solidFill>
+                    </a:lnR>
+                    <a:lnB w="9525">
+                      <a:solidFill>
+                        <a:srgbClr val="D6E0E5"/>
+                      </a:solidFill>
+                    </a:lnB>
+                    <a:solidFill>
+                      <a:srgbClr val="FFFFFF"/>
+                    </a:solidFill>
+                  </a:tcPr>
+                </a:tc>
+                <a:tc>
+                  <a:txBody>
+                    <a:bodyPr/>
+                    <a:lstStyle/>
+                    <a:p>
+                      <a:r>
+                        <a:rPr sz="1875">
+                          <a:solidFill>
+                            <a:srgbClr val="172B3A"/>
+                          </a:solidFill>
+                          <a:latin typeface="Arial Unicode MS"/>
+                          <a:ea typeface="Arial Unicode MS"/>
+                          <a:cs typeface="Arial Unicode MS"/>
+                        </a:rPr>
+                        <a:t>误差图表、实验配置与说明</a:t>
+                      </a:r>
+                    </a:p>
+                  </a:txBody>
+                  <a:tcPr marL="91440" marR="91440" marT="45720" marB="45720">
+                    <a:lnR w="9525">
+                      <a:solidFill>
+                        <a:srgbClr val="D6E0E5"/>
+                      </a:solidFill>
+                    </a:lnR>
+                    <a:lnB w="9525">
+                      <a:solidFill>
+                        <a:srgbClr val="D6E0E5"/>
+                      </a:solidFill>
+                    </a:lnB>
+                    <a:solidFill>
+                      <a:srgbClr val="FFFFFF"/>
+                    </a:solidFill>
+                  </a:tcPr>
+                </a:tc>
+              </a:tr>
+            </a:tbl>
+          </a:graphicData>
+        </a:graphic>
+      </p:graphicFrame>
+      <p:sp>
+        <p:nvSpPr>
+          <p:cNvPr id="6" name="">
+            <a:extLst xmlns:a="http://schemas.openxmlformats.org/drawingml/2006/main">
+              <a:ext uri="{FF2B5EF4-FFF2-40B4-BE49-F238E27FC236}">
+                <a16:creationId xmlns:a16="http://schemas.microsoft.com/office/drawing/2014/main" id="{D3F0BE25-A48B-4142-804E-9F8A62551210}"/>
+              </a:ext>
+            </a:extLst>
+          </p:cNvPr>
+          <p:cNvSpPr>
+            <a:spLocks xmlns:a="http://schemas.openxmlformats.org/drawingml/2006/main" noGrp="1"/>
+          </p:cNvSpPr>
+          <p:nvPr/>
+        </p:nvSpPr>
+        <p:spPr>
+          <a:xfrm xmlns:a="http://schemas.openxmlformats.org/drawingml/2006/main">
+            <a:off x="619125" y="5905500"/>
+            <a:ext cx="10763250" cy="381000"/>
+          </a:xfrm>
+          <a:prstGeom xmlns:a="http://schemas.openxmlformats.org/drawingml/2006/main" prst="rect">
+            <a:avLst/>
+          </a:prstGeom>
+          <a:noFill xmlns:a="http://schemas.openxmlformats.org/drawingml/2006/main"/>
+          <a:ln xmlns:a="http://schemas.openxmlformats.org/drawingml/2006/main" w="0">
+            <a:noFill/>
+          </a:ln>
+        </p:spPr>
+        <p:txBody>
+          <a:bodyPr xmlns:a="http://schemas.openxmlformats.org/drawingml/2006/main"/>
+          <a:lstStyle xmlns:a="http://schemas.openxmlformats.org/drawingml/2006/main">
+            <a:defPPr>
+              <a:defRPr sz="1800">
+                <a:solidFill>
+                  <a:srgbClr val="172B3A"/>
+                </a:solidFill>
+                <a:latin typeface="Arial Unicode MS"/>
+                <a:ea typeface="Arial Unicode MS"/>
+                <a:cs typeface="Arial Unicode MS"/>
+              </a:defRPr>
+            </a:defPPr>
+            <a:lvl1pPr>
+              <a:defRPr sz="1800">
+                <a:solidFill>
+                  <a:srgbClr val="172B3A"/>
+                </a:solidFill>
+                <a:latin typeface="Arial Unicode MS"/>
+                <a:ea typeface="Arial Unicode MS"/>
+                <a:cs typeface="Arial Unicode MS"/>
+              </a:defRPr>
+            </a:lvl1pPr>
+            <a:lvl2pPr>
+              <a:defRPr sz="1800">
+                <a:solidFill>
+                  <a:srgbClr val="172B3A"/>
+                </a:solidFill>
+                <a:latin typeface="Arial Unicode MS"/>
+                <a:ea typeface="Arial Unicode MS"/>
+                <a:cs typeface="Arial Unicode MS"/>
+              </a:defRPr>
+            </a:lvl2pPr>
+            <a:lvl3pPr>
+              <a:defRPr sz="1800">
+                <a:solidFill>
+                  <a:srgbClr val="172B3A"/>
+                </a:solidFill>
+                <a:latin typeface="Arial Unicode MS"/>
+                <a:ea typeface="Arial Unicode MS"/>
+                <a:cs typeface="Arial Unicode MS"/>
+              </a:defRPr>
+            </a:lvl3pPr>
+            <a:lvl4pPr>
+              <a:defRPr sz="1800">
+                <a:solidFill>
+                  <a:srgbClr val="172B3A"/>
+                </a:solidFill>
+                <a:latin typeface="Arial Unicode MS"/>
+                <a:ea typeface="Arial Unicode MS"/>
+                <a:cs typeface="Arial Unicode MS"/>
+              </a:defRPr>
+            </a:lvl4pPr>
+            <a:lvl5pPr>
+              <a:defRPr sz="1800">
+                <a:solidFill>
+                  <a:srgbClr val="172B3A"/>
+                </a:solidFill>
+                <a:latin typeface="Arial Unicode MS"/>
+                <a:ea typeface="Arial Unicode MS"/>
+                <a:cs typeface="Arial Unicode MS"/>
+              </a:defRPr>
+            </a:lvl5pPr>
+            <a:lvl6pPr>
+              <a:defRPr sz="1800">
+                <a:solidFill>
+                  <a:srgbClr val="172B3A"/>
+                </a:solidFill>
+                <a:latin typeface="Arial Unicode MS"/>
+                <a:ea typeface="Arial Unicode MS"/>
+                <a:cs typeface="Arial Unicode MS"/>
+              </a:defRPr>
+            </a:lvl6pPr>
+            <a:lvl7pPr>
+              <a:defRPr sz="1800">
+                <a:solidFill>
+                  <a:srgbClr val="172B3A"/>
+                </a:solidFill>
+                <a:latin typeface="Arial Unicode MS"/>
+                <a:ea typeface="Arial Unicode MS"/>
+                <a:cs typeface="Arial Unicode MS"/>
+              </a:defRPr>
+            </a:lvl7pPr>
+            <a:lvl8pPr>
+              <a:defRPr sz="1800">
+                <a:solidFill>
+                  <a:srgbClr val="172B3A"/>
+                </a:solidFill>
+                <a:latin typeface="Arial Unicode MS"/>
+                <a:ea typeface="Arial Unicode MS"/>
+                <a:cs typeface="Arial Unicode MS"/>
+              </a:defRPr>
+            </a:lvl8pPr>
+            <a:lvl9pPr>
+              <a:defRPr sz="1800">
+                <a:solidFill>
+                  <a:srgbClr val="172B3A"/>
+                </a:solidFill>
+                <a:latin typeface="Arial Unicode MS"/>
+                <a:ea typeface="Arial Unicode MS"/>
+                <a:cs typeface="Arial Unicode MS"/>
+              </a:defRPr>
+            </a:lvl9pPr>
+          </a:lstStyle>
+          <a:p xmlns:a="http://schemas.openxmlformats.org/drawingml/2006/main">
+            <a:pPr>
+              <a:defRPr sz="1800">
+                <a:solidFill>
+                  <a:srgbClr val="172B3A"/>
+                </a:solidFill>
+                <a:latin typeface="Arial Unicode MS"/>
+                <a:ea typeface="Arial Unicode MS"/>
+                <a:cs typeface="Arial Unicode MS"/>
+              </a:defRPr>
+            </a:pPr>
+            <a:r>
+              <a:rPr sz="1800">
+                <a:solidFill>
+                  <a:srgbClr val="172B3A"/>
+                </a:solidFill>
+                <a:latin typeface="Arial Unicode MS"/>
+                <a:ea typeface="Arial Unicode MS"/>
+                <a:cs typeface="Arial Unicode MS"/>
+              </a:rPr>
+              <a:t>36项测试通过。同四块电池的探索结果仍需新增数据检验。</a:t>
+            </a:r>
+          </a:p>
+        </p:txBody>
+      </p:sp>
+    </p:spTree>
+    <p:extLst>
+      <p:ext uri="{BB962C8B-B14F-4D97-AF65-F5344CB8AC3E}">
+        <p14:creationId xmlns:p14="http://schemas.microsoft.com/office/powerpoint/2010/main" val="1511753349"/>
       </p:ext>
     </p:extLst>
   </p:cSld>
@@ -37546,7 +43919,7 @@
           <p:cNvPr id="4" name="Chart">
             <a:extLst xmlns:a="http://schemas.openxmlformats.org/drawingml/2006/main">
               <a:ext uri="{FF2B5EF4-FFF2-40B4-BE49-F238E27FC236}">
-                <a16:creationId xmlns:a16="http://schemas.microsoft.com/office/drawing/2014/main" id="{9348B8BC-3671-427E-B1C7-5A21E6B27FAB}"/>
+                <a16:creationId xmlns:a16="http://schemas.microsoft.com/office/drawing/2014/main" id="{B6E0385D-2E30-40D2-B58A-252728562F04}"/>
               </a:ext>
             </a:extLst>
           </p:cNvPr>
@@ -37559,7 +43932,7 @@
         </p:xfrm>
         <a:graphic xmlns:a="http://schemas.openxmlformats.org/drawingml/2006/main">
           <a:graphicData uri="http://schemas.openxmlformats.org/drawingml/2006/chart">
-            <c:chart xmlns:r="http://schemas.openxmlformats.org/officeDocument/2006/relationships" xmlns:c="http://schemas.openxmlformats.org/drawingml/2006/chart" r:id="R1d3d0c1fbfb647dd"/>
+            <c:chart xmlns:r="http://schemas.openxmlformats.org/officeDocument/2006/relationships" xmlns:c="http://schemas.openxmlformats.org/drawingml/2006/chart" r:id="R4c355e33b70141e3"/>
           </a:graphicData>
         </a:graphic>
       </p:graphicFrame>
@@ -38117,7 +44490,7 @@
           <p:cNvPr id="4" name="Chart">
             <a:extLst xmlns:a="http://schemas.openxmlformats.org/drawingml/2006/main">
               <a:ext uri="{FF2B5EF4-FFF2-40B4-BE49-F238E27FC236}">
-                <a16:creationId xmlns:a16="http://schemas.microsoft.com/office/drawing/2014/main" id="{C816A92E-D895-4A24-AD8A-42784243C03B}"/>
+                <a16:creationId xmlns:a16="http://schemas.microsoft.com/office/drawing/2014/main" id="{1A30728D-A2A4-46E8-9B6D-A085A2329D02}"/>
               </a:ext>
             </a:extLst>
           </p:cNvPr>
@@ -38130,7 +44503,7 @@
         </p:xfrm>
         <a:graphic xmlns:a="http://schemas.openxmlformats.org/drawingml/2006/main">
           <a:graphicData uri="http://schemas.openxmlformats.org/drawingml/2006/chart">
-            <c:chart xmlns:r="http://schemas.openxmlformats.org/officeDocument/2006/relationships" xmlns:c="http://schemas.openxmlformats.org/drawingml/2006/chart" r:id="R98c8337d7d4f48b4"/>
+            <c:chart xmlns:r="http://schemas.openxmlformats.org/officeDocument/2006/relationships" xmlns:c="http://schemas.openxmlformats.org/drawingml/2006/chart" r:id="R574bc51e8c404f99"/>
           </a:graphicData>
         </a:graphic>
       </p:graphicFrame>
@@ -38688,7 +45061,7 @@
           <p:cNvPr id="4" name="Chart">
             <a:extLst xmlns:a="http://schemas.openxmlformats.org/drawingml/2006/main">
               <a:ext uri="{FF2B5EF4-FFF2-40B4-BE49-F238E27FC236}">
-                <a16:creationId xmlns:a16="http://schemas.microsoft.com/office/drawing/2014/main" id="{D180C064-FCCF-4C4E-9465-9178DD27F65D}"/>
+                <a16:creationId xmlns:a16="http://schemas.microsoft.com/office/drawing/2014/main" id="{36D486A5-61DC-4D4F-B927-D98A98441843}"/>
               </a:ext>
             </a:extLst>
           </p:cNvPr>
@@ -38701,7 +45074,7 @@
         </p:xfrm>
         <a:graphic xmlns:a="http://schemas.openxmlformats.org/drawingml/2006/main">
           <a:graphicData uri="http://schemas.openxmlformats.org/drawingml/2006/chart">
-            <c:chart xmlns:r="http://schemas.openxmlformats.org/officeDocument/2006/relationships" xmlns:c="http://schemas.openxmlformats.org/drawingml/2006/chart" r:id="Rb4a744d086334766"/>
+            <c:chart xmlns:r="http://schemas.openxmlformats.org/officeDocument/2006/relationships" xmlns:c="http://schemas.openxmlformats.org/drawingml/2006/chart" r:id="R06c7f358dacb49ad"/>
           </a:graphicData>
         </a:graphic>
       </p:graphicFrame>
@@ -39259,7 +45632,7 @@
           <p:cNvPr id="4" name="Chart">
             <a:extLst xmlns:a="http://schemas.openxmlformats.org/drawingml/2006/main">
               <a:ext uri="{FF2B5EF4-FFF2-40B4-BE49-F238E27FC236}">
-                <a16:creationId xmlns:a16="http://schemas.microsoft.com/office/drawing/2014/main" id="{481BC69C-CEE5-4E71-B5AA-04D2100025AA}"/>
+                <a16:creationId xmlns:a16="http://schemas.microsoft.com/office/drawing/2014/main" id="{6BD214ED-8A38-49DE-B945-77179A8F1664}"/>
               </a:ext>
             </a:extLst>
           </p:cNvPr>
@@ -39272,7 +45645,7 @@
         </p:xfrm>
         <a:graphic xmlns:a="http://schemas.openxmlformats.org/drawingml/2006/main">
           <a:graphicData uri="http://schemas.openxmlformats.org/drawingml/2006/chart">
-            <c:chart xmlns:r="http://schemas.openxmlformats.org/officeDocument/2006/relationships" xmlns:c="http://schemas.openxmlformats.org/drawingml/2006/chart" r:id="R1529301b0cb14a01"/>
+            <c:chart xmlns:r="http://schemas.openxmlformats.org/officeDocument/2006/relationships" xmlns:c="http://schemas.openxmlformats.org/drawingml/2006/chart" r:id="R30c5d8999c3947b5"/>
           </a:graphicData>
         </a:graphic>
       </p:graphicFrame>

--- a/deliverables/题目三_工作过程.pptx
+++ b/deliverables/题目三_工作过程.pptx
@@ -29,6 +29,9 @@
     <p:sldId xmlns:r="http://schemas.openxmlformats.org/officeDocument/2006/relationships" id="274" r:id="R9e6f19e38e9b403f"/>
     <p:sldId xmlns:r="http://schemas.openxmlformats.org/officeDocument/2006/relationships" id="275" r:id="R0cd6f7eed1874029"/>
     <p:sldId xmlns:r="http://schemas.openxmlformats.org/officeDocument/2006/relationships" id="276" r:id="R97488197f0374528"/>
+    <p:sldId xmlns:ns0="http://schemas.openxmlformats.org/officeDocument/2006/relationships" id="277" ns0:id="rId27"/>
+    <p:sldId xmlns:ns0="http://schemas.openxmlformats.org/officeDocument/2006/relationships" id="278" ns0:id="rId28"/>
+    <p:sldId xmlns:ns0="http://schemas.openxmlformats.org/officeDocument/2006/relationships" id="279" ns0:id="rId29"/>
   </p:sldIdLst>
   <p:sldSz cx="12192000" cy="6858000"/>
   <p:notesSz cx="6858000" cy="9144000"/>
@@ -31370,6 +31373,564 @@
 </p:sld>
 </file>
 
+<file path=ppt/slides/slide22.xml><?xml version="1.0" encoding="utf-8"?>
+<p:sld xmlns:a="http://schemas.openxmlformats.org/drawingml/2006/main" xmlns:p="http://schemas.openxmlformats.org/presentationml/2006/main" xmlns:r="http://schemas.openxmlformats.org/officeDocument/2006/relationships">
+  <p:cSld>
+    <p:spTree>
+      <p:nvGrpSpPr>
+        <p:cNvPr id="1" name=""/>
+        <p:cNvGrpSpPr/>
+        <p:nvPr/>
+      </p:nvGrpSpPr>
+      <p:grpSpPr/>
+      <p:sp>
+        <p:nvSpPr>
+          <p:cNvPr id="2" name="TextBox 1"/>
+          <p:cNvSpPr txBox="1"/>
+          <p:nvPr/>
+        </p:nvSpPr>
+        <p:spPr>
+          <a:xfrm>
+            <a:off x="566928" y="384048"/>
+            <a:ext cx="11045952" cy="813816"/>
+          </a:xfrm>
+          <a:prstGeom prst="rect">
+            <a:avLst/>
+          </a:prstGeom>
+          <a:noFill/>
+        </p:spPr>
+        <p:txBody>
+          <a:bodyPr wrap="square">
+            <a:spAutoFit/>
+          </a:bodyPr>
+          <a:lstStyle/>
+          <a:p>
+            <a:r>
+              <a:rPr sz="2925" b="0">
+                <a:latin typeface="Arial Unicode MS"/>
+                <a:ea typeface="Arial Unicode MS"/>
+              </a:rPr>
+              <a:t>06 / 误差方向与容量高估风险</a:t>
+            </a:r>
+          </a:p>
+        </p:txBody>
+      </p:sp>
+      <p:pic>
+        <p:nvPicPr>
+          <p:cNvPr id="3" name="Picture 2" descr="01_error_risk.png"/>
+          <p:cNvPicPr>
+            <a:picLocks noChangeAspect="1"/>
+          </p:cNvPicPr>
+          <p:nvPr/>
+        </p:nvPicPr>
+        <p:blipFill>
+          <a:blip r:embed="rId2"/>
+          <a:stretch>
+            <a:fillRect/>
+          </a:stretch>
+        </p:blipFill>
+        <p:spPr>
+          <a:xfrm>
+            <a:off x="621792" y="1325880"/>
+            <a:ext cx="9107424" cy="3794759"/>
+          </a:xfrm>
+          <a:prstGeom prst="rect">
+            <a:avLst/>
+          </a:prstGeom>
+        </p:spPr>
+      </p:pic>
+      <p:sp>
+        <p:nvSpPr>
+          <p:cNvPr id="4" name="TextBox 3"/>
+          <p:cNvSpPr txBox="1"/>
+          <p:nvPr/>
+        </p:nvSpPr>
+        <p:spPr>
+          <a:xfrm>
+            <a:off x="621792" y="5230368"/>
+            <a:ext cx="10762488" cy="960120"/>
+          </a:xfrm>
+          <a:prstGeom prst="rect">
+            <a:avLst/>
+          </a:prstGeom>
+          <a:noFill/>
+        </p:spPr>
+        <p:txBody>
+          <a:bodyPr wrap="square">
+            <a:spAutoFit/>
+          </a:bodyPr>
+          <a:lstStyle/>
+          <a:p>
+            <a:r>
+              <a:rPr sz="1600" b="0">
+                <a:latin typeface="Arial Unicode MS"/>
+                <a:ea typeface="Arial Unicode MS"/>
+              </a:rPr>
+              <a:t>平均偏差（预测−实测）：回归 −0.0111 Ah、森林 +0.0444 Ah、基线 +0.0023 Ah。</a:t>
+            </a:r>
+          </a:p>
+          <a:p>
+            <a:r>
+              <a:rPr sz="1600" b="0">
+                <a:latin typeface="Arial Unicode MS"/>
+                <a:ea typeface="Arial Unicode MS"/>
+              </a:rPr>
+              <a:t>森林在B0005、B0006、B0007的全部34个测试点上高估容量，B0006最大高估0.173 Ah。</a:t>
+            </a:r>
+          </a:p>
+          <a:p>
+            <a:r>
+              <a:rPr sz="1600" b="0">
+                <a:latin typeface="Arial Unicode MS"/>
+                <a:ea typeface="Arial Unicode MS"/>
+              </a:rPr>
+              <a:t>高估比低估更危险；不能因为回归整体偏低估就断言它更安全。</a:t>
+            </a:r>
+          </a:p>
+        </p:txBody>
+      </p:sp>
+      <p:sp>
+        <p:nvSpPr>
+          <p:cNvPr id="5" name="TextBox 4"/>
+          <p:cNvSpPr txBox="1"/>
+          <p:nvPr/>
+        </p:nvSpPr>
+        <p:spPr>
+          <a:xfrm>
+            <a:off x="566928" y="6336792"/>
+            <a:ext cx="10479024" cy="283464"/>
+          </a:xfrm>
+          <a:prstGeom prst="rect">
+            <a:avLst/>
+          </a:prstGeom>
+          <a:noFill/>
+        </p:spPr>
+        <p:txBody>
+          <a:bodyPr wrap="square">
+            <a:spAutoFit/>
+          </a:bodyPr>
+          <a:lstStyle/>
+          <a:p>
+            <a:r>
+              <a:rPr sz="1200" b="0">
+                <a:latin typeface="Arial Unicode MS"/>
+                <a:ea typeface="Arial Unicode MS"/>
+              </a:rPr>
+              <a:t>工作过程记录  杨晓真 25121619  2026.10.28</a:t>
+            </a:r>
+          </a:p>
+        </p:txBody>
+      </p:sp>
+      <p:sp>
+        <p:nvSpPr>
+          <p:cNvPr id="6" name="TextBox 5"/>
+          <p:cNvSpPr txBox="1"/>
+          <p:nvPr/>
+        </p:nvSpPr>
+        <p:spPr>
+          <a:xfrm>
+            <a:off x="11146536" y="6336792"/>
+            <a:ext cx="713232" cy="283464"/>
+          </a:xfrm>
+          <a:prstGeom prst="rect">
+            <a:avLst/>
+          </a:prstGeom>
+          <a:noFill/>
+        </p:spPr>
+        <p:txBody>
+          <a:bodyPr wrap="square">
+            <a:spAutoFit/>
+          </a:bodyPr>
+          <a:lstStyle/>
+          <a:p>
+            <a:r>
+              <a:rPr sz="1200" b="0">
+                <a:latin typeface="Arial Unicode MS"/>
+                <a:ea typeface="Arial Unicode MS"/>
+              </a:rPr>
+              <a:t>22</a:t>
+            </a:r>
+          </a:p>
+        </p:txBody>
+      </p:sp>
+    </p:spTree>
+  </p:cSld>
+  <p:clrMapOvr>
+    <a:masterClrMapping/>
+  </p:clrMapOvr>
+</p:sld>
+</file>
+
+<file path=ppt/slides/slide23.xml><?xml version="1.0" encoding="utf-8"?>
+<p:sld xmlns:a="http://schemas.openxmlformats.org/drawingml/2006/main" xmlns:p="http://schemas.openxmlformats.org/presentationml/2006/main" xmlns:r="http://schemas.openxmlformats.org/officeDocument/2006/relationships">
+  <p:cSld>
+    <p:spTree>
+      <p:nvGrpSpPr>
+        <p:cNvPr id="1" name=""/>
+        <p:cNvGrpSpPr/>
+        <p:nvPr/>
+      </p:nvGrpSpPr>
+      <p:grpSpPr/>
+      <p:sp>
+        <p:nvSpPr>
+          <p:cNvPr id="2" name="TextBox 1"/>
+          <p:cNvSpPr txBox="1"/>
+          <p:nvPr/>
+        </p:nvSpPr>
+        <p:spPr>
+          <a:xfrm>
+            <a:off x="566928" y="384048"/>
+            <a:ext cx="11045952" cy="813816"/>
+          </a:xfrm>
+          <a:prstGeom prst="rect">
+            <a:avLst/>
+          </a:prstGeom>
+          <a:noFill/>
+        </p:spPr>
+        <p:txBody>
+          <a:bodyPr wrap="square">
+            <a:spAutoFit/>
+          </a:bodyPr>
+          <a:lstStyle/>
+          <a:p>
+            <a:r>
+              <a:rPr sz="2925" b="0">
+                <a:latin typeface="Arial Unicode MS"/>
+                <a:ea typeface="Arial Unicode MS"/>
+              </a:rPr>
+              <a:t>06 / 提前预警与寿命外推的不确定性</a:t>
+            </a:r>
+          </a:p>
+        </p:txBody>
+      </p:sp>
+      <p:pic>
+        <p:nvPicPr>
+          <p:cNvPr id="3" name="Picture 2" descr="03_lifetime_sensitivity.png"/>
+          <p:cNvPicPr>
+            <a:picLocks noChangeAspect="1"/>
+          </p:cNvPicPr>
+          <p:nvPr/>
+        </p:nvPicPr>
+        <p:blipFill>
+          <a:blip r:embed="rId2"/>
+          <a:stretch>
+            <a:fillRect/>
+          </a:stretch>
+        </p:blipFill>
+        <p:spPr>
+          <a:xfrm>
+            <a:off x="621792" y="1325880"/>
+            <a:ext cx="5692140" cy="3794760"/>
+          </a:xfrm>
+          <a:prstGeom prst="rect">
+            <a:avLst/>
+          </a:prstGeom>
+        </p:spPr>
+      </p:pic>
+      <p:sp>
+        <p:nvSpPr>
+          <p:cNvPr id="4" name="TextBox 3"/>
+          <p:cNvSpPr txBox="1"/>
+          <p:nvPr/>
+        </p:nvSpPr>
+        <p:spPr>
+          <a:xfrm>
+            <a:off x="621792" y="5230368"/>
+            <a:ext cx="10762488" cy="960120"/>
+          </a:xfrm>
+          <a:prstGeom prst="rect">
+            <a:avLst/>
+          </a:prstGeom>
+          <a:noFill/>
+        </p:spPr>
+        <p:txBody>
+          <a:bodyPr wrap="square">
+            <a:spAutoFit/>
+          </a:bodyPr>
+          <a:lstStyle/>
+          <a:p>
+            <a:r>
+              <a:rPr sz="1600" b="0">
+                <a:latin typeface="Arial Unicode MS"/>
+                <a:ea typeface="Arial Unicode MS"/>
+              </a:rPr>
+              <a:t>四块电池首次跌到80%研究阈值的循环为101、61、124、75，均早于测试起点135（B0018为106），单步预测无法验证提前预警。</a:t>
+            </a:r>
+          </a:p>
+          <a:p>
+            <a:r>
+              <a:rPr sz="1600" b="0">
+                <a:latin typeface="Arial Unicode MS"/>
+                <a:ea typeface="Arial Unicode MS"/>
+              </a:rPr>
+              <a:t>241个滚动起点只对应4个真实事件：最近20次线性趋势检出3次，容量保持基线全部漏报。</a:t>
+            </a:r>
+          </a:p>
+          <a:p>
+            <a:r>
+              <a:rPr sz="1600" b="0">
+                <a:latin typeface="Arial Unicode MS"/>
+                <a:ea typeface="Arial Unicode MS"/>
+              </a:rPr>
+              <a:t>仅用前30%与50%历史外推时B0005估到228.6、115.1次（实测101）；历史变长不保证更准，该范围不是置信区间。</a:t>
+            </a:r>
+          </a:p>
+        </p:txBody>
+      </p:sp>
+      <p:sp>
+        <p:nvSpPr>
+          <p:cNvPr id="5" name="TextBox 4"/>
+          <p:cNvSpPr txBox="1"/>
+          <p:nvPr/>
+        </p:nvSpPr>
+        <p:spPr>
+          <a:xfrm>
+            <a:off x="566928" y="6336792"/>
+            <a:ext cx="10479024" cy="283464"/>
+          </a:xfrm>
+          <a:prstGeom prst="rect">
+            <a:avLst/>
+          </a:prstGeom>
+          <a:noFill/>
+        </p:spPr>
+        <p:txBody>
+          <a:bodyPr wrap="square">
+            <a:spAutoFit/>
+          </a:bodyPr>
+          <a:lstStyle/>
+          <a:p>
+            <a:r>
+              <a:rPr sz="1200" b="0">
+                <a:latin typeface="Arial Unicode MS"/>
+                <a:ea typeface="Arial Unicode MS"/>
+              </a:rPr>
+              <a:t>工作过程记录  杨晓真 25121619  2026.10.28</a:t>
+            </a:r>
+          </a:p>
+        </p:txBody>
+      </p:sp>
+      <p:sp>
+        <p:nvSpPr>
+          <p:cNvPr id="6" name="TextBox 5"/>
+          <p:cNvSpPr txBox="1"/>
+          <p:nvPr/>
+        </p:nvSpPr>
+        <p:spPr>
+          <a:xfrm>
+            <a:off x="11146536" y="6336792"/>
+            <a:ext cx="713232" cy="283464"/>
+          </a:xfrm>
+          <a:prstGeom prst="rect">
+            <a:avLst/>
+          </a:prstGeom>
+          <a:noFill/>
+        </p:spPr>
+        <p:txBody>
+          <a:bodyPr wrap="square">
+            <a:spAutoFit/>
+          </a:bodyPr>
+          <a:lstStyle/>
+          <a:p>
+            <a:r>
+              <a:rPr sz="1200" b="0">
+                <a:latin typeface="Arial Unicode MS"/>
+                <a:ea typeface="Arial Unicode MS"/>
+              </a:rPr>
+              <a:t>23</a:t>
+            </a:r>
+          </a:p>
+        </p:txBody>
+      </p:sp>
+    </p:spTree>
+  </p:cSld>
+  <p:clrMapOvr>
+    <a:masterClrMapping/>
+  </p:clrMapOvr>
+</p:sld>
+</file>
+
+<file path=ppt/slides/slide24.xml><?xml version="1.0" encoding="utf-8"?>
+<p:sld xmlns:a="http://schemas.openxmlformats.org/drawingml/2006/main" xmlns:p="http://schemas.openxmlformats.org/presentationml/2006/main" xmlns:r="http://schemas.openxmlformats.org/officeDocument/2006/relationships">
+  <p:cSld>
+    <p:spTree>
+      <p:nvGrpSpPr>
+        <p:cNvPr id="1" name=""/>
+        <p:cNvGrpSpPr/>
+        <p:nvPr/>
+      </p:nvGrpSpPr>
+      <p:grpSpPr/>
+      <p:sp>
+        <p:nvSpPr>
+          <p:cNvPr id="2" name="TextBox 1"/>
+          <p:cNvSpPr txBox="1"/>
+          <p:nvPr/>
+        </p:nvSpPr>
+        <p:spPr>
+          <a:xfrm>
+            <a:off x="566928" y="384048"/>
+            <a:ext cx="11045952" cy="813816"/>
+          </a:xfrm>
+          <a:prstGeom prst="rect">
+            <a:avLst/>
+          </a:prstGeom>
+          <a:noFill/>
+        </p:spPr>
+        <p:txBody>
+          <a:bodyPr wrap="square">
+            <a:spAutoFit/>
+          </a:bodyPr>
+          <a:lstStyle/>
+          <a:p>
+            <a:r>
+              <a:rPr sz="2925" b="0">
+                <a:latin typeface="Arial Unicode MS"/>
+                <a:ea typeface="Arial Unicode MS"/>
+              </a:rPr>
+              <a:t>07 / 使用、维护与更换建议</a:t>
+            </a:r>
+          </a:p>
+        </p:txBody>
+      </p:sp>
+      <p:sp>
+        <p:nvSpPr>
+          <p:cNvPr id="3" name="TextBox 2"/>
+          <p:cNvSpPr txBox="1"/>
+          <p:nvPr/>
+        </p:nvSpPr>
+        <p:spPr>
+          <a:xfrm>
+            <a:off x="621792" y="1417320"/>
+            <a:ext cx="10762488" cy="4663440"/>
+          </a:xfrm>
+          <a:prstGeom prst="rect">
+            <a:avLst/>
+          </a:prstGeom>
+          <a:noFill/>
+        </p:spPr>
+        <p:txBody>
+          <a:bodyPr wrap="square">
+            <a:spAutoFit/>
+          </a:bodyPr>
+          <a:lstStyle/>
+          <a:p>
+            <a:r>
+              <a:rPr sz="2000" b="0">
+                <a:latin typeface="Arial Unicode MS"/>
+                <a:ea typeface="Arial Unicode MS"/>
+              </a:rPr>
+              <a:t>· 保留容量保持作参照基线：它不训练任何参数，平均误差最低，可作为判断其他模型的下限。</a:t>
+            </a:r>
+          </a:p>
+          <a:p>
+            <a:r>
+              <a:rPr sz="2000" b="0">
+                <a:latin typeface="Arial Unicode MS"/>
+                <a:ea typeface="Arial Unicode MS"/>
+              </a:rPr>
+              <a:t>· 逐电池查看预测偏差与最大高估，不能只看平均RMSE；本次森林后期持续高估，不能据此乐观安排续航。</a:t>
+            </a:r>
+          </a:p>
+          <a:p>
+            <a:r>
+              <a:rPr sz="2000" b="0">
+                <a:latin typeface="Arial Unicode MS"/>
+                <a:ea typeface="Arial Unicode MS"/>
+              </a:rPr>
+              <a:t>· 接近研究阈值（首循环容量的80%）时用新一轮实测复核再决策，不要凭早期线性交点确定更换日期。</a:t>
+            </a:r>
+          </a:p>
+          <a:p>
+            <a:r>
+              <a:rPr sz="2000" b="0">
+                <a:latin typeface="Arial Unicode MS"/>
+                <a:ea typeface="Arial Unicode MS"/>
+              </a:rPr>
+              <a:t>· 不要把容量误差换算成飞行分钟数或剩余寿命；数据集缺少任务能耗、电流与内阻信息。</a:t>
+            </a:r>
+          </a:p>
+          <a:p>
+            <a:r>
+              <a:rPr sz="2000" b="0">
+                <a:latin typeface="Arial Unicode MS"/>
+                <a:ea typeface="Arial Unicode MS"/>
+              </a:rPr>
+              <a:t>· 需要新电池与更多工况外部验证后才可推广；结论只适用于这四块电池、24℃与本次时间划分。</a:t>
+            </a:r>
+          </a:p>
+        </p:txBody>
+      </p:sp>
+      <p:sp>
+        <p:nvSpPr>
+          <p:cNvPr id="4" name="TextBox 3"/>
+          <p:cNvSpPr txBox="1"/>
+          <p:nvPr/>
+        </p:nvSpPr>
+        <p:spPr>
+          <a:xfrm>
+            <a:off x="566928" y="6336792"/>
+            <a:ext cx="10479024" cy="283464"/>
+          </a:xfrm>
+          <a:prstGeom prst="rect">
+            <a:avLst/>
+          </a:prstGeom>
+          <a:noFill/>
+        </p:spPr>
+        <p:txBody>
+          <a:bodyPr wrap="square">
+            <a:spAutoFit/>
+          </a:bodyPr>
+          <a:lstStyle/>
+          <a:p>
+            <a:r>
+              <a:rPr sz="1200" b="0">
+                <a:latin typeface="Arial Unicode MS"/>
+                <a:ea typeface="Arial Unicode MS"/>
+              </a:rPr>
+              <a:t>工作过程记录  杨晓真 25121619  2026.10.28</a:t>
+            </a:r>
+          </a:p>
+        </p:txBody>
+      </p:sp>
+      <p:sp>
+        <p:nvSpPr>
+          <p:cNvPr id="5" name="TextBox 4"/>
+          <p:cNvSpPr txBox="1"/>
+          <p:nvPr/>
+        </p:nvSpPr>
+        <p:spPr>
+          <a:xfrm>
+            <a:off x="11146536" y="6336792"/>
+            <a:ext cx="713232" cy="283464"/>
+          </a:xfrm>
+          <a:prstGeom prst="rect">
+            <a:avLst/>
+          </a:prstGeom>
+          <a:noFill/>
+        </p:spPr>
+        <p:txBody>
+          <a:bodyPr wrap="square">
+            <a:spAutoFit/>
+          </a:bodyPr>
+          <a:lstStyle/>
+          <a:p>
+            <a:r>
+              <a:rPr sz="1200" b="0">
+                <a:latin typeface="Arial Unicode MS"/>
+                <a:ea typeface="Arial Unicode MS"/>
+              </a:rPr>
+              <a:t>24</a:t>
+            </a:r>
+          </a:p>
+        </p:txBody>
+      </p:sp>
+    </p:spTree>
+  </p:cSld>
+  <p:clrMapOvr>
+    <a:masterClrMapping/>
+  </p:clrMapOvr>
+</p:sld>
+</file>
+
 <file path=ppt/slides/slide3.xml><?xml version="1.0" encoding="utf-8"?>
 <p:sld xmlns:p="http://schemas.openxmlformats.org/presentationml/2006/main">
   <p:cSld>
